--- a/folien/08-docker-praxis.pptx
+++ b/folien/08-docker-praxis.pptx
@@ -21,9 +21,10 @@
     <p:sldId id="269" r:id="rId15"/>
     <p:sldId id="270" r:id="rId16"/>
     <p:sldId id="271" r:id="rId17"/>
+    <p:sldId id="272" r:id="rId18"/>
   </p:sldIdLst>
   <p:notesMasterIdLst>
-    <p:notesMasterId r:id="rId18"/>
+    <p:notesMasterId r:id="rId19"/>
   </p:notesMasterIdLst>
   <p:sldSz cx="9144000" cy="5143500"/>
   <p:notesSz cx="5143500" cy="9144000"/>
@@ -1157,6 +1158,94 @@
             <a:fld id="{F7021451-1387-4CA6-816F-3879F97B5CBC}" type="slidenum">
               <a:rPr lang="en-US"/>
               <a:t>16</a:t>
+            </a:fld>
+            <a:endParaRPr lang="en-US"/>
+          </a:p>
+        </p:txBody>
+      </p:sp>
+    </p:spTree>
+    <p:extLst>
+      <p:ext uri="{BB962C8B-B14F-4D97-AF65-F5344CB8AC3E}">
+        <p14:creationId xmlns:p14="http://schemas.microsoft.com/office/powerpoint/2010/main" val="1024086991"/>
+      </p:ext>
+    </p:extLst>
+  </p:cSld>
+  <p:clrMapOvr>
+    <a:masterClrMapping/>
+  </p:clrMapOvr>
+</p:notes>
+</file>
+
+<file path=ppt/notesSlides/notesSlide17.xml><?xml version="1.0" encoding="utf-8"?>
+<p:notes xmlns:a="http://schemas.openxmlformats.org/drawingml/2006/main" xmlns:r="http://schemas.openxmlformats.org/officeDocument/2006/relationships" xmlns:p="http://schemas.openxmlformats.org/presentationml/2006/main">
+  <p:cSld>
+    <p:spTree>
+      <p:nvGrpSpPr>
+        <p:cNvPr id="1" name=""/>
+        <p:cNvGrpSpPr/>
+        <p:nvPr/>
+      </p:nvGrpSpPr>
+      <p:grpSpPr>
+        <a:xfrm>
+          <a:off x="0" y="0"/>
+          <a:ext cx="0" cy="0"/>
+          <a:chOff x="0" y="0"/>
+          <a:chExt cx="0" cy="0"/>
+        </a:xfrm>
+      </p:grpSpPr>
+      <p:sp>
+        <p:nvSpPr>
+          <p:cNvPr id="2" name="Slide Image Placeholder 1"/>
+          <p:cNvSpPr>
+            <a:spLocks noGrp="1" noRot="1" noChangeAspect="1"/>
+          </p:cNvSpPr>
+          <p:nvPr>
+            <p:ph type="sldImg"/>
+          </p:nvPr>
+        </p:nvSpPr>
+        <p:spPr/>
+      </p:sp>
+      <p:sp>
+        <p:nvSpPr>
+          <p:cNvPr id="3" name="Notes Placeholder 2"/>
+          <p:cNvSpPr>
+            <a:spLocks noGrp="1"/>
+          </p:cNvSpPr>
+          <p:nvPr>
+            <p:ph type="body" idx="1"/>
+          </p:nvPr>
+        </p:nvSpPr>
+        <p:spPr/>
+        <p:txBody>
+          <a:bodyPr/>
+          <a:lstStyle/>
+          <a:p>
+            <a:r>
+              <a:rPr lang="en-US" dirty="0"/>
+              <a:t/>
+            </a:r>
+            <a:endParaRPr lang="en-US" dirty="0"/>
+          </a:p>
+        </p:txBody>
+      </p:sp>
+      <p:sp>
+        <p:nvSpPr>
+          <p:cNvPr id="4" name="Slide Number Placeholder 3"/>
+          <p:cNvSpPr>
+            <a:spLocks noGrp="1"/>
+          </p:cNvSpPr>
+          <p:nvPr>
+            <p:ph type="sldNum" sz="quarter" idx="10"/>
+          </p:nvPr>
+        </p:nvSpPr>
+        <p:spPr/>
+        <p:txBody>
+          <a:bodyPr/>
+          <a:lstStyle/>
+          <a:p>
+            <a:fld id="{F7021451-1387-4CA6-816F-3879F97B5CBC}" type="slidenum">
+              <a:rPr lang="en-US"/>
+              <a:t>17</a:t>
             </a:fld>
             <a:endParaRPr lang="en-US"/>
           </a:p>
@@ -2326,7 +2415,7 @@
                 <a:ea typeface="Arial" pitchFamily="34" charset="-122"/>
                 <a:cs typeface="Arial" pitchFamily="34" charset="-120"/>
               </a:rPr>
-              <a:t>Das Gruppen-Event Mission Control: Vier Dienste, ein Team, 90 Minuten.</a:t>
+              <a:t>Das Gruppen-Event Mission Control: Zehn Container, ein Team, 90 Minuten.</a:t>
             </a:r>
             <a:endParaRPr lang="en-US" sz="1700" dirty="0"/>
           </a:p>
@@ -2434,48 +2523,150 @@
         </p:nvSpPr>
         <p:spPr>
           <a:xfrm>
-            <a:off x="6355080" y="0"/>
-            <a:ext cx="2788920" cy="5143500"/>
+            <a:off x="566928" y="201168"/>
+            <a:ext cx="475488" cy="50292"/>
           </a:xfrm>
           <a:prstGeom prst="rect">
             <a:avLst/>
           </a:prstGeom>
           <a:solidFill>
-            <a:srgbClr val="FBF2E3"/>
+            <a:srgbClr val="0F7C86"/>
           </a:solidFill>
           <a:ln/>
         </p:spPr>
       </p:sp>
       <p:sp>
         <p:nvSpPr>
-          <p:cNvPr id="3" name="Shape 1"/>
-          <p:cNvSpPr/>
-          <p:nvPr/>
-        </p:nvSpPr>
-        <p:spPr>
-          <a:xfrm>
-            <a:off x="6355080" y="0"/>
-            <a:ext cx="45720" cy="5143500"/>
+          <p:cNvPr id="3" name="Text 1"/>
+          <p:cNvSpPr/>
+          <p:nvPr/>
+        </p:nvSpPr>
+        <p:spPr>
+          <a:xfrm>
+            <a:off x="566928" y="384048"/>
+            <a:ext cx="8010144" cy="237744"/>
+          </a:xfrm>
+          <a:prstGeom prst="rect">
+            <a:avLst/>
+          </a:prstGeom>
+          <a:noFill/>
+          <a:ln/>
+        </p:spPr>
+        <p:txBody>
+          <a:bodyPr wrap="square" lIns="0" tIns="0" rIns="0" bIns="0" rtlCol="0" anchor="ctr"/>
+          <a:lstStyle/>
+          <a:p>
+            <a:pPr indent="0" marL="0">
+              <a:buNone/>
+            </a:pPr>
+            <a:r>
+              <a:rPr lang="en-US" sz="1150" b="1" spc="180" kern="0" dirty="0">
+                <a:solidFill>
+                  <a:srgbClr val="0F7C86"/>
+                </a:solidFill>
+                <a:latin typeface="Arial" pitchFamily="34" charset="0"/>
+                <a:ea typeface="Arial" pitchFamily="34" charset="-122"/>
+                <a:cs typeface="Arial" pitchFamily="34" charset="-120"/>
+              </a:rPr>
+              <a:t>HEALTHCHECK UND DEPENDS_ON</a:t>
+            </a:r>
+            <a:endParaRPr lang="en-US" sz="1150" dirty="0"/>
+          </a:p>
+        </p:txBody>
+      </p:sp>
+      <p:sp>
+        <p:nvSpPr>
+          <p:cNvPr id="4" name="Text 2"/>
+          <p:cNvSpPr/>
+          <p:nvPr/>
+        </p:nvSpPr>
+        <p:spPr>
+          <a:xfrm>
+            <a:off x="566928" y="731520"/>
+            <a:ext cx="8010144" cy="603504"/>
+          </a:xfrm>
+          <a:prstGeom prst="rect">
+            <a:avLst/>
+          </a:prstGeom>
+          <a:noFill/>
+          <a:ln/>
+        </p:spPr>
+        <p:txBody>
+          <a:bodyPr wrap="square" lIns="0" tIns="0" rIns="0" bIns="0" rtlCol="0" anchor="t"/>
+          <a:lstStyle/>
+          <a:p>
+            <a:pPr indent="0" marL="0">
+              <a:buNone/>
+            </a:pPr>
+            <a:r>
+              <a:rPr lang="en-US" sz="2600" b="1" dirty="0">
+                <a:solidFill>
+                  <a:srgbClr val="272E52"/>
+                </a:solidFill>
+                <a:latin typeface="Arial" pitchFamily="34" charset="0"/>
+                <a:ea typeface="Arial" pitchFamily="34" charset="-122"/>
+                <a:cs typeface="Arial" pitchFamily="34" charset="-120"/>
+              </a:rPr>
+              <a:t>Warten, bis die Datenbank bereit ist</a:t>
+            </a:r>
+            <a:endParaRPr lang="en-US" sz="2600" dirty="0"/>
+          </a:p>
+        </p:txBody>
+      </p:sp>
+      <p:pic>
+        <p:nvPicPr>
+          <p:cNvPr id="5" name="Image 0" descr="/Users/jacobmenge/Desktop/kurs-26.2b-orga/folienwerkstatt/assets/diagramme/health-depends.png">    </p:cNvPr>
+          <p:cNvPicPr>
+            <a:picLocks noChangeAspect="1"/>
+          </p:cNvPicPr>
+          <p:nvPr/>
+        </p:nvPicPr>
+        <p:blipFill>
+          <a:blip r:embed="rId1"/>
+          <a:stretch>
+            <a:fillRect/>
+          </a:stretch>
+        </p:blipFill>
+        <p:spPr>
+          <a:xfrm>
+            <a:off x="566928" y="1499616"/>
+            <a:ext cx="8010144" cy="2286000"/>
+          </a:xfrm>
+          <a:prstGeom prst="rect">
+            <a:avLst/>
+          </a:prstGeom>
+        </p:spPr>
+      </p:pic>
+      <p:sp>
+        <p:nvSpPr>
+          <p:cNvPr id="6" name="Shape 3"/>
+          <p:cNvSpPr/>
+          <p:nvPr/>
+        </p:nvSpPr>
+        <p:spPr>
+          <a:xfrm>
+            <a:off x="566928" y="4069080"/>
+            <a:ext cx="32004" cy="256032"/>
           </a:xfrm>
           <a:prstGeom prst="rect">
             <a:avLst/>
           </a:prstGeom>
           <a:solidFill>
-            <a:srgbClr val="9A6310"/>
+            <a:srgbClr val="0F7C86"/>
           </a:solidFill>
           <a:ln/>
         </p:spPr>
       </p:sp>
       <p:sp>
         <p:nvSpPr>
-          <p:cNvPr id="4" name="Text 2"/>
-          <p:cNvSpPr/>
-          <p:nvPr/>
-        </p:nvSpPr>
-        <p:spPr>
-          <a:xfrm>
-            <a:off x="6629400" y="1463040"/>
-            <a:ext cx="2194560" cy="1737360"/>
+          <p:cNvPr id="7" name="Text 4"/>
+          <p:cNvSpPr/>
+          <p:nvPr/>
+        </p:nvSpPr>
+        <p:spPr>
+          <a:xfrm>
+            <a:off x="749808" y="4023360"/>
+            <a:ext cx="7827264" cy="402336"/>
           </a:xfrm>
           <a:prstGeom prst="rect">
             <a:avLst/>
@@ -2487,109 +2678,73 @@
           <a:bodyPr wrap="square" lIns="0" tIns="0" rIns="0" bIns="0" rtlCol="0" anchor="ctr"/>
           <a:lstStyle/>
           <a:p>
-            <a:pPr algn="ctr" indent="0" marL="0">
-              <a:buNone/>
-            </a:pPr>
-            <a:r>
-              <a:rPr lang="en-US" sz="8400" b="1" dirty="0">
-                <a:solidFill>
-                  <a:srgbClr val="9A6310"/>
-                </a:solidFill>
-                <a:latin typeface="Arial" pitchFamily="34" charset="0"/>
-                <a:ea typeface="Arial" pitchFamily="34" charset="-122"/>
-                <a:cs typeface="Arial" pitchFamily="34" charset="-120"/>
-              </a:rPr>
-              <a:t>02</a:t>
-            </a:r>
-            <a:endParaRPr lang="en-US" sz="8400" dirty="0"/>
-          </a:p>
-        </p:txBody>
-      </p:sp>
-      <p:sp>
-        <p:nvSpPr>
-          <p:cNvPr id="5" name="Shape 3"/>
-          <p:cNvSpPr/>
-          <p:nvPr/>
-        </p:nvSpPr>
-        <p:spPr>
-          <a:xfrm>
-            <a:off x="566928" y="1883664"/>
-            <a:ext cx="475488" cy="50292"/>
-          </a:xfrm>
-          <a:prstGeom prst="rect">
-            <a:avLst/>
-          </a:prstGeom>
-          <a:solidFill>
-            <a:srgbClr val="9A6310"/>
-          </a:solidFill>
-          <a:ln/>
-        </p:spPr>
-      </p:sp>
-      <p:sp>
-        <p:nvSpPr>
-          <p:cNvPr id="6" name="Text 4"/>
-          <p:cNvSpPr/>
-          <p:nvPr/>
-        </p:nvSpPr>
-        <p:spPr>
-          <a:xfrm>
-            <a:off x="566928" y="2084832"/>
-            <a:ext cx="5394960" cy="868680"/>
-          </a:xfrm>
-          <a:prstGeom prst="rect">
-            <a:avLst/>
-          </a:prstGeom>
-          <a:noFill/>
-          <a:ln/>
-        </p:spPr>
-        <p:txBody>
-          <a:bodyPr wrap="square" lIns="0" tIns="0" rIns="0" bIns="0" rtlCol="0" anchor="t"/>
-          <a:lstStyle/>
-          <a:p>
-            <a:pPr indent="0" marL="0">
-              <a:buNone/>
-            </a:pPr>
-            <a:r>
-              <a:rPr lang="en-US" sz="3000" b="1" dirty="0">
-                <a:solidFill>
-                  <a:srgbClr val="272E52"/>
-                </a:solidFill>
-                <a:latin typeface="Arial" pitchFamily="34" charset="0"/>
-                <a:ea typeface="Arial" pitchFamily="34" charset="-122"/>
-                <a:cs typeface="Arial" pitchFamily="34" charset="-120"/>
-              </a:rPr>
-              <a:t>Eure Missionen</a:t>
-            </a:r>
-            <a:endParaRPr lang="en-US" sz="3000" dirty="0"/>
-          </a:p>
-        </p:txBody>
-      </p:sp>
-      <p:sp>
-        <p:nvSpPr>
-          <p:cNvPr id="7" name="Text 5"/>
-          <p:cNvSpPr/>
-          <p:nvPr/>
-        </p:nvSpPr>
-        <p:spPr>
-          <a:xfrm>
-            <a:off x="566928" y="3017520"/>
-            <a:ext cx="5394960" cy="548640"/>
-          </a:xfrm>
-          <a:prstGeom prst="rect">
-            <a:avLst/>
-          </a:prstGeom>
-          <a:noFill/>
-          <a:ln/>
-        </p:spPr>
-        <p:txBody>
-          <a:bodyPr wrap="square" lIns="0" tIns="0" rIns="0" bIns="0" rtlCol="0" anchor="t"/>
-          <a:lstStyle/>
-          <a:p>
-            <a:pPr indent="0" marL="0">
-              <a:buNone/>
-            </a:pPr>
-            <a:r>
-              <a:rPr lang="en-US" sz="1350" dirty="0">
+            <a:pPr indent="0" marL="0">
+              <a:buNone/>
+            </a:pPr>
+            <a:r>
+              <a:rPr lang="en-US" sz="1200" b="1" dirty="0">
+                <a:solidFill>
+                  <a:srgbClr val="434A63"/>
+                </a:solidFill>
+                <a:latin typeface="Arial" pitchFamily="34" charset="0"/>
+                <a:ea typeface="Arial" pitchFamily="34" charset="-122"/>
+                <a:cs typeface="Arial" pitchFamily="34" charset="-120"/>
+              </a:rPr>
+              <a:t>Der Profi-Baustein des Abends: Startreihenfolge nicht hoffen, sondern absichern. Ein Healthcheck ist ein kleiner Test, den Docker regelmäßig im Container ausführt.</a:t>
+            </a:r>
+            <a:endParaRPr lang="en-US" sz="1200" dirty="0"/>
+          </a:p>
+        </p:txBody>
+      </p:sp>
+      <p:sp>
+        <p:nvSpPr>
+          <p:cNvPr id="8" name="Shape 5"/>
+          <p:cNvSpPr/>
+          <p:nvPr/>
+        </p:nvSpPr>
+        <p:spPr>
+          <a:xfrm>
+            <a:off x="566928" y="4631436"/>
+            <a:ext cx="8010144" cy="0"/>
+          </a:xfrm>
+          <a:prstGeom prst="line">
+            <a:avLst/>
+          </a:prstGeom>
+          <a:noFill/>
+          <a:ln w="9525">
+            <a:solidFill>
+              <a:srgbClr val="DFE3F0"/>
+            </a:solidFill>
+            <a:prstDash val="solid"/>
+          </a:ln>
+        </p:spPr>
+      </p:sp>
+      <p:sp>
+        <p:nvSpPr>
+          <p:cNvPr id="9" name="Text 6"/>
+          <p:cNvSpPr/>
+          <p:nvPr/>
+        </p:nvSpPr>
+        <p:spPr>
+          <a:xfrm>
+            <a:off x="566928" y="4722876"/>
+            <a:ext cx="5029200" cy="237744"/>
+          </a:xfrm>
+          <a:prstGeom prst="rect">
+            <a:avLst/>
+          </a:prstGeom>
+          <a:noFill/>
+          <a:ln/>
+        </p:spPr>
+        <p:txBody>
+          <a:bodyPr wrap="square" lIns="0" tIns="0" rIns="0" bIns="0" rtlCol="0" anchor="ctr"/>
+          <a:lstStyle/>
+          <a:p>
+            <a:pPr indent="0" marL="0">
+              <a:buNone/>
+            </a:pPr>
+            <a:r>
+              <a:rPr lang="en-US" sz="1050" spc="30" kern="0" dirty="0">
                 <a:solidFill>
                   <a:srgbClr val="5C6377"/>
                 </a:solidFill>
@@ -2597,9 +2752,48 @@
                 <a:ea typeface="Arial" pitchFamily="34" charset="-122"/>
                 <a:cs typeface="Arial" pitchFamily="34" charset="-120"/>
               </a:rPr>
-              <a:t>90 Minuten, sieben Missionen, drei Bonus-Missionen</a:t>
-            </a:r>
-            <a:endParaRPr lang="en-US" sz="1350" dirty="0"/>
+              <a:t>Das Szenario</a:t>
+            </a:r>
+            <a:endParaRPr lang="en-US" sz="1050" dirty="0"/>
+          </a:p>
+        </p:txBody>
+      </p:sp>
+      <p:sp>
+        <p:nvSpPr>
+          <p:cNvPr id="10" name="Text 7"/>
+          <p:cNvSpPr/>
+          <p:nvPr/>
+        </p:nvSpPr>
+        <p:spPr>
+          <a:xfrm>
+            <a:off x="8028432" y="4722876"/>
+            <a:ext cx="548640" cy="237744"/>
+          </a:xfrm>
+          <a:prstGeom prst="rect">
+            <a:avLst/>
+          </a:prstGeom>
+          <a:noFill/>
+          <a:ln/>
+        </p:spPr>
+        <p:txBody>
+          <a:bodyPr wrap="square" lIns="0" tIns="0" rIns="0" bIns="0" rtlCol="0" anchor="ctr"/>
+          <a:lstStyle/>
+          <a:p>
+            <a:pPr algn="r" indent="0" marL="0">
+              <a:buNone/>
+            </a:pPr>
+            <a:r>
+              <a:rPr lang="en-US" sz="1050" dirty="0">
+                <a:solidFill>
+                  <a:srgbClr val="5C6377"/>
+                </a:solidFill>
+                <a:latin typeface="Arial" pitchFamily="34" charset="0"/>
+                <a:ea typeface="Arial" pitchFamily="34" charset="-122"/>
+                <a:cs typeface="Arial" pitchFamily="34" charset="-120"/>
+              </a:rPr>
+              <a:t>8/13</a:t>
+            </a:r>
+            <a:endParaRPr lang="en-US" sz="1050" dirty="0"/>
           </a:p>
         </p:txBody>
       </p:sp>
@@ -2643,8 +2837,28 @@
         </p:nvSpPr>
         <p:spPr>
           <a:xfrm>
-            <a:off x="566928" y="201168"/>
-            <a:ext cx="475488" cy="50292"/>
+            <a:off x="6355080" y="0"/>
+            <a:ext cx="2788920" cy="5143500"/>
+          </a:xfrm>
+          <a:prstGeom prst="rect">
+            <a:avLst/>
+          </a:prstGeom>
+          <a:solidFill>
+            <a:srgbClr val="FBF2E3"/>
+          </a:solidFill>
+          <a:ln/>
+        </p:spPr>
+      </p:sp>
+      <p:sp>
+        <p:nvSpPr>
+          <p:cNvPr id="3" name="Shape 1"/>
+          <p:cNvSpPr/>
+          <p:nvPr/>
+        </p:nvSpPr>
+        <p:spPr>
+          <a:xfrm>
+            <a:off x="6355080" y="0"/>
+            <a:ext cx="45720" cy="5143500"/>
           </a:xfrm>
           <a:prstGeom prst="rect">
             <a:avLst/>
@@ -2657,14 +2871,14 @@
       </p:sp>
       <p:sp>
         <p:nvSpPr>
-          <p:cNvPr id="3" name="Text 1"/>
-          <p:cNvSpPr/>
-          <p:nvPr/>
-        </p:nvSpPr>
-        <p:spPr>
-          <a:xfrm>
-            <a:off x="566928" y="384048"/>
-            <a:ext cx="8010144" cy="237744"/>
+          <p:cNvPr id="4" name="Text 2"/>
+          <p:cNvSpPr/>
+          <p:nvPr/>
+        </p:nvSpPr>
+        <p:spPr>
+          <a:xfrm>
+            <a:off x="6629400" y="1463040"/>
+            <a:ext cx="2194560" cy="1737360"/>
           </a:xfrm>
           <a:prstGeom prst="rect">
             <a:avLst/>
@@ -2676,11 +2890,11 @@
           <a:bodyPr wrap="square" lIns="0" tIns="0" rIns="0" bIns="0" rtlCol="0" anchor="ctr"/>
           <a:lstStyle/>
           <a:p>
-            <a:pPr indent="0" marL="0">
-              <a:buNone/>
-            </a:pPr>
-            <a:r>
-              <a:rPr lang="en-US" sz="1150" b="1" spc="180" kern="0" dirty="0">
+            <a:pPr algn="ctr" indent="0" marL="0">
+              <a:buNone/>
+            </a:pPr>
+            <a:r>
+              <a:rPr lang="en-US" sz="8400" b="1" dirty="0">
                 <a:solidFill>
                   <a:srgbClr val="9A6310"/>
                 </a:solidFill>
@@ -2688,48 +2902,9 @@
                 <a:ea typeface="Arial" pitchFamily="34" charset="-122"/>
                 <a:cs typeface="Arial" pitchFamily="34" charset="-120"/>
               </a:rPr>
-              <a:t>BREAKOUT · 90 MINUTEN</a:t>
-            </a:r>
-            <a:endParaRPr lang="en-US" sz="1150" dirty="0"/>
-          </a:p>
-        </p:txBody>
-      </p:sp>
-      <p:sp>
-        <p:nvSpPr>
-          <p:cNvPr id="4" name="Text 2"/>
-          <p:cNvSpPr/>
-          <p:nvPr/>
-        </p:nvSpPr>
-        <p:spPr>
-          <a:xfrm>
-            <a:off x="566928" y="731520"/>
-            <a:ext cx="8010144" cy="603504"/>
-          </a:xfrm>
-          <a:prstGeom prst="rect">
-            <a:avLst/>
-          </a:prstGeom>
-          <a:noFill/>
-          <a:ln/>
-        </p:spPr>
-        <p:txBody>
-          <a:bodyPr wrap="square" lIns="0" tIns="0" rIns="0" bIns="0" rtlCol="0" anchor="t"/>
-          <a:lstStyle/>
-          <a:p>
-            <a:pPr indent="0" marL="0">
-              <a:buNone/>
-            </a:pPr>
-            <a:r>
-              <a:rPr lang="en-US" sz="2600" b="1" dirty="0">
-                <a:solidFill>
-                  <a:srgbClr val="272E52"/>
-                </a:solidFill>
-                <a:latin typeface="Arial" pitchFamily="34" charset="0"/>
-                <a:ea typeface="Arial" pitchFamily="34" charset="-122"/>
-                <a:cs typeface="Arial" pitchFamily="34" charset="-120"/>
-              </a:rPr>
-              <a:t>Der Auftrag</a:t>
-            </a:r>
-            <a:endParaRPr lang="en-US" sz="2600" dirty="0"/>
+              <a:t>02</a:t>
+            </a:r>
+            <a:endParaRPr lang="en-US" sz="8400" dirty="0"/>
           </a:p>
         </p:txBody>
       </p:sp>
@@ -2741,732 +2916,8 @@
         </p:nvSpPr>
         <p:spPr>
           <a:xfrm>
-            <a:off x="438912" y="1682496"/>
-            <a:ext cx="8266176" cy="228600"/>
-          </a:xfrm>
-          <a:prstGeom prst="rect">
-            <a:avLst/>
-          </a:prstGeom>
-          <a:solidFill>
-            <a:srgbClr val="F5F6FC"/>
-          </a:solidFill>
-          <a:ln/>
-        </p:spPr>
-      </p:sp>
-      <p:sp>
-        <p:nvSpPr>
-          <p:cNvPr id="6" name="Text 4"/>
-          <p:cNvSpPr/>
-          <p:nvPr/>
-        </p:nvSpPr>
-        <p:spPr>
-          <a:xfrm>
-            <a:off x="566928" y="1682496"/>
-            <a:ext cx="731520" cy="228600"/>
-          </a:xfrm>
-          <a:prstGeom prst="rect">
-            <a:avLst/>
-          </a:prstGeom>
-          <a:noFill/>
-          <a:ln/>
-        </p:spPr>
-        <p:txBody>
-          <a:bodyPr wrap="square" lIns="0" tIns="0" rIns="0" bIns="0" rtlCol="0" anchor="ctr"/>
-          <a:lstStyle/>
-          <a:p>
-            <a:pPr indent="0" marL="0">
-              <a:buNone/>
-            </a:pPr>
-            <a:r>
-              <a:rPr lang="en-US" sz="1050" b="1" dirty="0">
-                <a:solidFill>
-                  <a:srgbClr val="9A6310"/>
-                </a:solidFill>
-                <a:latin typeface="Courier New" pitchFamily="34" charset="0"/>
-                <a:ea typeface="Courier New" pitchFamily="34" charset="-122"/>
-                <a:cs typeface="Courier New" pitchFamily="34" charset="-120"/>
-              </a:rPr>
-              <a:t>Start</a:t>
-            </a:r>
-            <a:endParaRPr lang="en-US" sz="1050" dirty="0"/>
-          </a:p>
-        </p:txBody>
-      </p:sp>
-      <p:sp>
-        <p:nvSpPr>
-          <p:cNvPr id="7" name="Text 5"/>
-          <p:cNvSpPr/>
-          <p:nvPr/>
-        </p:nvSpPr>
-        <p:spPr>
-          <a:xfrm>
-            <a:off x="1298448" y="1682496"/>
-            <a:ext cx="7278624" cy="228600"/>
-          </a:xfrm>
-          <a:prstGeom prst="rect">
-            <a:avLst/>
-          </a:prstGeom>
-          <a:noFill/>
-          <a:ln/>
-        </p:spPr>
-        <p:txBody>
-          <a:bodyPr wrap="square" lIns="0" tIns="0" rIns="0" bIns="0" rtlCol="0" anchor="ctr"/>
-          <a:lstStyle/>
-          <a:p>
-            <a:pPr indent="0" marL="0">
-              <a:buNone/>
-            </a:pPr>
-            <a:r>
-              <a:rPr lang="en-US" sz="1050" dirty="0">
-                <a:solidFill>
-                  <a:srgbClr val="434A63"/>
-                </a:solidFill>
-                <a:latin typeface="Arial" pitchFamily="34" charset="0"/>
-                <a:ea typeface="Arial" pitchFamily="34" charset="-122"/>
-                <a:cs typeface="Arial" pitchFamily="34" charset="-120"/>
-              </a:rPr>
-              <a:t>Code holen, Ordner ansehen, leere compose.yaml anlegen</a:t>
-            </a:r>
-            <a:endParaRPr lang="en-US" sz="1050" dirty="0"/>
-          </a:p>
-        </p:txBody>
-      </p:sp>
-      <p:sp>
-        <p:nvSpPr>
-          <p:cNvPr id="8" name="Text 6"/>
-          <p:cNvSpPr/>
-          <p:nvPr/>
-        </p:nvSpPr>
-        <p:spPr>
-          <a:xfrm>
-            <a:off x="566928" y="1911096"/>
-            <a:ext cx="731520" cy="228600"/>
-          </a:xfrm>
-          <a:prstGeom prst="rect">
-            <a:avLst/>
-          </a:prstGeom>
-          <a:noFill/>
-          <a:ln/>
-        </p:spPr>
-        <p:txBody>
-          <a:bodyPr wrap="square" lIns="0" tIns="0" rIns="0" bIns="0" rtlCol="0" anchor="ctr"/>
-          <a:lstStyle/>
-          <a:p>
-            <a:pPr indent="0" marL="0">
-              <a:buNone/>
-            </a:pPr>
-            <a:r>
-              <a:rPr lang="en-US" sz="1050" b="1" dirty="0">
-                <a:solidFill>
-                  <a:srgbClr val="9A6310"/>
-                </a:solidFill>
-                <a:latin typeface="Courier New" pitchFamily="34" charset="0"/>
-                <a:ea typeface="Courier New" pitchFamily="34" charset="-122"/>
-                <a:cs typeface="Courier New" pitchFamily="34" charset="-120"/>
-              </a:rPr>
-              <a:t>M1</a:t>
-            </a:r>
-            <a:endParaRPr lang="en-US" sz="1050" dirty="0"/>
-          </a:p>
-        </p:txBody>
-      </p:sp>
-      <p:sp>
-        <p:nvSpPr>
-          <p:cNvPr id="9" name="Text 7"/>
-          <p:cNvSpPr/>
-          <p:nvPr/>
-        </p:nvSpPr>
-        <p:spPr>
-          <a:xfrm>
-            <a:off x="1298448" y="1911096"/>
-            <a:ext cx="7278624" cy="228600"/>
-          </a:xfrm>
-          <a:prstGeom prst="rect">
-            <a:avLst/>
-          </a:prstGeom>
-          <a:noFill/>
-          <a:ln/>
-        </p:spPr>
-        <p:txBody>
-          <a:bodyPr wrap="square" lIns="0" tIns="0" rIns="0" bIns="0" rtlCol="0" anchor="ctr"/>
-          <a:lstStyle/>
-          <a:p>
-            <a:pPr indent="0" marL="0">
-              <a:buNone/>
-            </a:pPr>
-            <a:r>
-              <a:rPr lang="en-US" sz="1050" dirty="0">
-                <a:solidFill>
-                  <a:srgbClr val="434A63"/>
-                </a:solidFill>
-                <a:latin typeface="Arial" pitchFamily="34" charset="0"/>
-                <a:ea typeface="Arial" pitchFamily="34" charset="-122"/>
-                <a:cs typeface="Arial" pitchFamily="34" charset="-120"/>
-              </a:rPr>
-              <a:t>Frontend hochfahren: die erste Lampe leuchtet</a:t>
-            </a:r>
-            <a:endParaRPr lang="en-US" sz="1050" dirty="0"/>
-          </a:p>
-        </p:txBody>
-      </p:sp>
-      <p:sp>
-        <p:nvSpPr>
-          <p:cNvPr id="10" name="Shape 8"/>
-          <p:cNvSpPr/>
-          <p:nvPr/>
-        </p:nvSpPr>
-        <p:spPr>
-          <a:xfrm>
-            <a:off x="438912" y="2139696"/>
-            <a:ext cx="8266176" cy="228600"/>
-          </a:xfrm>
-          <a:prstGeom prst="rect">
-            <a:avLst/>
-          </a:prstGeom>
-          <a:solidFill>
-            <a:srgbClr val="F5F6FC"/>
-          </a:solidFill>
-          <a:ln/>
-        </p:spPr>
-      </p:sp>
-      <p:sp>
-        <p:nvSpPr>
-          <p:cNvPr id="11" name="Text 9"/>
-          <p:cNvSpPr/>
-          <p:nvPr/>
-        </p:nvSpPr>
-        <p:spPr>
-          <a:xfrm>
-            <a:off x="566928" y="2139696"/>
-            <a:ext cx="731520" cy="228600"/>
-          </a:xfrm>
-          <a:prstGeom prst="rect">
-            <a:avLst/>
-          </a:prstGeom>
-          <a:noFill/>
-          <a:ln/>
-        </p:spPr>
-        <p:txBody>
-          <a:bodyPr wrap="square" lIns="0" tIns="0" rIns="0" bIns="0" rtlCol="0" anchor="ctr"/>
-          <a:lstStyle/>
-          <a:p>
-            <a:pPr indent="0" marL="0">
-              <a:buNone/>
-            </a:pPr>
-            <a:r>
-              <a:rPr lang="en-US" sz="1050" b="1" dirty="0">
-                <a:solidFill>
-                  <a:srgbClr val="9A6310"/>
-                </a:solidFill>
-                <a:latin typeface="Courier New" pitchFamily="34" charset="0"/>
-                <a:ea typeface="Courier New" pitchFamily="34" charset="-122"/>
-                <a:cs typeface="Courier New" pitchFamily="34" charset="-120"/>
-              </a:rPr>
-              <a:t>M2</a:t>
-            </a:r>
-            <a:endParaRPr lang="en-US" sz="1050" dirty="0"/>
-          </a:p>
-        </p:txBody>
-      </p:sp>
-      <p:sp>
-        <p:nvSpPr>
-          <p:cNvPr id="12" name="Text 10"/>
-          <p:cNvSpPr/>
-          <p:nvPr/>
-        </p:nvSpPr>
-        <p:spPr>
-          <a:xfrm>
-            <a:off x="1298448" y="2139696"/>
-            <a:ext cx="7278624" cy="228600"/>
-          </a:xfrm>
-          <a:prstGeom prst="rect">
-            <a:avLst/>
-          </a:prstGeom>
-          <a:noFill/>
-          <a:ln/>
-        </p:spPr>
-        <p:txBody>
-          <a:bodyPr wrap="square" lIns="0" tIns="0" rIns="0" bIns="0" rtlCol="0" anchor="ctr"/>
-          <a:lstStyle/>
-          <a:p>
-            <a:pPr indent="0" marL="0">
-              <a:buNone/>
-            </a:pPr>
-            <a:r>
-              <a:rPr lang="en-US" sz="1050" dirty="0">
-                <a:solidFill>
-                  <a:srgbClr val="434A63"/>
-                </a:solidFill>
-                <a:latin typeface="Arial" pitchFamily="34" charset="0"/>
-                <a:ea typeface="Arial" pitchFamily="34" charset="-122"/>
-                <a:cs typeface="Arial" pitchFamily="34" charset="-120"/>
-              </a:rPr>
-              <a:t>Datenbank mit Init-Skript und Volume</a:t>
-            </a:r>
-            <a:endParaRPr lang="en-US" sz="1050" dirty="0"/>
-          </a:p>
-        </p:txBody>
-      </p:sp>
-      <p:sp>
-        <p:nvSpPr>
-          <p:cNvPr id="13" name="Text 11"/>
-          <p:cNvSpPr/>
-          <p:nvPr/>
-        </p:nvSpPr>
-        <p:spPr>
-          <a:xfrm>
-            <a:off x="566928" y="2368296"/>
-            <a:ext cx="731520" cy="228600"/>
-          </a:xfrm>
-          <a:prstGeom prst="rect">
-            <a:avLst/>
-          </a:prstGeom>
-          <a:noFill/>
-          <a:ln/>
-        </p:spPr>
-        <p:txBody>
-          <a:bodyPr wrap="square" lIns="0" tIns="0" rIns="0" bIns="0" rtlCol="0" anchor="ctr"/>
-          <a:lstStyle/>
-          <a:p>
-            <a:pPr indent="0" marL="0">
-              <a:buNone/>
-            </a:pPr>
-            <a:r>
-              <a:rPr lang="en-US" sz="1050" b="1" dirty="0">
-                <a:solidFill>
-                  <a:srgbClr val="9A6310"/>
-                </a:solidFill>
-                <a:latin typeface="Courier New" pitchFamily="34" charset="0"/>
-                <a:ea typeface="Courier New" pitchFamily="34" charset="-122"/>
-                <a:cs typeface="Courier New" pitchFamily="34" charset="-120"/>
-              </a:rPr>
-              <a:t>M3</a:t>
-            </a:r>
-            <a:endParaRPr lang="en-US" sz="1050" dirty="0"/>
-          </a:p>
-        </p:txBody>
-      </p:sp>
-      <p:sp>
-        <p:nvSpPr>
-          <p:cNvPr id="14" name="Text 12"/>
-          <p:cNvSpPr/>
-          <p:nvPr/>
-        </p:nvSpPr>
-        <p:spPr>
-          <a:xfrm>
-            <a:off x="1298448" y="2368296"/>
-            <a:ext cx="7278624" cy="228600"/>
-          </a:xfrm>
-          <a:prstGeom prst="rect">
-            <a:avLst/>
-          </a:prstGeom>
-          <a:noFill/>
-          <a:ln/>
-        </p:spPr>
-        <p:txBody>
-          <a:bodyPr wrap="square" lIns="0" tIns="0" rIns="0" bIns="0" rtlCol="0" anchor="ctr"/>
-          <a:lstStyle/>
-          <a:p>
-            <a:pPr indent="0" marL="0">
-              <a:buNone/>
-            </a:pPr>
-            <a:r>
-              <a:rPr lang="en-US" sz="1050" dirty="0">
-                <a:solidFill>
-                  <a:srgbClr val="434A63"/>
-                </a:solidFill>
-                <a:latin typeface="Arial" pitchFamily="34" charset="0"/>
-                <a:ea typeface="Arial" pitchFamily="34" charset="-122"/>
-                <a:cs typeface="Arial" pitchFamily="34" charset="-120"/>
-              </a:rPr>
-              <a:t>Backend bauen und mit der Datenbank verbinden</a:t>
-            </a:r>
-            <a:endParaRPr lang="en-US" sz="1050" dirty="0"/>
-          </a:p>
-        </p:txBody>
-      </p:sp>
-      <p:sp>
-        <p:nvSpPr>
-          <p:cNvPr id="15" name="Shape 13"/>
-          <p:cNvSpPr/>
-          <p:nvPr/>
-        </p:nvSpPr>
-        <p:spPr>
-          <a:xfrm>
-            <a:off x="438912" y="2596896"/>
-            <a:ext cx="8266176" cy="228600"/>
-          </a:xfrm>
-          <a:prstGeom prst="rect">
-            <a:avLst/>
-          </a:prstGeom>
-          <a:solidFill>
-            <a:srgbClr val="F5F6FC"/>
-          </a:solidFill>
-          <a:ln/>
-        </p:spPr>
-      </p:sp>
-      <p:sp>
-        <p:nvSpPr>
-          <p:cNvPr id="16" name="Text 14"/>
-          <p:cNvSpPr/>
-          <p:nvPr/>
-        </p:nvSpPr>
-        <p:spPr>
-          <a:xfrm>
-            <a:off x="566928" y="2596896"/>
-            <a:ext cx="731520" cy="228600"/>
-          </a:xfrm>
-          <a:prstGeom prst="rect">
-            <a:avLst/>
-          </a:prstGeom>
-          <a:noFill/>
-          <a:ln/>
-        </p:spPr>
-        <p:txBody>
-          <a:bodyPr wrap="square" lIns="0" tIns="0" rIns="0" bIns="0" rtlCol="0" anchor="ctr"/>
-          <a:lstStyle/>
-          <a:p>
-            <a:pPr indent="0" marL="0">
-              <a:buNone/>
-            </a:pPr>
-            <a:r>
-              <a:rPr lang="en-US" sz="1050" b="1" dirty="0">
-                <a:solidFill>
-                  <a:srgbClr val="9A6310"/>
-                </a:solidFill>
-                <a:latin typeface="Courier New" pitchFamily="34" charset="0"/>
-                <a:ea typeface="Courier New" pitchFamily="34" charset="-122"/>
-                <a:cs typeface="Courier New" pitchFamily="34" charset="-120"/>
-              </a:rPr>
-              <a:t>M4</a:t>
-            </a:r>
-            <a:endParaRPr lang="en-US" sz="1050" dirty="0"/>
-          </a:p>
-        </p:txBody>
-      </p:sp>
-      <p:sp>
-        <p:nvSpPr>
-          <p:cNvPr id="17" name="Text 15"/>
-          <p:cNvSpPr/>
-          <p:nvPr/>
-        </p:nvSpPr>
-        <p:spPr>
-          <a:xfrm>
-            <a:off x="1298448" y="2596896"/>
-            <a:ext cx="7278624" cy="228600"/>
-          </a:xfrm>
-          <a:prstGeom prst="rect">
-            <a:avLst/>
-          </a:prstGeom>
-          <a:noFill/>
-          <a:ln/>
-        </p:spPr>
-        <p:txBody>
-          <a:bodyPr wrap="square" lIns="0" tIns="0" rIns="0" bIns="0" rtlCol="0" anchor="ctr"/>
-          <a:lstStyle/>
-          <a:p>
-            <a:pPr indent="0" marL="0">
-              <a:buNone/>
-            </a:pPr>
-            <a:r>
-              <a:rPr lang="en-US" sz="1050" dirty="0">
-                <a:solidFill>
-                  <a:srgbClr val="434A63"/>
-                </a:solidFill>
-                <a:latin typeface="Arial" pitchFamily="34" charset="0"/>
-                <a:ea typeface="Arial" pitchFamily="34" charset="-122"/>
-                <a:cs typeface="Arial" pitchFamily="34" charset="-120"/>
-              </a:rPr>
-              <a:t>Adminer für den Blick in die Daten</a:t>
-            </a:r>
-            <a:endParaRPr lang="en-US" sz="1050" dirty="0"/>
-          </a:p>
-        </p:txBody>
-      </p:sp>
-      <p:sp>
-        <p:nvSpPr>
-          <p:cNvPr id="18" name="Text 16"/>
-          <p:cNvSpPr/>
-          <p:nvPr/>
-        </p:nvSpPr>
-        <p:spPr>
-          <a:xfrm>
-            <a:off x="566928" y="2825496"/>
-            <a:ext cx="731520" cy="228600"/>
-          </a:xfrm>
-          <a:prstGeom prst="rect">
-            <a:avLst/>
-          </a:prstGeom>
-          <a:noFill/>
-          <a:ln/>
-        </p:spPr>
-        <p:txBody>
-          <a:bodyPr wrap="square" lIns="0" tIns="0" rIns="0" bIns="0" rtlCol="0" anchor="ctr"/>
-          <a:lstStyle/>
-          <a:p>
-            <a:pPr indent="0" marL="0">
-              <a:buNone/>
-            </a:pPr>
-            <a:r>
-              <a:rPr lang="en-US" sz="1050" b="1" dirty="0">
-                <a:solidFill>
-                  <a:srgbClr val="9A6310"/>
-                </a:solidFill>
-                <a:latin typeface="Courier New" pitchFamily="34" charset="0"/>
-                <a:ea typeface="Courier New" pitchFamily="34" charset="-122"/>
-                <a:cs typeface="Courier New" pitchFamily="34" charset="-120"/>
-              </a:rPr>
-              <a:t>M5</a:t>
-            </a:r>
-            <a:endParaRPr lang="en-US" sz="1050" dirty="0"/>
-          </a:p>
-        </p:txBody>
-      </p:sp>
-      <p:sp>
-        <p:nvSpPr>
-          <p:cNvPr id="19" name="Text 17"/>
-          <p:cNvSpPr/>
-          <p:nvPr/>
-        </p:nvSpPr>
-        <p:spPr>
-          <a:xfrm>
-            <a:off x="1298448" y="2825496"/>
-            <a:ext cx="7278624" cy="228600"/>
-          </a:xfrm>
-          <a:prstGeom prst="rect">
-            <a:avLst/>
-          </a:prstGeom>
-          <a:noFill/>
-          <a:ln/>
-        </p:spPr>
-        <p:txBody>
-          <a:bodyPr wrap="square" lIns="0" tIns="0" rIns="0" bIns="0" rtlCol="0" anchor="ctr"/>
-          <a:lstStyle/>
-          <a:p>
-            <a:pPr indent="0" marL="0">
-              <a:buNone/>
-            </a:pPr>
-            <a:r>
-              <a:rPr lang="en-US" sz="1050" dirty="0">
-                <a:solidFill>
-                  <a:srgbClr val="434A63"/>
-                </a:solidFill>
-                <a:latin typeface="Arial" pitchFamily="34" charset="0"/>
-                <a:ea typeface="Arial" pitchFamily="34" charset="-122"/>
-                <a:cs typeface="Arial" pitchFamily="34" charset="-120"/>
-              </a:rPr>
-              <a:t>Alle Werte in die .env auslagern</a:t>
-            </a:r>
-            <a:endParaRPr lang="en-US" sz="1050" dirty="0"/>
-          </a:p>
-        </p:txBody>
-      </p:sp>
-      <p:sp>
-        <p:nvSpPr>
-          <p:cNvPr id="20" name="Shape 18"/>
-          <p:cNvSpPr/>
-          <p:nvPr/>
-        </p:nvSpPr>
-        <p:spPr>
-          <a:xfrm>
-            <a:off x="438912" y="3054096"/>
-            <a:ext cx="8266176" cy="228600"/>
-          </a:xfrm>
-          <a:prstGeom prst="rect">
-            <a:avLst/>
-          </a:prstGeom>
-          <a:solidFill>
-            <a:srgbClr val="F5F6FC"/>
-          </a:solidFill>
-          <a:ln/>
-        </p:spPr>
-      </p:sp>
-      <p:sp>
-        <p:nvSpPr>
-          <p:cNvPr id="21" name="Text 19"/>
-          <p:cNvSpPr/>
-          <p:nvPr/>
-        </p:nvSpPr>
-        <p:spPr>
-          <a:xfrm>
-            <a:off x="566928" y="3054096"/>
-            <a:ext cx="731520" cy="228600"/>
-          </a:xfrm>
-          <a:prstGeom prst="rect">
-            <a:avLst/>
-          </a:prstGeom>
-          <a:noFill/>
-          <a:ln/>
-        </p:spPr>
-        <p:txBody>
-          <a:bodyPr wrap="square" lIns="0" tIns="0" rIns="0" bIns="0" rtlCol="0" anchor="ctr"/>
-          <a:lstStyle/>
-          <a:p>
-            <a:pPr indent="0" marL="0">
-              <a:buNone/>
-            </a:pPr>
-            <a:r>
-              <a:rPr lang="en-US" sz="1050" b="1" dirty="0">
-                <a:solidFill>
-                  <a:srgbClr val="9A6310"/>
-                </a:solidFill>
-                <a:latin typeface="Courier New" pitchFamily="34" charset="0"/>
-                <a:ea typeface="Courier New" pitchFamily="34" charset="-122"/>
-                <a:cs typeface="Courier New" pitchFamily="34" charset="-120"/>
-              </a:rPr>
-              <a:t>M6</a:t>
-            </a:r>
-            <a:endParaRPr lang="en-US" sz="1050" dirty="0"/>
-          </a:p>
-        </p:txBody>
-      </p:sp>
-      <p:sp>
-        <p:nvSpPr>
-          <p:cNvPr id="22" name="Text 20"/>
-          <p:cNvSpPr/>
-          <p:nvPr/>
-        </p:nvSpPr>
-        <p:spPr>
-          <a:xfrm>
-            <a:off x="1298448" y="3054096"/>
-            <a:ext cx="7278624" cy="228600"/>
-          </a:xfrm>
-          <a:prstGeom prst="rect">
-            <a:avLst/>
-          </a:prstGeom>
-          <a:noFill/>
-          <a:ln/>
-        </p:spPr>
-        <p:txBody>
-          <a:bodyPr wrap="square" lIns="0" tIns="0" rIns="0" bIns="0" rtlCol="0" anchor="ctr"/>
-          <a:lstStyle/>
-          <a:p>
-            <a:pPr indent="0" marL="0">
-              <a:buNone/>
-            </a:pPr>
-            <a:r>
-              <a:rPr lang="en-US" sz="1050" dirty="0">
-                <a:solidFill>
-                  <a:srgbClr val="434A63"/>
-                </a:solidFill>
-                <a:latin typeface="Arial" pitchFamily="34" charset="0"/>
-                <a:ea typeface="Arial" pitchFamily="34" charset="-122"/>
-                <a:cs typeface="Arial" pitchFamily="34" charset="-120"/>
-              </a:rPr>
-              <a:t>Healthcheck und Wartebedingung einbauen</a:t>
-            </a:r>
-            <a:endParaRPr lang="en-US" sz="1050" dirty="0"/>
-          </a:p>
-        </p:txBody>
-      </p:sp>
-      <p:sp>
-        <p:nvSpPr>
-          <p:cNvPr id="23" name="Text 21"/>
-          <p:cNvSpPr/>
-          <p:nvPr/>
-        </p:nvSpPr>
-        <p:spPr>
-          <a:xfrm>
-            <a:off x="566928" y="3282696"/>
-            <a:ext cx="731520" cy="228600"/>
-          </a:xfrm>
-          <a:prstGeom prst="rect">
-            <a:avLst/>
-          </a:prstGeom>
-          <a:noFill/>
-          <a:ln/>
-        </p:spPr>
-        <p:txBody>
-          <a:bodyPr wrap="square" lIns="0" tIns="0" rIns="0" bIns="0" rtlCol="0" anchor="ctr"/>
-          <a:lstStyle/>
-          <a:p>
-            <a:pPr indent="0" marL="0">
-              <a:buNone/>
-            </a:pPr>
-            <a:r>
-              <a:rPr lang="en-US" sz="1050" b="1" dirty="0">
-                <a:solidFill>
-                  <a:srgbClr val="9A6310"/>
-                </a:solidFill>
-                <a:latin typeface="Courier New" pitchFamily="34" charset="0"/>
-                <a:ea typeface="Courier New" pitchFamily="34" charset="-122"/>
-                <a:cs typeface="Courier New" pitchFamily="34" charset="-120"/>
-              </a:rPr>
-              <a:t>M7</a:t>
-            </a:r>
-            <a:endParaRPr lang="en-US" sz="1050" dirty="0"/>
-          </a:p>
-        </p:txBody>
-      </p:sp>
-      <p:sp>
-        <p:nvSpPr>
-          <p:cNvPr id="24" name="Text 22"/>
-          <p:cNvSpPr/>
-          <p:nvPr/>
-        </p:nvSpPr>
-        <p:spPr>
-          <a:xfrm>
-            <a:off x="1298448" y="3282696"/>
-            <a:ext cx="7278624" cy="228600"/>
-          </a:xfrm>
-          <a:prstGeom prst="rect">
-            <a:avLst/>
-          </a:prstGeom>
-          <a:noFill/>
-          <a:ln/>
-        </p:spPr>
-        <p:txBody>
-          <a:bodyPr wrap="square" lIns="0" tIns="0" rIns="0" bIns="0" rtlCol="0" anchor="ctr"/>
-          <a:lstStyle/>
-          <a:p>
-            <a:pPr indent="0" marL="0">
-              <a:buNone/>
-            </a:pPr>
-            <a:r>
-              <a:rPr lang="en-US" sz="1050" dirty="0">
-                <a:solidFill>
-                  <a:srgbClr val="434A63"/>
-                </a:solidFill>
-                <a:latin typeface="Arial" pitchFamily="34" charset="0"/>
-                <a:ea typeface="Arial" pitchFamily="34" charset="-122"/>
-                <a:cs typeface="Arial" pitchFamily="34" charset="-120"/>
-              </a:rPr>
-              <a:t>Persistenz-Test und sauberes Aufräumen</a:t>
-            </a:r>
-            <a:endParaRPr lang="en-US" sz="1050" dirty="0"/>
-          </a:p>
-        </p:txBody>
-      </p:sp>
-      <p:sp>
-        <p:nvSpPr>
-          <p:cNvPr id="25" name="Shape 23"/>
-          <p:cNvSpPr/>
-          <p:nvPr/>
-        </p:nvSpPr>
-        <p:spPr>
-          <a:xfrm>
-            <a:off x="566928" y="3621024"/>
-            <a:ext cx="8010144" cy="914400"/>
-          </a:xfrm>
-          <a:prstGeom prst="rect">
-            <a:avLst/>
-          </a:prstGeom>
-          <a:solidFill>
-            <a:srgbClr val="EEF0FB"/>
-          </a:solidFill>
-          <a:ln/>
-        </p:spPr>
-      </p:sp>
-      <p:sp>
-        <p:nvSpPr>
-          <p:cNvPr id="26" name="Shape 24"/>
-          <p:cNvSpPr/>
-          <p:nvPr/>
-        </p:nvSpPr>
-        <p:spPr>
-          <a:xfrm>
-            <a:off x="566928" y="3621024"/>
-            <a:ext cx="41148" cy="914400"/>
+            <a:off x="566928" y="1883664"/>
+            <a:ext cx="475488" cy="50292"/>
           </a:xfrm>
           <a:prstGeom prst="rect">
             <a:avLst/>
@@ -3479,14 +2930,14 @@
       </p:sp>
       <p:sp>
         <p:nvSpPr>
-          <p:cNvPr id="27" name="Text 25"/>
-          <p:cNvSpPr/>
-          <p:nvPr/>
-        </p:nvSpPr>
-        <p:spPr>
-          <a:xfrm>
-            <a:off x="804672" y="3767328"/>
-            <a:ext cx="7607808" cy="242062"/>
+          <p:cNvPr id="6" name="Text 4"/>
+          <p:cNvSpPr/>
+          <p:nvPr/>
+        </p:nvSpPr>
+        <p:spPr>
+          <a:xfrm>
+            <a:off x="566928" y="2084832"/>
+            <a:ext cx="5394960" cy="868680"/>
           </a:xfrm>
           <a:prstGeom prst="rect">
             <a:avLst/>
@@ -3502,7 +2953,7 @@
               <a:buNone/>
             </a:pPr>
             <a:r>
-              <a:rPr lang="en-US" sz="1300" b="1" dirty="0">
+              <a:rPr lang="en-US" sz="3000" b="1" dirty="0">
                 <a:solidFill>
                   <a:srgbClr val="272E52"/>
                 </a:solidFill>
@@ -3510,22 +2961,22 @@
                 <a:ea typeface="Arial" pitchFamily="34" charset="-122"/>
                 <a:cs typeface="Arial" pitchFamily="34" charset="-120"/>
               </a:rPr>
-              <a:t>Jetzt öffnen: die Einheit mit Aufgabe, Hilfekarten und Lösung</a:t>
-            </a:r>
-            <a:endParaRPr lang="en-US" sz="1300" dirty="0"/>
-          </a:p>
-        </p:txBody>
-      </p:sp>
-      <p:sp>
-        <p:nvSpPr>
-          <p:cNvPr id="28" name="Text 26"/>
-          <p:cNvSpPr/>
-          <p:nvPr/>
-        </p:nvSpPr>
-        <p:spPr>
-          <a:xfrm>
-            <a:off x="804672" y="4055110"/>
-            <a:ext cx="7607808" cy="361442"/>
+              <a:t>Eure Missionen</a:t>
+            </a:r>
+            <a:endParaRPr lang="en-US" sz="3000" dirty="0"/>
+          </a:p>
+        </p:txBody>
+      </p:sp>
+      <p:sp>
+        <p:nvSpPr>
+          <p:cNvPr id="7" name="Text 5"/>
+          <p:cNvSpPr/>
+          <p:nvPr/>
+        </p:nvSpPr>
+        <p:spPr>
+          <a:xfrm>
+            <a:off x="566928" y="3017520"/>
+            <a:ext cx="5394960" cy="548640"/>
           </a:xfrm>
           <a:prstGeom prst="rect">
             <a:avLst/>
@@ -3538,101 +2989,10 @@
           <a:lstStyle/>
           <a:p>
             <a:pPr indent="0" marL="0">
-              <a:lnSpc>
-                <a:spcPct val="92000"/>
-              </a:lnSpc>
-              <a:spcAft>
-                <a:spcPts val="500"/>
-              </a:spcAft>
-              <a:buNone/>
-            </a:pPr>
-            <a:r>
-              <a:rPr lang="en-US" sz="1000" dirty="0">
-                <a:solidFill>
-                  <a:srgbClr val="434A63"/>
-                </a:solidFill>
-                <a:latin typeface="Arial" pitchFamily="34" charset="0"/>
-                <a:ea typeface="Arial" pitchFamily="34" charset="-122"/>
-                <a:cs typeface="Arial" pitchFamily="34" charset="-120"/>
-              </a:rPr>
-              <a:t>jacobmenge.github.io/kurs-unterlagen/docker-compose-mission-control/</a:t>
-            </a:r>
-            <a:endParaRPr lang="en-US" sz="1000" dirty="0"/>
-          </a:p>
-          <a:p>
-            <a:pPr indent="0" marL="0">
-              <a:lnSpc>
-                <a:spcPct val="92000"/>
-              </a:lnSpc>
-              <a:spcAft>
-                <a:spcPts val="500"/>
-              </a:spcAft>
-              <a:buNone/>
-            </a:pPr>
-            <a:r>
-              <a:rPr lang="en-US" sz="1000" dirty="0">
-                <a:solidFill>
-                  <a:srgbClr val="434A63"/>
-                </a:solidFill>
-                <a:latin typeface="Arial" pitchFamily="34" charset="0"/>
-                <a:ea typeface="Arial" pitchFamily="34" charset="-122"/>
-                <a:cs typeface="Arial" pitchFamily="34" charset="-120"/>
-              </a:rPr>
-              <a:t>Ergebnisse eintragen:  &lt;Link zum Ergebnis-Dokument hier eintragen&gt;</a:t>
-            </a:r>
-            <a:endParaRPr lang="en-US" sz="1000" dirty="0"/>
-          </a:p>
-        </p:txBody>
-      </p:sp>
-      <p:sp>
-        <p:nvSpPr>
-          <p:cNvPr id="29" name="Shape 27"/>
-          <p:cNvSpPr/>
-          <p:nvPr/>
-        </p:nvSpPr>
-        <p:spPr>
-          <a:xfrm>
-            <a:off x="566928" y="4631436"/>
-            <a:ext cx="8010144" cy="0"/>
-          </a:xfrm>
-          <a:prstGeom prst="line">
-            <a:avLst/>
-          </a:prstGeom>
-          <a:noFill/>
-          <a:ln w="9525">
-            <a:solidFill>
-              <a:srgbClr val="DFE3F0"/>
-            </a:solidFill>
-            <a:prstDash val="solid"/>
-          </a:ln>
-        </p:spPr>
-      </p:sp>
-      <p:sp>
-        <p:nvSpPr>
-          <p:cNvPr id="30" name="Text 28"/>
-          <p:cNvSpPr/>
-          <p:nvPr/>
-        </p:nvSpPr>
-        <p:spPr>
-          <a:xfrm>
-            <a:off x="566928" y="4722876"/>
-            <a:ext cx="5029200" cy="237744"/>
-          </a:xfrm>
-          <a:prstGeom prst="rect">
-            <a:avLst/>
-          </a:prstGeom>
-          <a:noFill/>
-          <a:ln/>
-        </p:spPr>
-        <p:txBody>
-          <a:bodyPr wrap="square" lIns="0" tIns="0" rIns="0" bIns="0" rtlCol="0" anchor="ctr"/>
-          <a:lstStyle/>
-          <a:p>
-            <a:pPr indent="0" marL="0">
-              <a:buNone/>
-            </a:pPr>
-            <a:r>
-              <a:rPr lang="en-US" sz="1050" spc="30" kern="0" dirty="0">
+              <a:buNone/>
+            </a:pPr>
+            <a:r>
+              <a:rPr lang="en-US" sz="1350" dirty="0">
                 <a:solidFill>
                   <a:srgbClr val="5C6377"/>
                 </a:solidFill>
@@ -3640,48 +3000,9 @@
                 <a:ea typeface="Arial" pitchFamily="34" charset="-122"/>
                 <a:cs typeface="Arial" pitchFamily="34" charset="-120"/>
               </a:rPr>
-              <a:t>Die Missionen</a:t>
-            </a:r>
-            <a:endParaRPr lang="en-US" sz="1050" dirty="0"/>
-          </a:p>
-        </p:txBody>
-      </p:sp>
-      <p:sp>
-        <p:nvSpPr>
-          <p:cNvPr id="31" name="Text 29"/>
-          <p:cNvSpPr/>
-          <p:nvPr/>
-        </p:nvSpPr>
-        <p:spPr>
-          <a:xfrm>
-            <a:off x="8028432" y="4722876"/>
-            <a:ext cx="548640" cy="237744"/>
-          </a:xfrm>
-          <a:prstGeom prst="rect">
-            <a:avLst/>
-          </a:prstGeom>
-          <a:noFill/>
-          <a:ln/>
-        </p:spPr>
-        <p:txBody>
-          <a:bodyPr wrap="square" lIns="0" tIns="0" rIns="0" bIns="0" rtlCol="0" anchor="ctr"/>
-          <a:lstStyle/>
-          <a:p>
-            <a:pPr algn="r" indent="0" marL="0">
-              <a:buNone/>
-            </a:pPr>
-            <a:r>
-              <a:rPr lang="en-US" sz="1050" dirty="0">
-                <a:solidFill>
-                  <a:srgbClr val="5C6377"/>
-                </a:solidFill>
-                <a:latin typeface="Arial" pitchFamily="34" charset="0"/>
-                <a:ea typeface="Arial" pitchFamily="34" charset="-122"/>
-                <a:cs typeface="Arial" pitchFamily="34" charset="-120"/>
-              </a:rPr>
-              <a:t>8/12</a:t>
-            </a:r>
-            <a:endParaRPr lang="en-US" sz="1050" dirty="0"/>
+              <a:t>90 Minuten, sieben Missionen, drei Vertiefungen</a:t>
+            </a:r>
+            <a:endParaRPr lang="en-US" sz="1350" dirty="0"/>
           </a:p>
         </p:txBody>
       </p:sp>
@@ -3770,7 +3091,7 @@
                 <a:ea typeface="Arial" pitchFamily="34" charset="-122"/>
                 <a:cs typeface="Arial" pitchFamily="34" charset="-120"/>
               </a:rPr>
-              <a:t>SPIELREGELN</a:t>
+              <a:t>BREAKOUT · 90 MINUTEN</a:t>
             </a:r>
             <a:endParaRPr lang="en-US" sz="1150" dirty="0"/>
           </a:p>
@@ -3809,7 +3130,7 @@
                 <a:ea typeface="Arial" pitchFamily="34" charset="-122"/>
                 <a:cs typeface="Arial" pitchFamily="34" charset="-120"/>
               </a:rPr>
-              <a:t>So arbeitet ihr</a:t>
+              <a:t>Der Auftrag</a:t>
             </a:r>
             <a:endParaRPr lang="en-US" sz="2600" dirty="0"/>
           </a:p>
@@ -3817,171 +3138,14 @@
       </p:sp>
       <p:sp>
         <p:nvSpPr>
-          <p:cNvPr id="5" name="Text 3"/>
-          <p:cNvSpPr/>
-          <p:nvPr/>
-        </p:nvSpPr>
-        <p:spPr>
-          <a:xfrm>
-            <a:off x="566928" y="1700784"/>
-            <a:ext cx="8010144" cy="1828800"/>
-          </a:xfrm>
-          <a:prstGeom prst="rect">
-            <a:avLst/>
-          </a:prstGeom>
-          <a:noFill/>
-          <a:ln/>
-        </p:spPr>
-        <p:txBody>
-          <a:bodyPr wrap="square" lIns="0" tIns="0" rIns="0" bIns="0" rtlCol="0" anchor="t"/>
-          <a:lstStyle/>
-          <a:p>
-            <a:pPr marL="254000" indent="-254000">
-              <a:lnSpc>
-                <a:spcPct val="100000"/>
-              </a:lnSpc>
-              <a:spcAft>
-                <a:spcPts val="900"/>
-              </a:spcAft>
-              <a:buClr>
-                <a:srgbClr val="0F7C86"/>
-              </a:buClr>
-              <a:buSzPct val="100000"/>
-              <a:buChar char="▸"/>
-            </a:pPr>
-            <a:r>
-              <a:rPr lang="en-US" sz="1200" dirty="0">
-                <a:solidFill>
-                  <a:srgbClr val="434A63"/>
-                </a:solidFill>
-                <a:latin typeface="Arial" pitchFamily="34" charset="0"/>
-                <a:ea typeface="Arial" pitchFamily="34" charset="-122"/>
-                <a:cs typeface="Arial" pitchFamily="34" charset="-120"/>
-              </a:rPr>
-              <a:t>Rollen verteilen: Driver tippt, Navigator hält die Reihenfolge, Debugger liest Logs, Dokumentator notiert. Windows wie immer in der PowerShell.</a:t>
-            </a:r>
-            <a:endParaRPr lang="en-US" sz="1200" dirty="0"/>
-          </a:p>
-          <a:p>
-            <a:pPr marL="254000" indent="-254000">
-              <a:lnSpc>
-                <a:spcPct val="100000"/>
-              </a:lnSpc>
-              <a:spcAft>
-                <a:spcPts val="900"/>
-              </a:spcAft>
-              <a:buClr>
-                <a:srgbClr val="0F7C86"/>
-              </a:buClr>
-              <a:buSzPct val="100000"/>
-              <a:buChar char="▸"/>
-            </a:pPr>
-            <a:r>
-              <a:rPr lang="en-US" sz="1200" dirty="0">
-                <a:solidFill>
-                  <a:srgbClr val="434A63"/>
-                </a:solidFill>
-                <a:latin typeface="Arial" pitchFamily="34" charset="0"/>
-                <a:ea typeface="Arial" pitchFamily="34" charset="-122"/>
-                <a:cs typeface="Arial" pitchFamily="34" charset="-120"/>
-              </a:rPr>
-              <a:t>Missionen strikt der Reihe nach. Nach jeder Mission ein up und ein Blick auf die Lampen.</a:t>
-            </a:r>
-            <a:endParaRPr lang="en-US" sz="1200" dirty="0"/>
-          </a:p>
-          <a:p>
-            <a:pPr marL="254000" indent="-254000">
-              <a:lnSpc>
-                <a:spcPct val="100000"/>
-              </a:lnSpc>
-              <a:spcAft>
-                <a:spcPts val="900"/>
-              </a:spcAft>
-              <a:buClr>
-                <a:srgbClr val="0F7C86"/>
-              </a:buClr>
-              <a:buSzPct val="100000"/>
-              <a:buChar char="▸"/>
-            </a:pPr>
-            <a:r>
-              <a:rPr lang="en-US" sz="1200" dirty="0">
-                <a:solidFill>
-                  <a:srgbClr val="434A63"/>
-                </a:solidFill>
-                <a:latin typeface="Arial" pitchFamily="34" charset="0"/>
-                <a:ea typeface="Arial" pitchFamily="34" charset="-122"/>
-                <a:cs typeface="Arial" pitchFamily="34" charset="-120"/>
-              </a:rPr>
-              <a:t>Hilfekarten erst nach eigener Diagnose: Logs lesen, docker compose ps und config prüfen, im Team diskutieren.</a:t>
-            </a:r>
-            <a:endParaRPr lang="en-US" sz="1200" dirty="0"/>
-          </a:p>
-          <a:p>
-            <a:pPr marL="254000" indent="-254000">
-              <a:lnSpc>
-                <a:spcPct val="100000"/>
-              </a:lnSpc>
-              <a:spcAft>
-                <a:spcPts val="900"/>
-              </a:spcAft>
-              <a:buClr>
-                <a:srgbClr val="0F7C86"/>
-              </a:buClr>
-              <a:buSzPct val="100000"/>
-              <a:buChar char="▸"/>
-            </a:pPr>
-            <a:r>
-              <a:rPr lang="en-US" sz="1200" dirty="0">
-                <a:solidFill>
-                  <a:srgbClr val="434A63"/>
-                </a:solidFill>
-                <a:latin typeface="Arial" pitchFamily="34" charset="0"/>
-                <a:ea typeface="Arial" pitchFamily="34" charset="-122"/>
-                <a:cs typeface="Arial" pitchFamily="34" charset="-120"/>
-              </a:rPr>
-              <a:t>Schnelle Gruppen: drei Bonus-Missionen, unter anderem der Tausch des Backends gegen FastAPI.</a:t>
-            </a:r>
-            <a:endParaRPr lang="en-US" sz="1200" dirty="0"/>
-          </a:p>
-          <a:p>
-            <a:pPr marL="254000" indent="-254000">
-              <a:lnSpc>
-                <a:spcPct val="100000"/>
-              </a:lnSpc>
-              <a:spcAft>
-                <a:spcPts val="900"/>
-              </a:spcAft>
-              <a:buClr>
-                <a:srgbClr val="0F7C86"/>
-              </a:buClr>
-              <a:buSzPct val="100000"/>
-              <a:buChar char="▸"/>
-            </a:pPr>
-            <a:r>
-              <a:rPr lang="en-US" sz="1200" dirty="0">
-                <a:solidFill>
-                  <a:srgbClr val="434A63"/>
-                </a:solidFill>
-                <a:latin typeface="Arial" pitchFamily="34" charset="0"/>
-                <a:ea typeface="Arial" pitchFamily="34" charset="-122"/>
-                <a:cs typeface="Arial" pitchFamily="34" charset="-120"/>
-              </a:rPr>
-              <a:t>Wenn nichts mehr geht: Hilfekarten durch, dann um Hilfe bitten.</a:t>
-            </a:r>
-            <a:endParaRPr lang="en-US" sz="1200" dirty="0"/>
-          </a:p>
-        </p:txBody>
-      </p:sp>
-      <p:sp>
-        <p:nvSpPr>
-          <p:cNvPr id="6" name="Shape 4"/>
-          <p:cNvSpPr/>
-          <p:nvPr/>
-        </p:nvSpPr>
-        <p:spPr>
-          <a:xfrm>
-            <a:off x="566928" y="3639312"/>
-            <a:ext cx="8010144" cy="822960"/>
+          <p:cNvPr id="5" name="Shape 3"/>
+          <p:cNvSpPr/>
+          <p:nvPr/>
+        </p:nvSpPr>
+        <p:spPr>
+          <a:xfrm>
+            <a:off x="438912" y="1682496"/>
+            <a:ext cx="8266176" cy="228600"/>
           </a:xfrm>
           <a:prstGeom prst="rect">
             <a:avLst/>
@@ -3994,14 +3158,718 @@
       </p:sp>
       <p:sp>
         <p:nvSpPr>
-          <p:cNvPr id="7" name="Shape 5"/>
-          <p:cNvSpPr/>
-          <p:nvPr/>
-        </p:nvSpPr>
-        <p:spPr>
-          <a:xfrm>
-            <a:off x="566928" y="3639312"/>
-            <a:ext cx="41148" cy="822960"/>
+          <p:cNvPr id="6" name="Text 4"/>
+          <p:cNvSpPr/>
+          <p:nvPr/>
+        </p:nvSpPr>
+        <p:spPr>
+          <a:xfrm>
+            <a:off x="566928" y="1682496"/>
+            <a:ext cx="731520" cy="228600"/>
+          </a:xfrm>
+          <a:prstGeom prst="rect">
+            <a:avLst/>
+          </a:prstGeom>
+          <a:noFill/>
+          <a:ln/>
+        </p:spPr>
+        <p:txBody>
+          <a:bodyPr wrap="square" lIns="0" tIns="0" rIns="0" bIns="0" rtlCol="0" anchor="ctr"/>
+          <a:lstStyle/>
+          <a:p>
+            <a:pPr indent="0" marL="0">
+              <a:buNone/>
+            </a:pPr>
+            <a:r>
+              <a:rPr lang="en-US" sz="1050" b="1" dirty="0">
+                <a:solidFill>
+                  <a:srgbClr val="9A6310"/>
+                </a:solidFill>
+                <a:latin typeface="Courier New" pitchFamily="34" charset="0"/>
+                <a:ea typeface="Courier New" pitchFamily="34" charset="-122"/>
+                <a:cs typeface="Courier New" pitchFamily="34" charset="-120"/>
+              </a:rPr>
+              <a:t>Start</a:t>
+            </a:r>
+            <a:endParaRPr lang="en-US" sz="1050" dirty="0"/>
+          </a:p>
+        </p:txBody>
+      </p:sp>
+      <p:sp>
+        <p:nvSpPr>
+          <p:cNvPr id="7" name="Text 5"/>
+          <p:cNvSpPr/>
+          <p:nvPr/>
+        </p:nvSpPr>
+        <p:spPr>
+          <a:xfrm>
+            <a:off x="1298448" y="1682496"/>
+            <a:ext cx="7278624" cy="228600"/>
+          </a:xfrm>
+          <a:prstGeom prst="rect">
+            <a:avLst/>
+          </a:prstGeom>
+          <a:noFill/>
+          <a:ln/>
+        </p:spPr>
+        <p:txBody>
+          <a:bodyPr wrap="square" lIns="0" tIns="0" rIns="0" bIns="0" rtlCol="0" anchor="ctr"/>
+          <a:lstStyle/>
+          <a:p>
+            <a:pPr indent="0" marL="0">
+              <a:buNone/>
+            </a:pPr>
+            <a:r>
+              <a:rPr lang="en-US" sz="1050" dirty="0">
+                <a:solidFill>
+                  <a:srgbClr val="434A63"/>
+                </a:solidFill>
+                <a:latin typeface="Arial" pitchFamily="34" charset="0"/>
+                <a:ea typeface="Arial" pitchFamily="34" charset="-122"/>
+                <a:cs typeface="Arial" pitchFamily="34" charset="-120"/>
+              </a:rPr>
+              <a:t>Code holen, Ordner ansehen, leere compose.yaml anlegen</a:t>
+            </a:r>
+            <a:endParaRPr lang="en-US" sz="1050" dirty="0"/>
+          </a:p>
+        </p:txBody>
+      </p:sp>
+      <p:sp>
+        <p:nvSpPr>
+          <p:cNvPr id="8" name="Text 6"/>
+          <p:cNvSpPr/>
+          <p:nvPr/>
+        </p:nvSpPr>
+        <p:spPr>
+          <a:xfrm>
+            <a:off x="566928" y="1911096"/>
+            <a:ext cx="731520" cy="228600"/>
+          </a:xfrm>
+          <a:prstGeom prst="rect">
+            <a:avLst/>
+          </a:prstGeom>
+          <a:noFill/>
+          <a:ln/>
+        </p:spPr>
+        <p:txBody>
+          <a:bodyPr wrap="square" lIns="0" tIns="0" rIns="0" bIns="0" rtlCol="0" anchor="ctr"/>
+          <a:lstStyle/>
+          <a:p>
+            <a:pPr indent="0" marL="0">
+              <a:buNone/>
+            </a:pPr>
+            <a:r>
+              <a:rPr lang="en-US" sz="1050" b="1" dirty="0">
+                <a:solidFill>
+                  <a:srgbClr val="9A6310"/>
+                </a:solidFill>
+                <a:latin typeface="Courier New" pitchFamily="34" charset="0"/>
+                <a:ea typeface="Courier New" pitchFamily="34" charset="-122"/>
+                <a:cs typeface="Courier New" pitchFamily="34" charset="-120"/>
+              </a:rPr>
+              <a:t>M1</a:t>
+            </a:r>
+            <a:endParaRPr lang="en-US" sz="1050" dirty="0"/>
+          </a:p>
+        </p:txBody>
+      </p:sp>
+      <p:sp>
+        <p:nvSpPr>
+          <p:cNvPr id="9" name="Text 7"/>
+          <p:cNvSpPr/>
+          <p:nvPr/>
+        </p:nvSpPr>
+        <p:spPr>
+          <a:xfrm>
+            <a:off x="1298448" y="1911096"/>
+            <a:ext cx="7278624" cy="228600"/>
+          </a:xfrm>
+          <a:prstGeom prst="rect">
+            <a:avLst/>
+          </a:prstGeom>
+          <a:noFill/>
+          <a:ln/>
+        </p:spPr>
+        <p:txBody>
+          <a:bodyPr wrap="square" lIns="0" tIns="0" rIns="0" bIns="0" rtlCol="0" anchor="ctr"/>
+          <a:lstStyle/>
+          <a:p>
+            <a:pPr indent="0" marL="0">
+              <a:buNone/>
+            </a:pPr>
+            <a:r>
+              <a:rPr lang="en-US" sz="1050" dirty="0">
+                <a:solidFill>
+                  <a:srgbClr val="434A63"/>
+                </a:solidFill>
+                <a:latin typeface="Arial" pitchFamily="34" charset="0"/>
+                <a:ea typeface="Arial" pitchFamily="34" charset="-122"/>
+                <a:cs typeface="Arial" pitchFamily="34" charset="-120"/>
+              </a:rPr>
+              <a:t>Das Frontend: die erste Lampe leuchtet, die Station steht dunkel</a:t>
+            </a:r>
+            <a:endParaRPr lang="en-US" sz="1050" dirty="0"/>
+          </a:p>
+        </p:txBody>
+      </p:sp>
+      <p:sp>
+        <p:nvSpPr>
+          <p:cNvPr id="10" name="Shape 8"/>
+          <p:cNvSpPr/>
+          <p:nvPr/>
+        </p:nvSpPr>
+        <p:spPr>
+          <a:xfrm>
+            <a:off x="438912" y="2139696"/>
+            <a:ext cx="8266176" cy="228600"/>
+          </a:xfrm>
+          <a:prstGeom prst="rect">
+            <a:avLst/>
+          </a:prstGeom>
+          <a:solidFill>
+            <a:srgbClr val="F5F6FC"/>
+          </a:solidFill>
+          <a:ln/>
+        </p:spPr>
+      </p:sp>
+      <p:sp>
+        <p:nvSpPr>
+          <p:cNvPr id="11" name="Text 9"/>
+          <p:cNvSpPr/>
+          <p:nvPr/>
+        </p:nvSpPr>
+        <p:spPr>
+          <a:xfrm>
+            <a:off x="566928" y="2139696"/>
+            <a:ext cx="731520" cy="228600"/>
+          </a:xfrm>
+          <a:prstGeom prst="rect">
+            <a:avLst/>
+          </a:prstGeom>
+          <a:noFill/>
+          <a:ln/>
+        </p:spPr>
+        <p:txBody>
+          <a:bodyPr wrap="square" lIns="0" tIns="0" rIns="0" bIns="0" rtlCol="0" anchor="ctr"/>
+          <a:lstStyle/>
+          <a:p>
+            <a:pPr indent="0" marL="0">
+              <a:buNone/>
+            </a:pPr>
+            <a:r>
+              <a:rPr lang="en-US" sz="1050" b="1" dirty="0">
+                <a:solidFill>
+                  <a:srgbClr val="9A6310"/>
+                </a:solidFill>
+                <a:latin typeface="Courier New" pitchFamily="34" charset="0"/>
+                <a:ea typeface="Courier New" pitchFamily="34" charset="-122"/>
+                <a:cs typeface="Courier New" pitchFamily="34" charset="-120"/>
+              </a:rPr>
+              <a:t>M2</a:t>
+            </a:r>
+            <a:endParaRPr lang="en-US" sz="1050" dirty="0"/>
+          </a:p>
+        </p:txBody>
+      </p:sp>
+      <p:sp>
+        <p:nvSpPr>
+          <p:cNvPr id="12" name="Text 10"/>
+          <p:cNvSpPr/>
+          <p:nvPr/>
+        </p:nvSpPr>
+        <p:spPr>
+          <a:xfrm>
+            <a:off x="1298448" y="2139696"/>
+            <a:ext cx="7278624" cy="228600"/>
+          </a:xfrm>
+          <a:prstGeom prst="rect">
+            <a:avLst/>
+          </a:prstGeom>
+          <a:noFill/>
+          <a:ln/>
+        </p:spPr>
+        <p:txBody>
+          <a:bodyPr wrap="square" lIns="0" tIns="0" rIns="0" bIns="0" rtlCol="0" anchor="ctr"/>
+          <a:lstStyle/>
+          <a:p>
+            <a:pPr indent="0" marL="0">
+              <a:buNone/>
+            </a:pPr>
+            <a:r>
+              <a:rPr lang="en-US" sz="1050" dirty="0">
+                <a:solidFill>
+                  <a:srgbClr val="434A63"/>
+                </a:solidFill>
+                <a:latin typeface="Arial" pitchFamily="34" charset="0"/>
+                <a:ea typeface="Arial" pitchFamily="34" charset="-122"/>
+                <a:cs typeface="Arial" pitchFamily="34" charset="-120"/>
+              </a:rPr>
+              <a:t>Das Logbuch: Datenbank mit Init-Skript und Volume</a:t>
+            </a:r>
+            <a:endParaRPr lang="en-US" sz="1050" dirty="0"/>
+          </a:p>
+        </p:txBody>
+      </p:sp>
+      <p:sp>
+        <p:nvSpPr>
+          <p:cNvPr id="13" name="Text 11"/>
+          <p:cNvSpPr/>
+          <p:nvPr/>
+        </p:nvSpPr>
+        <p:spPr>
+          <a:xfrm>
+            <a:off x="566928" y="2368296"/>
+            <a:ext cx="731520" cy="228600"/>
+          </a:xfrm>
+          <a:prstGeom prst="rect">
+            <a:avLst/>
+          </a:prstGeom>
+          <a:noFill/>
+          <a:ln/>
+        </p:spPr>
+        <p:txBody>
+          <a:bodyPr wrap="square" lIns="0" tIns="0" rIns="0" bIns="0" rtlCol="0" anchor="ctr"/>
+          <a:lstStyle/>
+          <a:p>
+            <a:pPr indent="0" marL="0">
+              <a:buNone/>
+            </a:pPr>
+            <a:r>
+              <a:rPr lang="en-US" sz="1050" b="1" dirty="0">
+                <a:solidFill>
+                  <a:srgbClr val="9A6310"/>
+                </a:solidFill>
+                <a:latin typeface="Courier New" pitchFamily="34" charset="0"/>
+                <a:ea typeface="Courier New" pitchFamily="34" charset="-122"/>
+                <a:cs typeface="Courier New" pitchFamily="34" charset="-120"/>
+              </a:rPr>
+              <a:t>M3</a:t>
+            </a:r>
+            <a:endParaRPr lang="en-US" sz="1050" dirty="0"/>
+          </a:p>
+        </p:txBody>
+      </p:sp>
+      <p:sp>
+        <p:nvSpPr>
+          <p:cNvPr id="14" name="Text 12"/>
+          <p:cNvSpPr/>
+          <p:nvPr/>
+        </p:nvSpPr>
+        <p:spPr>
+          <a:xfrm>
+            <a:off x="1298448" y="2368296"/>
+            <a:ext cx="7278624" cy="228600"/>
+          </a:xfrm>
+          <a:prstGeom prst="rect">
+            <a:avLst/>
+          </a:prstGeom>
+          <a:noFill/>
+          <a:ln/>
+        </p:spPr>
+        <p:txBody>
+          <a:bodyPr wrap="square" lIns="0" tIns="0" rIns="0" bIns="0" rtlCol="0" anchor="ctr"/>
+          <a:lstStyle/>
+          <a:p>
+            <a:pPr indent="0" marL="0">
+              <a:buNone/>
+            </a:pPr>
+            <a:r>
+              <a:rPr lang="en-US" sz="1050" dirty="0">
+                <a:solidFill>
+                  <a:srgbClr val="434A63"/>
+                </a:solidFill>
+                <a:latin typeface="Arial" pitchFamily="34" charset="0"/>
+                <a:ea typeface="Arial" pitchFamily="34" charset="-122"/>
+                <a:cs typeface="Arial" pitchFamily="34" charset="-120"/>
+              </a:rPr>
+              <a:t>Der Funkkontakt: Backend bauen, zwei Lampen springen um</a:t>
+            </a:r>
+            <a:endParaRPr lang="en-US" sz="1050" dirty="0"/>
+          </a:p>
+        </p:txBody>
+      </p:sp>
+      <p:sp>
+        <p:nvSpPr>
+          <p:cNvPr id="15" name="Shape 13"/>
+          <p:cNvSpPr/>
+          <p:nvPr/>
+        </p:nvSpPr>
+        <p:spPr>
+          <a:xfrm>
+            <a:off x="438912" y="2596896"/>
+            <a:ext cx="8266176" cy="228600"/>
+          </a:xfrm>
+          <a:prstGeom prst="rect">
+            <a:avLst/>
+          </a:prstGeom>
+          <a:solidFill>
+            <a:srgbClr val="F5F6FC"/>
+          </a:solidFill>
+          <a:ln/>
+        </p:spPr>
+      </p:sp>
+      <p:sp>
+        <p:nvSpPr>
+          <p:cNvPr id="16" name="Text 14"/>
+          <p:cNvSpPr/>
+          <p:nvPr/>
+        </p:nvSpPr>
+        <p:spPr>
+          <a:xfrm>
+            <a:off x="566928" y="2596896"/>
+            <a:ext cx="731520" cy="228600"/>
+          </a:xfrm>
+          <a:prstGeom prst="rect">
+            <a:avLst/>
+          </a:prstGeom>
+          <a:noFill/>
+          <a:ln/>
+        </p:spPr>
+        <p:txBody>
+          <a:bodyPr wrap="square" lIns="0" tIns="0" rIns="0" bIns="0" rtlCol="0" anchor="ctr"/>
+          <a:lstStyle/>
+          <a:p>
+            <a:pPr indent="0" marL="0">
+              <a:buNone/>
+            </a:pPr>
+            <a:r>
+              <a:rPr lang="en-US" sz="1050" b="1" dirty="0">
+                <a:solidFill>
+                  <a:srgbClr val="9A6310"/>
+                </a:solidFill>
+                <a:latin typeface="Courier New" pitchFamily="34" charset="0"/>
+                <a:ea typeface="Courier New" pitchFamily="34" charset="-122"/>
+                <a:cs typeface="Courier New" pitchFamily="34" charset="-120"/>
+              </a:rPr>
+              <a:t>M4</a:t>
+            </a:r>
+            <a:endParaRPr lang="en-US" sz="1050" dirty="0"/>
+          </a:p>
+        </p:txBody>
+      </p:sp>
+      <p:sp>
+        <p:nvSpPr>
+          <p:cNvPr id="17" name="Text 15"/>
+          <p:cNvSpPr/>
+          <p:nvPr/>
+        </p:nvSpPr>
+        <p:spPr>
+          <a:xfrm>
+            <a:off x="1298448" y="2596896"/>
+            <a:ext cx="7278624" cy="228600"/>
+          </a:xfrm>
+          <a:prstGeom prst="rect">
+            <a:avLst/>
+          </a:prstGeom>
+          <a:noFill/>
+          <a:ln/>
+        </p:spPr>
+        <p:txBody>
+          <a:bodyPr wrap="square" lIns="0" tIns="0" rIns="0" bIns="0" rtlCol="0" anchor="ctr"/>
+          <a:lstStyle/>
+          <a:p>
+            <a:pPr indent="0" marL="0">
+              <a:buNone/>
+            </a:pPr>
+            <a:r>
+              <a:rPr lang="en-US" sz="1050" dirty="0">
+                <a:solidFill>
+                  <a:srgbClr val="434A63"/>
+                </a:solidFill>
+                <a:latin typeface="Arial" pitchFamily="34" charset="0"/>
+                <a:ea typeface="Arial" pitchFamily="34" charset="-122"/>
+                <a:cs typeface="Arial" pitchFamily="34" charset="-120"/>
+              </a:rPr>
+              <a:t>Das erste Modul: die Lebenserhaltung leuchtet</a:t>
+            </a:r>
+            <a:endParaRPr lang="en-US" sz="1050" dirty="0"/>
+          </a:p>
+        </p:txBody>
+      </p:sp>
+      <p:sp>
+        <p:nvSpPr>
+          <p:cNvPr id="18" name="Text 16"/>
+          <p:cNvSpPr/>
+          <p:nvPr/>
+        </p:nvSpPr>
+        <p:spPr>
+          <a:xfrm>
+            <a:off x="566928" y="2825496"/>
+            <a:ext cx="731520" cy="228600"/>
+          </a:xfrm>
+          <a:prstGeom prst="rect">
+            <a:avLst/>
+          </a:prstGeom>
+          <a:noFill/>
+          <a:ln/>
+        </p:spPr>
+        <p:txBody>
+          <a:bodyPr wrap="square" lIns="0" tIns="0" rIns="0" bIns="0" rtlCol="0" anchor="ctr"/>
+          <a:lstStyle/>
+          <a:p>
+            <a:pPr indent="0" marL="0">
+              <a:buNone/>
+            </a:pPr>
+            <a:r>
+              <a:rPr lang="en-US" sz="1050" b="1" dirty="0">
+                <a:solidFill>
+                  <a:srgbClr val="9A6310"/>
+                </a:solidFill>
+                <a:latin typeface="Courier New" pitchFamily="34" charset="0"/>
+                <a:ea typeface="Courier New" pitchFamily="34" charset="-122"/>
+                <a:cs typeface="Courier New" pitchFamily="34" charset="-120"/>
+              </a:rPr>
+              <a:t>M5</a:t>
+            </a:r>
+            <a:endParaRPr lang="en-US" sz="1050" dirty="0"/>
+          </a:p>
+        </p:txBody>
+      </p:sp>
+      <p:sp>
+        <p:nvSpPr>
+          <p:cNvPr id="19" name="Text 17"/>
+          <p:cNvSpPr/>
+          <p:nvPr/>
+        </p:nvSpPr>
+        <p:spPr>
+          <a:xfrm>
+            <a:off x="1298448" y="2825496"/>
+            <a:ext cx="7278624" cy="228600"/>
+          </a:xfrm>
+          <a:prstGeom prst="rect">
+            <a:avLst/>
+          </a:prstGeom>
+          <a:noFill/>
+          <a:ln/>
+        </p:spPr>
+        <p:txBody>
+          <a:bodyPr wrap="square" lIns="0" tIns="0" rIns="0" bIns="0" rtlCol="0" anchor="ctr"/>
+          <a:lstStyle/>
+          <a:p>
+            <a:pPr indent="0" marL="0">
+              <a:buNone/>
+            </a:pPr>
+            <a:r>
+              <a:rPr lang="en-US" sz="1050" dirty="0">
+                <a:solidFill>
+                  <a:srgbClr val="434A63"/>
+                </a:solidFill>
+                <a:latin typeface="Arial" pitchFamily="34" charset="0"/>
+                <a:ea typeface="Arial" pitchFamily="34" charset="-122"/>
+                <a:cs typeface="Arial" pitchFamily="34" charset="-120"/>
+              </a:rPr>
+              <a:t>Betriebsstärke: mindestens drei Module online</a:t>
+            </a:r>
+            <a:endParaRPr lang="en-US" sz="1050" dirty="0"/>
+          </a:p>
+        </p:txBody>
+      </p:sp>
+      <p:sp>
+        <p:nvSpPr>
+          <p:cNvPr id="20" name="Shape 18"/>
+          <p:cNvSpPr/>
+          <p:nvPr/>
+        </p:nvSpPr>
+        <p:spPr>
+          <a:xfrm>
+            <a:off x="438912" y="3054096"/>
+            <a:ext cx="8266176" cy="228600"/>
+          </a:xfrm>
+          <a:prstGeom prst="rect">
+            <a:avLst/>
+          </a:prstGeom>
+          <a:solidFill>
+            <a:srgbClr val="F5F6FC"/>
+          </a:solidFill>
+          <a:ln/>
+        </p:spPr>
+      </p:sp>
+      <p:sp>
+        <p:nvSpPr>
+          <p:cNvPr id="21" name="Text 19"/>
+          <p:cNvSpPr/>
+          <p:nvPr/>
+        </p:nvSpPr>
+        <p:spPr>
+          <a:xfrm>
+            <a:off x="566928" y="3054096"/>
+            <a:ext cx="731520" cy="228600"/>
+          </a:xfrm>
+          <a:prstGeom prst="rect">
+            <a:avLst/>
+          </a:prstGeom>
+          <a:noFill/>
+          <a:ln/>
+        </p:spPr>
+        <p:txBody>
+          <a:bodyPr wrap="square" lIns="0" tIns="0" rIns="0" bIns="0" rtlCol="0" anchor="ctr"/>
+          <a:lstStyle/>
+          <a:p>
+            <a:pPr indent="0" marL="0">
+              <a:buNone/>
+            </a:pPr>
+            <a:r>
+              <a:rPr lang="en-US" sz="1050" b="1" dirty="0">
+                <a:solidFill>
+                  <a:srgbClr val="9A6310"/>
+                </a:solidFill>
+                <a:latin typeface="Courier New" pitchFamily="34" charset="0"/>
+                <a:ea typeface="Courier New" pitchFamily="34" charset="-122"/>
+                <a:cs typeface="Courier New" pitchFamily="34" charset="-120"/>
+              </a:rPr>
+              <a:t>M6</a:t>
+            </a:r>
+            <a:endParaRPr lang="en-US" sz="1050" dirty="0"/>
+          </a:p>
+        </p:txBody>
+      </p:sp>
+      <p:sp>
+        <p:nvSpPr>
+          <p:cNvPr id="22" name="Text 20"/>
+          <p:cNvSpPr/>
+          <p:nvPr/>
+        </p:nvSpPr>
+        <p:spPr>
+          <a:xfrm>
+            <a:off x="1298448" y="3054096"/>
+            <a:ext cx="7278624" cy="228600"/>
+          </a:xfrm>
+          <a:prstGeom prst="rect">
+            <a:avLst/>
+          </a:prstGeom>
+          <a:noFill/>
+          <a:ln/>
+        </p:spPr>
+        <p:txBody>
+          <a:bodyPr wrap="square" lIns="0" tIns="0" rIns="0" bIns="0" rtlCol="0" anchor="ctr"/>
+          <a:lstStyle/>
+          <a:p>
+            <a:pPr indent="0" marL="0">
+              <a:buNone/>
+            </a:pPr>
+            <a:r>
+              <a:rPr lang="en-US" sz="1050" dirty="0">
+                <a:solidFill>
+                  <a:srgbClr val="434A63"/>
+                </a:solidFill>
+                <a:latin typeface="Arial" pitchFamily="34" charset="0"/>
+                <a:ea typeface="Arial" pitchFamily="34" charset="-122"/>
+                <a:cs typeface="Arial" pitchFamily="34" charset="-120"/>
+              </a:rPr>
+              <a:t>Konfiguration an eine Stelle: die .env-Datei</a:t>
+            </a:r>
+            <a:endParaRPr lang="en-US" sz="1050" dirty="0"/>
+          </a:p>
+        </p:txBody>
+      </p:sp>
+      <p:sp>
+        <p:nvSpPr>
+          <p:cNvPr id="23" name="Text 21"/>
+          <p:cNvSpPr/>
+          <p:nvPr/>
+        </p:nvSpPr>
+        <p:spPr>
+          <a:xfrm>
+            <a:off x="566928" y="3282696"/>
+            <a:ext cx="731520" cy="228600"/>
+          </a:xfrm>
+          <a:prstGeom prst="rect">
+            <a:avLst/>
+          </a:prstGeom>
+          <a:noFill/>
+          <a:ln/>
+        </p:spPr>
+        <p:txBody>
+          <a:bodyPr wrap="square" lIns="0" tIns="0" rIns="0" bIns="0" rtlCol="0" anchor="ctr"/>
+          <a:lstStyle/>
+          <a:p>
+            <a:pPr indent="0" marL="0">
+              <a:buNone/>
+            </a:pPr>
+            <a:r>
+              <a:rPr lang="en-US" sz="1050" b="1" dirty="0">
+                <a:solidFill>
+                  <a:srgbClr val="9A6310"/>
+                </a:solidFill>
+                <a:latin typeface="Courier New" pitchFamily="34" charset="0"/>
+                <a:ea typeface="Courier New" pitchFamily="34" charset="-122"/>
+                <a:cs typeface="Courier New" pitchFamily="34" charset="-120"/>
+              </a:rPr>
+              <a:t>M7</a:t>
+            </a:r>
+            <a:endParaRPr lang="en-US" sz="1050" dirty="0"/>
+          </a:p>
+        </p:txBody>
+      </p:sp>
+      <p:sp>
+        <p:nvSpPr>
+          <p:cNvPr id="24" name="Text 22"/>
+          <p:cNvSpPr/>
+          <p:nvPr/>
+        </p:nvSpPr>
+        <p:spPr>
+          <a:xfrm>
+            <a:off x="1298448" y="3282696"/>
+            <a:ext cx="7278624" cy="228600"/>
+          </a:xfrm>
+          <a:prstGeom prst="rect">
+            <a:avLst/>
+          </a:prstGeom>
+          <a:noFill/>
+          <a:ln/>
+        </p:spPr>
+        <p:txBody>
+          <a:bodyPr wrap="square" lIns="0" tIns="0" rIns="0" bIns="0" rtlCol="0" anchor="ctr"/>
+          <a:lstStyle/>
+          <a:p>
+            <a:pPr indent="0" marL="0">
+              <a:buNone/>
+            </a:pPr>
+            <a:r>
+              <a:rPr lang="en-US" sz="1050" dirty="0">
+                <a:solidFill>
+                  <a:srgbClr val="434A63"/>
+                </a:solidFill>
+                <a:latin typeface="Arial" pitchFamily="34" charset="0"/>
+                <a:ea typeface="Arial" pitchFamily="34" charset="-122"/>
+                <a:cs typeface="Arial" pitchFamily="34" charset="-120"/>
+              </a:rPr>
+              <a:t>Die Betriebsabnahme: healthy, Adminer, Neustart-Beweis</a:t>
+            </a:r>
+            <a:endParaRPr lang="en-US" sz="1050" dirty="0"/>
+          </a:p>
+        </p:txBody>
+      </p:sp>
+      <p:sp>
+        <p:nvSpPr>
+          <p:cNvPr id="25" name="Shape 23"/>
+          <p:cNvSpPr/>
+          <p:nvPr/>
+        </p:nvSpPr>
+        <p:spPr>
+          <a:xfrm>
+            <a:off x="566928" y="3621024"/>
+            <a:ext cx="8010144" cy="914400"/>
+          </a:xfrm>
+          <a:prstGeom prst="rect">
+            <a:avLst/>
+          </a:prstGeom>
+          <a:solidFill>
+            <a:srgbClr val="EEF0FB"/>
+          </a:solidFill>
+          <a:ln/>
+        </p:spPr>
+      </p:sp>
+      <p:sp>
+        <p:nvSpPr>
+          <p:cNvPr id="26" name="Shape 24"/>
+          <p:cNvSpPr/>
+          <p:nvPr/>
+        </p:nvSpPr>
+        <p:spPr>
+          <a:xfrm>
+            <a:off x="566928" y="3621024"/>
+            <a:ext cx="41148" cy="914400"/>
           </a:xfrm>
           <a:prstGeom prst="rect">
             <a:avLst/>
@@ -4014,13 +3882,13 @@
       </p:sp>
       <p:sp>
         <p:nvSpPr>
-          <p:cNvPr id="8" name="Text 6"/>
-          <p:cNvSpPr/>
-          <p:nvPr/>
-        </p:nvSpPr>
-        <p:spPr>
-          <a:xfrm>
-            <a:off x="804672" y="3785616"/>
+          <p:cNvPr id="27" name="Text 25"/>
+          <p:cNvSpPr/>
+          <p:nvPr/>
+        </p:nvSpPr>
+        <p:spPr>
+          <a:xfrm>
+            <a:off x="804672" y="3767328"/>
             <a:ext cx="7607808" cy="242062"/>
           </a:xfrm>
           <a:prstGeom prst="rect">
@@ -4045,7 +3913,7 @@
                 <a:ea typeface="Arial" pitchFamily="34" charset="-122"/>
                 <a:cs typeface="Arial" pitchFamily="34" charset="-120"/>
               </a:rPr>
-              <a:t>Um 20:30 beginnt die Demo-Runde</a:t>
+              <a:t>Jetzt öffnen: die Einheit mit Missionen, Funkhilfe und Musterlösung</a:t>
             </a:r>
             <a:endParaRPr lang="en-US" sz="1300" dirty="0"/>
           </a:p>
@@ -4053,14 +3921,14 @@
       </p:sp>
       <p:sp>
         <p:nvSpPr>
-          <p:cNvPr id="9" name="Text 7"/>
-          <p:cNvSpPr/>
-          <p:nvPr/>
-        </p:nvSpPr>
-        <p:spPr>
-          <a:xfrm>
-            <a:off x="804672" y="4073398"/>
-            <a:ext cx="7607808" cy="270002"/>
+          <p:cNvPr id="28" name="Text 26"/>
+          <p:cNvSpPr/>
+          <p:nvPr/>
+        </p:nvSpPr>
+        <p:spPr>
+          <a:xfrm>
+            <a:off x="804672" y="4055110"/>
+            <a:ext cx="7607808" cy="361442"/>
           </a:xfrm>
           <a:prstGeom prst="rect">
             <a:avLst/>
@@ -4076,10 +3944,13 @@
               <a:lnSpc>
                 <a:spcPct val="92000"/>
               </a:lnSpc>
-              <a:buNone/>
-            </a:pPr>
-            <a:r>
-              <a:rPr lang="en-US" sz="1100" dirty="0">
+              <a:spcAft>
+                <a:spcPts val="500"/>
+              </a:spcAft>
+              <a:buNone/>
+            </a:pPr>
+            <a:r>
+              <a:rPr lang="en-US" sz="1000" dirty="0">
                 <a:solidFill>
                   <a:srgbClr val="434A63"/>
                 </a:solidFill>
@@ -4087,15 +3958,38 @@
                 <a:ea typeface="Arial" pitchFamily="34" charset="-122"/>
                 <a:cs typeface="Arial" pitchFamily="34" charset="-120"/>
               </a:rPr>
-              <a:t>Jede Gruppe 3 bis 5 Minuten: docker compose ps mit healthy, die Lampen im Browser, ein eigenes Modul und eure kniffligste Stelle.</a:t>
-            </a:r>
-            <a:endParaRPr lang="en-US" sz="1100" dirty="0"/>
-          </a:p>
-        </p:txBody>
-      </p:sp>
-      <p:sp>
-        <p:nvSpPr>
-          <p:cNvPr id="10" name="Shape 8"/>
+              <a:t>jacobmenge.github.io/kurs-unterlagen/docker-compose-mission-control/</a:t>
+            </a:r>
+            <a:endParaRPr lang="en-US" sz="1000" dirty="0"/>
+          </a:p>
+          <a:p>
+            <a:pPr indent="0" marL="0">
+              <a:lnSpc>
+                <a:spcPct val="92000"/>
+              </a:lnSpc>
+              <a:spcAft>
+                <a:spcPts val="500"/>
+              </a:spcAft>
+              <a:buNone/>
+            </a:pPr>
+            <a:r>
+              <a:rPr lang="en-US" sz="1000" dirty="0">
+                <a:solidFill>
+                  <a:srgbClr val="434A63"/>
+                </a:solidFill>
+                <a:latin typeface="Arial" pitchFamily="34" charset="0"/>
+                <a:ea typeface="Arial" pitchFamily="34" charset="-122"/>
+                <a:cs typeface="Arial" pitchFamily="34" charset="-120"/>
+              </a:rPr>
+              <a:t>Ergebnisse eintragen:  &lt;Link zum Ergebnis-Dokument hier eintragen&gt;</a:t>
+            </a:r>
+            <a:endParaRPr lang="en-US" sz="1000" dirty="0"/>
+          </a:p>
+        </p:txBody>
+      </p:sp>
+      <p:sp>
+        <p:nvSpPr>
+          <p:cNvPr id="29" name="Shape 27"/>
           <p:cNvSpPr/>
           <p:nvPr/>
         </p:nvSpPr>
@@ -4118,7 +4012,7 @@
       </p:sp>
       <p:sp>
         <p:nvSpPr>
-          <p:cNvPr id="11" name="Text 9"/>
+          <p:cNvPr id="30" name="Text 28"/>
           <p:cNvSpPr/>
           <p:nvPr/>
         </p:nvSpPr>
@@ -4157,7 +4051,7 @@
       </p:sp>
       <p:sp>
         <p:nvSpPr>
-          <p:cNvPr id="12" name="Text 10"/>
+          <p:cNvPr id="31" name="Text 29"/>
           <p:cNvSpPr/>
           <p:nvPr/>
         </p:nvSpPr>
@@ -4188,7 +4082,7 @@
                 <a:ea typeface="Arial" pitchFamily="34" charset="-122"/>
                 <a:cs typeface="Arial" pitchFamily="34" charset="-120"/>
               </a:rPr>
-              <a:t>9/12</a:t>
+              <a:t>9/13</a:t>
             </a:r>
             <a:endParaRPr lang="en-US" sz="1050" dirty="0"/>
           </a:p>
@@ -4241,7 +4135,7 @@
             <a:avLst/>
           </a:prstGeom>
           <a:solidFill>
-            <a:srgbClr val="0F7C86"/>
+            <a:srgbClr val="9A6310"/>
           </a:solidFill>
           <a:ln/>
         </p:spPr>
@@ -4273,13 +4167,13 @@
             <a:r>
               <a:rPr lang="en-US" sz="1150" b="1" spc="180" kern="0" dirty="0">
                 <a:solidFill>
-                  <a:srgbClr val="0F7C86"/>
-                </a:solidFill>
-                <a:latin typeface="Arial" pitchFamily="34" charset="0"/>
-                <a:ea typeface="Arial" pitchFamily="34" charset="-122"/>
-                <a:cs typeface="Arial" pitchFamily="34" charset="-120"/>
-              </a:rPr>
-              <a:t>AUSWERTUNG · 20 MINUTEN</a:t>
+                  <a:srgbClr val="9A6310"/>
+                </a:solidFill>
+                <a:latin typeface="Arial" pitchFamily="34" charset="0"/>
+                <a:ea typeface="Arial" pitchFamily="34" charset="-122"/>
+                <a:cs typeface="Arial" pitchFamily="34" charset="-120"/>
+              </a:rPr>
+              <a:t>SPIELREGELN</a:t>
             </a:r>
             <a:endParaRPr lang="en-US" sz="1150" dirty="0"/>
           </a:p>
@@ -4318,7 +4212,7 @@
                 <a:ea typeface="Arial" pitchFamily="34" charset="-122"/>
                 <a:cs typeface="Arial" pitchFamily="34" charset="-120"/>
               </a:rPr>
-              <a:t>Die Demo-Runde</a:t>
+              <a:t>So arbeitet ihr</a:t>
             </a:r>
             <a:endParaRPr lang="en-US" sz="2600" dirty="0"/>
           </a:p>
@@ -4326,14 +4220,171 @@
       </p:sp>
       <p:sp>
         <p:nvSpPr>
-          <p:cNvPr id="5" name="Shape 3"/>
-          <p:cNvSpPr/>
-          <p:nvPr/>
-        </p:nvSpPr>
-        <p:spPr>
-          <a:xfrm>
-            <a:off x="438912" y="1810512"/>
-            <a:ext cx="8266176" cy="365760"/>
+          <p:cNvPr id="5" name="Text 3"/>
+          <p:cNvSpPr/>
+          <p:nvPr/>
+        </p:nvSpPr>
+        <p:spPr>
+          <a:xfrm>
+            <a:off x="566928" y="1645920"/>
+            <a:ext cx="8010144" cy="1956816"/>
+          </a:xfrm>
+          <a:prstGeom prst="rect">
+            <a:avLst/>
+          </a:prstGeom>
+          <a:noFill/>
+          <a:ln/>
+        </p:spPr>
+        <p:txBody>
+          <a:bodyPr wrap="square" lIns="0" tIns="0" rIns="0" bIns="0" rtlCol="0" anchor="t"/>
+          <a:lstStyle/>
+          <a:p>
+            <a:pPr marL="254000" indent="-254000">
+              <a:lnSpc>
+                <a:spcPct val="100000"/>
+              </a:lnSpc>
+              <a:spcAft>
+                <a:spcPts val="900"/>
+              </a:spcAft>
+              <a:buClr>
+                <a:srgbClr val="0F7C86"/>
+              </a:buClr>
+              <a:buSzPct val="100000"/>
+              <a:buChar char="▸"/>
+            </a:pPr>
+            <a:r>
+              <a:rPr lang="en-US" sz="1150" dirty="0">
+                <a:solidFill>
+                  <a:srgbClr val="434A63"/>
+                </a:solidFill>
+                <a:latin typeface="Arial" pitchFamily="34" charset="0"/>
+                <a:ea typeface="Arial" pitchFamily="34" charset="-122"/>
+                <a:cs typeface="Arial" pitchFamily="34" charset="-120"/>
+              </a:rPr>
+              <a:t>Keine Schrittliste heute: Jede Mission nennt Ziel und Erfolgskriterium, den Weg baut ihr.</a:t>
+            </a:r>
+            <a:endParaRPr lang="en-US" sz="1150" dirty="0"/>
+          </a:p>
+          <a:p>
+            <a:pPr marL="254000" indent="-254000">
+              <a:lnSpc>
+                <a:spcPct val="100000"/>
+              </a:lnSpc>
+              <a:spcAft>
+                <a:spcPts val="900"/>
+              </a:spcAft>
+              <a:buClr>
+                <a:srgbClr val="0F7C86"/>
+              </a:buClr>
+              <a:buSzPct val="100000"/>
+              <a:buChar char="▸"/>
+            </a:pPr>
+            <a:r>
+              <a:rPr lang="en-US" sz="1150" dirty="0">
+                <a:solidFill>
+                  <a:srgbClr val="434A63"/>
+                </a:solidFill>
+                <a:latin typeface="Arial" pitchFamily="34" charset="0"/>
+                <a:ea typeface="Arial" pitchFamily="34" charset="-122"/>
+                <a:cs typeface="Arial" pitchFamily="34" charset="-120"/>
+              </a:rPr>
+              <a:t>Der Reihe nach. Erfolg erkennt ihr an Lampen, Stellplätzen und Logbuch.</a:t>
+            </a:r>
+            <a:endParaRPr lang="en-US" sz="1150" dirty="0"/>
+          </a:p>
+          <a:p>
+            <a:pPr marL="254000" indent="-254000">
+              <a:lnSpc>
+                <a:spcPct val="100000"/>
+              </a:lnSpc>
+              <a:spcAft>
+                <a:spcPts val="900"/>
+              </a:spcAft>
+              <a:buClr>
+                <a:srgbClr val="0F7C86"/>
+              </a:buClr>
+              <a:buSzPct val="100000"/>
+              <a:buChar char="▸"/>
+            </a:pPr>
+            <a:r>
+              <a:rPr lang="en-US" sz="1150" dirty="0">
+                <a:solidFill>
+                  <a:srgbClr val="434A63"/>
+                </a:solidFill>
+                <a:latin typeface="Arial" pitchFamily="34" charset="0"/>
+                <a:ea typeface="Arial" pitchFamily="34" charset="-122"/>
+                <a:cs typeface="Arial" pitchFamily="34" charset="-120"/>
+              </a:rPr>
+              <a:t>Klemmt es: erst Team, dann Funkhilfe Stufe 1 bis 3. Fünf Minuten ohne Fortschritt heißt nächste Stufe.</a:t>
+            </a:r>
+            <a:endParaRPr lang="en-US" sz="1150" dirty="0"/>
+          </a:p>
+          <a:p>
+            <a:pPr marL="254000" indent="-254000">
+              <a:lnSpc>
+                <a:spcPct val="100000"/>
+              </a:lnSpc>
+              <a:spcAft>
+                <a:spcPts val="900"/>
+              </a:spcAft>
+              <a:buClr>
+                <a:srgbClr val="0F7C86"/>
+              </a:buClr>
+              <a:buSzPct val="100000"/>
+              <a:buChar char="▸"/>
+            </a:pPr>
+            <a:r>
+              <a:rPr lang="en-US" sz="1150" dirty="0">
+                <a:solidFill>
+                  <a:srgbClr val="434A63"/>
+                </a:solidFill>
+                <a:latin typeface="Arial" pitchFamily="34" charset="0"/>
+                <a:ea typeface="Arial" pitchFamily="34" charset="-122"/>
+                <a:cs typeface="Arial" pitchFamily="34" charset="-120"/>
+              </a:rPr>
+              <a:t>Pflicht: drei Module leuchten. Volle Station, Störung und Backend-Tausch sind Vertiefung.</a:t>
+            </a:r>
+            <a:endParaRPr lang="en-US" sz="1150" dirty="0"/>
+          </a:p>
+          <a:p>
+            <a:pPr marL="254000" indent="-254000">
+              <a:lnSpc>
+                <a:spcPct val="100000"/>
+              </a:lnSpc>
+              <a:spcAft>
+                <a:spcPts val="900"/>
+              </a:spcAft>
+              <a:buClr>
+                <a:srgbClr val="0F7C86"/>
+              </a:buClr>
+              <a:buSzPct val="100000"/>
+              <a:buChar char="▸"/>
+            </a:pPr>
+            <a:r>
+              <a:rPr lang="en-US" sz="1150" dirty="0">
+                <a:solidFill>
+                  <a:srgbClr val="434A63"/>
+                </a:solidFill>
+                <a:latin typeface="Arial" pitchFamily="34" charset="0"/>
+                <a:ea typeface="Arial" pitchFamily="34" charset="-122"/>
+                <a:cs typeface="Arial" pitchFamily="34" charset="-120"/>
+              </a:rPr>
+              <a:t>Musterlösung nur als Notausgang. Driver tippt, Windows wie immer in der PowerShell.</a:t>
+            </a:r>
+            <a:endParaRPr lang="en-US" sz="1150" dirty="0"/>
+          </a:p>
+        </p:txBody>
+      </p:sp>
+      <p:sp>
+        <p:nvSpPr>
+          <p:cNvPr id="6" name="Shape 4"/>
+          <p:cNvSpPr/>
+          <p:nvPr/>
+        </p:nvSpPr>
+        <p:spPr>
+          <a:xfrm>
+            <a:off x="566928" y="3639312"/>
+            <a:ext cx="8010144" cy="822960"/>
           </a:xfrm>
           <a:prstGeom prst="rect">
             <a:avLst/>
@@ -4346,69 +4397,92 @@
       </p:sp>
       <p:sp>
         <p:nvSpPr>
-          <p:cNvPr id="6" name="Text 4"/>
-          <p:cNvSpPr/>
-          <p:nvPr/>
-        </p:nvSpPr>
-        <p:spPr>
-          <a:xfrm>
-            <a:off x="566928" y="1810512"/>
-            <a:ext cx="548640" cy="365760"/>
-          </a:xfrm>
-          <a:prstGeom prst="rect">
-            <a:avLst/>
-          </a:prstGeom>
-          <a:noFill/>
-          <a:ln/>
-        </p:spPr>
-        <p:txBody>
-          <a:bodyPr wrap="square" lIns="0" tIns="0" rIns="0" bIns="0" rtlCol="0" anchor="ctr"/>
-          <a:lstStyle/>
-          <a:p>
-            <a:pPr indent="0" marL="0">
-              <a:buNone/>
-            </a:pPr>
-            <a:r>
-              <a:rPr lang="en-US" sz="1200" b="1" dirty="0">
-                <a:solidFill>
-                  <a:srgbClr val="0F7C86"/>
-                </a:solidFill>
-                <a:latin typeface="Courier New" pitchFamily="34" charset="0"/>
-                <a:ea typeface="Courier New" pitchFamily="34" charset="-122"/>
-                <a:cs typeface="Courier New" pitchFamily="34" charset="-120"/>
-              </a:rPr>
-              <a:t>1</a:t>
-            </a:r>
-            <a:endParaRPr lang="en-US" sz="1200" dirty="0"/>
-          </a:p>
-        </p:txBody>
-      </p:sp>
-      <p:sp>
-        <p:nvSpPr>
-          <p:cNvPr id="7" name="Text 5"/>
-          <p:cNvSpPr/>
-          <p:nvPr/>
-        </p:nvSpPr>
-        <p:spPr>
-          <a:xfrm>
-            <a:off x="1115568" y="1810512"/>
-            <a:ext cx="7461504" cy="365760"/>
-          </a:xfrm>
-          <a:prstGeom prst="rect">
-            <a:avLst/>
-          </a:prstGeom>
-          <a:noFill/>
-          <a:ln/>
-        </p:spPr>
-        <p:txBody>
-          <a:bodyPr wrap="square" lIns="0" tIns="0" rIns="0" bIns="0" rtlCol="0" anchor="ctr"/>
-          <a:lstStyle/>
-          <a:p>
-            <a:pPr indent="0" marL="0">
-              <a:buNone/>
-            </a:pPr>
-            <a:r>
-              <a:rPr lang="en-US" sz="1200" dirty="0">
+          <p:cNvPr id="7" name="Shape 5"/>
+          <p:cNvSpPr/>
+          <p:nvPr/>
+        </p:nvSpPr>
+        <p:spPr>
+          <a:xfrm>
+            <a:off x="566928" y="3639312"/>
+            <a:ext cx="41148" cy="822960"/>
+          </a:xfrm>
+          <a:prstGeom prst="rect">
+            <a:avLst/>
+          </a:prstGeom>
+          <a:solidFill>
+            <a:srgbClr val="9A6310"/>
+          </a:solidFill>
+          <a:ln/>
+        </p:spPr>
+      </p:sp>
+      <p:sp>
+        <p:nvSpPr>
+          <p:cNvPr id="8" name="Text 6"/>
+          <p:cNvSpPr/>
+          <p:nvPr/>
+        </p:nvSpPr>
+        <p:spPr>
+          <a:xfrm>
+            <a:off x="804672" y="3785616"/>
+            <a:ext cx="7607808" cy="242062"/>
+          </a:xfrm>
+          <a:prstGeom prst="rect">
+            <a:avLst/>
+          </a:prstGeom>
+          <a:noFill/>
+          <a:ln/>
+        </p:spPr>
+        <p:txBody>
+          <a:bodyPr wrap="square" lIns="0" tIns="0" rIns="0" bIns="0" rtlCol="0" anchor="t"/>
+          <a:lstStyle/>
+          <a:p>
+            <a:pPr indent="0" marL="0">
+              <a:buNone/>
+            </a:pPr>
+            <a:r>
+              <a:rPr lang="en-US" sz="1300" b="1" dirty="0">
+                <a:solidFill>
+                  <a:srgbClr val="272E52"/>
+                </a:solidFill>
+                <a:latin typeface="Arial" pitchFamily="34" charset="0"/>
+                <a:ea typeface="Arial" pitchFamily="34" charset="-122"/>
+                <a:cs typeface="Arial" pitchFamily="34" charset="-120"/>
+              </a:rPr>
+              <a:t>Um 20:30 beginnt die Demo-Runde</a:t>
+            </a:r>
+            <a:endParaRPr lang="en-US" sz="1300" dirty="0"/>
+          </a:p>
+        </p:txBody>
+      </p:sp>
+      <p:sp>
+        <p:nvSpPr>
+          <p:cNvPr id="9" name="Text 7"/>
+          <p:cNvSpPr/>
+          <p:nvPr/>
+        </p:nvSpPr>
+        <p:spPr>
+          <a:xfrm>
+            <a:off x="804672" y="4073398"/>
+            <a:ext cx="7607808" cy="270002"/>
+          </a:xfrm>
+          <a:prstGeom prst="rect">
+            <a:avLst/>
+          </a:prstGeom>
+          <a:noFill/>
+          <a:ln/>
+        </p:spPr>
+        <p:txBody>
+          <a:bodyPr wrap="square" lIns="0" tIns="0" rIns="0" bIns="0" rtlCol="0" anchor="t"/>
+          <a:lstStyle/>
+          <a:p>
+            <a:pPr indent="0" marL="0">
+              <a:lnSpc>
+                <a:spcPct val="92000"/>
+              </a:lnSpc>
+              <a:buNone/>
+            </a:pPr>
+            <a:r>
+              <a:rPr lang="en-US" sz="1100" dirty="0">
                 <a:solidFill>
                   <a:srgbClr val="434A63"/>
                 </a:solidFill>
@@ -4416,426 +4490,15 @@
                 <a:ea typeface="Arial" pitchFamily="34" charset="-122"/>
                 <a:cs typeface="Arial" pitchFamily="34" charset="-120"/>
               </a:rPr>
-              <a:t>docker compose ps: vier Services Up, die Datenbank zusätzlich healthy</a:t>
-            </a:r>
-            <a:endParaRPr lang="en-US" sz="1200" dirty="0"/>
-          </a:p>
-        </p:txBody>
-      </p:sp>
-      <p:sp>
-        <p:nvSpPr>
-          <p:cNvPr id="8" name="Text 6"/>
-          <p:cNvSpPr/>
-          <p:nvPr/>
-        </p:nvSpPr>
-        <p:spPr>
-          <a:xfrm>
-            <a:off x="566928" y="2176272"/>
-            <a:ext cx="548640" cy="365760"/>
-          </a:xfrm>
-          <a:prstGeom prst="rect">
-            <a:avLst/>
-          </a:prstGeom>
-          <a:noFill/>
-          <a:ln/>
-        </p:spPr>
-        <p:txBody>
-          <a:bodyPr wrap="square" lIns="0" tIns="0" rIns="0" bIns="0" rtlCol="0" anchor="ctr"/>
-          <a:lstStyle/>
-          <a:p>
-            <a:pPr indent="0" marL="0">
-              <a:buNone/>
-            </a:pPr>
-            <a:r>
-              <a:rPr lang="en-US" sz="1200" b="1" dirty="0">
-                <a:solidFill>
-                  <a:srgbClr val="0F7C86"/>
-                </a:solidFill>
-                <a:latin typeface="Courier New" pitchFamily="34" charset="0"/>
-                <a:ea typeface="Courier New" pitchFamily="34" charset="-122"/>
-                <a:cs typeface="Courier New" pitchFamily="34" charset="-120"/>
-              </a:rPr>
-              <a:t>2</a:t>
-            </a:r>
-            <a:endParaRPr lang="en-US" sz="1200" dirty="0"/>
-          </a:p>
-        </p:txBody>
-      </p:sp>
-      <p:sp>
-        <p:nvSpPr>
-          <p:cNvPr id="9" name="Text 7"/>
-          <p:cNvSpPr/>
-          <p:nvPr/>
-        </p:nvSpPr>
-        <p:spPr>
-          <a:xfrm>
-            <a:off x="1115568" y="2176272"/>
-            <a:ext cx="7461504" cy="365760"/>
-          </a:xfrm>
-          <a:prstGeom prst="rect">
-            <a:avLst/>
-          </a:prstGeom>
-          <a:noFill/>
-          <a:ln/>
-        </p:spPr>
-        <p:txBody>
-          <a:bodyPr wrap="square" lIns="0" tIns="0" rIns="0" bIns="0" rtlCol="0" anchor="ctr"/>
-          <a:lstStyle/>
-          <a:p>
-            <a:pPr indent="0" marL="0">
-              <a:buNone/>
-            </a:pPr>
-            <a:r>
-              <a:rPr lang="en-US" sz="1200" dirty="0">
-                <a:solidFill>
-                  <a:srgbClr val="434A63"/>
-                </a:solidFill>
-                <a:latin typeface="Arial" pitchFamily="34" charset="0"/>
-                <a:ea typeface="Arial" pitchFamily="34" charset="-122"/>
-                <a:cs typeface="Arial" pitchFamily="34" charset="-120"/>
-              </a:rPr>
-              <a:t>Der Browser: alle Lampen grün und ein selbst angelegtes Modul im Grid</a:t>
-            </a:r>
-            <a:endParaRPr lang="en-US" sz="1200" dirty="0"/>
+              <a:t>Jede Gruppe 3 bis 5 Minuten: die Station im Browser, docker compose ps mit healthy und eure kniffligste Stelle.</a:t>
+            </a:r>
+            <a:endParaRPr lang="en-US" sz="1100" dirty="0"/>
           </a:p>
         </p:txBody>
       </p:sp>
       <p:sp>
         <p:nvSpPr>
           <p:cNvPr id="10" name="Shape 8"/>
-          <p:cNvSpPr/>
-          <p:nvPr/>
-        </p:nvSpPr>
-        <p:spPr>
-          <a:xfrm>
-            <a:off x="438912" y="2542032"/>
-            <a:ext cx="8266176" cy="365760"/>
-          </a:xfrm>
-          <a:prstGeom prst="rect">
-            <a:avLst/>
-          </a:prstGeom>
-          <a:solidFill>
-            <a:srgbClr val="F5F6FC"/>
-          </a:solidFill>
-          <a:ln/>
-        </p:spPr>
-      </p:sp>
-      <p:sp>
-        <p:nvSpPr>
-          <p:cNvPr id="11" name="Text 9"/>
-          <p:cNvSpPr/>
-          <p:nvPr/>
-        </p:nvSpPr>
-        <p:spPr>
-          <a:xfrm>
-            <a:off x="566928" y="2542032"/>
-            <a:ext cx="548640" cy="365760"/>
-          </a:xfrm>
-          <a:prstGeom prst="rect">
-            <a:avLst/>
-          </a:prstGeom>
-          <a:noFill/>
-          <a:ln/>
-        </p:spPr>
-        <p:txBody>
-          <a:bodyPr wrap="square" lIns="0" tIns="0" rIns="0" bIns="0" rtlCol="0" anchor="ctr"/>
-          <a:lstStyle/>
-          <a:p>
-            <a:pPr indent="0" marL="0">
-              <a:buNone/>
-            </a:pPr>
-            <a:r>
-              <a:rPr lang="en-US" sz="1200" b="1" dirty="0">
-                <a:solidFill>
-                  <a:srgbClr val="0F7C86"/>
-                </a:solidFill>
-                <a:latin typeface="Courier New" pitchFamily="34" charset="0"/>
-                <a:ea typeface="Courier New" pitchFamily="34" charset="-122"/>
-                <a:cs typeface="Courier New" pitchFamily="34" charset="-120"/>
-              </a:rPr>
-              <a:t>3</a:t>
-            </a:r>
-            <a:endParaRPr lang="en-US" sz="1200" dirty="0"/>
-          </a:p>
-        </p:txBody>
-      </p:sp>
-      <p:sp>
-        <p:nvSpPr>
-          <p:cNvPr id="12" name="Text 10"/>
-          <p:cNvSpPr/>
-          <p:nvPr/>
-        </p:nvSpPr>
-        <p:spPr>
-          <a:xfrm>
-            <a:off x="1115568" y="2542032"/>
-            <a:ext cx="7461504" cy="365760"/>
-          </a:xfrm>
-          <a:prstGeom prst="rect">
-            <a:avLst/>
-          </a:prstGeom>
-          <a:noFill/>
-          <a:ln/>
-        </p:spPr>
-        <p:txBody>
-          <a:bodyPr wrap="square" lIns="0" tIns="0" rIns="0" bIns="0" rtlCol="0" anchor="ctr"/>
-          <a:lstStyle/>
-          <a:p>
-            <a:pPr indent="0" marL="0">
-              <a:buNone/>
-            </a:pPr>
-            <a:r>
-              <a:rPr lang="en-US" sz="1200" dirty="0">
-                <a:solidFill>
-                  <a:srgbClr val="434A63"/>
-                </a:solidFill>
-                <a:latin typeface="Arial" pitchFamily="34" charset="0"/>
-                <a:ea typeface="Arial" pitchFamily="34" charset="-122"/>
-                <a:cs typeface="Arial" pitchFamily="34" charset="-120"/>
-              </a:rPr>
-              <a:t>Die .env-Frage: Warum steht euer Passwort nur noch an einer Stelle?</a:t>
-            </a:r>
-            <a:endParaRPr lang="en-US" sz="1200" dirty="0"/>
-          </a:p>
-        </p:txBody>
-      </p:sp>
-      <p:sp>
-        <p:nvSpPr>
-          <p:cNvPr id="13" name="Text 11"/>
-          <p:cNvSpPr/>
-          <p:nvPr/>
-        </p:nvSpPr>
-        <p:spPr>
-          <a:xfrm>
-            <a:off x="566928" y="2907792"/>
-            <a:ext cx="548640" cy="365760"/>
-          </a:xfrm>
-          <a:prstGeom prst="rect">
-            <a:avLst/>
-          </a:prstGeom>
-          <a:noFill/>
-          <a:ln/>
-        </p:spPr>
-        <p:txBody>
-          <a:bodyPr wrap="square" lIns="0" tIns="0" rIns="0" bIns="0" rtlCol="0" anchor="ctr"/>
-          <a:lstStyle/>
-          <a:p>
-            <a:pPr indent="0" marL="0">
-              <a:buNone/>
-            </a:pPr>
-            <a:r>
-              <a:rPr lang="en-US" sz="1200" b="1" dirty="0">
-                <a:solidFill>
-                  <a:srgbClr val="0F7C86"/>
-                </a:solidFill>
-                <a:latin typeface="Courier New" pitchFamily="34" charset="0"/>
-                <a:ea typeface="Courier New" pitchFamily="34" charset="-122"/>
-                <a:cs typeface="Courier New" pitchFamily="34" charset="-120"/>
-              </a:rPr>
-              <a:t>4</a:t>
-            </a:r>
-            <a:endParaRPr lang="en-US" sz="1200" dirty="0"/>
-          </a:p>
-        </p:txBody>
-      </p:sp>
-      <p:sp>
-        <p:nvSpPr>
-          <p:cNvPr id="14" name="Text 12"/>
-          <p:cNvSpPr/>
-          <p:nvPr/>
-        </p:nvSpPr>
-        <p:spPr>
-          <a:xfrm>
-            <a:off x="1115568" y="2907792"/>
-            <a:ext cx="7461504" cy="365760"/>
-          </a:xfrm>
-          <a:prstGeom prst="rect">
-            <a:avLst/>
-          </a:prstGeom>
-          <a:noFill/>
-          <a:ln/>
-        </p:spPr>
-        <p:txBody>
-          <a:bodyPr wrap="square" lIns="0" tIns="0" rIns="0" bIns="0" rtlCol="0" anchor="ctr"/>
-          <a:lstStyle/>
-          <a:p>
-            <a:pPr indent="0" marL="0">
-              <a:buNone/>
-            </a:pPr>
-            <a:r>
-              <a:rPr lang="en-US" sz="1200" dirty="0">
-                <a:solidFill>
-                  <a:srgbClr val="434A63"/>
-                </a:solidFill>
-                <a:latin typeface="Arial" pitchFamily="34" charset="0"/>
-                <a:ea typeface="Arial" pitchFamily="34" charset="-122"/>
-                <a:cs typeface="Arial" pitchFamily="34" charset="-120"/>
-              </a:rPr>
-              <a:t>Die Healthcheck-Frage: Wer wartet hier eigentlich worauf?</a:t>
-            </a:r>
-            <a:endParaRPr lang="en-US" sz="1200" dirty="0"/>
-          </a:p>
-        </p:txBody>
-      </p:sp>
-      <p:sp>
-        <p:nvSpPr>
-          <p:cNvPr id="15" name="Shape 13"/>
-          <p:cNvSpPr/>
-          <p:nvPr/>
-        </p:nvSpPr>
-        <p:spPr>
-          <a:xfrm>
-            <a:off x="438912" y="3273552"/>
-            <a:ext cx="8266176" cy="365760"/>
-          </a:xfrm>
-          <a:prstGeom prst="rect">
-            <a:avLst/>
-          </a:prstGeom>
-          <a:solidFill>
-            <a:srgbClr val="F5F6FC"/>
-          </a:solidFill>
-          <a:ln/>
-        </p:spPr>
-      </p:sp>
-      <p:sp>
-        <p:nvSpPr>
-          <p:cNvPr id="16" name="Text 14"/>
-          <p:cNvSpPr/>
-          <p:nvPr/>
-        </p:nvSpPr>
-        <p:spPr>
-          <a:xfrm>
-            <a:off x="566928" y="3273552"/>
-            <a:ext cx="548640" cy="365760"/>
-          </a:xfrm>
-          <a:prstGeom prst="rect">
-            <a:avLst/>
-          </a:prstGeom>
-          <a:noFill/>
-          <a:ln/>
-        </p:spPr>
-        <p:txBody>
-          <a:bodyPr wrap="square" lIns="0" tIns="0" rIns="0" bIns="0" rtlCol="0" anchor="ctr"/>
-          <a:lstStyle/>
-          <a:p>
-            <a:pPr indent="0" marL="0">
-              <a:buNone/>
-            </a:pPr>
-            <a:r>
-              <a:rPr lang="en-US" sz="1200" b="1" dirty="0">
-                <a:solidFill>
-                  <a:srgbClr val="0F7C86"/>
-                </a:solidFill>
-                <a:latin typeface="Courier New" pitchFamily="34" charset="0"/>
-                <a:ea typeface="Courier New" pitchFamily="34" charset="-122"/>
-                <a:cs typeface="Courier New" pitchFamily="34" charset="-120"/>
-              </a:rPr>
-              <a:t>5</a:t>
-            </a:r>
-            <a:endParaRPr lang="en-US" sz="1200" dirty="0"/>
-          </a:p>
-        </p:txBody>
-      </p:sp>
-      <p:sp>
-        <p:nvSpPr>
-          <p:cNvPr id="17" name="Text 15"/>
-          <p:cNvSpPr/>
-          <p:nvPr/>
-        </p:nvSpPr>
-        <p:spPr>
-          <a:xfrm>
-            <a:off x="1115568" y="3273552"/>
-            <a:ext cx="7461504" cy="365760"/>
-          </a:xfrm>
-          <a:prstGeom prst="rect">
-            <a:avLst/>
-          </a:prstGeom>
-          <a:noFill/>
-          <a:ln/>
-        </p:spPr>
-        <p:txBody>
-          <a:bodyPr wrap="square" lIns="0" tIns="0" rIns="0" bIns="0" rtlCol="0" anchor="ctr"/>
-          <a:lstStyle/>
-          <a:p>
-            <a:pPr indent="0" marL="0">
-              <a:buNone/>
-            </a:pPr>
-            <a:r>
-              <a:rPr lang="en-US" sz="1200" dirty="0">
-                <a:solidFill>
-                  <a:srgbClr val="434A63"/>
-                </a:solidFill>
-                <a:latin typeface="Arial" pitchFamily="34" charset="0"/>
-                <a:ea typeface="Arial" pitchFamily="34" charset="-122"/>
-                <a:cs typeface="Arial" pitchFamily="34" charset="-120"/>
-              </a:rPr>
-              <a:t>Die kniffligste Stelle eurer Gruppe und wie ihr sie gelöst habt</a:t>
-            </a:r>
-            <a:endParaRPr lang="en-US" sz="1200" dirty="0"/>
-          </a:p>
-        </p:txBody>
-      </p:sp>
-      <p:sp>
-        <p:nvSpPr>
-          <p:cNvPr id="18" name="Shape 16"/>
-          <p:cNvSpPr/>
-          <p:nvPr/>
-        </p:nvSpPr>
-        <p:spPr>
-          <a:xfrm>
-            <a:off x="566928" y="4069080"/>
-            <a:ext cx="32004" cy="256032"/>
-          </a:xfrm>
-          <a:prstGeom prst="rect">
-            <a:avLst/>
-          </a:prstGeom>
-          <a:solidFill>
-            <a:srgbClr val="0F7C86"/>
-          </a:solidFill>
-          <a:ln/>
-        </p:spPr>
-      </p:sp>
-      <p:sp>
-        <p:nvSpPr>
-          <p:cNvPr id="19" name="Text 17"/>
-          <p:cNvSpPr/>
-          <p:nvPr/>
-        </p:nvSpPr>
-        <p:spPr>
-          <a:xfrm>
-            <a:off x="749808" y="4023360"/>
-            <a:ext cx="7827264" cy="402336"/>
-          </a:xfrm>
-          <a:prstGeom prst="rect">
-            <a:avLst/>
-          </a:prstGeom>
-          <a:noFill/>
-          <a:ln/>
-        </p:spPr>
-        <p:txBody>
-          <a:bodyPr wrap="square" lIns="0" tIns="0" rIns="0" bIns="0" rtlCol="0" anchor="ctr"/>
-          <a:lstStyle/>
-          <a:p>
-            <a:pPr indent="0" marL="0">
-              <a:buNone/>
-            </a:pPr>
-            <a:r>
-              <a:rPr lang="en-US" sz="1200" b="1" dirty="0">
-                <a:solidFill>
-                  <a:srgbClr val="434A63"/>
-                </a:solidFill>
-                <a:latin typeface="Arial" pitchFamily="34" charset="0"/>
-                <a:ea typeface="Arial" pitchFamily="34" charset="-122"/>
-                <a:cs typeface="Arial" pitchFamily="34" charset="-120"/>
-              </a:rPr>
-              <a:t>Punkte gibt es nur symbolisch und nur für Teamarbeit: Jede Rolle, die in der Demo zu Wort kommt, zählt einen.</a:t>
-            </a:r>
-            <a:endParaRPr lang="en-US" sz="1200" dirty="0"/>
-          </a:p>
-        </p:txBody>
-      </p:sp>
-      <p:sp>
-        <p:nvSpPr>
-          <p:cNvPr id="20" name="Shape 18"/>
           <p:cNvSpPr/>
           <p:nvPr/>
         </p:nvSpPr>
@@ -4858,7 +4521,7 @@
       </p:sp>
       <p:sp>
         <p:nvSpPr>
-          <p:cNvPr id="21" name="Text 19"/>
+          <p:cNvPr id="11" name="Text 9"/>
           <p:cNvSpPr/>
           <p:nvPr/>
         </p:nvSpPr>
@@ -4889,7 +4552,7 @@
                 <a:ea typeface="Arial" pitchFamily="34" charset="-122"/>
                 <a:cs typeface="Arial" pitchFamily="34" charset="-120"/>
               </a:rPr>
-              <a:t>Demo-Runde</a:t>
+              <a:t>Die Missionen</a:t>
             </a:r>
             <a:endParaRPr lang="en-US" sz="1050" dirty="0"/>
           </a:p>
@@ -4897,7 +4560,7 @@
       </p:sp>
       <p:sp>
         <p:nvSpPr>
-          <p:cNvPr id="22" name="Text 20"/>
+          <p:cNvPr id="12" name="Text 10"/>
           <p:cNvSpPr/>
           <p:nvPr/>
         </p:nvSpPr>
@@ -4928,7 +4591,7 @@
                 <a:ea typeface="Arial" pitchFamily="34" charset="-122"/>
                 <a:cs typeface="Arial" pitchFamily="34" charset="-120"/>
               </a:rPr>
-              <a:t>10/12</a:t>
+              <a:t>10/13</a:t>
             </a:r>
             <a:endParaRPr lang="en-US" sz="1050" dirty="0"/>
           </a:p>
@@ -5019,7 +4682,7 @@
                 <a:ea typeface="Arial" pitchFamily="34" charset="-122"/>
                 <a:cs typeface="Arial" pitchFamily="34" charset="-120"/>
               </a:rPr>
-              <a:t>DER RÜCKBLICK</a:t>
+              <a:t>AUSWERTUNG · 20 MINUTEN</a:t>
             </a:r>
             <a:endParaRPr lang="en-US" sz="1150" dirty="0"/>
           </a:p>
@@ -5058,45 +4721,471 @@
                 <a:ea typeface="Arial" pitchFamily="34" charset="-122"/>
                 <a:cs typeface="Arial" pitchFamily="34" charset="-120"/>
               </a:rPr>
-              <a:t>Vier Abende Docker</a:t>
+              <a:t>Die Demo-Runde</a:t>
             </a:r>
             <a:endParaRPr lang="en-US" sz="2600" dirty="0"/>
           </a:p>
         </p:txBody>
       </p:sp>
-      <p:pic>
-        <p:nvPicPr>
-          <p:cNvPr id="5" name="Image 0" descr="/Users/jacobmenge/Desktop/kurs-26.2b-orga/folienwerkstatt/assets/diagramme/block-rueckblick.png">    </p:cNvPr>
-          <p:cNvPicPr>
-            <a:picLocks noChangeAspect="1"/>
-          </p:cNvPicPr>
-          <p:nvPr/>
-        </p:nvPicPr>
-        <p:blipFill>
-          <a:blip r:embed="rId1"/>
-          <a:stretch>
-            <a:fillRect/>
-          </a:stretch>
-        </p:blipFill>
-        <p:spPr>
-          <a:xfrm>
-            <a:off x="566928" y="1700784"/>
-            <a:ext cx="8010144" cy="1737360"/>
-          </a:xfrm>
-          <a:prstGeom prst="rect">
-            <a:avLst/>
-          </a:prstGeom>
-        </p:spPr>
-      </p:pic>
-      <p:sp>
-        <p:nvSpPr>
-          <p:cNvPr id="6" name="Shape 3"/>
-          <p:cNvSpPr/>
-          <p:nvPr/>
-        </p:nvSpPr>
-        <p:spPr>
-          <a:xfrm>
-            <a:off x="566928" y="3931920"/>
+      <p:sp>
+        <p:nvSpPr>
+          <p:cNvPr id="5" name="Shape 3"/>
+          <p:cNvSpPr/>
+          <p:nvPr/>
+        </p:nvSpPr>
+        <p:spPr>
+          <a:xfrm>
+            <a:off x="438912" y="1810512"/>
+            <a:ext cx="8266176" cy="365760"/>
+          </a:xfrm>
+          <a:prstGeom prst="rect">
+            <a:avLst/>
+          </a:prstGeom>
+          <a:solidFill>
+            <a:srgbClr val="F5F6FC"/>
+          </a:solidFill>
+          <a:ln/>
+        </p:spPr>
+      </p:sp>
+      <p:sp>
+        <p:nvSpPr>
+          <p:cNvPr id="6" name="Text 4"/>
+          <p:cNvSpPr/>
+          <p:nvPr/>
+        </p:nvSpPr>
+        <p:spPr>
+          <a:xfrm>
+            <a:off x="566928" y="1810512"/>
+            <a:ext cx="548640" cy="365760"/>
+          </a:xfrm>
+          <a:prstGeom prst="rect">
+            <a:avLst/>
+          </a:prstGeom>
+          <a:noFill/>
+          <a:ln/>
+        </p:spPr>
+        <p:txBody>
+          <a:bodyPr wrap="square" lIns="0" tIns="0" rIns="0" bIns="0" rtlCol="0" anchor="ctr"/>
+          <a:lstStyle/>
+          <a:p>
+            <a:pPr indent="0" marL="0">
+              <a:buNone/>
+            </a:pPr>
+            <a:r>
+              <a:rPr lang="en-US" sz="1200" b="1" dirty="0">
+                <a:solidFill>
+                  <a:srgbClr val="0F7C86"/>
+                </a:solidFill>
+                <a:latin typeface="Courier New" pitchFamily="34" charset="0"/>
+                <a:ea typeface="Courier New" pitchFamily="34" charset="-122"/>
+                <a:cs typeface="Courier New" pitchFamily="34" charset="-120"/>
+              </a:rPr>
+              <a:t>1</a:t>
+            </a:r>
+            <a:endParaRPr lang="en-US" sz="1200" dirty="0"/>
+          </a:p>
+        </p:txBody>
+      </p:sp>
+      <p:sp>
+        <p:nvSpPr>
+          <p:cNvPr id="7" name="Text 5"/>
+          <p:cNvSpPr/>
+          <p:nvPr/>
+        </p:nvSpPr>
+        <p:spPr>
+          <a:xfrm>
+            <a:off x="1115568" y="1810512"/>
+            <a:ext cx="7461504" cy="365760"/>
+          </a:xfrm>
+          <a:prstGeom prst="rect">
+            <a:avLst/>
+          </a:prstGeom>
+          <a:noFill/>
+          <a:ln/>
+        </p:spPr>
+        <p:txBody>
+          <a:bodyPr wrap="square" lIns="0" tIns="0" rIns="0" bIns="0" rtlCol="0" anchor="ctr"/>
+          <a:lstStyle/>
+          <a:p>
+            <a:pPr indent="0" marL="0">
+              <a:buNone/>
+            </a:pPr>
+            <a:r>
+              <a:rPr lang="en-US" sz="1200" dirty="0">
+                <a:solidFill>
+                  <a:srgbClr val="434A63"/>
+                </a:solidFill>
+                <a:latin typeface="Arial" pitchFamily="34" charset="0"/>
+                <a:ea typeface="Arial" pitchFamily="34" charset="-122"/>
+                <a:cs typeface="Arial" pitchFamily="34" charset="-120"/>
+              </a:rPr>
+              <a:t>Die Station: Wie viele Module leuchten? Daneben docker compose ps mit healthy</a:t>
+            </a:r>
+            <a:endParaRPr lang="en-US" sz="1200" dirty="0"/>
+          </a:p>
+        </p:txBody>
+      </p:sp>
+      <p:sp>
+        <p:nvSpPr>
+          <p:cNvPr id="8" name="Text 6"/>
+          <p:cNvSpPr/>
+          <p:nvPr/>
+        </p:nvSpPr>
+        <p:spPr>
+          <a:xfrm>
+            <a:off x="566928" y="2176272"/>
+            <a:ext cx="548640" cy="365760"/>
+          </a:xfrm>
+          <a:prstGeom prst="rect">
+            <a:avLst/>
+          </a:prstGeom>
+          <a:noFill/>
+          <a:ln/>
+        </p:spPr>
+        <p:txBody>
+          <a:bodyPr wrap="square" lIns="0" tIns="0" rIns="0" bIns="0" rtlCol="0" anchor="ctr"/>
+          <a:lstStyle/>
+          <a:p>
+            <a:pPr indent="0" marL="0">
+              <a:buNone/>
+            </a:pPr>
+            <a:r>
+              <a:rPr lang="en-US" sz="1200" b="1" dirty="0">
+                <a:solidFill>
+                  <a:srgbClr val="0F7C86"/>
+                </a:solidFill>
+                <a:latin typeface="Courier New" pitchFamily="34" charset="0"/>
+                <a:ea typeface="Courier New" pitchFamily="34" charset="-122"/>
+                <a:cs typeface="Courier New" pitchFamily="34" charset="-120"/>
+              </a:rPr>
+              <a:t>2</a:t>
+            </a:r>
+            <a:endParaRPr lang="en-US" sz="1200" dirty="0"/>
+          </a:p>
+        </p:txBody>
+      </p:sp>
+      <p:sp>
+        <p:nvSpPr>
+          <p:cNvPr id="9" name="Text 7"/>
+          <p:cNvSpPr/>
+          <p:nvPr/>
+        </p:nvSpPr>
+        <p:spPr>
+          <a:xfrm>
+            <a:off x="1115568" y="2176272"/>
+            <a:ext cx="7461504" cy="365760"/>
+          </a:xfrm>
+          <a:prstGeom prst="rect">
+            <a:avLst/>
+          </a:prstGeom>
+          <a:noFill/>
+          <a:ln/>
+        </p:spPr>
+        <p:txBody>
+          <a:bodyPr wrap="square" lIns="0" tIns="0" rIns="0" bIns="0" rtlCol="0" anchor="ctr"/>
+          <a:lstStyle/>
+          <a:p>
+            <a:pPr indent="0" marL="0">
+              <a:buNone/>
+            </a:pPr>
+            <a:r>
+              <a:rPr lang="en-US" sz="1200" dirty="0">
+                <a:solidFill>
+                  <a:srgbClr val="434A63"/>
+                </a:solidFill>
+                <a:latin typeface="Arial" pitchFamily="34" charset="0"/>
+                <a:ea typeface="Arial" pitchFamily="34" charset="-122"/>
+                <a:cs typeface="Arial" pitchFamily="34" charset="-120"/>
+              </a:rPr>
+              <a:t>Der Beweis: down und up, die Logbuch-Historie ist noch da. Warum?</a:t>
+            </a:r>
+            <a:endParaRPr lang="en-US" sz="1200" dirty="0"/>
+          </a:p>
+        </p:txBody>
+      </p:sp>
+      <p:sp>
+        <p:nvSpPr>
+          <p:cNvPr id="10" name="Shape 8"/>
+          <p:cNvSpPr/>
+          <p:nvPr/>
+        </p:nvSpPr>
+        <p:spPr>
+          <a:xfrm>
+            <a:off x="438912" y="2542032"/>
+            <a:ext cx="8266176" cy="365760"/>
+          </a:xfrm>
+          <a:prstGeom prst="rect">
+            <a:avLst/>
+          </a:prstGeom>
+          <a:solidFill>
+            <a:srgbClr val="F5F6FC"/>
+          </a:solidFill>
+          <a:ln/>
+        </p:spPr>
+      </p:sp>
+      <p:sp>
+        <p:nvSpPr>
+          <p:cNvPr id="11" name="Text 9"/>
+          <p:cNvSpPr/>
+          <p:nvPr/>
+        </p:nvSpPr>
+        <p:spPr>
+          <a:xfrm>
+            <a:off x="566928" y="2542032"/>
+            <a:ext cx="548640" cy="365760"/>
+          </a:xfrm>
+          <a:prstGeom prst="rect">
+            <a:avLst/>
+          </a:prstGeom>
+          <a:noFill/>
+          <a:ln/>
+        </p:spPr>
+        <p:txBody>
+          <a:bodyPr wrap="square" lIns="0" tIns="0" rIns="0" bIns="0" rtlCol="0" anchor="ctr"/>
+          <a:lstStyle/>
+          <a:p>
+            <a:pPr indent="0" marL="0">
+              <a:buNone/>
+            </a:pPr>
+            <a:r>
+              <a:rPr lang="en-US" sz="1200" b="1" dirty="0">
+                <a:solidFill>
+                  <a:srgbClr val="0F7C86"/>
+                </a:solidFill>
+                <a:latin typeface="Courier New" pitchFamily="34" charset="0"/>
+                <a:ea typeface="Courier New" pitchFamily="34" charset="-122"/>
+                <a:cs typeface="Courier New" pitchFamily="34" charset="-120"/>
+              </a:rPr>
+              <a:t>3</a:t>
+            </a:r>
+            <a:endParaRPr lang="en-US" sz="1200" dirty="0"/>
+          </a:p>
+        </p:txBody>
+      </p:sp>
+      <p:sp>
+        <p:nvSpPr>
+          <p:cNvPr id="12" name="Text 10"/>
+          <p:cNvSpPr/>
+          <p:nvPr/>
+        </p:nvSpPr>
+        <p:spPr>
+          <a:xfrm>
+            <a:off x="1115568" y="2542032"/>
+            <a:ext cx="7461504" cy="365760"/>
+          </a:xfrm>
+          <a:prstGeom prst="rect">
+            <a:avLst/>
+          </a:prstGeom>
+          <a:noFill/>
+          <a:ln/>
+        </p:spPr>
+        <p:txBody>
+          <a:bodyPr wrap="square" lIns="0" tIns="0" rIns="0" bIns="0" rtlCol="0" anchor="ctr"/>
+          <a:lstStyle/>
+          <a:p>
+            <a:pPr indent="0" marL="0">
+              <a:buNone/>
+            </a:pPr>
+            <a:r>
+              <a:rPr lang="en-US" sz="1200" dirty="0">
+                <a:solidFill>
+                  <a:srgbClr val="434A63"/>
+                </a:solidFill>
+                <a:latin typeface="Arial" pitchFamily="34" charset="0"/>
+                <a:ea typeface="Arial" pitchFamily="34" charset="-122"/>
+                <a:cs typeface="Arial" pitchFamily="34" charset="-120"/>
+              </a:rPr>
+              <a:t>Die kniffligste Stelle und welches Log oder welche Funkhilfe sie gelöst hat</a:t>
+            </a:r>
+            <a:endParaRPr lang="en-US" sz="1200" dirty="0"/>
+          </a:p>
+        </p:txBody>
+      </p:sp>
+      <p:sp>
+        <p:nvSpPr>
+          <p:cNvPr id="13" name="Text 11"/>
+          <p:cNvSpPr/>
+          <p:nvPr/>
+        </p:nvSpPr>
+        <p:spPr>
+          <a:xfrm>
+            <a:off x="566928" y="2907792"/>
+            <a:ext cx="548640" cy="365760"/>
+          </a:xfrm>
+          <a:prstGeom prst="rect">
+            <a:avLst/>
+          </a:prstGeom>
+          <a:noFill/>
+          <a:ln/>
+        </p:spPr>
+        <p:txBody>
+          <a:bodyPr wrap="square" lIns="0" tIns="0" rIns="0" bIns="0" rtlCol="0" anchor="ctr"/>
+          <a:lstStyle/>
+          <a:p>
+            <a:pPr indent="0" marL="0">
+              <a:buNone/>
+            </a:pPr>
+            <a:r>
+              <a:rPr lang="en-US" sz="1200" b="1" dirty="0">
+                <a:solidFill>
+                  <a:srgbClr val="0F7C86"/>
+                </a:solidFill>
+                <a:latin typeface="Courier New" pitchFamily="34" charset="0"/>
+                <a:ea typeface="Courier New" pitchFamily="34" charset="-122"/>
+                <a:cs typeface="Courier New" pitchFamily="34" charset="-120"/>
+              </a:rPr>
+              <a:t>4</a:t>
+            </a:r>
+            <a:endParaRPr lang="en-US" sz="1200" dirty="0"/>
+          </a:p>
+        </p:txBody>
+      </p:sp>
+      <p:sp>
+        <p:nvSpPr>
+          <p:cNvPr id="14" name="Text 12"/>
+          <p:cNvSpPr/>
+          <p:nvPr/>
+        </p:nvSpPr>
+        <p:spPr>
+          <a:xfrm>
+            <a:off x="1115568" y="2907792"/>
+            <a:ext cx="7461504" cy="365760"/>
+          </a:xfrm>
+          <a:prstGeom prst="rect">
+            <a:avLst/>
+          </a:prstGeom>
+          <a:noFill/>
+          <a:ln/>
+        </p:spPr>
+        <p:txBody>
+          <a:bodyPr wrap="square" lIns="0" tIns="0" rIns="0" bIns="0" rtlCol="0" anchor="ctr"/>
+          <a:lstStyle/>
+          <a:p>
+            <a:pPr indent="0" marL="0">
+              <a:buNone/>
+            </a:pPr>
+            <a:r>
+              <a:rPr lang="en-US" sz="1200" dirty="0">
+                <a:solidFill>
+                  <a:srgbClr val="434A63"/>
+                </a:solidFill>
+                <a:latin typeface="Arial" pitchFamily="34" charset="0"/>
+                <a:ea typeface="Arial" pitchFamily="34" charset="-122"/>
+                <a:cs typeface="Arial" pitchFamily="34" charset="-120"/>
+              </a:rPr>
+              <a:t>Aus der Vertiefung: Störung, Live-Ausfall oder FastAPI, kurz vorführen</a:t>
+            </a:r>
+            <a:endParaRPr lang="en-US" sz="1200" dirty="0"/>
+          </a:p>
+        </p:txBody>
+      </p:sp>
+      <p:sp>
+        <p:nvSpPr>
+          <p:cNvPr id="15" name="Shape 13"/>
+          <p:cNvSpPr/>
+          <p:nvPr/>
+        </p:nvSpPr>
+        <p:spPr>
+          <a:xfrm>
+            <a:off x="438912" y="3273552"/>
+            <a:ext cx="8266176" cy="365760"/>
+          </a:xfrm>
+          <a:prstGeom prst="rect">
+            <a:avLst/>
+          </a:prstGeom>
+          <a:solidFill>
+            <a:srgbClr val="F5F6FC"/>
+          </a:solidFill>
+          <a:ln/>
+        </p:spPr>
+      </p:sp>
+      <p:sp>
+        <p:nvSpPr>
+          <p:cNvPr id="16" name="Text 14"/>
+          <p:cNvSpPr/>
+          <p:nvPr/>
+        </p:nvSpPr>
+        <p:spPr>
+          <a:xfrm>
+            <a:off x="566928" y="3273552"/>
+            <a:ext cx="548640" cy="365760"/>
+          </a:xfrm>
+          <a:prstGeom prst="rect">
+            <a:avLst/>
+          </a:prstGeom>
+          <a:noFill/>
+          <a:ln/>
+        </p:spPr>
+        <p:txBody>
+          <a:bodyPr wrap="square" lIns="0" tIns="0" rIns="0" bIns="0" rtlCol="0" anchor="ctr"/>
+          <a:lstStyle/>
+          <a:p>
+            <a:pPr indent="0" marL="0">
+              <a:buNone/>
+            </a:pPr>
+            <a:r>
+              <a:rPr lang="en-US" sz="1200" b="1" dirty="0">
+                <a:solidFill>
+                  <a:srgbClr val="0F7C86"/>
+                </a:solidFill>
+                <a:latin typeface="Courier New" pitchFamily="34" charset="0"/>
+                <a:ea typeface="Courier New" pitchFamily="34" charset="-122"/>
+                <a:cs typeface="Courier New" pitchFamily="34" charset="-120"/>
+              </a:rPr>
+              <a:t>5</a:t>
+            </a:r>
+            <a:endParaRPr lang="en-US" sz="1200" dirty="0"/>
+          </a:p>
+        </p:txBody>
+      </p:sp>
+      <p:sp>
+        <p:nvSpPr>
+          <p:cNvPr id="17" name="Text 15"/>
+          <p:cNvSpPr/>
+          <p:nvPr/>
+        </p:nvSpPr>
+        <p:spPr>
+          <a:xfrm>
+            <a:off x="1115568" y="3273552"/>
+            <a:ext cx="7461504" cy="365760"/>
+          </a:xfrm>
+          <a:prstGeom prst="rect">
+            <a:avLst/>
+          </a:prstGeom>
+          <a:noFill/>
+          <a:ln/>
+        </p:spPr>
+        <p:txBody>
+          <a:bodyPr wrap="square" lIns="0" tIns="0" rIns="0" bIns="0" rtlCol="0" anchor="ctr"/>
+          <a:lstStyle/>
+          <a:p>
+            <a:pPr indent="0" marL="0">
+              <a:buNone/>
+            </a:pPr>
+            <a:r>
+              <a:rPr lang="en-US" sz="1200" dirty="0">
+                <a:solidFill>
+                  <a:srgbClr val="434A63"/>
+                </a:solidFill>
+                <a:latin typeface="Arial" pitchFamily="34" charset="0"/>
+                <a:ea typeface="Arial" pitchFamily="34" charset="-122"/>
+                <a:cs typeface="Arial" pitchFamily="34" charset="-120"/>
+              </a:rPr>
+              <a:t>Die offene Frage für Mittwoch: Euer Stack spricht HTTP. Die Presse in Halle 1 auch?</a:t>
+            </a:r>
+            <a:endParaRPr lang="en-US" sz="1200" dirty="0"/>
+          </a:p>
+        </p:txBody>
+      </p:sp>
+      <p:sp>
+        <p:nvSpPr>
+          <p:cNvPr id="18" name="Shape 16"/>
+          <p:cNvSpPr/>
+          <p:nvPr/>
+        </p:nvSpPr>
+        <p:spPr>
+          <a:xfrm>
+            <a:off x="566928" y="4069080"/>
             <a:ext cx="32004" cy="256032"/>
           </a:xfrm>
           <a:prstGeom prst="rect">
@@ -5110,13 +5199,13 @@
       </p:sp>
       <p:sp>
         <p:nvSpPr>
-          <p:cNvPr id="7" name="Text 4"/>
-          <p:cNvSpPr/>
-          <p:nvPr/>
-        </p:nvSpPr>
-        <p:spPr>
-          <a:xfrm>
-            <a:off x="749808" y="3886200"/>
+          <p:cNvPr id="19" name="Text 17"/>
+          <p:cNvSpPr/>
+          <p:nvPr/>
+        </p:nvSpPr>
+        <p:spPr>
+          <a:xfrm>
+            <a:off x="749808" y="4023360"/>
             <a:ext cx="7827264" cy="402336"/>
           </a:xfrm>
           <a:prstGeom prst="rect">
@@ -5141,7 +5230,7 @@
                 <a:ea typeface="Arial" pitchFamily="34" charset="-122"/>
                 <a:cs typeface="Arial" pitchFamily="34" charset="-120"/>
               </a:rPr>
-              <a:t>Von der ersten Wegwerf-Kiste zum orchestrierten Stack. Dieser Werkzeugkasten bleibt für den Rest des Kurses im Einsatz.</a:t>
+              <a:t>Punkte gibt es nur symbolisch und nur für Teamarbeit: Jede Rolle, die in der Demo zu Wort kommt, zählt einen.</a:t>
             </a:r>
             <a:endParaRPr lang="en-US" sz="1200" dirty="0"/>
           </a:p>
@@ -5149,7 +5238,7 @@
       </p:sp>
       <p:sp>
         <p:nvSpPr>
-          <p:cNvPr id="8" name="Shape 5"/>
+          <p:cNvPr id="20" name="Shape 18"/>
           <p:cNvSpPr/>
           <p:nvPr/>
         </p:nvSpPr>
@@ -5172,7 +5261,7 @@
       </p:sp>
       <p:sp>
         <p:nvSpPr>
-          <p:cNvPr id="9" name="Text 6"/>
+          <p:cNvPr id="21" name="Text 19"/>
           <p:cNvSpPr/>
           <p:nvPr/>
         </p:nvSpPr>
@@ -5211,7 +5300,7 @@
       </p:sp>
       <p:sp>
         <p:nvSpPr>
-          <p:cNvPr id="10" name="Text 7"/>
+          <p:cNvPr id="22" name="Text 20"/>
           <p:cNvSpPr/>
           <p:nvPr/>
         </p:nvSpPr>
@@ -5242,7 +5331,7 @@
                 <a:ea typeface="Arial" pitchFamily="34" charset="-122"/>
                 <a:cs typeface="Arial" pitchFamily="34" charset="-120"/>
               </a:rPr>
-              <a:t>11/12</a:t>
+              <a:t>11/13</a:t>
             </a:r>
             <a:endParaRPr lang="en-US" sz="1050" dirty="0"/>
           </a:p>
@@ -5333,7 +5422,7 @@
                 <a:ea typeface="Arial" pitchFamily="34" charset="-122"/>
                 <a:cs typeface="Arial" pitchFamily="34" charset="-120"/>
               </a:rPr>
-              <a:t>AUSBLICK</a:t>
+              <a:t>DER RÜCKBLICK</a:t>
             </a:r>
             <a:endParaRPr lang="en-US" sz="1150" dirty="0"/>
           </a:p>
@@ -5372,81 +5461,46 @@
                 <a:ea typeface="Arial" pitchFamily="34" charset="-122"/>
                 <a:cs typeface="Arial" pitchFamily="34" charset="-120"/>
               </a:rPr>
-              <a:t>Bis Mittwoch</a:t>
+              <a:t>Vier Abende Docker</a:t>
             </a:r>
             <a:endParaRPr lang="en-US" sz="2600" dirty="0"/>
           </a:p>
         </p:txBody>
       </p:sp>
-      <p:sp>
-        <p:nvSpPr>
-          <p:cNvPr id="5" name="Text 3"/>
-          <p:cNvSpPr/>
-          <p:nvPr/>
-        </p:nvSpPr>
-        <p:spPr>
-          <a:xfrm>
-            <a:off x="566928" y="1444752"/>
-            <a:ext cx="8010144" cy="438912"/>
-          </a:xfrm>
-          <a:prstGeom prst="rect">
-            <a:avLst/>
-          </a:prstGeom>
-          <a:noFill/>
-          <a:ln/>
-        </p:spPr>
-        <p:txBody>
-          <a:bodyPr wrap="square" lIns="0" tIns="0" rIns="0" bIns="0" rtlCol="0" anchor="t"/>
-          <a:lstStyle/>
-          <a:p>
-            <a:pPr indent="0" marL="0">
-              <a:buNone/>
-            </a:pPr>
-            <a:r>
-              <a:rPr lang="en-US" sz="1300" dirty="0">
-                <a:solidFill>
-                  <a:srgbClr val="5C6377"/>
-                </a:solidFill>
-                <a:latin typeface="Arial" pitchFamily="34" charset="0"/>
-                <a:ea typeface="Arial" pitchFamily="34" charset="-122"/>
-                <a:cs typeface="Arial" pitchFamily="34" charset="-120"/>
-              </a:rPr>
-              <a:t>Mittwoch beginnt ein neues Kapitel: die Industrie. Wie sprechen Maschinen, Sensoren und Anlagen?</a:t>
-            </a:r>
-            <a:endParaRPr lang="en-US" sz="1300" dirty="0"/>
-          </a:p>
-        </p:txBody>
-      </p:sp>
-      <p:sp>
-        <p:nvSpPr>
-          <p:cNvPr id="6" name="Shape 4"/>
-          <p:cNvSpPr/>
-          <p:nvPr/>
-        </p:nvSpPr>
-        <p:spPr>
-          <a:xfrm>
-            <a:off x="566928" y="1975104"/>
-            <a:ext cx="2523744" cy="1920240"/>
-          </a:xfrm>
-          <a:prstGeom prst="rect">
-            <a:avLst/>
-          </a:prstGeom>
-          <a:solidFill>
-            <a:srgbClr val="F5F6FC"/>
-          </a:solidFill>
-          <a:ln/>
-        </p:spPr>
-      </p:sp>
-      <p:sp>
-        <p:nvSpPr>
-          <p:cNvPr id="7" name="Shape 5"/>
-          <p:cNvSpPr/>
-          <p:nvPr/>
-        </p:nvSpPr>
-        <p:spPr>
-          <a:xfrm>
-            <a:off x="566928" y="1975104"/>
-            <a:ext cx="41148" cy="1920240"/>
+      <p:pic>
+        <p:nvPicPr>
+          <p:cNvPr id="5" name="Image 0" descr="/Users/jacobmenge/Desktop/kurs-26.2b-orga/folienwerkstatt/assets/diagramme/block-rueckblick.png">    </p:cNvPr>
+          <p:cNvPicPr>
+            <a:picLocks noChangeAspect="1"/>
+          </p:cNvPicPr>
+          <p:nvPr/>
+        </p:nvPicPr>
+        <p:blipFill>
+          <a:blip r:embed="rId1"/>
+          <a:stretch>
+            <a:fillRect/>
+          </a:stretch>
+        </p:blipFill>
+        <p:spPr>
+          <a:xfrm>
+            <a:off x="566928" y="1700784"/>
+            <a:ext cx="8010144" cy="1737360"/>
+          </a:xfrm>
+          <a:prstGeom prst="rect">
+            <a:avLst/>
+          </a:prstGeom>
+        </p:spPr>
+      </p:pic>
+      <p:sp>
+        <p:nvSpPr>
+          <p:cNvPr id="6" name="Shape 3"/>
+          <p:cNvSpPr/>
+          <p:nvPr/>
+        </p:nvSpPr>
+        <p:spPr>
+          <a:xfrm>
+            <a:off x="566928" y="3931920"/>
+            <a:ext cx="32004" cy="256032"/>
           </a:xfrm>
           <a:prstGeom prst="rect">
             <a:avLst/>
@@ -5459,72 +5513,30 @@
       </p:sp>
       <p:sp>
         <p:nvSpPr>
-          <p:cNvPr id="8" name="Text 6"/>
-          <p:cNvSpPr/>
-          <p:nvPr/>
-        </p:nvSpPr>
-        <p:spPr>
-          <a:xfrm>
-            <a:off x="804672" y="2121408"/>
-            <a:ext cx="2121408" cy="256032"/>
-          </a:xfrm>
-          <a:prstGeom prst="rect">
-            <a:avLst/>
-          </a:prstGeom>
-          <a:noFill/>
-          <a:ln/>
-        </p:spPr>
-        <p:txBody>
-          <a:bodyPr wrap="square" lIns="0" tIns="0" rIns="0" bIns="0" rtlCol="0" anchor="t"/>
-          <a:lstStyle/>
-          <a:p>
-            <a:pPr indent="0" marL="0">
-              <a:buNone/>
-            </a:pPr>
-            <a:r>
-              <a:rPr lang="en-US" sz="1300" b="1" dirty="0">
-                <a:solidFill>
-                  <a:srgbClr val="272E52"/>
-                </a:solidFill>
-                <a:latin typeface="Arial" pitchFamily="34" charset="0"/>
-                <a:ea typeface="Arial" pitchFamily="34" charset="-122"/>
-                <a:cs typeface="Arial" pitchFamily="34" charset="-120"/>
-              </a:rPr>
-              <a:t>Industrie und IoT</a:t>
-            </a:r>
-            <a:endParaRPr lang="en-US" sz="1300" dirty="0"/>
-          </a:p>
-        </p:txBody>
-      </p:sp>
-      <p:sp>
-        <p:nvSpPr>
-          <p:cNvPr id="9" name="Text 7"/>
-          <p:cNvSpPr/>
-          <p:nvPr/>
-        </p:nvSpPr>
-        <p:spPr>
-          <a:xfrm>
-            <a:off x="804672" y="2423160"/>
-            <a:ext cx="2121408" cy="1353312"/>
-          </a:xfrm>
-          <a:prstGeom prst="rect">
-            <a:avLst/>
-          </a:prstGeom>
-          <a:noFill/>
-          <a:ln/>
-        </p:spPr>
-        <p:txBody>
-          <a:bodyPr wrap="square" lIns="0" tIns="0" rIns="0" bIns="0" rtlCol="0" anchor="t"/>
-          <a:lstStyle/>
-          <a:p>
-            <a:pPr indent="0" marL="0">
-              <a:lnSpc>
-                <a:spcPct val="92000"/>
-              </a:lnSpc>
-              <a:buNone/>
-            </a:pPr>
-            <a:r>
-              <a:rPr lang="en-US" sz="1150" dirty="0">
+          <p:cNvPr id="7" name="Text 4"/>
+          <p:cNvSpPr/>
+          <p:nvPr/>
+        </p:nvSpPr>
+        <p:spPr>
+          <a:xfrm>
+            <a:off x="749808" y="3886200"/>
+            <a:ext cx="7827264" cy="402336"/>
+          </a:xfrm>
+          <a:prstGeom prst="rect">
+            <a:avLst/>
+          </a:prstGeom>
+          <a:noFill/>
+          <a:ln/>
+        </p:spPr>
+        <p:txBody>
+          <a:bodyPr wrap="square" lIns="0" tIns="0" rIns="0" bIns="0" rtlCol="0" anchor="ctr"/>
+          <a:lstStyle/>
+          <a:p>
+            <a:pPr indent="0" marL="0">
+              <a:buNone/>
+            </a:pPr>
+            <a:r>
+              <a:rPr lang="en-US" sz="1200" b="1" dirty="0">
                 <a:solidFill>
                   <a:srgbClr val="434A63"/>
                 </a:solidFill>
@@ -5532,308 +5544,7 @@
                 <a:ea typeface="Arial" pitchFamily="34" charset="-122"/>
                 <a:cs typeface="Arial" pitchFamily="34" charset="-120"/>
               </a:rPr>
-              <a:t>Profinet, OPC UA und MQTT: die Sprachen der Fabrik. Erst als Überblick, dann live im Datenmitschnitt.</a:t>
-            </a:r>
-            <a:endParaRPr lang="en-US" sz="1150" dirty="0"/>
-          </a:p>
-        </p:txBody>
-      </p:sp>
-      <p:sp>
-        <p:nvSpPr>
-          <p:cNvPr id="10" name="Shape 8"/>
-          <p:cNvSpPr/>
-          <p:nvPr/>
-        </p:nvSpPr>
-        <p:spPr>
-          <a:xfrm>
-            <a:off x="3310128" y="1975104"/>
-            <a:ext cx="2523744" cy="1920240"/>
-          </a:xfrm>
-          <a:prstGeom prst="rect">
-            <a:avLst/>
-          </a:prstGeom>
-          <a:solidFill>
-            <a:srgbClr val="F5F6FC"/>
-          </a:solidFill>
-          <a:ln/>
-        </p:spPr>
-      </p:sp>
-      <p:sp>
-        <p:nvSpPr>
-          <p:cNvPr id="11" name="Shape 9"/>
-          <p:cNvSpPr/>
-          <p:nvPr/>
-        </p:nvSpPr>
-        <p:spPr>
-          <a:xfrm>
-            <a:off x="3310128" y="1975104"/>
-            <a:ext cx="41148" cy="1920240"/>
-          </a:xfrm>
-          <a:prstGeom prst="rect">
-            <a:avLst/>
-          </a:prstGeom>
-          <a:solidFill>
-            <a:srgbClr val="0F7C86"/>
-          </a:solidFill>
-          <a:ln/>
-        </p:spPr>
-      </p:sp>
-      <p:sp>
-        <p:nvSpPr>
-          <p:cNvPr id="12" name="Text 10"/>
-          <p:cNvSpPr/>
-          <p:nvPr/>
-        </p:nvSpPr>
-        <p:spPr>
-          <a:xfrm>
-            <a:off x="3547872" y="2121408"/>
-            <a:ext cx="2121408" cy="256032"/>
-          </a:xfrm>
-          <a:prstGeom prst="rect">
-            <a:avLst/>
-          </a:prstGeom>
-          <a:noFill/>
-          <a:ln/>
-        </p:spPr>
-        <p:txBody>
-          <a:bodyPr wrap="square" lIns="0" tIns="0" rIns="0" bIns="0" rtlCol="0" anchor="t"/>
-          <a:lstStyle/>
-          <a:p>
-            <a:pPr indent="0" marL="0">
-              <a:buNone/>
-            </a:pPr>
-            <a:r>
-              <a:rPr lang="en-US" sz="1300" b="1" dirty="0">
-                <a:solidFill>
-                  <a:srgbClr val="272E52"/>
-                </a:solidFill>
-                <a:latin typeface="Arial" pitchFamily="34" charset="0"/>
-                <a:ea typeface="Arial" pitchFamily="34" charset="-122"/>
-                <a:cs typeface="Arial" pitchFamily="34" charset="-120"/>
-              </a:rPr>
-              <a:t>Wireshark</a:t>
-            </a:r>
-            <a:endParaRPr lang="en-US" sz="1300" dirty="0"/>
-          </a:p>
-        </p:txBody>
-      </p:sp>
-      <p:sp>
-        <p:nvSpPr>
-          <p:cNvPr id="13" name="Text 11"/>
-          <p:cNvSpPr/>
-          <p:nvPr/>
-        </p:nvSpPr>
-        <p:spPr>
-          <a:xfrm>
-            <a:off x="3547872" y="2423160"/>
-            <a:ext cx="2121408" cy="1353312"/>
-          </a:xfrm>
-          <a:prstGeom prst="rect">
-            <a:avLst/>
-          </a:prstGeom>
-          <a:noFill/>
-          <a:ln/>
-        </p:spPr>
-        <p:txBody>
-          <a:bodyPr wrap="square" lIns="0" tIns="0" rIns="0" bIns="0" rtlCol="0" anchor="t"/>
-          <a:lstStyle/>
-          <a:p>
-            <a:pPr indent="0" marL="0">
-              <a:lnSpc>
-                <a:spcPct val="92000"/>
-              </a:lnSpc>
-              <a:buNone/>
-            </a:pPr>
-            <a:r>
-              <a:rPr lang="en-US" sz="1150" dirty="0">
-                <a:solidFill>
-                  <a:srgbClr val="434A63"/>
-                </a:solidFill>
-                <a:latin typeface="Arial" pitchFamily="34" charset="0"/>
-                <a:ea typeface="Arial" pitchFamily="34" charset="-122"/>
-                <a:cs typeface="Arial" pitchFamily="34" charset="-120"/>
-              </a:rPr>
-              <a:t>Wir schauen echten Industrie-Protokollen bei der Arbeit zu. Ob ihr das Werkzeug vorab installiert, sagen wir rechtzeitig im Chat.</a:t>
-            </a:r>
-            <a:endParaRPr lang="en-US" sz="1150" dirty="0"/>
-          </a:p>
-        </p:txBody>
-      </p:sp>
-      <p:sp>
-        <p:nvSpPr>
-          <p:cNvPr id="14" name="Shape 12"/>
-          <p:cNvSpPr/>
-          <p:nvPr/>
-        </p:nvSpPr>
-        <p:spPr>
-          <a:xfrm>
-            <a:off x="6053328" y="1975104"/>
-            <a:ext cx="2523744" cy="1920240"/>
-          </a:xfrm>
-          <a:prstGeom prst="rect">
-            <a:avLst/>
-          </a:prstGeom>
-          <a:solidFill>
-            <a:srgbClr val="F5F6FC"/>
-          </a:solidFill>
-          <a:ln/>
-        </p:spPr>
-      </p:sp>
-      <p:sp>
-        <p:nvSpPr>
-          <p:cNvPr id="15" name="Shape 13"/>
-          <p:cNvSpPr/>
-          <p:nvPr/>
-        </p:nvSpPr>
-        <p:spPr>
-          <a:xfrm>
-            <a:off x="6053328" y="1975104"/>
-            <a:ext cx="41148" cy="1920240"/>
-          </a:xfrm>
-          <a:prstGeom prst="rect">
-            <a:avLst/>
-          </a:prstGeom>
-          <a:solidFill>
-            <a:srgbClr val="0F7C86"/>
-          </a:solidFill>
-          <a:ln/>
-        </p:spPr>
-      </p:sp>
-      <p:sp>
-        <p:nvSpPr>
-          <p:cNvPr id="16" name="Text 14"/>
-          <p:cNvSpPr/>
-          <p:nvPr/>
-        </p:nvSpPr>
-        <p:spPr>
-          <a:xfrm>
-            <a:off x="6291072" y="2121408"/>
-            <a:ext cx="2121408" cy="256032"/>
-          </a:xfrm>
-          <a:prstGeom prst="rect">
-            <a:avLst/>
-          </a:prstGeom>
-          <a:noFill/>
-          <a:ln/>
-        </p:spPr>
-        <p:txBody>
-          <a:bodyPr wrap="square" lIns="0" tIns="0" rIns="0" bIns="0" rtlCol="0" anchor="t"/>
-          <a:lstStyle/>
-          <a:p>
-            <a:pPr indent="0" marL="0">
-              <a:buNone/>
-            </a:pPr>
-            <a:r>
-              <a:rPr lang="en-US" sz="1300" b="1" dirty="0">
-                <a:solidFill>
-                  <a:srgbClr val="272E52"/>
-                </a:solidFill>
-                <a:latin typeface="Arial" pitchFamily="34" charset="0"/>
-                <a:ea typeface="Arial" pitchFamily="34" charset="-122"/>
-                <a:cs typeface="Arial" pitchFamily="34" charset="-120"/>
-              </a:rPr>
-              <a:t>Docker bleibt</a:t>
-            </a:r>
-            <a:endParaRPr lang="en-US" sz="1300" dirty="0"/>
-          </a:p>
-        </p:txBody>
-      </p:sp>
-      <p:sp>
-        <p:nvSpPr>
-          <p:cNvPr id="17" name="Text 15"/>
-          <p:cNvSpPr/>
-          <p:nvPr/>
-        </p:nvSpPr>
-        <p:spPr>
-          <a:xfrm>
-            <a:off x="6291072" y="2423160"/>
-            <a:ext cx="2121408" cy="1353312"/>
-          </a:xfrm>
-          <a:prstGeom prst="rect">
-            <a:avLst/>
-          </a:prstGeom>
-          <a:noFill/>
-          <a:ln/>
-        </p:spPr>
-        <p:txBody>
-          <a:bodyPr wrap="square" lIns="0" tIns="0" rIns="0" bIns="0" rtlCol="0" anchor="t"/>
-          <a:lstStyle/>
-          <a:p>
-            <a:pPr indent="0" marL="0">
-              <a:lnSpc>
-                <a:spcPct val="92000"/>
-              </a:lnSpc>
-              <a:buNone/>
-            </a:pPr>
-            <a:r>
-              <a:rPr lang="en-US" sz="1150" dirty="0">
-                <a:solidFill>
-                  <a:srgbClr val="434A63"/>
-                </a:solidFill>
-                <a:latin typeface="Arial" pitchFamily="34" charset="0"/>
-                <a:ea typeface="Arial" pitchFamily="34" charset="-122"/>
-                <a:cs typeface="Arial" pitchFamily="34" charset="-120"/>
-              </a:rPr>
-              <a:t>Der Werkzeugkasten von heute läuft ab jetzt nebenbei mit. Der MQTT-Broker wohnt bald in einem Container.</a:t>
-            </a:r>
-            <a:endParaRPr lang="en-US" sz="1150" dirty="0"/>
-          </a:p>
-        </p:txBody>
-      </p:sp>
-      <p:sp>
-        <p:nvSpPr>
-          <p:cNvPr id="18" name="Shape 16"/>
-          <p:cNvSpPr/>
-          <p:nvPr/>
-        </p:nvSpPr>
-        <p:spPr>
-          <a:xfrm>
-            <a:off x="566928" y="4160520"/>
-            <a:ext cx="32004" cy="256032"/>
-          </a:xfrm>
-          <a:prstGeom prst="rect">
-            <a:avLst/>
-          </a:prstGeom>
-          <a:solidFill>
-            <a:srgbClr val="0F7C86"/>
-          </a:solidFill>
-          <a:ln/>
-        </p:spPr>
-      </p:sp>
-      <p:sp>
-        <p:nvSpPr>
-          <p:cNvPr id="19" name="Text 17"/>
-          <p:cNvSpPr/>
-          <p:nvPr/>
-        </p:nvSpPr>
-        <p:spPr>
-          <a:xfrm>
-            <a:off x="749808" y="4114800"/>
-            <a:ext cx="7827264" cy="402336"/>
-          </a:xfrm>
-          <a:prstGeom prst="rect">
-            <a:avLst/>
-          </a:prstGeom>
-          <a:noFill/>
-          <a:ln/>
-        </p:spPr>
-        <p:txBody>
-          <a:bodyPr wrap="square" lIns="0" tIns="0" rIns="0" bIns="0" rtlCol="0" anchor="ctr"/>
-          <a:lstStyle/>
-          <a:p>
-            <a:pPr indent="0" marL="0">
-              <a:buNone/>
-            </a:pPr>
-            <a:r>
-              <a:rPr lang="en-US" sz="1200" b="1" dirty="0">
-                <a:solidFill>
-                  <a:srgbClr val="434A63"/>
-                </a:solidFill>
-                <a:latin typeface="Arial" pitchFamily="34" charset="0"/>
-                <a:ea typeface="Arial" pitchFamily="34" charset="-122"/>
-                <a:cs typeface="Arial" pitchFamily="34" charset="-120"/>
-              </a:rPr>
-              <a:t>Nächster Termin: Mittwoch, 23. September um 18:00 Uhr, Industrie und IoT.</a:t>
+              <a:t>Vom ersten Wegwerf-Container zum orchestrierten Stack. Dieser Werkzeugkasten bleibt für den Rest des Kurses im Einsatz.</a:t>
             </a:r>
             <a:endParaRPr lang="en-US" sz="1200" dirty="0"/>
           </a:p>
@@ -5841,7 +5552,7 @@
       </p:sp>
       <p:sp>
         <p:nvSpPr>
-          <p:cNvPr id="20" name="Shape 18"/>
+          <p:cNvPr id="8" name="Shape 5"/>
           <p:cNvSpPr/>
           <p:nvPr/>
         </p:nvSpPr>
@@ -5864,7 +5575,7 @@
       </p:sp>
       <p:sp>
         <p:nvSpPr>
-          <p:cNvPr id="21" name="Text 19"/>
+          <p:cNvPr id="9" name="Text 6"/>
           <p:cNvSpPr/>
           <p:nvPr/>
         </p:nvSpPr>
@@ -5895,7 +5606,7 @@
                 <a:ea typeface="Arial" pitchFamily="34" charset="-122"/>
                 <a:cs typeface="Arial" pitchFamily="34" charset="-120"/>
               </a:rPr>
-              <a:t>Abschluss</a:t>
+              <a:t>Demo-Runde</a:t>
             </a:r>
             <a:endParaRPr lang="en-US" sz="1050" dirty="0"/>
           </a:p>
@@ -5903,7 +5614,7 @@
       </p:sp>
       <p:sp>
         <p:nvSpPr>
-          <p:cNvPr id="22" name="Text 20"/>
+          <p:cNvPr id="10" name="Text 7"/>
           <p:cNvSpPr/>
           <p:nvPr/>
         </p:nvSpPr>
@@ -5934,7 +5645,7 @@
                 <a:ea typeface="Arial" pitchFamily="34" charset="-122"/>
                 <a:cs typeface="Arial" pitchFamily="34" charset="-120"/>
               </a:rPr>
-              <a:t>12/12</a:t>
+              <a:t>12/13</a:t>
             </a:r>
             <a:endParaRPr lang="en-US" sz="1050" dirty="0"/>
           </a:p>
@@ -5951,6 +5662,698 @@
 <file path=ppt/slides/slide16.xml><?xml version="1.0" encoding="utf-8"?>
 <p:sld xmlns:a="http://schemas.openxmlformats.org/drawingml/2006/main" xmlns:r="http://schemas.openxmlformats.org/officeDocument/2006/relationships" xmlns:p="http://schemas.openxmlformats.org/presentationml/2006/main">
   <p:cSld name="Slide 16">
+    <p:bg>
+      <p:bgPr>
+        <a:solidFill>
+          <a:srgbClr val="FFFFFF"/>
+        </a:solidFill>
+      </p:bgPr>
+    </p:bg>
+    <p:spTree>
+      <p:nvGrpSpPr>
+        <p:cNvPr id="1" name=""/>
+        <p:cNvGrpSpPr/>
+        <p:nvPr/>
+      </p:nvGrpSpPr>
+      <p:grpSpPr>
+        <a:xfrm>
+          <a:off x="0" y="0"/>
+          <a:ext cx="0" cy="0"/>
+          <a:chOff x="0" y="0"/>
+          <a:chExt cx="0" cy="0"/>
+        </a:xfrm>
+      </p:grpSpPr>
+      <p:sp>
+        <p:nvSpPr>
+          <p:cNvPr id="2" name="Shape 0"/>
+          <p:cNvSpPr/>
+          <p:nvPr/>
+        </p:nvSpPr>
+        <p:spPr>
+          <a:xfrm>
+            <a:off x="566928" y="201168"/>
+            <a:ext cx="475488" cy="50292"/>
+          </a:xfrm>
+          <a:prstGeom prst="rect">
+            <a:avLst/>
+          </a:prstGeom>
+          <a:solidFill>
+            <a:srgbClr val="0F7C86"/>
+          </a:solidFill>
+          <a:ln/>
+        </p:spPr>
+      </p:sp>
+      <p:sp>
+        <p:nvSpPr>
+          <p:cNvPr id="3" name="Text 1"/>
+          <p:cNvSpPr/>
+          <p:nvPr/>
+        </p:nvSpPr>
+        <p:spPr>
+          <a:xfrm>
+            <a:off x="566928" y="384048"/>
+            <a:ext cx="8010144" cy="237744"/>
+          </a:xfrm>
+          <a:prstGeom prst="rect">
+            <a:avLst/>
+          </a:prstGeom>
+          <a:noFill/>
+          <a:ln/>
+        </p:spPr>
+        <p:txBody>
+          <a:bodyPr wrap="square" lIns="0" tIns="0" rIns="0" bIns="0" rtlCol="0" anchor="ctr"/>
+          <a:lstStyle/>
+          <a:p>
+            <a:pPr indent="0" marL="0">
+              <a:buNone/>
+            </a:pPr>
+            <a:r>
+              <a:rPr lang="en-US" sz="1150" b="1" spc="180" kern="0" dirty="0">
+                <a:solidFill>
+                  <a:srgbClr val="0F7C86"/>
+                </a:solidFill>
+                <a:latin typeface="Arial" pitchFamily="34" charset="0"/>
+                <a:ea typeface="Arial" pitchFamily="34" charset="-122"/>
+                <a:cs typeface="Arial" pitchFamily="34" charset="-120"/>
+              </a:rPr>
+              <a:t>AUSBLICK</a:t>
+            </a:r>
+            <a:endParaRPr lang="en-US" sz="1150" dirty="0"/>
+          </a:p>
+        </p:txBody>
+      </p:sp>
+      <p:sp>
+        <p:nvSpPr>
+          <p:cNvPr id="4" name="Text 2"/>
+          <p:cNvSpPr/>
+          <p:nvPr/>
+        </p:nvSpPr>
+        <p:spPr>
+          <a:xfrm>
+            <a:off x="566928" y="731520"/>
+            <a:ext cx="8010144" cy="603504"/>
+          </a:xfrm>
+          <a:prstGeom prst="rect">
+            <a:avLst/>
+          </a:prstGeom>
+          <a:noFill/>
+          <a:ln/>
+        </p:spPr>
+        <p:txBody>
+          <a:bodyPr wrap="square" lIns="0" tIns="0" rIns="0" bIns="0" rtlCol="0" anchor="t"/>
+          <a:lstStyle/>
+          <a:p>
+            <a:pPr indent="0" marL="0">
+              <a:buNone/>
+            </a:pPr>
+            <a:r>
+              <a:rPr lang="en-US" sz="2600" b="1" dirty="0">
+                <a:solidFill>
+                  <a:srgbClr val="272E52"/>
+                </a:solidFill>
+                <a:latin typeface="Arial" pitchFamily="34" charset="0"/>
+                <a:ea typeface="Arial" pitchFamily="34" charset="-122"/>
+                <a:cs typeface="Arial" pitchFamily="34" charset="-120"/>
+              </a:rPr>
+              <a:t>Bis Mittwoch</a:t>
+            </a:r>
+            <a:endParaRPr lang="en-US" sz="2600" dirty="0"/>
+          </a:p>
+        </p:txBody>
+      </p:sp>
+      <p:sp>
+        <p:nvSpPr>
+          <p:cNvPr id="5" name="Text 3"/>
+          <p:cNvSpPr/>
+          <p:nvPr/>
+        </p:nvSpPr>
+        <p:spPr>
+          <a:xfrm>
+            <a:off x="566928" y="1444752"/>
+            <a:ext cx="8010144" cy="438912"/>
+          </a:xfrm>
+          <a:prstGeom prst="rect">
+            <a:avLst/>
+          </a:prstGeom>
+          <a:noFill/>
+          <a:ln/>
+        </p:spPr>
+        <p:txBody>
+          <a:bodyPr wrap="square" lIns="0" tIns="0" rIns="0" bIns="0" rtlCol="0" anchor="t"/>
+          <a:lstStyle/>
+          <a:p>
+            <a:pPr indent="0" marL="0">
+              <a:buNone/>
+            </a:pPr>
+            <a:r>
+              <a:rPr lang="en-US" sz="1300" dirty="0">
+                <a:solidFill>
+                  <a:srgbClr val="5C6377"/>
+                </a:solidFill>
+                <a:latin typeface="Arial" pitchFamily="34" charset="0"/>
+                <a:ea typeface="Arial" pitchFamily="34" charset="-122"/>
+                <a:cs typeface="Arial" pitchFamily="34" charset="-120"/>
+              </a:rPr>
+              <a:t>Mittwoch beginnt ein neues Kapitel: die Industrie. Wie sprechen Maschinen, Sensoren und Anlagen?</a:t>
+            </a:r>
+            <a:endParaRPr lang="en-US" sz="1300" dirty="0"/>
+          </a:p>
+        </p:txBody>
+      </p:sp>
+      <p:sp>
+        <p:nvSpPr>
+          <p:cNvPr id="6" name="Shape 4"/>
+          <p:cNvSpPr/>
+          <p:nvPr/>
+        </p:nvSpPr>
+        <p:spPr>
+          <a:xfrm>
+            <a:off x="566928" y="1975104"/>
+            <a:ext cx="2523744" cy="1920240"/>
+          </a:xfrm>
+          <a:prstGeom prst="rect">
+            <a:avLst/>
+          </a:prstGeom>
+          <a:solidFill>
+            <a:srgbClr val="F5F6FC"/>
+          </a:solidFill>
+          <a:ln/>
+        </p:spPr>
+      </p:sp>
+      <p:sp>
+        <p:nvSpPr>
+          <p:cNvPr id="7" name="Shape 5"/>
+          <p:cNvSpPr/>
+          <p:nvPr/>
+        </p:nvSpPr>
+        <p:spPr>
+          <a:xfrm>
+            <a:off x="566928" y="1975104"/>
+            <a:ext cx="41148" cy="1920240"/>
+          </a:xfrm>
+          <a:prstGeom prst="rect">
+            <a:avLst/>
+          </a:prstGeom>
+          <a:solidFill>
+            <a:srgbClr val="0F7C86"/>
+          </a:solidFill>
+          <a:ln/>
+        </p:spPr>
+      </p:sp>
+      <p:sp>
+        <p:nvSpPr>
+          <p:cNvPr id="8" name="Text 6"/>
+          <p:cNvSpPr/>
+          <p:nvPr/>
+        </p:nvSpPr>
+        <p:spPr>
+          <a:xfrm>
+            <a:off x="804672" y="2121408"/>
+            <a:ext cx="2121408" cy="256032"/>
+          </a:xfrm>
+          <a:prstGeom prst="rect">
+            <a:avLst/>
+          </a:prstGeom>
+          <a:noFill/>
+          <a:ln/>
+        </p:spPr>
+        <p:txBody>
+          <a:bodyPr wrap="square" lIns="0" tIns="0" rIns="0" bIns="0" rtlCol="0" anchor="t"/>
+          <a:lstStyle/>
+          <a:p>
+            <a:pPr indent="0" marL="0">
+              <a:buNone/>
+            </a:pPr>
+            <a:r>
+              <a:rPr lang="en-US" sz="1300" b="1" dirty="0">
+                <a:solidFill>
+                  <a:srgbClr val="272E52"/>
+                </a:solidFill>
+                <a:latin typeface="Arial" pitchFamily="34" charset="0"/>
+                <a:ea typeface="Arial" pitchFamily="34" charset="-122"/>
+                <a:cs typeface="Arial" pitchFamily="34" charset="-120"/>
+              </a:rPr>
+              <a:t>Industrie und IoT</a:t>
+            </a:r>
+            <a:endParaRPr lang="en-US" sz="1300" dirty="0"/>
+          </a:p>
+        </p:txBody>
+      </p:sp>
+      <p:sp>
+        <p:nvSpPr>
+          <p:cNvPr id="9" name="Text 7"/>
+          <p:cNvSpPr/>
+          <p:nvPr/>
+        </p:nvSpPr>
+        <p:spPr>
+          <a:xfrm>
+            <a:off x="804672" y="2423160"/>
+            <a:ext cx="2121408" cy="1353312"/>
+          </a:xfrm>
+          <a:prstGeom prst="rect">
+            <a:avLst/>
+          </a:prstGeom>
+          <a:noFill/>
+          <a:ln/>
+        </p:spPr>
+        <p:txBody>
+          <a:bodyPr wrap="square" lIns="0" tIns="0" rIns="0" bIns="0" rtlCol="0" anchor="t"/>
+          <a:lstStyle/>
+          <a:p>
+            <a:pPr indent="0" marL="0">
+              <a:lnSpc>
+                <a:spcPct val="92000"/>
+              </a:lnSpc>
+              <a:buNone/>
+            </a:pPr>
+            <a:r>
+              <a:rPr lang="en-US" sz="1150" dirty="0">
+                <a:solidFill>
+                  <a:srgbClr val="434A63"/>
+                </a:solidFill>
+                <a:latin typeface="Arial" pitchFamily="34" charset="0"/>
+                <a:ea typeface="Arial" pitchFamily="34" charset="-122"/>
+                <a:cs typeface="Arial" pitchFamily="34" charset="-120"/>
+              </a:rPr>
+              <a:t>Profinet, OPC UA und MQTT: die Sprachen der Fabrik. Erst als Überblick, dann live im Datenmitschnitt.</a:t>
+            </a:r>
+            <a:endParaRPr lang="en-US" sz="1150" dirty="0"/>
+          </a:p>
+        </p:txBody>
+      </p:sp>
+      <p:sp>
+        <p:nvSpPr>
+          <p:cNvPr id="10" name="Shape 8"/>
+          <p:cNvSpPr/>
+          <p:nvPr/>
+        </p:nvSpPr>
+        <p:spPr>
+          <a:xfrm>
+            <a:off x="3310128" y="1975104"/>
+            <a:ext cx="2523744" cy="1920240"/>
+          </a:xfrm>
+          <a:prstGeom prst="rect">
+            <a:avLst/>
+          </a:prstGeom>
+          <a:solidFill>
+            <a:srgbClr val="F5F6FC"/>
+          </a:solidFill>
+          <a:ln/>
+        </p:spPr>
+      </p:sp>
+      <p:sp>
+        <p:nvSpPr>
+          <p:cNvPr id="11" name="Shape 9"/>
+          <p:cNvSpPr/>
+          <p:nvPr/>
+        </p:nvSpPr>
+        <p:spPr>
+          <a:xfrm>
+            <a:off x="3310128" y="1975104"/>
+            <a:ext cx="41148" cy="1920240"/>
+          </a:xfrm>
+          <a:prstGeom prst="rect">
+            <a:avLst/>
+          </a:prstGeom>
+          <a:solidFill>
+            <a:srgbClr val="0F7C86"/>
+          </a:solidFill>
+          <a:ln/>
+        </p:spPr>
+      </p:sp>
+      <p:sp>
+        <p:nvSpPr>
+          <p:cNvPr id="12" name="Text 10"/>
+          <p:cNvSpPr/>
+          <p:nvPr/>
+        </p:nvSpPr>
+        <p:spPr>
+          <a:xfrm>
+            <a:off x="3547872" y="2121408"/>
+            <a:ext cx="2121408" cy="256032"/>
+          </a:xfrm>
+          <a:prstGeom prst="rect">
+            <a:avLst/>
+          </a:prstGeom>
+          <a:noFill/>
+          <a:ln/>
+        </p:spPr>
+        <p:txBody>
+          <a:bodyPr wrap="square" lIns="0" tIns="0" rIns="0" bIns="0" rtlCol="0" anchor="t"/>
+          <a:lstStyle/>
+          <a:p>
+            <a:pPr indent="0" marL="0">
+              <a:buNone/>
+            </a:pPr>
+            <a:r>
+              <a:rPr lang="en-US" sz="1300" b="1" dirty="0">
+                <a:solidFill>
+                  <a:srgbClr val="272E52"/>
+                </a:solidFill>
+                <a:latin typeface="Arial" pitchFamily="34" charset="0"/>
+                <a:ea typeface="Arial" pitchFamily="34" charset="-122"/>
+                <a:cs typeface="Arial" pitchFamily="34" charset="-120"/>
+              </a:rPr>
+              <a:t>Wireshark</a:t>
+            </a:r>
+            <a:endParaRPr lang="en-US" sz="1300" dirty="0"/>
+          </a:p>
+        </p:txBody>
+      </p:sp>
+      <p:sp>
+        <p:nvSpPr>
+          <p:cNvPr id="13" name="Text 11"/>
+          <p:cNvSpPr/>
+          <p:nvPr/>
+        </p:nvSpPr>
+        <p:spPr>
+          <a:xfrm>
+            <a:off x="3547872" y="2423160"/>
+            <a:ext cx="2121408" cy="1353312"/>
+          </a:xfrm>
+          <a:prstGeom prst="rect">
+            <a:avLst/>
+          </a:prstGeom>
+          <a:noFill/>
+          <a:ln/>
+        </p:spPr>
+        <p:txBody>
+          <a:bodyPr wrap="square" lIns="0" tIns="0" rIns="0" bIns="0" rtlCol="0" anchor="t"/>
+          <a:lstStyle/>
+          <a:p>
+            <a:pPr indent="0" marL="0">
+              <a:lnSpc>
+                <a:spcPct val="92000"/>
+              </a:lnSpc>
+              <a:buNone/>
+            </a:pPr>
+            <a:r>
+              <a:rPr lang="en-US" sz="1150" dirty="0">
+                <a:solidFill>
+                  <a:srgbClr val="434A63"/>
+                </a:solidFill>
+                <a:latin typeface="Arial" pitchFamily="34" charset="0"/>
+                <a:ea typeface="Arial" pitchFamily="34" charset="-122"/>
+                <a:cs typeface="Arial" pitchFamily="34" charset="-120"/>
+              </a:rPr>
+              <a:t>Wir schauen echten Industrie-Protokollen bei der Arbeit zu. Ob ihr das Werkzeug vorab installiert, sagen wir rechtzeitig im Chat.</a:t>
+            </a:r>
+            <a:endParaRPr lang="en-US" sz="1150" dirty="0"/>
+          </a:p>
+        </p:txBody>
+      </p:sp>
+      <p:sp>
+        <p:nvSpPr>
+          <p:cNvPr id="14" name="Shape 12"/>
+          <p:cNvSpPr/>
+          <p:nvPr/>
+        </p:nvSpPr>
+        <p:spPr>
+          <a:xfrm>
+            <a:off x="6053328" y="1975104"/>
+            <a:ext cx="2523744" cy="1920240"/>
+          </a:xfrm>
+          <a:prstGeom prst="rect">
+            <a:avLst/>
+          </a:prstGeom>
+          <a:solidFill>
+            <a:srgbClr val="F5F6FC"/>
+          </a:solidFill>
+          <a:ln/>
+        </p:spPr>
+      </p:sp>
+      <p:sp>
+        <p:nvSpPr>
+          <p:cNvPr id="15" name="Shape 13"/>
+          <p:cNvSpPr/>
+          <p:nvPr/>
+        </p:nvSpPr>
+        <p:spPr>
+          <a:xfrm>
+            <a:off x="6053328" y="1975104"/>
+            <a:ext cx="41148" cy="1920240"/>
+          </a:xfrm>
+          <a:prstGeom prst="rect">
+            <a:avLst/>
+          </a:prstGeom>
+          <a:solidFill>
+            <a:srgbClr val="0F7C86"/>
+          </a:solidFill>
+          <a:ln/>
+        </p:spPr>
+      </p:sp>
+      <p:sp>
+        <p:nvSpPr>
+          <p:cNvPr id="16" name="Text 14"/>
+          <p:cNvSpPr/>
+          <p:nvPr/>
+        </p:nvSpPr>
+        <p:spPr>
+          <a:xfrm>
+            <a:off x="6291072" y="2121408"/>
+            <a:ext cx="2121408" cy="256032"/>
+          </a:xfrm>
+          <a:prstGeom prst="rect">
+            <a:avLst/>
+          </a:prstGeom>
+          <a:noFill/>
+          <a:ln/>
+        </p:spPr>
+        <p:txBody>
+          <a:bodyPr wrap="square" lIns="0" tIns="0" rIns="0" bIns="0" rtlCol="0" anchor="t"/>
+          <a:lstStyle/>
+          <a:p>
+            <a:pPr indent="0" marL="0">
+              <a:buNone/>
+            </a:pPr>
+            <a:r>
+              <a:rPr lang="en-US" sz="1300" b="1" dirty="0">
+                <a:solidFill>
+                  <a:srgbClr val="272E52"/>
+                </a:solidFill>
+                <a:latin typeface="Arial" pitchFamily="34" charset="0"/>
+                <a:ea typeface="Arial" pitchFamily="34" charset="-122"/>
+                <a:cs typeface="Arial" pitchFamily="34" charset="-120"/>
+              </a:rPr>
+              <a:t>Docker bleibt</a:t>
+            </a:r>
+            <a:endParaRPr lang="en-US" sz="1300" dirty="0"/>
+          </a:p>
+        </p:txBody>
+      </p:sp>
+      <p:sp>
+        <p:nvSpPr>
+          <p:cNvPr id="17" name="Text 15"/>
+          <p:cNvSpPr/>
+          <p:nvPr/>
+        </p:nvSpPr>
+        <p:spPr>
+          <a:xfrm>
+            <a:off x="6291072" y="2423160"/>
+            <a:ext cx="2121408" cy="1353312"/>
+          </a:xfrm>
+          <a:prstGeom prst="rect">
+            <a:avLst/>
+          </a:prstGeom>
+          <a:noFill/>
+          <a:ln/>
+        </p:spPr>
+        <p:txBody>
+          <a:bodyPr wrap="square" lIns="0" tIns="0" rIns="0" bIns="0" rtlCol="0" anchor="t"/>
+          <a:lstStyle/>
+          <a:p>
+            <a:pPr indent="0" marL="0">
+              <a:lnSpc>
+                <a:spcPct val="92000"/>
+              </a:lnSpc>
+              <a:buNone/>
+            </a:pPr>
+            <a:r>
+              <a:rPr lang="en-US" sz="1150" dirty="0">
+                <a:solidFill>
+                  <a:srgbClr val="434A63"/>
+                </a:solidFill>
+                <a:latin typeface="Arial" pitchFamily="34" charset="0"/>
+                <a:ea typeface="Arial" pitchFamily="34" charset="-122"/>
+                <a:cs typeface="Arial" pitchFamily="34" charset="-120"/>
+              </a:rPr>
+              <a:t>Der Werkzeugkasten von heute läuft ab jetzt nebenbei mit. Der MQTT-Broker wohnt bald in einem Container.</a:t>
+            </a:r>
+            <a:endParaRPr lang="en-US" sz="1150" dirty="0"/>
+          </a:p>
+        </p:txBody>
+      </p:sp>
+      <p:sp>
+        <p:nvSpPr>
+          <p:cNvPr id="18" name="Shape 16"/>
+          <p:cNvSpPr/>
+          <p:nvPr/>
+        </p:nvSpPr>
+        <p:spPr>
+          <a:xfrm>
+            <a:off x="566928" y="4160520"/>
+            <a:ext cx="32004" cy="256032"/>
+          </a:xfrm>
+          <a:prstGeom prst="rect">
+            <a:avLst/>
+          </a:prstGeom>
+          <a:solidFill>
+            <a:srgbClr val="0F7C86"/>
+          </a:solidFill>
+          <a:ln/>
+        </p:spPr>
+      </p:sp>
+      <p:sp>
+        <p:nvSpPr>
+          <p:cNvPr id="19" name="Text 17"/>
+          <p:cNvSpPr/>
+          <p:nvPr/>
+        </p:nvSpPr>
+        <p:spPr>
+          <a:xfrm>
+            <a:off x="749808" y="4114800"/>
+            <a:ext cx="7827264" cy="402336"/>
+          </a:xfrm>
+          <a:prstGeom prst="rect">
+            <a:avLst/>
+          </a:prstGeom>
+          <a:noFill/>
+          <a:ln/>
+        </p:spPr>
+        <p:txBody>
+          <a:bodyPr wrap="square" lIns="0" tIns="0" rIns="0" bIns="0" rtlCol="0" anchor="ctr"/>
+          <a:lstStyle/>
+          <a:p>
+            <a:pPr indent="0" marL="0">
+              <a:buNone/>
+            </a:pPr>
+            <a:r>
+              <a:rPr lang="en-US" sz="1200" b="1" dirty="0">
+                <a:solidFill>
+                  <a:srgbClr val="434A63"/>
+                </a:solidFill>
+                <a:latin typeface="Arial" pitchFamily="34" charset="0"/>
+                <a:ea typeface="Arial" pitchFamily="34" charset="-122"/>
+                <a:cs typeface="Arial" pitchFamily="34" charset="-120"/>
+              </a:rPr>
+              <a:t>Nächster Termin: Mittwoch, 23. September um 18:00 Uhr, Industrie und IoT.</a:t>
+            </a:r>
+            <a:endParaRPr lang="en-US" sz="1200" dirty="0"/>
+          </a:p>
+        </p:txBody>
+      </p:sp>
+      <p:sp>
+        <p:nvSpPr>
+          <p:cNvPr id="20" name="Shape 18"/>
+          <p:cNvSpPr/>
+          <p:nvPr/>
+        </p:nvSpPr>
+        <p:spPr>
+          <a:xfrm>
+            <a:off x="566928" y="4631436"/>
+            <a:ext cx="8010144" cy="0"/>
+          </a:xfrm>
+          <a:prstGeom prst="line">
+            <a:avLst/>
+          </a:prstGeom>
+          <a:noFill/>
+          <a:ln w="9525">
+            <a:solidFill>
+              <a:srgbClr val="DFE3F0"/>
+            </a:solidFill>
+            <a:prstDash val="solid"/>
+          </a:ln>
+        </p:spPr>
+      </p:sp>
+      <p:sp>
+        <p:nvSpPr>
+          <p:cNvPr id="21" name="Text 19"/>
+          <p:cNvSpPr/>
+          <p:nvPr/>
+        </p:nvSpPr>
+        <p:spPr>
+          <a:xfrm>
+            <a:off x="566928" y="4722876"/>
+            <a:ext cx="5029200" cy="237744"/>
+          </a:xfrm>
+          <a:prstGeom prst="rect">
+            <a:avLst/>
+          </a:prstGeom>
+          <a:noFill/>
+          <a:ln/>
+        </p:spPr>
+        <p:txBody>
+          <a:bodyPr wrap="square" lIns="0" tIns="0" rIns="0" bIns="0" rtlCol="0" anchor="ctr"/>
+          <a:lstStyle/>
+          <a:p>
+            <a:pPr indent="0" marL="0">
+              <a:buNone/>
+            </a:pPr>
+            <a:r>
+              <a:rPr lang="en-US" sz="1050" spc="30" kern="0" dirty="0">
+                <a:solidFill>
+                  <a:srgbClr val="5C6377"/>
+                </a:solidFill>
+                <a:latin typeface="Arial" pitchFamily="34" charset="0"/>
+                <a:ea typeface="Arial" pitchFamily="34" charset="-122"/>
+                <a:cs typeface="Arial" pitchFamily="34" charset="-120"/>
+              </a:rPr>
+              <a:t>Abschluss</a:t>
+            </a:r>
+            <a:endParaRPr lang="en-US" sz="1050" dirty="0"/>
+          </a:p>
+        </p:txBody>
+      </p:sp>
+      <p:sp>
+        <p:nvSpPr>
+          <p:cNvPr id="22" name="Text 20"/>
+          <p:cNvSpPr/>
+          <p:nvPr/>
+        </p:nvSpPr>
+        <p:spPr>
+          <a:xfrm>
+            <a:off x="8028432" y="4722876"/>
+            <a:ext cx="548640" cy="237744"/>
+          </a:xfrm>
+          <a:prstGeom prst="rect">
+            <a:avLst/>
+          </a:prstGeom>
+          <a:noFill/>
+          <a:ln/>
+        </p:spPr>
+        <p:txBody>
+          <a:bodyPr wrap="square" lIns="0" tIns="0" rIns="0" bIns="0" rtlCol="0" anchor="ctr"/>
+          <a:lstStyle/>
+          <a:p>
+            <a:pPr algn="r" indent="0" marL="0">
+              <a:buNone/>
+            </a:pPr>
+            <a:r>
+              <a:rPr lang="en-US" sz="1050" dirty="0">
+                <a:solidFill>
+                  <a:srgbClr val="5C6377"/>
+                </a:solidFill>
+                <a:latin typeface="Arial" pitchFamily="34" charset="0"/>
+                <a:ea typeface="Arial" pitchFamily="34" charset="-122"/>
+                <a:cs typeface="Arial" pitchFamily="34" charset="-120"/>
+              </a:rPr>
+              <a:t>13/13</a:t>
+            </a:r>
+            <a:endParaRPr lang="en-US" sz="1050" dirty="0"/>
+          </a:p>
+        </p:txBody>
+      </p:sp>
+    </p:spTree>
+  </p:cSld>
+  <p:clrMapOvr>
+    <a:masterClrMapping/>
+  </p:clrMapOvr>
+</p:sld>
+</file>
+
+<file path=ppt/slides/slide17.xml><?xml version="1.0" encoding="utf-8"?>
+<p:sld xmlns:a="http://schemas.openxmlformats.org/drawingml/2006/main" xmlns:r="http://schemas.openxmlformats.org/officeDocument/2006/relationships" xmlns:p="http://schemas.openxmlformats.org/presentationml/2006/main">
+  <p:cSld name="Slide 17">
     <p:bg>
       <p:bgPr>
         <a:solidFill>
@@ -6025,7 +6428,7 @@
                 <a:ea typeface="Arial" pitchFamily="34" charset="-122"/>
                 <a:cs typeface="Arial" pitchFamily="34" charset="-120"/>
               </a:rPr>
-              <a:t>Mission erfüllt.</a:t>
+              <a:t>Zehn Container, eine Datei.</a:t>
             </a:r>
             <a:endParaRPr lang="en-US" sz="3200" dirty="0"/>
           </a:p>
@@ -6064,7 +6467,7 @@
                 <a:ea typeface="Arial" pitchFamily="34" charset="-122"/>
                 <a:cs typeface="Arial" pitchFamily="34" charset="-120"/>
               </a:rPr>
-              <a:t>Aufgabe, Hilfekarten und die komplette Lösung stehen zum Nachlesen auf der Kursseite.</a:t>
+              <a:t>Missionen, Funkhilfe und die komplette Musterlösung stehen zum Nachlesen auf der Kursseite.</a:t>
             </a:r>
             <a:endParaRPr lang="en-US" sz="1400" dirty="0"/>
           </a:p>
@@ -6507,7 +6910,7 @@
                 <a:ea typeface="Arial" pitchFamily="34" charset="-122"/>
                 <a:cs typeface="Arial" pitchFamily="34" charset="-120"/>
               </a:rPr>
-              <a:t>Zielbild und die drei neuen Bausteine (build, .env, Healthcheck)</a:t>
+              <a:t>Zielbild und die neuen Bausteine (build, .env, Healthcheck, Heartbeat)</a:t>
             </a:r>
             <a:endParaRPr lang="en-US" sz="1050" dirty="0"/>
           </a:p>
@@ -6761,7 +7164,7 @@
                 <a:ea typeface="Arial" pitchFamily="34" charset="-122"/>
                 <a:cs typeface="Arial" pitchFamily="34" charset="-120"/>
               </a:rPr>
-              <a:t>Mission läuft: 90 Minuten in Gruppen, Hilfekarten erlaubt</a:t>
+              <a:t>Mission läuft: 90 Minuten in Gruppen, Funkhilfe in drei Stufen</a:t>
             </a:r>
             <a:endParaRPr lang="en-US" sz="1050" dirty="0"/>
           </a:p>
@@ -7097,7 +7500,7 @@
                 <a:ea typeface="Arial" pitchFamily="34" charset="-122"/>
                 <a:cs typeface="Arial" pitchFamily="34" charset="-120"/>
               </a:rPr>
-              <a:t>1/12</a:t>
+              <a:t>1/13</a:t>
             </a:r>
             <a:endParaRPr lang="en-US" sz="1050" dirty="0"/>
           </a:p>
@@ -7460,7 +7863,7 @@
                 <a:ea typeface="Arial" pitchFamily="34" charset="-122"/>
                 <a:cs typeface="Arial" pitchFamily="34" charset="-120"/>
               </a:rPr>
-              <a:t>2/12</a:t>
+              <a:t>2/13</a:t>
             </a:r>
             <a:endParaRPr lang="en-US" sz="1050" dirty="0"/>
           </a:p>
@@ -7806,7 +8209,7 @@
                 <a:ea typeface="Arial" pitchFamily="34" charset="-122"/>
                 <a:cs typeface="Arial" pitchFamily="34" charset="-120"/>
               </a:rPr>
-              <a:t>3/12</a:t>
+              <a:t>3/13</a:t>
             </a:r>
             <a:endParaRPr lang="en-US" sz="1050" dirty="0"/>
           </a:p>
@@ -8167,8 +8570,8 @@
         </p:blipFill>
         <p:spPr>
           <a:xfrm>
-            <a:off x="566928" y="1517904"/>
-            <a:ext cx="8010144" cy="2194560"/>
+            <a:off x="566928" y="1463040"/>
+            <a:ext cx="8010144" cy="2286000"/>
           </a:xfrm>
           <a:prstGeom prst="rect">
             <a:avLst/>
@@ -8329,7 +8732,7 @@
                 <a:ea typeface="Arial" pitchFamily="34" charset="-122"/>
                 <a:cs typeface="Arial" pitchFamily="34" charset="-120"/>
               </a:rPr>
-              <a:t>4/12</a:t>
+              <a:t>4/13</a:t>
             </a:r>
             <a:endParaRPr lang="en-US" sz="1050" dirty="0"/>
           </a:p>
@@ -8481,8 +8884,8 @@
         </p:blipFill>
         <p:spPr>
           <a:xfrm>
-            <a:off x="566928" y="1426464"/>
-            <a:ext cx="8010144" cy="2450592"/>
+            <a:off x="566928" y="1389888"/>
+            <a:ext cx="8010144" cy="2487168"/>
           </a:xfrm>
           <a:prstGeom prst="rect">
             <a:avLst/>
@@ -8542,7 +8945,7 @@
                 <a:ea typeface="Arial" pitchFamily="34" charset="-122"/>
                 <a:cs typeface="Arial" pitchFamily="34" charset="-120"/>
               </a:rPr>
-              <a:t>Neu sind nur drei Dinge: build, die .env-Datei und der Healthcheck. Alles andere kennt ihr aus den letzten drei Abenden.</a:t>
+              <a:t>Neu sind nur vier Dinge: build, die .env-Datei, der Healthcheck und der Heartbeat der Module. Alles andere kennt ihr aus den letzten drei Abenden.</a:t>
             </a:r>
             <a:endParaRPr lang="en-US" sz="1200" dirty="0"/>
           </a:p>
@@ -8643,7 +9046,7 @@
                 <a:ea typeface="Arial" pitchFamily="34" charset="-122"/>
                 <a:cs typeface="Arial" pitchFamily="34" charset="-120"/>
               </a:rPr>
-              <a:t>5/12</a:t>
+              <a:t>5/13</a:t>
             </a:r>
             <a:endParaRPr lang="en-US" sz="1050" dirty="0"/>
           </a:p>
@@ -8957,7 +9360,7 @@
                 <a:ea typeface="Arial" pitchFamily="34" charset="-122"/>
                 <a:cs typeface="Arial" pitchFamily="34" charset="-120"/>
               </a:rPr>
-              <a:t>6/12</a:t>
+              <a:t>6/13</a:t>
             </a:r>
             <a:endParaRPr lang="en-US" sz="1050" dirty="0"/>
           </a:p>
@@ -9048,7 +9451,7 @@
                 <a:ea typeface="Arial" pitchFamily="34" charset="-122"/>
                 <a:cs typeface="Arial" pitchFamily="34" charset="-120"/>
               </a:rPr>
-              <a:t>HEALTHCHECK UND DEPENDS_ON</a:t>
+              <a:t>ALLE DREI SEKUNDEN EIN LEBENSZEICHEN</a:t>
             </a:r>
             <a:endParaRPr lang="en-US" sz="1150" dirty="0"/>
           </a:p>
@@ -9087,7 +9490,7 @@
                 <a:ea typeface="Arial" pitchFamily="34" charset="-122"/>
                 <a:cs typeface="Arial" pitchFamily="34" charset="-120"/>
               </a:rPr>
-              <a:t>Warten, bis die Datenbank bereit ist</a:t>
+              <a:t>Der Heartbeat der Module</a:t>
             </a:r>
             <a:endParaRPr lang="en-US" sz="2600" dirty="0"/>
           </a:p>
@@ -9095,7 +9498,7 @@
       </p:sp>
       <p:pic>
         <p:nvPicPr>
-          <p:cNvPr id="5" name="Image 0" descr="/Users/jacobmenge/Desktop/kurs-26.2b-orga/folienwerkstatt/assets/diagramme/health-depends.png">    </p:cNvPr>
+          <p:cNvPr id="5" name="Image 0" descr="/Users/jacobmenge/Desktop/kurs-26.2b-orga/folienwerkstatt/assets/diagramme/heartbeat-bild.png">    </p:cNvPr>
           <p:cNvPicPr>
             <a:picLocks noChangeAspect="1"/>
           </p:cNvPicPr>
@@ -9109,8 +9512,8 @@
         </p:blipFill>
         <p:spPr>
           <a:xfrm>
-            <a:off x="566928" y="1499616"/>
-            <a:ext cx="8010144" cy="2286000"/>
+            <a:off x="566928" y="1517904"/>
+            <a:ext cx="8010144" cy="2304288"/>
           </a:xfrm>
           <a:prstGeom prst="rect">
             <a:avLst/>
@@ -9125,7 +9528,7 @@
         </p:nvSpPr>
         <p:spPr>
           <a:xfrm>
-            <a:off x="566928" y="4069080"/>
+            <a:off x="566928" y="4087368"/>
             <a:ext cx="32004" cy="256032"/>
           </a:xfrm>
           <a:prstGeom prst="rect">
@@ -9145,7 +9548,7 @@
         </p:nvSpPr>
         <p:spPr>
           <a:xfrm>
-            <a:off x="749808" y="4023360"/>
+            <a:off x="749808" y="4041648"/>
             <a:ext cx="7827264" cy="402336"/>
           </a:xfrm>
           <a:prstGeom prst="rect">
@@ -9170,7 +9573,7 @@
                 <a:ea typeface="Arial" pitchFamily="34" charset="-122"/>
                 <a:cs typeface="Arial" pitchFamily="34" charset="-120"/>
               </a:rPr>
-              <a:t>Der Profi-Baustein des Abends: Startreihenfolge nicht hoffen, sondern absichern. Ein Healthcheck ist ein kleiner Test, den Docker regelmäßig im Container ausführt.</a:t>
+              <a:t>Jedes Modul ist ein eigener Container aus demselben Image, nur MODUL_NAME unterscheidet sie: die Umgebungsvariablen-Lektion von Montag in groß.</a:t>
             </a:r>
             <a:endParaRPr lang="en-US" sz="1200" dirty="0"/>
           </a:p>
@@ -9271,7 +9674,7 @@
                 <a:ea typeface="Arial" pitchFamily="34" charset="-122"/>
                 <a:cs typeface="Arial" pitchFamily="34" charset="-120"/>
               </a:rPr>
-              <a:t>7/12</a:t>
+              <a:t>7/13</a:t>
             </a:r>
             <a:endParaRPr lang="en-US" sz="1050" dirty="0"/>
           </a:p>

--- a/folien/08-docker-praxis.pptx
+++ b/folien/08-docker-praxis.pptx
@@ -22,9 +22,15 @@
     <p:sldId id="270" r:id="rId16"/>
     <p:sldId id="271" r:id="rId17"/>
     <p:sldId id="272" r:id="rId18"/>
+    <p:sldId id="273" r:id="rId19"/>
+    <p:sldId id="274" r:id="rId20"/>
+    <p:sldId id="275" r:id="rId21"/>
+    <p:sldId id="276" r:id="rId22"/>
+    <p:sldId id="277" r:id="rId23"/>
+    <p:sldId id="278" r:id="rId24"/>
   </p:sldIdLst>
   <p:notesMasterIdLst>
-    <p:notesMasterId r:id="rId19"/>
+    <p:notesMasterId r:id="rId25"/>
   </p:notesMasterIdLst>
   <p:sldSz cx="9144000" cy="5143500"/>
   <p:notesSz cx="5143500" cy="9144000"/>
@@ -1264,6 +1270,182 @@
 </p:notes>
 </file>
 
+<file path=ppt/notesSlides/notesSlide18.xml><?xml version="1.0" encoding="utf-8"?>
+<p:notes xmlns:a="http://schemas.openxmlformats.org/drawingml/2006/main" xmlns:r="http://schemas.openxmlformats.org/officeDocument/2006/relationships" xmlns:p="http://schemas.openxmlformats.org/presentationml/2006/main">
+  <p:cSld>
+    <p:spTree>
+      <p:nvGrpSpPr>
+        <p:cNvPr id="1" name=""/>
+        <p:cNvGrpSpPr/>
+        <p:nvPr/>
+      </p:nvGrpSpPr>
+      <p:grpSpPr>
+        <a:xfrm>
+          <a:off x="0" y="0"/>
+          <a:ext cx="0" cy="0"/>
+          <a:chOff x="0" y="0"/>
+          <a:chExt cx="0" cy="0"/>
+        </a:xfrm>
+      </p:grpSpPr>
+      <p:sp>
+        <p:nvSpPr>
+          <p:cNvPr id="2" name="Slide Image Placeholder 1"/>
+          <p:cNvSpPr>
+            <a:spLocks noGrp="1" noRot="1" noChangeAspect="1"/>
+          </p:cNvSpPr>
+          <p:nvPr>
+            <p:ph type="sldImg"/>
+          </p:nvPr>
+        </p:nvSpPr>
+        <p:spPr/>
+      </p:sp>
+      <p:sp>
+        <p:nvSpPr>
+          <p:cNvPr id="3" name="Notes Placeholder 2"/>
+          <p:cNvSpPr>
+            <a:spLocks noGrp="1"/>
+          </p:cNvSpPr>
+          <p:nvPr>
+            <p:ph type="body" idx="1"/>
+          </p:nvPr>
+        </p:nvSpPr>
+        <p:spPr/>
+        <p:txBody>
+          <a:bodyPr/>
+          <a:lstStyle/>
+          <a:p>
+            <a:r>
+              <a:rPr lang="en-US" dirty="0"/>
+              <a:t/>
+            </a:r>
+            <a:endParaRPr lang="en-US" dirty="0"/>
+          </a:p>
+        </p:txBody>
+      </p:sp>
+      <p:sp>
+        <p:nvSpPr>
+          <p:cNvPr id="4" name="Slide Number Placeholder 3"/>
+          <p:cNvSpPr>
+            <a:spLocks noGrp="1"/>
+          </p:cNvSpPr>
+          <p:nvPr>
+            <p:ph type="sldNum" sz="quarter" idx="10"/>
+          </p:nvPr>
+        </p:nvSpPr>
+        <p:spPr/>
+        <p:txBody>
+          <a:bodyPr/>
+          <a:lstStyle/>
+          <a:p>
+            <a:fld id="{F7021451-1387-4CA6-816F-3879F97B5CBC}" type="slidenum">
+              <a:rPr lang="en-US"/>
+              <a:t>18</a:t>
+            </a:fld>
+            <a:endParaRPr lang="en-US"/>
+          </a:p>
+        </p:txBody>
+      </p:sp>
+    </p:spTree>
+    <p:extLst>
+      <p:ext uri="{BB962C8B-B14F-4D97-AF65-F5344CB8AC3E}">
+        <p14:creationId xmlns:p14="http://schemas.microsoft.com/office/powerpoint/2010/main" val="1024086991"/>
+      </p:ext>
+    </p:extLst>
+  </p:cSld>
+  <p:clrMapOvr>
+    <a:masterClrMapping/>
+  </p:clrMapOvr>
+</p:notes>
+</file>
+
+<file path=ppt/notesSlides/notesSlide19.xml><?xml version="1.0" encoding="utf-8"?>
+<p:notes xmlns:a="http://schemas.openxmlformats.org/drawingml/2006/main" xmlns:r="http://schemas.openxmlformats.org/officeDocument/2006/relationships" xmlns:p="http://schemas.openxmlformats.org/presentationml/2006/main">
+  <p:cSld>
+    <p:spTree>
+      <p:nvGrpSpPr>
+        <p:cNvPr id="1" name=""/>
+        <p:cNvGrpSpPr/>
+        <p:nvPr/>
+      </p:nvGrpSpPr>
+      <p:grpSpPr>
+        <a:xfrm>
+          <a:off x="0" y="0"/>
+          <a:ext cx="0" cy="0"/>
+          <a:chOff x="0" y="0"/>
+          <a:chExt cx="0" cy="0"/>
+        </a:xfrm>
+      </p:grpSpPr>
+      <p:sp>
+        <p:nvSpPr>
+          <p:cNvPr id="2" name="Slide Image Placeholder 1"/>
+          <p:cNvSpPr>
+            <a:spLocks noGrp="1" noRot="1" noChangeAspect="1"/>
+          </p:cNvSpPr>
+          <p:nvPr>
+            <p:ph type="sldImg"/>
+          </p:nvPr>
+        </p:nvSpPr>
+        <p:spPr/>
+      </p:sp>
+      <p:sp>
+        <p:nvSpPr>
+          <p:cNvPr id="3" name="Notes Placeholder 2"/>
+          <p:cNvSpPr>
+            <a:spLocks noGrp="1"/>
+          </p:cNvSpPr>
+          <p:nvPr>
+            <p:ph type="body" idx="1"/>
+          </p:nvPr>
+        </p:nvSpPr>
+        <p:spPr/>
+        <p:txBody>
+          <a:bodyPr/>
+          <a:lstStyle/>
+          <a:p>
+            <a:r>
+              <a:rPr lang="en-US" dirty="0"/>
+              <a:t/>
+            </a:r>
+            <a:endParaRPr lang="en-US" dirty="0"/>
+          </a:p>
+        </p:txBody>
+      </p:sp>
+      <p:sp>
+        <p:nvSpPr>
+          <p:cNvPr id="4" name="Slide Number Placeholder 3"/>
+          <p:cNvSpPr>
+            <a:spLocks noGrp="1"/>
+          </p:cNvSpPr>
+          <p:nvPr>
+            <p:ph type="sldNum" sz="quarter" idx="10"/>
+          </p:nvPr>
+        </p:nvSpPr>
+        <p:spPr/>
+        <p:txBody>
+          <a:bodyPr/>
+          <a:lstStyle/>
+          <a:p>
+            <a:fld id="{F7021451-1387-4CA6-816F-3879F97B5CBC}" type="slidenum">
+              <a:rPr lang="en-US"/>
+              <a:t>19</a:t>
+            </a:fld>
+            <a:endParaRPr lang="en-US"/>
+          </a:p>
+        </p:txBody>
+      </p:sp>
+    </p:spTree>
+    <p:extLst>
+      <p:ext uri="{BB962C8B-B14F-4D97-AF65-F5344CB8AC3E}">
+        <p14:creationId xmlns:p14="http://schemas.microsoft.com/office/powerpoint/2010/main" val="1024086991"/>
+      </p:ext>
+    </p:extLst>
+  </p:cSld>
+  <p:clrMapOvr>
+    <a:masterClrMapping/>
+  </p:clrMapOvr>
+</p:notes>
+</file>
+
 <file path=ppt/notesSlides/notesSlide2.xml><?xml version="1.0" encoding="utf-8"?>
 <p:notes xmlns:a="http://schemas.openxmlformats.org/drawingml/2006/main" xmlns:r="http://schemas.openxmlformats.org/officeDocument/2006/relationships" xmlns:p="http://schemas.openxmlformats.org/presentationml/2006/main">
   <p:cSld>
@@ -1334,6 +1516,358 @@
             <a:fld id="{F7021451-1387-4CA6-816F-3879F97B5CBC}" type="slidenum">
               <a:rPr lang="en-US"/>
               <a:t>2</a:t>
+            </a:fld>
+            <a:endParaRPr lang="en-US"/>
+          </a:p>
+        </p:txBody>
+      </p:sp>
+    </p:spTree>
+    <p:extLst>
+      <p:ext uri="{BB962C8B-B14F-4D97-AF65-F5344CB8AC3E}">
+        <p14:creationId xmlns:p14="http://schemas.microsoft.com/office/powerpoint/2010/main" val="1024086991"/>
+      </p:ext>
+    </p:extLst>
+  </p:cSld>
+  <p:clrMapOvr>
+    <a:masterClrMapping/>
+  </p:clrMapOvr>
+</p:notes>
+</file>
+
+<file path=ppt/notesSlides/notesSlide20.xml><?xml version="1.0" encoding="utf-8"?>
+<p:notes xmlns:a="http://schemas.openxmlformats.org/drawingml/2006/main" xmlns:r="http://schemas.openxmlformats.org/officeDocument/2006/relationships" xmlns:p="http://schemas.openxmlformats.org/presentationml/2006/main">
+  <p:cSld>
+    <p:spTree>
+      <p:nvGrpSpPr>
+        <p:cNvPr id="1" name=""/>
+        <p:cNvGrpSpPr/>
+        <p:nvPr/>
+      </p:nvGrpSpPr>
+      <p:grpSpPr>
+        <a:xfrm>
+          <a:off x="0" y="0"/>
+          <a:ext cx="0" cy="0"/>
+          <a:chOff x="0" y="0"/>
+          <a:chExt cx="0" cy="0"/>
+        </a:xfrm>
+      </p:grpSpPr>
+      <p:sp>
+        <p:nvSpPr>
+          <p:cNvPr id="2" name="Slide Image Placeholder 1"/>
+          <p:cNvSpPr>
+            <a:spLocks noGrp="1" noRot="1" noChangeAspect="1"/>
+          </p:cNvSpPr>
+          <p:nvPr>
+            <p:ph type="sldImg"/>
+          </p:nvPr>
+        </p:nvSpPr>
+        <p:spPr/>
+      </p:sp>
+      <p:sp>
+        <p:nvSpPr>
+          <p:cNvPr id="3" name="Notes Placeholder 2"/>
+          <p:cNvSpPr>
+            <a:spLocks noGrp="1"/>
+          </p:cNvSpPr>
+          <p:nvPr>
+            <p:ph type="body" idx="1"/>
+          </p:nvPr>
+        </p:nvSpPr>
+        <p:spPr/>
+        <p:txBody>
+          <a:bodyPr/>
+          <a:lstStyle/>
+          <a:p>
+            <a:r>
+              <a:rPr lang="en-US" dirty="0"/>
+              <a:t/>
+            </a:r>
+            <a:endParaRPr lang="en-US" dirty="0"/>
+          </a:p>
+        </p:txBody>
+      </p:sp>
+      <p:sp>
+        <p:nvSpPr>
+          <p:cNvPr id="4" name="Slide Number Placeholder 3"/>
+          <p:cNvSpPr>
+            <a:spLocks noGrp="1"/>
+          </p:cNvSpPr>
+          <p:nvPr>
+            <p:ph type="sldNum" sz="quarter" idx="10"/>
+          </p:nvPr>
+        </p:nvSpPr>
+        <p:spPr/>
+        <p:txBody>
+          <a:bodyPr/>
+          <a:lstStyle/>
+          <a:p>
+            <a:fld id="{F7021451-1387-4CA6-816F-3879F97B5CBC}" type="slidenum">
+              <a:rPr lang="en-US"/>
+              <a:t>20</a:t>
+            </a:fld>
+            <a:endParaRPr lang="en-US"/>
+          </a:p>
+        </p:txBody>
+      </p:sp>
+    </p:spTree>
+    <p:extLst>
+      <p:ext uri="{BB962C8B-B14F-4D97-AF65-F5344CB8AC3E}">
+        <p14:creationId xmlns:p14="http://schemas.microsoft.com/office/powerpoint/2010/main" val="1024086991"/>
+      </p:ext>
+    </p:extLst>
+  </p:cSld>
+  <p:clrMapOvr>
+    <a:masterClrMapping/>
+  </p:clrMapOvr>
+</p:notes>
+</file>
+
+<file path=ppt/notesSlides/notesSlide21.xml><?xml version="1.0" encoding="utf-8"?>
+<p:notes xmlns:a="http://schemas.openxmlformats.org/drawingml/2006/main" xmlns:r="http://schemas.openxmlformats.org/officeDocument/2006/relationships" xmlns:p="http://schemas.openxmlformats.org/presentationml/2006/main">
+  <p:cSld>
+    <p:spTree>
+      <p:nvGrpSpPr>
+        <p:cNvPr id="1" name=""/>
+        <p:cNvGrpSpPr/>
+        <p:nvPr/>
+      </p:nvGrpSpPr>
+      <p:grpSpPr>
+        <a:xfrm>
+          <a:off x="0" y="0"/>
+          <a:ext cx="0" cy="0"/>
+          <a:chOff x="0" y="0"/>
+          <a:chExt cx="0" cy="0"/>
+        </a:xfrm>
+      </p:grpSpPr>
+      <p:sp>
+        <p:nvSpPr>
+          <p:cNvPr id="2" name="Slide Image Placeholder 1"/>
+          <p:cNvSpPr>
+            <a:spLocks noGrp="1" noRot="1" noChangeAspect="1"/>
+          </p:cNvSpPr>
+          <p:nvPr>
+            <p:ph type="sldImg"/>
+          </p:nvPr>
+        </p:nvSpPr>
+        <p:spPr/>
+      </p:sp>
+      <p:sp>
+        <p:nvSpPr>
+          <p:cNvPr id="3" name="Notes Placeholder 2"/>
+          <p:cNvSpPr>
+            <a:spLocks noGrp="1"/>
+          </p:cNvSpPr>
+          <p:nvPr>
+            <p:ph type="body" idx="1"/>
+          </p:nvPr>
+        </p:nvSpPr>
+        <p:spPr/>
+        <p:txBody>
+          <a:bodyPr/>
+          <a:lstStyle/>
+          <a:p>
+            <a:r>
+              <a:rPr lang="en-US" dirty="0"/>
+              <a:t/>
+            </a:r>
+            <a:endParaRPr lang="en-US" dirty="0"/>
+          </a:p>
+        </p:txBody>
+      </p:sp>
+      <p:sp>
+        <p:nvSpPr>
+          <p:cNvPr id="4" name="Slide Number Placeholder 3"/>
+          <p:cNvSpPr>
+            <a:spLocks noGrp="1"/>
+          </p:cNvSpPr>
+          <p:nvPr>
+            <p:ph type="sldNum" sz="quarter" idx="10"/>
+          </p:nvPr>
+        </p:nvSpPr>
+        <p:spPr/>
+        <p:txBody>
+          <a:bodyPr/>
+          <a:lstStyle/>
+          <a:p>
+            <a:fld id="{F7021451-1387-4CA6-816F-3879F97B5CBC}" type="slidenum">
+              <a:rPr lang="en-US"/>
+              <a:t>21</a:t>
+            </a:fld>
+            <a:endParaRPr lang="en-US"/>
+          </a:p>
+        </p:txBody>
+      </p:sp>
+    </p:spTree>
+    <p:extLst>
+      <p:ext uri="{BB962C8B-B14F-4D97-AF65-F5344CB8AC3E}">
+        <p14:creationId xmlns:p14="http://schemas.microsoft.com/office/powerpoint/2010/main" val="1024086991"/>
+      </p:ext>
+    </p:extLst>
+  </p:cSld>
+  <p:clrMapOvr>
+    <a:masterClrMapping/>
+  </p:clrMapOvr>
+</p:notes>
+</file>
+
+<file path=ppt/notesSlides/notesSlide22.xml><?xml version="1.0" encoding="utf-8"?>
+<p:notes xmlns:a="http://schemas.openxmlformats.org/drawingml/2006/main" xmlns:r="http://schemas.openxmlformats.org/officeDocument/2006/relationships" xmlns:p="http://schemas.openxmlformats.org/presentationml/2006/main">
+  <p:cSld>
+    <p:spTree>
+      <p:nvGrpSpPr>
+        <p:cNvPr id="1" name=""/>
+        <p:cNvGrpSpPr/>
+        <p:nvPr/>
+      </p:nvGrpSpPr>
+      <p:grpSpPr>
+        <a:xfrm>
+          <a:off x="0" y="0"/>
+          <a:ext cx="0" cy="0"/>
+          <a:chOff x="0" y="0"/>
+          <a:chExt cx="0" cy="0"/>
+        </a:xfrm>
+      </p:grpSpPr>
+      <p:sp>
+        <p:nvSpPr>
+          <p:cNvPr id="2" name="Slide Image Placeholder 1"/>
+          <p:cNvSpPr>
+            <a:spLocks noGrp="1" noRot="1" noChangeAspect="1"/>
+          </p:cNvSpPr>
+          <p:nvPr>
+            <p:ph type="sldImg"/>
+          </p:nvPr>
+        </p:nvSpPr>
+        <p:spPr/>
+      </p:sp>
+      <p:sp>
+        <p:nvSpPr>
+          <p:cNvPr id="3" name="Notes Placeholder 2"/>
+          <p:cNvSpPr>
+            <a:spLocks noGrp="1"/>
+          </p:cNvSpPr>
+          <p:nvPr>
+            <p:ph type="body" idx="1"/>
+          </p:nvPr>
+        </p:nvSpPr>
+        <p:spPr/>
+        <p:txBody>
+          <a:bodyPr/>
+          <a:lstStyle/>
+          <a:p>
+            <a:r>
+              <a:rPr lang="en-US" dirty="0"/>
+              <a:t/>
+            </a:r>
+            <a:endParaRPr lang="en-US" dirty="0"/>
+          </a:p>
+        </p:txBody>
+      </p:sp>
+      <p:sp>
+        <p:nvSpPr>
+          <p:cNvPr id="4" name="Slide Number Placeholder 3"/>
+          <p:cNvSpPr>
+            <a:spLocks noGrp="1"/>
+          </p:cNvSpPr>
+          <p:nvPr>
+            <p:ph type="sldNum" sz="quarter" idx="10"/>
+          </p:nvPr>
+        </p:nvSpPr>
+        <p:spPr/>
+        <p:txBody>
+          <a:bodyPr/>
+          <a:lstStyle/>
+          <a:p>
+            <a:fld id="{F7021451-1387-4CA6-816F-3879F97B5CBC}" type="slidenum">
+              <a:rPr lang="en-US"/>
+              <a:t>22</a:t>
+            </a:fld>
+            <a:endParaRPr lang="en-US"/>
+          </a:p>
+        </p:txBody>
+      </p:sp>
+    </p:spTree>
+    <p:extLst>
+      <p:ext uri="{BB962C8B-B14F-4D97-AF65-F5344CB8AC3E}">
+        <p14:creationId xmlns:p14="http://schemas.microsoft.com/office/powerpoint/2010/main" val="1024086991"/>
+      </p:ext>
+    </p:extLst>
+  </p:cSld>
+  <p:clrMapOvr>
+    <a:masterClrMapping/>
+  </p:clrMapOvr>
+</p:notes>
+</file>
+
+<file path=ppt/notesSlides/notesSlide23.xml><?xml version="1.0" encoding="utf-8"?>
+<p:notes xmlns:a="http://schemas.openxmlformats.org/drawingml/2006/main" xmlns:r="http://schemas.openxmlformats.org/officeDocument/2006/relationships" xmlns:p="http://schemas.openxmlformats.org/presentationml/2006/main">
+  <p:cSld>
+    <p:spTree>
+      <p:nvGrpSpPr>
+        <p:cNvPr id="1" name=""/>
+        <p:cNvGrpSpPr/>
+        <p:nvPr/>
+      </p:nvGrpSpPr>
+      <p:grpSpPr>
+        <a:xfrm>
+          <a:off x="0" y="0"/>
+          <a:ext cx="0" cy="0"/>
+          <a:chOff x="0" y="0"/>
+          <a:chExt cx="0" cy="0"/>
+        </a:xfrm>
+      </p:grpSpPr>
+      <p:sp>
+        <p:nvSpPr>
+          <p:cNvPr id="2" name="Slide Image Placeholder 1"/>
+          <p:cNvSpPr>
+            <a:spLocks noGrp="1" noRot="1" noChangeAspect="1"/>
+          </p:cNvSpPr>
+          <p:nvPr>
+            <p:ph type="sldImg"/>
+          </p:nvPr>
+        </p:nvSpPr>
+        <p:spPr/>
+      </p:sp>
+      <p:sp>
+        <p:nvSpPr>
+          <p:cNvPr id="3" name="Notes Placeholder 2"/>
+          <p:cNvSpPr>
+            <a:spLocks noGrp="1"/>
+          </p:cNvSpPr>
+          <p:nvPr>
+            <p:ph type="body" idx="1"/>
+          </p:nvPr>
+        </p:nvSpPr>
+        <p:spPr/>
+        <p:txBody>
+          <a:bodyPr/>
+          <a:lstStyle/>
+          <a:p>
+            <a:r>
+              <a:rPr lang="en-US" dirty="0"/>
+              <a:t/>
+            </a:r>
+            <a:endParaRPr lang="en-US" dirty="0"/>
+          </a:p>
+        </p:txBody>
+      </p:sp>
+      <p:sp>
+        <p:nvSpPr>
+          <p:cNvPr id="4" name="Slide Number Placeholder 3"/>
+          <p:cNvSpPr>
+            <a:spLocks noGrp="1"/>
+          </p:cNvSpPr>
+          <p:nvPr>
+            <p:ph type="sldNum" sz="quarter" idx="10"/>
+          </p:nvPr>
+        </p:nvSpPr>
+        <p:spPr/>
+        <p:txBody>
+          <a:bodyPr/>
+          <a:lstStyle/>
+          <a:p>
+            <a:fld id="{F7021451-1387-4CA6-816F-3879F97B5CBC}" type="slidenum">
+              <a:rPr lang="en-US"/>
+              <a:t>23</a:t>
             </a:fld>
             <a:endParaRPr lang="en-US"/>
           </a:p>
@@ -2568,7 +3102,7 @@
                 <a:ea typeface="Arial" pitchFamily="34" charset="-122"/>
                 <a:cs typeface="Arial" pitchFamily="34" charset="-120"/>
               </a:rPr>
-              <a:t>HEALTHCHECK UND DEPENDS_ON</a:t>
+              <a:t>MODUL/DOCKERFILE, ZEILE FÜR ZEILE</a:t>
             </a:r>
             <a:endParaRPr lang="en-US" sz="1150" dirty="0"/>
           </a:p>
@@ -2607,7 +3141,7 @@
                 <a:ea typeface="Arial" pitchFamily="34" charset="-122"/>
                 <a:cs typeface="Arial" pitchFamily="34" charset="-120"/>
               </a:rPr>
-              <a:t>Warten, bis die Datenbank bereit ist</a:t>
+              <a:t>Der Bauplan im Ordner</a:t>
             </a:r>
             <a:endParaRPr lang="en-US" sz="2600" dirty="0"/>
           </a:p>
@@ -2615,7 +3149,7 @@
       </p:sp>
       <p:pic>
         <p:nvPicPr>
-          <p:cNvPr id="5" name="Image 0" descr="/Users/jacobmenge/Desktop/kurs-26.2b-orga/folienwerkstatt/assets/diagramme/health-depends.png">    </p:cNvPr>
+          <p:cNvPr id="5" name="Image 0" descr="/Users/jacobmenge/Desktop/kurs-26.2b-orga/folienwerkstatt/assets/diagramme/dockerfile-modul.png">    </p:cNvPr>
           <p:cNvPicPr>
             <a:picLocks noChangeAspect="1"/>
           </p:cNvPicPr>
@@ -2629,8 +3163,8 @@
         </p:blipFill>
         <p:spPr>
           <a:xfrm>
-            <a:off x="566928" y="1499616"/>
-            <a:ext cx="8010144" cy="2286000"/>
+            <a:off x="566928" y="1481328"/>
+            <a:ext cx="8010144" cy="2322576"/>
           </a:xfrm>
           <a:prstGeom prst="rect">
             <a:avLst/>
@@ -2645,7 +3179,7 @@
         </p:nvSpPr>
         <p:spPr>
           <a:xfrm>
-            <a:off x="566928" y="4069080"/>
+            <a:off x="566928" y="4087368"/>
             <a:ext cx="32004" cy="256032"/>
           </a:xfrm>
           <a:prstGeom prst="rect">
@@ -2665,7 +3199,7 @@
         </p:nvSpPr>
         <p:spPr>
           <a:xfrm>
-            <a:off x="749808" y="4023360"/>
+            <a:off x="749808" y="4041648"/>
             <a:ext cx="7827264" cy="402336"/>
           </a:xfrm>
           <a:prstGeom prst="rect">
@@ -2690,7 +3224,7 @@
                 <a:ea typeface="Arial" pitchFamily="34" charset="-122"/>
                 <a:cs typeface="Arial" pitchFamily="34" charset="-120"/>
               </a:rPr>
-              <a:t>Der Profi-Baustein des Abends: Startreihenfolge nicht hoffen, sondern absichern. Ein Healthcheck ist ein kleiner Test, den Docker regelmäßig im Container ausführt.</a:t>
+              <a:t>Genau diese Datei führt Compose aus, wenn in eurer compose.yaml build: ./modul steht. Die Dockerfiles der anderen Ordner lest ihr mit demselben Werkzeugkasten.</a:t>
             </a:r>
             <a:endParaRPr lang="en-US" sz="1200" dirty="0"/>
           </a:p>
@@ -2791,7 +3325,7 @@
                 <a:ea typeface="Arial" pitchFamily="34" charset="-122"/>
                 <a:cs typeface="Arial" pitchFamily="34" charset="-120"/>
               </a:rPr>
-              <a:t>8/13</a:t>
+              <a:t>8/19</a:t>
             </a:r>
             <a:endParaRPr lang="en-US" sz="1050" dirty="0"/>
           </a:p>
@@ -2837,48 +3371,150 @@
         </p:nvSpPr>
         <p:spPr>
           <a:xfrm>
-            <a:off x="6355080" y="0"/>
-            <a:ext cx="2788920" cy="5143500"/>
+            <a:off x="566928" y="201168"/>
+            <a:ext cx="475488" cy="50292"/>
           </a:xfrm>
           <a:prstGeom prst="rect">
             <a:avLst/>
           </a:prstGeom>
           <a:solidFill>
-            <a:srgbClr val="FBF2E3"/>
+            <a:srgbClr val="0F7C86"/>
           </a:solidFill>
           <a:ln/>
         </p:spPr>
       </p:sp>
       <p:sp>
         <p:nvSpPr>
-          <p:cNvPr id="3" name="Shape 1"/>
-          <p:cNvSpPr/>
-          <p:nvPr/>
-        </p:nvSpPr>
-        <p:spPr>
-          <a:xfrm>
-            <a:off x="6355080" y="0"/>
-            <a:ext cx="45720" cy="5143500"/>
+          <p:cNvPr id="3" name="Text 1"/>
+          <p:cNvSpPr/>
+          <p:nvPr/>
+        </p:nvSpPr>
+        <p:spPr>
+          <a:xfrm>
+            <a:off x="566928" y="384048"/>
+            <a:ext cx="8010144" cy="237744"/>
+          </a:xfrm>
+          <a:prstGeom prst="rect">
+            <a:avLst/>
+          </a:prstGeom>
+          <a:noFill/>
+          <a:ln/>
+        </p:spPr>
+        <p:txBody>
+          <a:bodyPr wrap="square" lIns="0" tIns="0" rIns="0" bIns="0" rtlCol="0" anchor="ctr"/>
+          <a:lstStyle/>
+          <a:p>
+            <a:pPr indent="0" marL="0">
+              <a:buNone/>
+            </a:pPr>
+            <a:r>
+              <a:rPr lang="en-US" sz="1150" b="1" spc="180" kern="0" dirty="0">
+                <a:solidFill>
+                  <a:srgbClr val="0F7C86"/>
+                </a:solidFill>
+                <a:latin typeface="Arial" pitchFamily="34" charset="0"/>
+                <a:ea typeface="Arial" pitchFamily="34" charset="-122"/>
+                <a:cs typeface="Arial" pitchFamily="34" charset="-120"/>
+              </a:rPr>
+              <a:t>DIE .ENV-DATEI</a:t>
+            </a:r>
+            <a:endParaRPr lang="en-US" sz="1150" dirty="0"/>
+          </a:p>
+        </p:txBody>
+      </p:sp>
+      <p:sp>
+        <p:nvSpPr>
+          <p:cNvPr id="4" name="Text 2"/>
+          <p:cNvSpPr/>
+          <p:nvPr/>
+        </p:nvSpPr>
+        <p:spPr>
+          <a:xfrm>
+            <a:off x="566928" y="731520"/>
+            <a:ext cx="8010144" cy="603504"/>
+          </a:xfrm>
+          <a:prstGeom prst="rect">
+            <a:avLst/>
+          </a:prstGeom>
+          <a:noFill/>
+          <a:ln/>
+        </p:spPr>
+        <p:txBody>
+          <a:bodyPr wrap="square" lIns="0" tIns="0" rIns="0" bIns="0" rtlCol="0" anchor="t"/>
+          <a:lstStyle/>
+          <a:p>
+            <a:pPr indent="0" marL="0">
+              <a:buNone/>
+            </a:pPr>
+            <a:r>
+              <a:rPr lang="en-US" sz="2600" b="1" dirty="0">
+                <a:solidFill>
+                  <a:srgbClr val="272E52"/>
+                </a:solidFill>
+                <a:latin typeface="Arial" pitchFamily="34" charset="0"/>
+                <a:ea typeface="Arial" pitchFamily="34" charset="-122"/>
+                <a:cs typeface="Arial" pitchFamily="34" charset="-120"/>
+              </a:rPr>
+              <a:t>Eine Stelle für alle Werte</a:t>
+            </a:r>
+            <a:endParaRPr lang="en-US" sz="2600" dirty="0"/>
+          </a:p>
+        </p:txBody>
+      </p:sp>
+      <p:pic>
+        <p:nvPicPr>
+          <p:cNvPr id="5" name="Image 0" descr="/Users/jacobmenge/Desktop/kurs-26.2b-orga/folienwerkstatt/assets/diagramme/env-datei.png">    </p:cNvPr>
+          <p:cNvPicPr>
+            <a:picLocks noChangeAspect="1"/>
+          </p:cNvPicPr>
+          <p:nvPr/>
+        </p:nvPicPr>
+        <p:blipFill>
+          <a:blip r:embed="rId1"/>
+          <a:stretch>
+            <a:fillRect/>
+          </a:stretch>
+        </p:blipFill>
+        <p:spPr>
+          <a:xfrm>
+            <a:off x="566928" y="1481328"/>
+            <a:ext cx="8010144" cy="2231136"/>
+          </a:xfrm>
+          <a:prstGeom prst="rect">
+            <a:avLst/>
+          </a:prstGeom>
+        </p:spPr>
+      </p:pic>
+      <p:sp>
+        <p:nvSpPr>
+          <p:cNvPr id="6" name="Shape 3"/>
+          <p:cNvSpPr/>
+          <p:nvPr/>
+        </p:nvSpPr>
+        <p:spPr>
+          <a:xfrm>
+            <a:off x="566928" y="4087368"/>
+            <a:ext cx="32004" cy="256032"/>
           </a:xfrm>
           <a:prstGeom prst="rect">
             <a:avLst/>
           </a:prstGeom>
           <a:solidFill>
-            <a:srgbClr val="9A6310"/>
+            <a:srgbClr val="0F7C86"/>
           </a:solidFill>
           <a:ln/>
         </p:spPr>
       </p:sp>
       <p:sp>
         <p:nvSpPr>
-          <p:cNvPr id="4" name="Text 2"/>
-          <p:cNvSpPr/>
-          <p:nvPr/>
-        </p:nvSpPr>
-        <p:spPr>
-          <a:xfrm>
-            <a:off x="6629400" y="1463040"/>
-            <a:ext cx="2194560" cy="1737360"/>
+          <p:cNvPr id="7" name="Text 4"/>
+          <p:cNvSpPr/>
+          <p:nvPr/>
+        </p:nvSpPr>
+        <p:spPr>
+          <a:xfrm>
+            <a:off x="749808" y="4041648"/>
+            <a:ext cx="7827264" cy="402336"/>
           </a:xfrm>
           <a:prstGeom prst="rect">
             <a:avLst/>
@@ -2890,109 +3526,73 @@
           <a:bodyPr wrap="square" lIns="0" tIns="0" rIns="0" bIns="0" rtlCol="0" anchor="ctr"/>
           <a:lstStyle/>
           <a:p>
-            <a:pPr algn="ctr" indent="0" marL="0">
-              <a:buNone/>
-            </a:pPr>
-            <a:r>
-              <a:rPr lang="en-US" sz="8400" b="1" dirty="0">
-                <a:solidFill>
-                  <a:srgbClr val="9A6310"/>
-                </a:solidFill>
-                <a:latin typeface="Arial" pitchFamily="34" charset="0"/>
-                <a:ea typeface="Arial" pitchFamily="34" charset="-122"/>
-                <a:cs typeface="Arial" pitchFamily="34" charset="-120"/>
-              </a:rPr>
-              <a:t>02</a:t>
-            </a:r>
-            <a:endParaRPr lang="en-US" sz="8400" dirty="0"/>
-          </a:p>
-        </p:txBody>
-      </p:sp>
-      <p:sp>
-        <p:nvSpPr>
-          <p:cNvPr id="5" name="Shape 3"/>
-          <p:cNvSpPr/>
-          <p:nvPr/>
-        </p:nvSpPr>
-        <p:spPr>
-          <a:xfrm>
-            <a:off x="566928" y="1883664"/>
-            <a:ext cx="475488" cy="50292"/>
-          </a:xfrm>
-          <a:prstGeom prst="rect">
-            <a:avLst/>
-          </a:prstGeom>
-          <a:solidFill>
-            <a:srgbClr val="9A6310"/>
-          </a:solidFill>
-          <a:ln/>
-        </p:spPr>
-      </p:sp>
-      <p:sp>
-        <p:nvSpPr>
-          <p:cNvPr id="6" name="Text 4"/>
-          <p:cNvSpPr/>
-          <p:nvPr/>
-        </p:nvSpPr>
-        <p:spPr>
-          <a:xfrm>
-            <a:off x="566928" y="2084832"/>
-            <a:ext cx="5394960" cy="868680"/>
-          </a:xfrm>
-          <a:prstGeom prst="rect">
-            <a:avLst/>
-          </a:prstGeom>
-          <a:noFill/>
-          <a:ln/>
-        </p:spPr>
-        <p:txBody>
-          <a:bodyPr wrap="square" lIns="0" tIns="0" rIns="0" bIns="0" rtlCol="0" anchor="t"/>
-          <a:lstStyle/>
-          <a:p>
-            <a:pPr indent="0" marL="0">
-              <a:buNone/>
-            </a:pPr>
-            <a:r>
-              <a:rPr lang="en-US" sz="3000" b="1" dirty="0">
-                <a:solidFill>
-                  <a:srgbClr val="272E52"/>
-                </a:solidFill>
-                <a:latin typeface="Arial" pitchFamily="34" charset="0"/>
-                <a:ea typeface="Arial" pitchFamily="34" charset="-122"/>
-                <a:cs typeface="Arial" pitchFamily="34" charset="-120"/>
-              </a:rPr>
-              <a:t>Eure Missionen</a:t>
-            </a:r>
-            <a:endParaRPr lang="en-US" sz="3000" dirty="0"/>
-          </a:p>
-        </p:txBody>
-      </p:sp>
-      <p:sp>
-        <p:nvSpPr>
-          <p:cNvPr id="7" name="Text 5"/>
-          <p:cNvSpPr/>
-          <p:nvPr/>
-        </p:nvSpPr>
-        <p:spPr>
-          <a:xfrm>
-            <a:off x="566928" y="3017520"/>
-            <a:ext cx="5394960" cy="548640"/>
-          </a:xfrm>
-          <a:prstGeom prst="rect">
-            <a:avLst/>
-          </a:prstGeom>
-          <a:noFill/>
-          <a:ln/>
-        </p:spPr>
-        <p:txBody>
-          <a:bodyPr wrap="square" lIns="0" tIns="0" rIns="0" bIns="0" rtlCol="0" anchor="t"/>
-          <a:lstStyle/>
-          <a:p>
-            <a:pPr indent="0" marL="0">
-              <a:buNone/>
-            </a:pPr>
-            <a:r>
-              <a:rPr lang="en-US" sz="1350" dirty="0">
+            <a:pPr indent="0" marL="0">
+              <a:buNone/>
+            </a:pPr>
+            <a:r>
+              <a:rPr lang="en-US" sz="1200" b="1" dirty="0">
+                <a:solidFill>
+                  <a:srgbClr val="434A63"/>
+                </a:solidFill>
+                <a:latin typeface="Arial" pitchFamily="34" charset="0"/>
+                <a:ea typeface="Arial" pitchFamily="34" charset="-122"/>
+                <a:cs typeface="Arial" pitchFamily="34" charset="-120"/>
+              </a:rPr>
+              <a:t>In echten Projekten steht die .env in der .gitignore: Zugangsdaten wandern nie ins Repository. Bei uns liegt deshalb nur die Vorlage .env.example im Repo.</a:t>
+            </a:r>
+            <a:endParaRPr lang="en-US" sz="1200" dirty="0"/>
+          </a:p>
+        </p:txBody>
+      </p:sp>
+      <p:sp>
+        <p:nvSpPr>
+          <p:cNvPr id="8" name="Shape 5"/>
+          <p:cNvSpPr/>
+          <p:nvPr/>
+        </p:nvSpPr>
+        <p:spPr>
+          <a:xfrm>
+            <a:off x="566928" y="4631436"/>
+            <a:ext cx="8010144" cy="0"/>
+          </a:xfrm>
+          <a:prstGeom prst="line">
+            <a:avLst/>
+          </a:prstGeom>
+          <a:noFill/>
+          <a:ln w="9525">
+            <a:solidFill>
+              <a:srgbClr val="DFE3F0"/>
+            </a:solidFill>
+            <a:prstDash val="solid"/>
+          </a:ln>
+        </p:spPr>
+      </p:sp>
+      <p:sp>
+        <p:nvSpPr>
+          <p:cNvPr id="9" name="Text 6"/>
+          <p:cNvSpPr/>
+          <p:nvPr/>
+        </p:nvSpPr>
+        <p:spPr>
+          <a:xfrm>
+            <a:off x="566928" y="4722876"/>
+            <a:ext cx="5029200" cy="237744"/>
+          </a:xfrm>
+          <a:prstGeom prst="rect">
+            <a:avLst/>
+          </a:prstGeom>
+          <a:noFill/>
+          <a:ln/>
+        </p:spPr>
+        <p:txBody>
+          <a:bodyPr wrap="square" lIns="0" tIns="0" rIns="0" bIns="0" rtlCol="0" anchor="ctr"/>
+          <a:lstStyle/>
+          <a:p>
+            <a:pPr indent="0" marL="0">
+              <a:buNone/>
+            </a:pPr>
+            <a:r>
+              <a:rPr lang="en-US" sz="1050" spc="30" kern="0" dirty="0">
                 <a:solidFill>
                   <a:srgbClr val="5C6377"/>
                 </a:solidFill>
@@ -3000,9 +3600,48 @@
                 <a:ea typeface="Arial" pitchFamily="34" charset="-122"/>
                 <a:cs typeface="Arial" pitchFamily="34" charset="-120"/>
               </a:rPr>
-              <a:t>90 Minuten, sieben Missionen, drei Vertiefungen</a:t>
-            </a:r>
-            <a:endParaRPr lang="en-US" sz="1350" dirty="0"/>
+              <a:t>Das Szenario</a:t>
+            </a:r>
+            <a:endParaRPr lang="en-US" sz="1050" dirty="0"/>
+          </a:p>
+        </p:txBody>
+      </p:sp>
+      <p:sp>
+        <p:nvSpPr>
+          <p:cNvPr id="10" name="Text 7"/>
+          <p:cNvSpPr/>
+          <p:nvPr/>
+        </p:nvSpPr>
+        <p:spPr>
+          <a:xfrm>
+            <a:off x="8028432" y="4722876"/>
+            <a:ext cx="548640" cy="237744"/>
+          </a:xfrm>
+          <a:prstGeom prst="rect">
+            <a:avLst/>
+          </a:prstGeom>
+          <a:noFill/>
+          <a:ln/>
+        </p:spPr>
+        <p:txBody>
+          <a:bodyPr wrap="square" lIns="0" tIns="0" rIns="0" bIns="0" rtlCol="0" anchor="ctr"/>
+          <a:lstStyle/>
+          <a:p>
+            <a:pPr algn="r" indent="0" marL="0">
+              <a:buNone/>
+            </a:pPr>
+            <a:r>
+              <a:rPr lang="en-US" sz="1050" dirty="0">
+                <a:solidFill>
+                  <a:srgbClr val="5C6377"/>
+                </a:solidFill>
+                <a:latin typeface="Arial" pitchFamily="34" charset="0"/>
+                <a:ea typeface="Arial" pitchFamily="34" charset="-122"/>
+                <a:cs typeface="Arial" pitchFamily="34" charset="-120"/>
+              </a:rPr>
+              <a:t>9/19</a:t>
+            </a:r>
+            <a:endParaRPr lang="en-US" sz="1050" dirty="0"/>
           </a:p>
         </p:txBody>
       </p:sp>
@@ -3053,7 +3692,7 @@
             <a:avLst/>
           </a:prstGeom>
           <a:solidFill>
-            <a:srgbClr val="9A6310"/>
+            <a:srgbClr val="0F7C86"/>
           </a:solidFill>
           <a:ln/>
         </p:spPr>
@@ -3085,13 +3724,13 @@
             <a:r>
               <a:rPr lang="en-US" sz="1150" b="1" spc="180" kern="0" dirty="0">
                 <a:solidFill>
-                  <a:srgbClr val="9A6310"/>
-                </a:solidFill>
-                <a:latin typeface="Arial" pitchFamily="34" charset="0"/>
-                <a:ea typeface="Arial" pitchFamily="34" charset="-122"/>
-                <a:cs typeface="Arial" pitchFamily="34" charset="-120"/>
-              </a:rPr>
-              <a:t>BREAKOUT · 90 MINUTEN</a:t>
+                  <a:srgbClr val="0F7C86"/>
+                </a:solidFill>
+                <a:latin typeface="Arial" pitchFamily="34" charset="0"/>
+                <a:ea typeface="Arial" pitchFamily="34" charset="-122"/>
+                <a:cs typeface="Arial" pitchFamily="34" charset="-120"/>
+              </a:rPr>
+              <a:t>ALLE DREI SEKUNDEN EIN LEBENSZEICHEN</a:t>
             </a:r>
             <a:endParaRPr lang="en-US" sz="1150" dirty="0"/>
           </a:p>
@@ -3130,42 +3769,66 @@
                 <a:ea typeface="Arial" pitchFamily="34" charset="-122"/>
                 <a:cs typeface="Arial" pitchFamily="34" charset="-120"/>
               </a:rPr>
-              <a:t>Der Auftrag</a:t>
+              <a:t>Der Heartbeat der Module</a:t>
             </a:r>
             <a:endParaRPr lang="en-US" sz="2600" dirty="0"/>
           </a:p>
         </p:txBody>
       </p:sp>
-      <p:sp>
-        <p:nvSpPr>
-          <p:cNvPr id="5" name="Shape 3"/>
-          <p:cNvSpPr/>
-          <p:nvPr/>
-        </p:nvSpPr>
-        <p:spPr>
-          <a:xfrm>
-            <a:off x="438912" y="1682496"/>
-            <a:ext cx="8266176" cy="228600"/>
+      <p:pic>
+        <p:nvPicPr>
+          <p:cNvPr id="5" name="Image 0" descr="/Users/jacobmenge/Desktop/kurs-26.2b-orga/folienwerkstatt/assets/diagramme/heartbeat-bild.png">    </p:cNvPr>
+          <p:cNvPicPr>
+            <a:picLocks noChangeAspect="1"/>
+          </p:cNvPicPr>
+          <p:nvPr/>
+        </p:nvPicPr>
+        <p:blipFill>
+          <a:blip r:embed="rId1"/>
+          <a:stretch>
+            <a:fillRect/>
+          </a:stretch>
+        </p:blipFill>
+        <p:spPr>
+          <a:xfrm>
+            <a:off x="566928" y="1426464"/>
+            <a:ext cx="8010144" cy="2505456"/>
+          </a:xfrm>
+          <a:prstGeom prst="rect">
+            <a:avLst/>
+          </a:prstGeom>
+        </p:spPr>
+      </p:pic>
+      <p:sp>
+        <p:nvSpPr>
+          <p:cNvPr id="6" name="Shape 3"/>
+          <p:cNvSpPr/>
+          <p:nvPr/>
+        </p:nvSpPr>
+        <p:spPr>
+          <a:xfrm>
+            <a:off x="566928" y="4105656"/>
+            <a:ext cx="32004" cy="256032"/>
           </a:xfrm>
           <a:prstGeom prst="rect">
             <a:avLst/>
           </a:prstGeom>
           <a:solidFill>
-            <a:srgbClr val="F5F6FC"/>
+            <a:srgbClr val="0F7C86"/>
           </a:solidFill>
           <a:ln/>
         </p:spPr>
       </p:sp>
       <p:sp>
         <p:nvSpPr>
-          <p:cNvPr id="6" name="Text 4"/>
-          <p:cNvSpPr/>
-          <p:nvPr/>
-        </p:nvSpPr>
-        <p:spPr>
-          <a:xfrm>
-            <a:off x="566928" y="1682496"/>
-            <a:ext cx="731520" cy="228600"/>
+          <p:cNvPr id="7" name="Text 4"/>
+          <p:cNvSpPr/>
+          <p:nvPr/>
+        </p:nvSpPr>
+        <p:spPr>
+          <a:xfrm>
+            <a:off x="749808" y="4059936"/>
+            <a:ext cx="7827264" cy="402336"/>
           </a:xfrm>
           <a:prstGeom prst="rect">
             <a:avLst/>
@@ -3181,46 +3844,7 @@
               <a:buNone/>
             </a:pPr>
             <a:r>
-              <a:rPr lang="en-US" sz="1050" b="1" dirty="0">
-                <a:solidFill>
-                  <a:srgbClr val="9A6310"/>
-                </a:solidFill>
-                <a:latin typeface="Courier New" pitchFamily="34" charset="0"/>
-                <a:ea typeface="Courier New" pitchFamily="34" charset="-122"/>
-                <a:cs typeface="Courier New" pitchFamily="34" charset="-120"/>
-              </a:rPr>
-              <a:t>Start</a:t>
-            </a:r>
-            <a:endParaRPr lang="en-US" sz="1050" dirty="0"/>
-          </a:p>
-        </p:txBody>
-      </p:sp>
-      <p:sp>
-        <p:nvSpPr>
-          <p:cNvPr id="7" name="Text 5"/>
-          <p:cNvSpPr/>
-          <p:nvPr/>
-        </p:nvSpPr>
-        <p:spPr>
-          <a:xfrm>
-            <a:off x="1298448" y="1682496"/>
-            <a:ext cx="7278624" cy="228600"/>
-          </a:xfrm>
-          <a:prstGeom prst="rect">
-            <a:avLst/>
-          </a:prstGeom>
-          <a:noFill/>
-          <a:ln/>
-        </p:spPr>
-        <p:txBody>
-          <a:bodyPr wrap="square" lIns="0" tIns="0" rIns="0" bIns="0" rtlCol="0" anchor="ctr"/>
-          <a:lstStyle/>
-          <a:p>
-            <a:pPr indent="0" marL="0">
-              <a:buNone/>
-            </a:pPr>
-            <a:r>
-              <a:rPr lang="en-US" sz="1050" dirty="0">
+              <a:rPr lang="en-US" sz="1200" b="1" dirty="0">
                 <a:solidFill>
                   <a:srgbClr val="434A63"/>
                 </a:solidFill>
@@ -3228,768 +3852,15 @@
                 <a:ea typeface="Arial" pitchFamily="34" charset="-122"/>
                 <a:cs typeface="Arial" pitchFamily="34" charset="-120"/>
               </a:rPr>
-              <a:t>Code holen, Ordner ansehen, leere compose.yaml anlegen</a:t>
-            </a:r>
-            <a:endParaRPr lang="en-US" sz="1050" dirty="0"/>
-          </a:p>
-        </p:txBody>
-      </p:sp>
-      <p:sp>
-        <p:nvSpPr>
-          <p:cNvPr id="8" name="Text 6"/>
-          <p:cNvSpPr/>
-          <p:nvPr/>
-        </p:nvSpPr>
-        <p:spPr>
-          <a:xfrm>
-            <a:off x="566928" y="1911096"/>
-            <a:ext cx="731520" cy="228600"/>
-          </a:xfrm>
-          <a:prstGeom prst="rect">
-            <a:avLst/>
-          </a:prstGeom>
-          <a:noFill/>
-          <a:ln/>
-        </p:spPr>
-        <p:txBody>
-          <a:bodyPr wrap="square" lIns="0" tIns="0" rIns="0" bIns="0" rtlCol="0" anchor="ctr"/>
-          <a:lstStyle/>
-          <a:p>
-            <a:pPr indent="0" marL="0">
-              <a:buNone/>
-            </a:pPr>
-            <a:r>
-              <a:rPr lang="en-US" sz="1050" b="1" dirty="0">
-                <a:solidFill>
-                  <a:srgbClr val="9A6310"/>
-                </a:solidFill>
-                <a:latin typeface="Courier New" pitchFamily="34" charset="0"/>
-                <a:ea typeface="Courier New" pitchFamily="34" charset="-122"/>
-                <a:cs typeface="Courier New" pitchFamily="34" charset="-120"/>
-              </a:rPr>
-              <a:t>M1</a:t>
-            </a:r>
-            <a:endParaRPr lang="en-US" sz="1050" dirty="0"/>
-          </a:p>
-        </p:txBody>
-      </p:sp>
-      <p:sp>
-        <p:nvSpPr>
-          <p:cNvPr id="9" name="Text 7"/>
-          <p:cNvSpPr/>
-          <p:nvPr/>
-        </p:nvSpPr>
-        <p:spPr>
-          <a:xfrm>
-            <a:off x="1298448" y="1911096"/>
-            <a:ext cx="7278624" cy="228600"/>
-          </a:xfrm>
-          <a:prstGeom prst="rect">
-            <a:avLst/>
-          </a:prstGeom>
-          <a:noFill/>
-          <a:ln/>
-        </p:spPr>
-        <p:txBody>
-          <a:bodyPr wrap="square" lIns="0" tIns="0" rIns="0" bIns="0" rtlCol="0" anchor="ctr"/>
-          <a:lstStyle/>
-          <a:p>
-            <a:pPr indent="0" marL="0">
-              <a:buNone/>
-            </a:pPr>
-            <a:r>
-              <a:rPr lang="en-US" sz="1050" dirty="0">
-                <a:solidFill>
-                  <a:srgbClr val="434A63"/>
-                </a:solidFill>
-                <a:latin typeface="Arial" pitchFamily="34" charset="0"/>
-                <a:ea typeface="Arial" pitchFamily="34" charset="-122"/>
-                <a:cs typeface="Arial" pitchFamily="34" charset="-120"/>
-              </a:rPr>
-              <a:t>Das Frontend: die erste Lampe leuchtet, die Station steht dunkel</a:t>
-            </a:r>
-            <a:endParaRPr lang="en-US" sz="1050" dirty="0"/>
-          </a:p>
-        </p:txBody>
-      </p:sp>
-      <p:sp>
-        <p:nvSpPr>
-          <p:cNvPr id="10" name="Shape 8"/>
-          <p:cNvSpPr/>
-          <p:nvPr/>
-        </p:nvSpPr>
-        <p:spPr>
-          <a:xfrm>
-            <a:off x="438912" y="2139696"/>
-            <a:ext cx="8266176" cy="228600"/>
-          </a:xfrm>
-          <a:prstGeom prst="rect">
-            <a:avLst/>
-          </a:prstGeom>
-          <a:solidFill>
-            <a:srgbClr val="F5F6FC"/>
-          </a:solidFill>
-          <a:ln/>
-        </p:spPr>
-      </p:sp>
-      <p:sp>
-        <p:nvSpPr>
-          <p:cNvPr id="11" name="Text 9"/>
-          <p:cNvSpPr/>
-          <p:nvPr/>
-        </p:nvSpPr>
-        <p:spPr>
-          <a:xfrm>
-            <a:off x="566928" y="2139696"/>
-            <a:ext cx="731520" cy="228600"/>
-          </a:xfrm>
-          <a:prstGeom prst="rect">
-            <a:avLst/>
-          </a:prstGeom>
-          <a:noFill/>
-          <a:ln/>
-        </p:spPr>
-        <p:txBody>
-          <a:bodyPr wrap="square" lIns="0" tIns="0" rIns="0" bIns="0" rtlCol="0" anchor="ctr"/>
-          <a:lstStyle/>
-          <a:p>
-            <a:pPr indent="0" marL="0">
-              <a:buNone/>
-            </a:pPr>
-            <a:r>
-              <a:rPr lang="en-US" sz="1050" b="1" dirty="0">
-                <a:solidFill>
-                  <a:srgbClr val="9A6310"/>
-                </a:solidFill>
-                <a:latin typeface="Courier New" pitchFamily="34" charset="0"/>
-                <a:ea typeface="Courier New" pitchFamily="34" charset="-122"/>
-                <a:cs typeface="Courier New" pitchFamily="34" charset="-120"/>
-              </a:rPr>
-              <a:t>M2</a:t>
-            </a:r>
-            <a:endParaRPr lang="en-US" sz="1050" dirty="0"/>
-          </a:p>
-        </p:txBody>
-      </p:sp>
-      <p:sp>
-        <p:nvSpPr>
-          <p:cNvPr id="12" name="Text 10"/>
-          <p:cNvSpPr/>
-          <p:nvPr/>
-        </p:nvSpPr>
-        <p:spPr>
-          <a:xfrm>
-            <a:off x="1298448" y="2139696"/>
-            <a:ext cx="7278624" cy="228600"/>
-          </a:xfrm>
-          <a:prstGeom prst="rect">
-            <a:avLst/>
-          </a:prstGeom>
-          <a:noFill/>
-          <a:ln/>
-        </p:spPr>
-        <p:txBody>
-          <a:bodyPr wrap="square" lIns="0" tIns="0" rIns="0" bIns="0" rtlCol="0" anchor="ctr"/>
-          <a:lstStyle/>
-          <a:p>
-            <a:pPr indent="0" marL="0">
-              <a:buNone/>
-            </a:pPr>
-            <a:r>
-              <a:rPr lang="en-US" sz="1050" dirty="0">
-                <a:solidFill>
-                  <a:srgbClr val="434A63"/>
-                </a:solidFill>
-                <a:latin typeface="Arial" pitchFamily="34" charset="0"/>
-                <a:ea typeface="Arial" pitchFamily="34" charset="-122"/>
-                <a:cs typeface="Arial" pitchFamily="34" charset="-120"/>
-              </a:rPr>
-              <a:t>Das Logbuch: Datenbank mit Init-Skript und Volume</a:t>
-            </a:r>
-            <a:endParaRPr lang="en-US" sz="1050" dirty="0"/>
-          </a:p>
-        </p:txBody>
-      </p:sp>
-      <p:sp>
-        <p:nvSpPr>
-          <p:cNvPr id="13" name="Text 11"/>
-          <p:cNvSpPr/>
-          <p:nvPr/>
-        </p:nvSpPr>
-        <p:spPr>
-          <a:xfrm>
-            <a:off x="566928" y="2368296"/>
-            <a:ext cx="731520" cy="228600"/>
-          </a:xfrm>
-          <a:prstGeom prst="rect">
-            <a:avLst/>
-          </a:prstGeom>
-          <a:noFill/>
-          <a:ln/>
-        </p:spPr>
-        <p:txBody>
-          <a:bodyPr wrap="square" lIns="0" tIns="0" rIns="0" bIns="0" rtlCol="0" anchor="ctr"/>
-          <a:lstStyle/>
-          <a:p>
-            <a:pPr indent="0" marL="0">
-              <a:buNone/>
-            </a:pPr>
-            <a:r>
-              <a:rPr lang="en-US" sz="1050" b="1" dirty="0">
-                <a:solidFill>
-                  <a:srgbClr val="9A6310"/>
-                </a:solidFill>
-                <a:latin typeface="Courier New" pitchFamily="34" charset="0"/>
-                <a:ea typeface="Courier New" pitchFamily="34" charset="-122"/>
-                <a:cs typeface="Courier New" pitchFamily="34" charset="-120"/>
-              </a:rPr>
-              <a:t>M3</a:t>
-            </a:r>
-            <a:endParaRPr lang="en-US" sz="1050" dirty="0"/>
-          </a:p>
-        </p:txBody>
-      </p:sp>
-      <p:sp>
-        <p:nvSpPr>
-          <p:cNvPr id="14" name="Text 12"/>
-          <p:cNvSpPr/>
-          <p:nvPr/>
-        </p:nvSpPr>
-        <p:spPr>
-          <a:xfrm>
-            <a:off x="1298448" y="2368296"/>
-            <a:ext cx="7278624" cy="228600"/>
-          </a:xfrm>
-          <a:prstGeom prst="rect">
-            <a:avLst/>
-          </a:prstGeom>
-          <a:noFill/>
-          <a:ln/>
-        </p:spPr>
-        <p:txBody>
-          <a:bodyPr wrap="square" lIns="0" tIns="0" rIns="0" bIns="0" rtlCol="0" anchor="ctr"/>
-          <a:lstStyle/>
-          <a:p>
-            <a:pPr indent="0" marL="0">
-              <a:buNone/>
-            </a:pPr>
-            <a:r>
-              <a:rPr lang="en-US" sz="1050" dirty="0">
-                <a:solidFill>
-                  <a:srgbClr val="434A63"/>
-                </a:solidFill>
-                <a:latin typeface="Arial" pitchFamily="34" charset="0"/>
-                <a:ea typeface="Arial" pitchFamily="34" charset="-122"/>
-                <a:cs typeface="Arial" pitchFamily="34" charset="-120"/>
-              </a:rPr>
-              <a:t>Der Funkkontakt: Backend bauen, zwei Lampen springen um</a:t>
-            </a:r>
-            <a:endParaRPr lang="en-US" sz="1050" dirty="0"/>
-          </a:p>
-        </p:txBody>
-      </p:sp>
-      <p:sp>
-        <p:nvSpPr>
-          <p:cNvPr id="15" name="Shape 13"/>
-          <p:cNvSpPr/>
-          <p:nvPr/>
-        </p:nvSpPr>
-        <p:spPr>
-          <a:xfrm>
-            <a:off x="438912" y="2596896"/>
-            <a:ext cx="8266176" cy="228600"/>
-          </a:xfrm>
-          <a:prstGeom prst="rect">
-            <a:avLst/>
-          </a:prstGeom>
-          <a:solidFill>
-            <a:srgbClr val="F5F6FC"/>
-          </a:solidFill>
-          <a:ln/>
-        </p:spPr>
-      </p:sp>
-      <p:sp>
-        <p:nvSpPr>
-          <p:cNvPr id="16" name="Text 14"/>
-          <p:cNvSpPr/>
-          <p:nvPr/>
-        </p:nvSpPr>
-        <p:spPr>
-          <a:xfrm>
-            <a:off x="566928" y="2596896"/>
-            <a:ext cx="731520" cy="228600"/>
-          </a:xfrm>
-          <a:prstGeom prst="rect">
-            <a:avLst/>
-          </a:prstGeom>
-          <a:noFill/>
-          <a:ln/>
-        </p:spPr>
-        <p:txBody>
-          <a:bodyPr wrap="square" lIns="0" tIns="0" rIns="0" bIns="0" rtlCol="0" anchor="ctr"/>
-          <a:lstStyle/>
-          <a:p>
-            <a:pPr indent="0" marL="0">
-              <a:buNone/>
-            </a:pPr>
-            <a:r>
-              <a:rPr lang="en-US" sz="1050" b="1" dirty="0">
-                <a:solidFill>
-                  <a:srgbClr val="9A6310"/>
-                </a:solidFill>
-                <a:latin typeface="Courier New" pitchFamily="34" charset="0"/>
-                <a:ea typeface="Courier New" pitchFamily="34" charset="-122"/>
-                <a:cs typeface="Courier New" pitchFamily="34" charset="-120"/>
-              </a:rPr>
-              <a:t>M4</a:t>
-            </a:r>
-            <a:endParaRPr lang="en-US" sz="1050" dirty="0"/>
-          </a:p>
-        </p:txBody>
-      </p:sp>
-      <p:sp>
-        <p:nvSpPr>
-          <p:cNvPr id="17" name="Text 15"/>
-          <p:cNvSpPr/>
-          <p:nvPr/>
-        </p:nvSpPr>
-        <p:spPr>
-          <a:xfrm>
-            <a:off x="1298448" y="2596896"/>
-            <a:ext cx="7278624" cy="228600"/>
-          </a:xfrm>
-          <a:prstGeom prst="rect">
-            <a:avLst/>
-          </a:prstGeom>
-          <a:noFill/>
-          <a:ln/>
-        </p:spPr>
-        <p:txBody>
-          <a:bodyPr wrap="square" lIns="0" tIns="0" rIns="0" bIns="0" rtlCol="0" anchor="ctr"/>
-          <a:lstStyle/>
-          <a:p>
-            <a:pPr indent="0" marL="0">
-              <a:buNone/>
-            </a:pPr>
-            <a:r>
-              <a:rPr lang="en-US" sz="1050" dirty="0">
-                <a:solidFill>
-                  <a:srgbClr val="434A63"/>
-                </a:solidFill>
-                <a:latin typeface="Arial" pitchFamily="34" charset="0"/>
-                <a:ea typeface="Arial" pitchFamily="34" charset="-122"/>
-                <a:cs typeface="Arial" pitchFamily="34" charset="-120"/>
-              </a:rPr>
-              <a:t>Das erste Modul: die Lebenserhaltung leuchtet</a:t>
-            </a:r>
-            <a:endParaRPr lang="en-US" sz="1050" dirty="0"/>
-          </a:p>
-        </p:txBody>
-      </p:sp>
-      <p:sp>
-        <p:nvSpPr>
-          <p:cNvPr id="18" name="Text 16"/>
-          <p:cNvSpPr/>
-          <p:nvPr/>
-        </p:nvSpPr>
-        <p:spPr>
-          <a:xfrm>
-            <a:off x="566928" y="2825496"/>
-            <a:ext cx="731520" cy="228600"/>
-          </a:xfrm>
-          <a:prstGeom prst="rect">
-            <a:avLst/>
-          </a:prstGeom>
-          <a:noFill/>
-          <a:ln/>
-        </p:spPr>
-        <p:txBody>
-          <a:bodyPr wrap="square" lIns="0" tIns="0" rIns="0" bIns="0" rtlCol="0" anchor="ctr"/>
-          <a:lstStyle/>
-          <a:p>
-            <a:pPr indent="0" marL="0">
-              <a:buNone/>
-            </a:pPr>
-            <a:r>
-              <a:rPr lang="en-US" sz="1050" b="1" dirty="0">
-                <a:solidFill>
-                  <a:srgbClr val="9A6310"/>
-                </a:solidFill>
-                <a:latin typeface="Courier New" pitchFamily="34" charset="0"/>
-                <a:ea typeface="Courier New" pitchFamily="34" charset="-122"/>
-                <a:cs typeface="Courier New" pitchFamily="34" charset="-120"/>
-              </a:rPr>
-              <a:t>M5</a:t>
-            </a:r>
-            <a:endParaRPr lang="en-US" sz="1050" dirty="0"/>
-          </a:p>
-        </p:txBody>
-      </p:sp>
-      <p:sp>
-        <p:nvSpPr>
-          <p:cNvPr id="19" name="Text 17"/>
-          <p:cNvSpPr/>
-          <p:nvPr/>
-        </p:nvSpPr>
-        <p:spPr>
-          <a:xfrm>
-            <a:off x="1298448" y="2825496"/>
-            <a:ext cx="7278624" cy="228600"/>
-          </a:xfrm>
-          <a:prstGeom prst="rect">
-            <a:avLst/>
-          </a:prstGeom>
-          <a:noFill/>
-          <a:ln/>
-        </p:spPr>
-        <p:txBody>
-          <a:bodyPr wrap="square" lIns="0" tIns="0" rIns="0" bIns="0" rtlCol="0" anchor="ctr"/>
-          <a:lstStyle/>
-          <a:p>
-            <a:pPr indent="0" marL="0">
-              <a:buNone/>
-            </a:pPr>
-            <a:r>
-              <a:rPr lang="en-US" sz="1050" dirty="0">
-                <a:solidFill>
-                  <a:srgbClr val="434A63"/>
-                </a:solidFill>
-                <a:latin typeface="Arial" pitchFamily="34" charset="0"/>
-                <a:ea typeface="Arial" pitchFamily="34" charset="-122"/>
-                <a:cs typeface="Arial" pitchFamily="34" charset="-120"/>
-              </a:rPr>
-              <a:t>Betriebsstärke: mindestens drei Module online</a:t>
-            </a:r>
-            <a:endParaRPr lang="en-US" sz="1050" dirty="0"/>
-          </a:p>
-        </p:txBody>
-      </p:sp>
-      <p:sp>
-        <p:nvSpPr>
-          <p:cNvPr id="20" name="Shape 18"/>
-          <p:cNvSpPr/>
-          <p:nvPr/>
-        </p:nvSpPr>
-        <p:spPr>
-          <a:xfrm>
-            <a:off x="438912" y="3054096"/>
-            <a:ext cx="8266176" cy="228600"/>
-          </a:xfrm>
-          <a:prstGeom prst="rect">
-            <a:avLst/>
-          </a:prstGeom>
-          <a:solidFill>
-            <a:srgbClr val="F5F6FC"/>
-          </a:solidFill>
-          <a:ln/>
-        </p:spPr>
-      </p:sp>
-      <p:sp>
-        <p:nvSpPr>
-          <p:cNvPr id="21" name="Text 19"/>
-          <p:cNvSpPr/>
-          <p:nvPr/>
-        </p:nvSpPr>
-        <p:spPr>
-          <a:xfrm>
-            <a:off x="566928" y="3054096"/>
-            <a:ext cx="731520" cy="228600"/>
-          </a:xfrm>
-          <a:prstGeom prst="rect">
-            <a:avLst/>
-          </a:prstGeom>
-          <a:noFill/>
-          <a:ln/>
-        </p:spPr>
-        <p:txBody>
-          <a:bodyPr wrap="square" lIns="0" tIns="0" rIns="0" bIns="0" rtlCol="0" anchor="ctr"/>
-          <a:lstStyle/>
-          <a:p>
-            <a:pPr indent="0" marL="0">
-              <a:buNone/>
-            </a:pPr>
-            <a:r>
-              <a:rPr lang="en-US" sz="1050" b="1" dirty="0">
-                <a:solidFill>
-                  <a:srgbClr val="9A6310"/>
-                </a:solidFill>
-                <a:latin typeface="Courier New" pitchFamily="34" charset="0"/>
-                <a:ea typeface="Courier New" pitchFamily="34" charset="-122"/>
-                <a:cs typeface="Courier New" pitchFamily="34" charset="-120"/>
-              </a:rPr>
-              <a:t>M6</a:t>
-            </a:r>
-            <a:endParaRPr lang="en-US" sz="1050" dirty="0"/>
-          </a:p>
-        </p:txBody>
-      </p:sp>
-      <p:sp>
-        <p:nvSpPr>
-          <p:cNvPr id="22" name="Text 20"/>
-          <p:cNvSpPr/>
-          <p:nvPr/>
-        </p:nvSpPr>
-        <p:spPr>
-          <a:xfrm>
-            <a:off x="1298448" y="3054096"/>
-            <a:ext cx="7278624" cy="228600"/>
-          </a:xfrm>
-          <a:prstGeom prst="rect">
-            <a:avLst/>
-          </a:prstGeom>
-          <a:noFill/>
-          <a:ln/>
-        </p:spPr>
-        <p:txBody>
-          <a:bodyPr wrap="square" lIns="0" tIns="0" rIns="0" bIns="0" rtlCol="0" anchor="ctr"/>
-          <a:lstStyle/>
-          <a:p>
-            <a:pPr indent="0" marL="0">
-              <a:buNone/>
-            </a:pPr>
-            <a:r>
-              <a:rPr lang="en-US" sz="1050" dirty="0">
-                <a:solidFill>
-                  <a:srgbClr val="434A63"/>
-                </a:solidFill>
-                <a:latin typeface="Arial" pitchFamily="34" charset="0"/>
-                <a:ea typeface="Arial" pitchFamily="34" charset="-122"/>
-                <a:cs typeface="Arial" pitchFamily="34" charset="-120"/>
-              </a:rPr>
-              <a:t>Konfiguration an eine Stelle: die .env-Datei</a:t>
-            </a:r>
-            <a:endParaRPr lang="en-US" sz="1050" dirty="0"/>
-          </a:p>
-        </p:txBody>
-      </p:sp>
-      <p:sp>
-        <p:nvSpPr>
-          <p:cNvPr id="23" name="Text 21"/>
-          <p:cNvSpPr/>
-          <p:nvPr/>
-        </p:nvSpPr>
-        <p:spPr>
-          <a:xfrm>
-            <a:off x="566928" y="3282696"/>
-            <a:ext cx="731520" cy="228600"/>
-          </a:xfrm>
-          <a:prstGeom prst="rect">
-            <a:avLst/>
-          </a:prstGeom>
-          <a:noFill/>
-          <a:ln/>
-        </p:spPr>
-        <p:txBody>
-          <a:bodyPr wrap="square" lIns="0" tIns="0" rIns="0" bIns="0" rtlCol="0" anchor="ctr"/>
-          <a:lstStyle/>
-          <a:p>
-            <a:pPr indent="0" marL="0">
-              <a:buNone/>
-            </a:pPr>
-            <a:r>
-              <a:rPr lang="en-US" sz="1050" b="1" dirty="0">
-                <a:solidFill>
-                  <a:srgbClr val="9A6310"/>
-                </a:solidFill>
-                <a:latin typeface="Courier New" pitchFamily="34" charset="0"/>
-                <a:ea typeface="Courier New" pitchFamily="34" charset="-122"/>
-                <a:cs typeface="Courier New" pitchFamily="34" charset="-120"/>
-              </a:rPr>
-              <a:t>M7</a:t>
-            </a:r>
-            <a:endParaRPr lang="en-US" sz="1050" dirty="0"/>
-          </a:p>
-        </p:txBody>
-      </p:sp>
-      <p:sp>
-        <p:nvSpPr>
-          <p:cNvPr id="24" name="Text 22"/>
-          <p:cNvSpPr/>
-          <p:nvPr/>
-        </p:nvSpPr>
-        <p:spPr>
-          <a:xfrm>
-            <a:off x="1298448" y="3282696"/>
-            <a:ext cx="7278624" cy="228600"/>
-          </a:xfrm>
-          <a:prstGeom prst="rect">
-            <a:avLst/>
-          </a:prstGeom>
-          <a:noFill/>
-          <a:ln/>
-        </p:spPr>
-        <p:txBody>
-          <a:bodyPr wrap="square" lIns="0" tIns="0" rIns="0" bIns="0" rtlCol="0" anchor="ctr"/>
-          <a:lstStyle/>
-          <a:p>
-            <a:pPr indent="0" marL="0">
-              <a:buNone/>
-            </a:pPr>
-            <a:r>
-              <a:rPr lang="en-US" sz="1050" dirty="0">
-                <a:solidFill>
-                  <a:srgbClr val="434A63"/>
-                </a:solidFill>
-                <a:latin typeface="Arial" pitchFamily="34" charset="0"/>
-                <a:ea typeface="Arial" pitchFamily="34" charset="-122"/>
-                <a:cs typeface="Arial" pitchFamily="34" charset="-120"/>
-              </a:rPr>
-              <a:t>Die Betriebsabnahme: healthy, Adminer, Neustart-Beweis</a:t>
-            </a:r>
-            <a:endParaRPr lang="en-US" sz="1050" dirty="0"/>
-          </a:p>
-        </p:txBody>
-      </p:sp>
-      <p:sp>
-        <p:nvSpPr>
-          <p:cNvPr id="25" name="Shape 23"/>
-          <p:cNvSpPr/>
-          <p:nvPr/>
-        </p:nvSpPr>
-        <p:spPr>
-          <a:xfrm>
-            <a:off x="566928" y="3621024"/>
-            <a:ext cx="8010144" cy="914400"/>
-          </a:xfrm>
-          <a:prstGeom prst="rect">
-            <a:avLst/>
-          </a:prstGeom>
-          <a:solidFill>
-            <a:srgbClr val="EEF0FB"/>
-          </a:solidFill>
-          <a:ln/>
-        </p:spPr>
-      </p:sp>
-      <p:sp>
-        <p:nvSpPr>
-          <p:cNvPr id="26" name="Shape 24"/>
-          <p:cNvSpPr/>
-          <p:nvPr/>
-        </p:nvSpPr>
-        <p:spPr>
-          <a:xfrm>
-            <a:off x="566928" y="3621024"/>
-            <a:ext cx="41148" cy="914400"/>
-          </a:xfrm>
-          <a:prstGeom prst="rect">
-            <a:avLst/>
-          </a:prstGeom>
-          <a:solidFill>
-            <a:srgbClr val="9A6310"/>
-          </a:solidFill>
-          <a:ln/>
-        </p:spPr>
-      </p:sp>
-      <p:sp>
-        <p:nvSpPr>
-          <p:cNvPr id="27" name="Text 25"/>
-          <p:cNvSpPr/>
-          <p:nvPr/>
-        </p:nvSpPr>
-        <p:spPr>
-          <a:xfrm>
-            <a:off x="804672" y="3767328"/>
-            <a:ext cx="7607808" cy="242062"/>
-          </a:xfrm>
-          <a:prstGeom prst="rect">
-            <a:avLst/>
-          </a:prstGeom>
-          <a:noFill/>
-          <a:ln/>
-        </p:spPr>
-        <p:txBody>
-          <a:bodyPr wrap="square" lIns="0" tIns="0" rIns="0" bIns="0" rtlCol="0" anchor="t"/>
-          <a:lstStyle/>
-          <a:p>
-            <a:pPr indent="0" marL="0">
-              <a:buNone/>
-            </a:pPr>
-            <a:r>
-              <a:rPr lang="en-US" sz="1300" b="1" dirty="0">
-                <a:solidFill>
-                  <a:srgbClr val="272E52"/>
-                </a:solidFill>
-                <a:latin typeface="Arial" pitchFamily="34" charset="0"/>
-                <a:ea typeface="Arial" pitchFamily="34" charset="-122"/>
-                <a:cs typeface="Arial" pitchFamily="34" charset="-120"/>
-              </a:rPr>
-              <a:t>Jetzt öffnen: die Einheit mit Missionen, Funkhilfe und Musterlösung</a:t>
-            </a:r>
-            <a:endParaRPr lang="en-US" sz="1300" dirty="0"/>
-          </a:p>
-        </p:txBody>
-      </p:sp>
-      <p:sp>
-        <p:nvSpPr>
-          <p:cNvPr id="28" name="Text 26"/>
-          <p:cNvSpPr/>
-          <p:nvPr/>
-        </p:nvSpPr>
-        <p:spPr>
-          <a:xfrm>
-            <a:off x="804672" y="4055110"/>
-            <a:ext cx="7607808" cy="361442"/>
-          </a:xfrm>
-          <a:prstGeom prst="rect">
-            <a:avLst/>
-          </a:prstGeom>
-          <a:noFill/>
-          <a:ln/>
-        </p:spPr>
-        <p:txBody>
-          <a:bodyPr wrap="square" lIns="0" tIns="0" rIns="0" bIns="0" rtlCol="0" anchor="t"/>
-          <a:lstStyle/>
-          <a:p>
-            <a:pPr indent="0" marL="0">
-              <a:lnSpc>
-                <a:spcPct val="92000"/>
-              </a:lnSpc>
-              <a:spcAft>
-                <a:spcPts val="500"/>
-              </a:spcAft>
-              <a:buNone/>
-            </a:pPr>
-            <a:r>
-              <a:rPr lang="en-US" sz="1000" dirty="0">
-                <a:solidFill>
-                  <a:srgbClr val="434A63"/>
-                </a:solidFill>
-                <a:latin typeface="Arial" pitchFamily="34" charset="0"/>
-                <a:ea typeface="Arial" pitchFamily="34" charset="-122"/>
-                <a:cs typeface="Arial" pitchFamily="34" charset="-120"/>
-              </a:rPr>
-              <a:t>jacobmenge.github.io/kurs-unterlagen/docker-compose-mission-control/</a:t>
-            </a:r>
-            <a:endParaRPr lang="en-US" sz="1000" dirty="0"/>
-          </a:p>
-          <a:p>
-            <a:pPr indent="0" marL="0">
-              <a:lnSpc>
-                <a:spcPct val="92000"/>
-              </a:lnSpc>
-              <a:spcAft>
-                <a:spcPts val="500"/>
-              </a:spcAft>
-              <a:buNone/>
-            </a:pPr>
-            <a:r>
-              <a:rPr lang="en-US" sz="1000" dirty="0">
-                <a:solidFill>
-                  <a:srgbClr val="434A63"/>
-                </a:solidFill>
-                <a:latin typeface="Arial" pitchFamily="34" charset="0"/>
-                <a:ea typeface="Arial" pitchFamily="34" charset="-122"/>
-                <a:cs typeface="Arial" pitchFamily="34" charset="-120"/>
-              </a:rPr>
-              <a:t>Ergebnisse eintragen:  &lt;Link zum Ergebnis-Dokument hier eintragen&gt;</a:t>
-            </a:r>
-            <a:endParaRPr lang="en-US" sz="1000" dirty="0"/>
-          </a:p>
-        </p:txBody>
-      </p:sp>
-      <p:sp>
-        <p:nvSpPr>
-          <p:cNvPr id="29" name="Shape 27"/>
+              <a:t>Jedes Modul ist ein eigener Container aus demselben Image, nur MODUL_NAME unterscheidet sie: die Umgebungsvariablen-Lektion von Montag in groß.</a:t>
+            </a:r>
+            <a:endParaRPr lang="en-US" sz="1200" dirty="0"/>
+          </a:p>
+        </p:txBody>
+      </p:sp>
+      <p:sp>
+        <p:nvSpPr>
+          <p:cNvPr id="8" name="Shape 5"/>
           <p:cNvSpPr/>
           <p:nvPr/>
         </p:nvSpPr>
@@ -4012,7 +3883,7 @@
       </p:sp>
       <p:sp>
         <p:nvSpPr>
-          <p:cNvPr id="30" name="Text 28"/>
+          <p:cNvPr id="9" name="Text 6"/>
           <p:cNvSpPr/>
           <p:nvPr/>
         </p:nvSpPr>
@@ -4043,7 +3914,7 @@
                 <a:ea typeface="Arial" pitchFamily="34" charset="-122"/>
                 <a:cs typeface="Arial" pitchFamily="34" charset="-120"/>
               </a:rPr>
-              <a:t>Die Missionen</a:t>
+              <a:t>Das Szenario</a:t>
             </a:r>
             <a:endParaRPr lang="en-US" sz="1050" dirty="0"/>
           </a:p>
@@ -4051,7 +3922,7 @@
       </p:sp>
       <p:sp>
         <p:nvSpPr>
-          <p:cNvPr id="31" name="Text 29"/>
+          <p:cNvPr id="10" name="Text 7"/>
           <p:cNvSpPr/>
           <p:nvPr/>
         </p:nvSpPr>
@@ -4082,7 +3953,7 @@
                 <a:ea typeface="Arial" pitchFamily="34" charset="-122"/>
                 <a:cs typeface="Arial" pitchFamily="34" charset="-120"/>
               </a:rPr>
-              <a:t>9/13</a:t>
+              <a:t>10/19</a:t>
             </a:r>
             <a:endParaRPr lang="en-US" sz="1050" dirty="0"/>
           </a:p>
@@ -4135,7 +4006,7 @@
             <a:avLst/>
           </a:prstGeom>
           <a:solidFill>
-            <a:srgbClr val="9A6310"/>
+            <a:srgbClr val="0F7C86"/>
           </a:solidFill>
           <a:ln/>
         </p:spPr>
@@ -4167,13 +4038,13 @@
             <a:r>
               <a:rPr lang="en-US" sz="1150" b="1" spc="180" kern="0" dirty="0">
                 <a:solidFill>
-                  <a:srgbClr val="9A6310"/>
-                </a:solidFill>
-                <a:latin typeface="Arial" pitchFamily="34" charset="0"/>
-                <a:ea typeface="Arial" pitchFamily="34" charset="-122"/>
-                <a:cs typeface="Arial" pitchFamily="34" charset="-120"/>
-              </a:rPr>
-              <a:t>SPIELREGELN</a:t>
+                  <a:srgbClr val="0F7C86"/>
+                </a:solidFill>
+                <a:latin typeface="Arial" pitchFamily="34" charset="0"/>
+                <a:ea typeface="Arial" pitchFamily="34" charset="-122"/>
+                <a:cs typeface="Arial" pitchFamily="34" charset="-120"/>
+              </a:rPr>
+              <a:t>HEALTHCHECK UND DEPENDS_ON</a:t>
             </a:r>
             <a:endParaRPr lang="en-US" sz="1150" dirty="0"/>
           </a:p>
@@ -4212,48 +4083,82 @@
                 <a:ea typeface="Arial" pitchFamily="34" charset="-122"/>
                 <a:cs typeface="Arial" pitchFamily="34" charset="-120"/>
               </a:rPr>
-              <a:t>So arbeitet ihr</a:t>
+              <a:t>Warten, bis die Datenbank bereit ist</a:t>
             </a:r>
             <a:endParaRPr lang="en-US" sz="2600" dirty="0"/>
           </a:p>
         </p:txBody>
       </p:sp>
-      <p:sp>
-        <p:nvSpPr>
-          <p:cNvPr id="5" name="Text 3"/>
-          <p:cNvSpPr/>
-          <p:nvPr/>
-        </p:nvSpPr>
-        <p:spPr>
-          <a:xfrm>
-            <a:off x="566928" y="1645920"/>
-            <a:ext cx="8010144" cy="1956816"/>
-          </a:xfrm>
-          <a:prstGeom prst="rect">
-            <a:avLst/>
-          </a:prstGeom>
-          <a:noFill/>
-          <a:ln/>
-        </p:spPr>
-        <p:txBody>
-          <a:bodyPr wrap="square" lIns="0" tIns="0" rIns="0" bIns="0" rtlCol="0" anchor="t"/>
-          <a:lstStyle/>
-          <a:p>
-            <a:pPr marL="254000" indent="-254000">
-              <a:lnSpc>
-                <a:spcPct val="100000"/>
-              </a:lnSpc>
-              <a:spcAft>
-                <a:spcPts val="900"/>
-              </a:spcAft>
-              <a:buClr>
-                <a:srgbClr val="0F7C86"/>
-              </a:buClr>
-              <a:buSzPct val="100000"/>
-              <a:buChar char="▸"/>
-            </a:pPr>
-            <a:r>
-              <a:rPr lang="en-US" sz="1150" dirty="0">
+      <p:pic>
+        <p:nvPicPr>
+          <p:cNvPr id="5" name="Image 0" descr="/Users/jacobmenge/Desktop/kurs-26.2b-orga/folienwerkstatt/assets/diagramme/health-depends.png">    </p:cNvPr>
+          <p:cNvPicPr>
+            <a:picLocks noChangeAspect="1"/>
+          </p:cNvPicPr>
+          <p:nvPr/>
+        </p:nvPicPr>
+        <p:blipFill>
+          <a:blip r:embed="rId1"/>
+          <a:stretch>
+            <a:fillRect/>
+          </a:stretch>
+        </p:blipFill>
+        <p:spPr>
+          <a:xfrm>
+            <a:off x="566928" y="1499616"/>
+            <a:ext cx="8010144" cy="2286000"/>
+          </a:xfrm>
+          <a:prstGeom prst="rect">
+            <a:avLst/>
+          </a:prstGeom>
+        </p:spPr>
+      </p:pic>
+      <p:sp>
+        <p:nvSpPr>
+          <p:cNvPr id="6" name="Shape 3"/>
+          <p:cNvSpPr/>
+          <p:nvPr/>
+        </p:nvSpPr>
+        <p:spPr>
+          <a:xfrm>
+            <a:off x="566928" y="4069080"/>
+            <a:ext cx="32004" cy="256032"/>
+          </a:xfrm>
+          <a:prstGeom prst="rect">
+            <a:avLst/>
+          </a:prstGeom>
+          <a:solidFill>
+            <a:srgbClr val="0F7C86"/>
+          </a:solidFill>
+          <a:ln/>
+        </p:spPr>
+      </p:sp>
+      <p:sp>
+        <p:nvSpPr>
+          <p:cNvPr id="7" name="Text 4"/>
+          <p:cNvSpPr/>
+          <p:nvPr/>
+        </p:nvSpPr>
+        <p:spPr>
+          <a:xfrm>
+            <a:off x="749808" y="4023360"/>
+            <a:ext cx="7827264" cy="402336"/>
+          </a:xfrm>
+          <a:prstGeom prst="rect">
+            <a:avLst/>
+          </a:prstGeom>
+          <a:noFill/>
+          <a:ln/>
+        </p:spPr>
+        <p:txBody>
+          <a:bodyPr wrap="square" lIns="0" tIns="0" rIns="0" bIns="0" rtlCol="0" anchor="ctr"/>
+          <a:lstStyle/>
+          <a:p>
+            <a:pPr indent="0" marL="0">
+              <a:buNone/>
+            </a:pPr>
+            <a:r>
+              <a:rPr lang="en-US" sz="1200" b="1" dirty="0">
                 <a:solidFill>
                   <a:srgbClr val="434A63"/>
                 </a:solidFill>
@@ -4261,244 +4166,15 @@
                 <a:ea typeface="Arial" pitchFamily="34" charset="-122"/>
                 <a:cs typeface="Arial" pitchFamily="34" charset="-120"/>
               </a:rPr>
-              <a:t>Keine Schrittliste heute: Jede Mission nennt Ziel und Erfolgskriterium, den Weg baut ihr.</a:t>
-            </a:r>
-            <a:endParaRPr lang="en-US" sz="1150" dirty="0"/>
-          </a:p>
-          <a:p>
-            <a:pPr marL="254000" indent="-254000">
-              <a:lnSpc>
-                <a:spcPct val="100000"/>
-              </a:lnSpc>
-              <a:spcAft>
-                <a:spcPts val="900"/>
-              </a:spcAft>
-              <a:buClr>
-                <a:srgbClr val="0F7C86"/>
-              </a:buClr>
-              <a:buSzPct val="100000"/>
-              <a:buChar char="▸"/>
-            </a:pPr>
-            <a:r>
-              <a:rPr lang="en-US" sz="1150" dirty="0">
-                <a:solidFill>
-                  <a:srgbClr val="434A63"/>
-                </a:solidFill>
-                <a:latin typeface="Arial" pitchFamily="34" charset="0"/>
-                <a:ea typeface="Arial" pitchFamily="34" charset="-122"/>
-                <a:cs typeface="Arial" pitchFamily="34" charset="-120"/>
-              </a:rPr>
-              <a:t>Der Reihe nach. Erfolg erkennt ihr an Lampen, Stellplätzen und Logbuch.</a:t>
-            </a:r>
-            <a:endParaRPr lang="en-US" sz="1150" dirty="0"/>
-          </a:p>
-          <a:p>
-            <a:pPr marL="254000" indent="-254000">
-              <a:lnSpc>
-                <a:spcPct val="100000"/>
-              </a:lnSpc>
-              <a:spcAft>
-                <a:spcPts val="900"/>
-              </a:spcAft>
-              <a:buClr>
-                <a:srgbClr val="0F7C86"/>
-              </a:buClr>
-              <a:buSzPct val="100000"/>
-              <a:buChar char="▸"/>
-            </a:pPr>
-            <a:r>
-              <a:rPr lang="en-US" sz="1150" dirty="0">
-                <a:solidFill>
-                  <a:srgbClr val="434A63"/>
-                </a:solidFill>
-                <a:latin typeface="Arial" pitchFamily="34" charset="0"/>
-                <a:ea typeface="Arial" pitchFamily="34" charset="-122"/>
-                <a:cs typeface="Arial" pitchFamily="34" charset="-120"/>
-              </a:rPr>
-              <a:t>Klemmt es: erst Team, dann Funkhilfe Stufe 1 bis 3. Fünf Minuten ohne Fortschritt heißt nächste Stufe.</a:t>
-            </a:r>
-            <a:endParaRPr lang="en-US" sz="1150" dirty="0"/>
-          </a:p>
-          <a:p>
-            <a:pPr marL="254000" indent="-254000">
-              <a:lnSpc>
-                <a:spcPct val="100000"/>
-              </a:lnSpc>
-              <a:spcAft>
-                <a:spcPts val="900"/>
-              </a:spcAft>
-              <a:buClr>
-                <a:srgbClr val="0F7C86"/>
-              </a:buClr>
-              <a:buSzPct val="100000"/>
-              <a:buChar char="▸"/>
-            </a:pPr>
-            <a:r>
-              <a:rPr lang="en-US" sz="1150" dirty="0">
-                <a:solidFill>
-                  <a:srgbClr val="434A63"/>
-                </a:solidFill>
-                <a:latin typeface="Arial" pitchFamily="34" charset="0"/>
-                <a:ea typeface="Arial" pitchFamily="34" charset="-122"/>
-                <a:cs typeface="Arial" pitchFamily="34" charset="-120"/>
-              </a:rPr>
-              <a:t>Pflicht: drei Module leuchten. Volle Station, Störung und Backend-Tausch sind Vertiefung.</a:t>
-            </a:r>
-            <a:endParaRPr lang="en-US" sz="1150" dirty="0"/>
-          </a:p>
-          <a:p>
-            <a:pPr marL="254000" indent="-254000">
-              <a:lnSpc>
-                <a:spcPct val="100000"/>
-              </a:lnSpc>
-              <a:spcAft>
-                <a:spcPts val="900"/>
-              </a:spcAft>
-              <a:buClr>
-                <a:srgbClr val="0F7C86"/>
-              </a:buClr>
-              <a:buSzPct val="100000"/>
-              <a:buChar char="▸"/>
-            </a:pPr>
-            <a:r>
-              <a:rPr lang="en-US" sz="1150" dirty="0">
-                <a:solidFill>
-                  <a:srgbClr val="434A63"/>
-                </a:solidFill>
-                <a:latin typeface="Arial" pitchFamily="34" charset="0"/>
-                <a:ea typeface="Arial" pitchFamily="34" charset="-122"/>
-                <a:cs typeface="Arial" pitchFamily="34" charset="-120"/>
-              </a:rPr>
-              <a:t>Musterlösung nur als Notausgang. Driver tippt, Windows wie immer in der PowerShell.</a:t>
-            </a:r>
-            <a:endParaRPr lang="en-US" sz="1150" dirty="0"/>
-          </a:p>
-        </p:txBody>
-      </p:sp>
-      <p:sp>
-        <p:nvSpPr>
-          <p:cNvPr id="6" name="Shape 4"/>
-          <p:cNvSpPr/>
-          <p:nvPr/>
-        </p:nvSpPr>
-        <p:spPr>
-          <a:xfrm>
-            <a:off x="566928" y="3639312"/>
-            <a:ext cx="8010144" cy="822960"/>
-          </a:xfrm>
-          <a:prstGeom prst="rect">
-            <a:avLst/>
-          </a:prstGeom>
-          <a:solidFill>
-            <a:srgbClr val="F5F6FC"/>
-          </a:solidFill>
-          <a:ln/>
-        </p:spPr>
-      </p:sp>
-      <p:sp>
-        <p:nvSpPr>
-          <p:cNvPr id="7" name="Shape 5"/>
-          <p:cNvSpPr/>
-          <p:nvPr/>
-        </p:nvSpPr>
-        <p:spPr>
-          <a:xfrm>
-            <a:off x="566928" y="3639312"/>
-            <a:ext cx="41148" cy="822960"/>
-          </a:xfrm>
-          <a:prstGeom prst="rect">
-            <a:avLst/>
-          </a:prstGeom>
-          <a:solidFill>
-            <a:srgbClr val="9A6310"/>
-          </a:solidFill>
-          <a:ln/>
-        </p:spPr>
-      </p:sp>
-      <p:sp>
-        <p:nvSpPr>
-          <p:cNvPr id="8" name="Text 6"/>
-          <p:cNvSpPr/>
-          <p:nvPr/>
-        </p:nvSpPr>
-        <p:spPr>
-          <a:xfrm>
-            <a:off x="804672" y="3785616"/>
-            <a:ext cx="7607808" cy="242062"/>
-          </a:xfrm>
-          <a:prstGeom prst="rect">
-            <a:avLst/>
-          </a:prstGeom>
-          <a:noFill/>
-          <a:ln/>
-        </p:spPr>
-        <p:txBody>
-          <a:bodyPr wrap="square" lIns="0" tIns="0" rIns="0" bIns="0" rtlCol="0" anchor="t"/>
-          <a:lstStyle/>
-          <a:p>
-            <a:pPr indent="0" marL="0">
-              <a:buNone/>
-            </a:pPr>
-            <a:r>
-              <a:rPr lang="en-US" sz="1300" b="1" dirty="0">
-                <a:solidFill>
-                  <a:srgbClr val="272E52"/>
-                </a:solidFill>
-                <a:latin typeface="Arial" pitchFamily="34" charset="0"/>
-                <a:ea typeface="Arial" pitchFamily="34" charset="-122"/>
-                <a:cs typeface="Arial" pitchFamily="34" charset="-120"/>
-              </a:rPr>
-              <a:t>Um 20:30 beginnt die Demo-Runde</a:t>
-            </a:r>
-            <a:endParaRPr lang="en-US" sz="1300" dirty="0"/>
-          </a:p>
-        </p:txBody>
-      </p:sp>
-      <p:sp>
-        <p:nvSpPr>
-          <p:cNvPr id="9" name="Text 7"/>
-          <p:cNvSpPr/>
-          <p:nvPr/>
-        </p:nvSpPr>
-        <p:spPr>
-          <a:xfrm>
-            <a:off x="804672" y="4073398"/>
-            <a:ext cx="7607808" cy="270002"/>
-          </a:xfrm>
-          <a:prstGeom prst="rect">
-            <a:avLst/>
-          </a:prstGeom>
-          <a:noFill/>
-          <a:ln/>
-        </p:spPr>
-        <p:txBody>
-          <a:bodyPr wrap="square" lIns="0" tIns="0" rIns="0" bIns="0" rtlCol="0" anchor="t"/>
-          <a:lstStyle/>
-          <a:p>
-            <a:pPr indent="0" marL="0">
-              <a:lnSpc>
-                <a:spcPct val="92000"/>
-              </a:lnSpc>
-              <a:buNone/>
-            </a:pPr>
-            <a:r>
-              <a:rPr lang="en-US" sz="1100" dirty="0">
-                <a:solidFill>
-                  <a:srgbClr val="434A63"/>
-                </a:solidFill>
-                <a:latin typeface="Arial" pitchFamily="34" charset="0"/>
-                <a:ea typeface="Arial" pitchFamily="34" charset="-122"/>
-                <a:cs typeface="Arial" pitchFamily="34" charset="-120"/>
-              </a:rPr>
-              <a:t>Jede Gruppe 3 bis 5 Minuten: die Station im Browser, docker compose ps mit healthy und eure kniffligste Stelle.</a:t>
-            </a:r>
-            <a:endParaRPr lang="en-US" sz="1100" dirty="0"/>
-          </a:p>
-        </p:txBody>
-      </p:sp>
-      <p:sp>
-        <p:nvSpPr>
-          <p:cNvPr id="10" name="Shape 8"/>
+              <a:t>Der Profi-Baustein des Abends: Startreihenfolge nicht hoffen, sondern absichern. Ein Healthcheck ist ein kleiner Test, den Docker regelmäßig im Container ausführt.</a:t>
+            </a:r>
+            <a:endParaRPr lang="en-US" sz="1200" dirty="0"/>
+          </a:p>
+        </p:txBody>
+      </p:sp>
+      <p:sp>
+        <p:nvSpPr>
+          <p:cNvPr id="8" name="Shape 5"/>
           <p:cNvSpPr/>
           <p:nvPr/>
         </p:nvSpPr>
@@ -4521,7 +4197,7 @@
       </p:sp>
       <p:sp>
         <p:nvSpPr>
-          <p:cNvPr id="11" name="Text 9"/>
+          <p:cNvPr id="9" name="Text 6"/>
           <p:cNvSpPr/>
           <p:nvPr/>
         </p:nvSpPr>
@@ -4552,7 +4228,7 @@
                 <a:ea typeface="Arial" pitchFamily="34" charset="-122"/>
                 <a:cs typeface="Arial" pitchFamily="34" charset="-120"/>
               </a:rPr>
-              <a:t>Die Missionen</a:t>
+              <a:t>Das Szenario</a:t>
             </a:r>
             <a:endParaRPr lang="en-US" sz="1050" dirty="0"/>
           </a:p>
@@ -4560,7 +4236,7 @@
       </p:sp>
       <p:sp>
         <p:nvSpPr>
-          <p:cNvPr id="12" name="Text 10"/>
+          <p:cNvPr id="10" name="Text 7"/>
           <p:cNvSpPr/>
           <p:nvPr/>
         </p:nvSpPr>
@@ -4591,7 +4267,7 @@
                 <a:ea typeface="Arial" pitchFamily="34" charset="-122"/>
                 <a:cs typeface="Arial" pitchFamily="34" charset="-120"/>
               </a:rPr>
-              <a:t>10/13</a:t>
+              <a:t>11/19</a:t>
             </a:r>
             <a:endParaRPr lang="en-US" sz="1050" dirty="0"/>
           </a:p>
@@ -4682,7 +4358,7 @@
                 <a:ea typeface="Arial" pitchFamily="34" charset="-122"/>
                 <a:cs typeface="Arial" pitchFamily="34" charset="-120"/>
               </a:rPr>
-              <a:t>AUSWERTUNG · 20 MINUTEN</a:t>
+              <a:t>DER HEALTHCHECK IM DETAIL</a:t>
             </a:r>
             <a:endParaRPr lang="en-US" sz="1150" dirty="0"/>
           </a:p>
@@ -4721,471 +4397,45 @@
                 <a:ea typeface="Arial" pitchFamily="34" charset="-122"/>
                 <a:cs typeface="Arial" pitchFamily="34" charset="-120"/>
               </a:rPr>
-              <a:t>Die Demo-Runde</a:t>
+              <a:t>Woher kommt pg_isready?</a:t>
             </a:r>
             <a:endParaRPr lang="en-US" sz="2600" dirty="0"/>
           </a:p>
         </p:txBody>
       </p:sp>
-      <p:sp>
-        <p:nvSpPr>
-          <p:cNvPr id="5" name="Shape 3"/>
-          <p:cNvSpPr/>
-          <p:nvPr/>
-        </p:nvSpPr>
-        <p:spPr>
-          <a:xfrm>
-            <a:off x="438912" y="1810512"/>
-            <a:ext cx="8266176" cy="365760"/>
-          </a:xfrm>
-          <a:prstGeom prst="rect">
-            <a:avLst/>
-          </a:prstGeom>
-          <a:solidFill>
-            <a:srgbClr val="F5F6FC"/>
-          </a:solidFill>
-          <a:ln/>
-        </p:spPr>
-      </p:sp>
-      <p:sp>
-        <p:nvSpPr>
-          <p:cNvPr id="6" name="Text 4"/>
-          <p:cNvSpPr/>
-          <p:nvPr/>
-        </p:nvSpPr>
-        <p:spPr>
-          <a:xfrm>
-            <a:off x="566928" y="1810512"/>
-            <a:ext cx="548640" cy="365760"/>
-          </a:xfrm>
-          <a:prstGeom prst="rect">
-            <a:avLst/>
-          </a:prstGeom>
-          <a:noFill/>
-          <a:ln/>
-        </p:spPr>
-        <p:txBody>
-          <a:bodyPr wrap="square" lIns="0" tIns="0" rIns="0" bIns="0" rtlCol="0" anchor="ctr"/>
-          <a:lstStyle/>
-          <a:p>
-            <a:pPr indent="0" marL="0">
-              <a:buNone/>
-            </a:pPr>
-            <a:r>
-              <a:rPr lang="en-US" sz="1200" b="1" dirty="0">
-                <a:solidFill>
-                  <a:srgbClr val="0F7C86"/>
-                </a:solidFill>
-                <a:latin typeface="Courier New" pitchFamily="34" charset="0"/>
-                <a:ea typeface="Courier New" pitchFamily="34" charset="-122"/>
-                <a:cs typeface="Courier New" pitchFamily="34" charset="-120"/>
-              </a:rPr>
-              <a:t>1</a:t>
-            </a:r>
-            <a:endParaRPr lang="en-US" sz="1200" dirty="0"/>
-          </a:p>
-        </p:txBody>
-      </p:sp>
-      <p:sp>
-        <p:nvSpPr>
-          <p:cNvPr id="7" name="Text 5"/>
-          <p:cNvSpPr/>
-          <p:nvPr/>
-        </p:nvSpPr>
-        <p:spPr>
-          <a:xfrm>
-            <a:off x="1115568" y="1810512"/>
-            <a:ext cx="7461504" cy="365760"/>
-          </a:xfrm>
-          <a:prstGeom prst="rect">
-            <a:avLst/>
-          </a:prstGeom>
-          <a:noFill/>
-          <a:ln/>
-        </p:spPr>
-        <p:txBody>
-          <a:bodyPr wrap="square" lIns="0" tIns="0" rIns="0" bIns="0" rtlCol="0" anchor="ctr"/>
-          <a:lstStyle/>
-          <a:p>
-            <a:pPr indent="0" marL="0">
-              <a:buNone/>
-            </a:pPr>
-            <a:r>
-              <a:rPr lang="en-US" sz="1200" dirty="0">
-                <a:solidFill>
-                  <a:srgbClr val="434A63"/>
-                </a:solidFill>
-                <a:latin typeface="Arial" pitchFamily="34" charset="0"/>
-                <a:ea typeface="Arial" pitchFamily="34" charset="-122"/>
-                <a:cs typeface="Arial" pitchFamily="34" charset="-120"/>
-              </a:rPr>
-              <a:t>Die Station: Wie viele Module leuchten? Daneben docker compose ps mit healthy</a:t>
-            </a:r>
-            <a:endParaRPr lang="en-US" sz="1200" dirty="0"/>
-          </a:p>
-        </p:txBody>
-      </p:sp>
-      <p:sp>
-        <p:nvSpPr>
-          <p:cNvPr id="8" name="Text 6"/>
-          <p:cNvSpPr/>
-          <p:nvPr/>
-        </p:nvSpPr>
-        <p:spPr>
-          <a:xfrm>
-            <a:off x="566928" y="2176272"/>
-            <a:ext cx="548640" cy="365760"/>
-          </a:xfrm>
-          <a:prstGeom prst="rect">
-            <a:avLst/>
-          </a:prstGeom>
-          <a:noFill/>
-          <a:ln/>
-        </p:spPr>
-        <p:txBody>
-          <a:bodyPr wrap="square" lIns="0" tIns="0" rIns="0" bIns="0" rtlCol="0" anchor="ctr"/>
-          <a:lstStyle/>
-          <a:p>
-            <a:pPr indent="0" marL="0">
-              <a:buNone/>
-            </a:pPr>
-            <a:r>
-              <a:rPr lang="en-US" sz="1200" b="1" dirty="0">
-                <a:solidFill>
-                  <a:srgbClr val="0F7C86"/>
-                </a:solidFill>
-                <a:latin typeface="Courier New" pitchFamily="34" charset="0"/>
-                <a:ea typeface="Courier New" pitchFamily="34" charset="-122"/>
-                <a:cs typeface="Courier New" pitchFamily="34" charset="-120"/>
-              </a:rPr>
-              <a:t>2</a:t>
-            </a:r>
-            <a:endParaRPr lang="en-US" sz="1200" dirty="0"/>
-          </a:p>
-        </p:txBody>
-      </p:sp>
-      <p:sp>
-        <p:nvSpPr>
-          <p:cNvPr id="9" name="Text 7"/>
-          <p:cNvSpPr/>
-          <p:nvPr/>
-        </p:nvSpPr>
-        <p:spPr>
-          <a:xfrm>
-            <a:off x="1115568" y="2176272"/>
-            <a:ext cx="7461504" cy="365760"/>
-          </a:xfrm>
-          <a:prstGeom prst="rect">
-            <a:avLst/>
-          </a:prstGeom>
-          <a:noFill/>
-          <a:ln/>
-        </p:spPr>
-        <p:txBody>
-          <a:bodyPr wrap="square" lIns="0" tIns="0" rIns="0" bIns="0" rtlCol="0" anchor="ctr"/>
-          <a:lstStyle/>
-          <a:p>
-            <a:pPr indent="0" marL="0">
-              <a:buNone/>
-            </a:pPr>
-            <a:r>
-              <a:rPr lang="en-US" sz="1200" dirty="0">
-                <a:solidFill>
-                  <a:srgbClr val="434A63"/>
-                </a:solidFill>
-                <a:latin typeface="Arial" pitchFamily="34" charset="0"/>
-                <a:ea typeface="Arial" pitchFamily="34" charset="-122"/>
-                <a:cs typeface="Arial" pitchFamily="34" charset="-120"/>
-              </a:rPr>
-              <a:t>Der Beweis: down und up, die Logbuch-Historie ist noch da. Warum?</a:t>
-            </a:r>
-            <a:endParaRPr lang="en-US" sz="1200" dirty="0"/>
-          </a:p>
-        </p:txBody>
-      </p:sp>
-      <p:sp>
-        <p:nvSpPr>
-          <p:cNvPr id="10" name="Shape 8"/>
-          <p:cNvSpPr/>
-          <p:nvPr/>
-        </p:nvSpPr>
-        <p:spPr>
-          <a:xfrm>
-            <a:off x="438912" y="2542032"/>
-            <a:ext cx="8266176" cy="365760"/>
-          </a:xfrm>
-          <a:prstGeom prst="rect">
-            <a:avLst/>
-          </a:prstGeom>
-          <a:solidFill>
-            <a:srgbClr val="F5F6FC"/>
-          </a:solidFill>
-          <a:ln/>
-        </p:spPr>
-      </p:sp>
-      <p:sp>
-        <p:nvSpPr>
-          <p:cNvPr id="11" name="Text 9"/>
-          <p:cNvSpPr/>
-          <p:nvPr/>
-        </p:nvSpPr>
-        <p:spPr>
-          <a:xfrm>
-            <a:off x="566928" y="2542032"/>
-            <a:ext cx="548640" cy="365760"/>
-          </a:xfrm>
-          <a:prstGeom prst="rect">
-            <a:avLst/>
-          </a:prstGeom>
-          <a:noFill/>
-          <a:ln/>
-        </p:spPr>
-        <p:txBody>
-          <a:bodyPr wrap="square" lIns="0" tIns="0" rIns="0" bIns="0" rtlCol="0" anchor="ctr"/>
-          <a:lstStyle/>
-          <a:p>
-            <a:pPr indent="0" marL="0">
-              <a:buNone/>
-            </a:pPr>
-            <a:r>
-              <a:rPr lang="en-US" sz="1200" b="1" dirty="0">
-                <a:solidFill>
-                  <a:srgbClr val="0F7C86"/>
-                </a:solidFill>
-                <a:latin typeface="Courier New" pitchFamily="34" charset="0"/>
-                <a:ea typeface="Courier New" pitchFamily="34" charset="-122"/>
-                <a:cs typeface="Courier New" pitchFamily="34" charset="-120"/>
-              </a:rPr>
-              <a:t>3</a:t>
-            </a:r>
-            <a:endParaRPr lang="en-US" sz="1200" dirty="0"/>
-          </a:p>
-        </p:txBody>
-      </p:sp>
-      <p:sp>
-        <p:nvSpPr>
-          <p:cNvPr id="12" name="Text 10"/>
-          <p:cNvSpPr/>
-          <p:nvPr/>
-        </p:nvSpPr>
-        <p:spPr>
-          <a:xfrm>
-            <a:off x="1115568" y="2542032"/>
-            <a:ext cx="7461504" cy="365760"/>
-          </a:xfrm>
-          <a:prstGeom prst="rect">
-            <a:avLst/>
-          </a:prstGeom>
-          <a:noFill/>
-          <a:ln/>
-        </p:spPr>
-        <p:txBody>
-          <a:bodyPr wrap="square" lIns="0" tIns="0" rIns="0" bIns="0" rtlCol="0" anchor="ctr"/>
-          <a:lstStyle/>
-          <a:p>
-            <a:pPr indent="0" marL="0">
-              <a:buNone/>
-            </a:pPr>
-            <a:r>
-              <a:rPr lang="en-US" sz="1200" dirty="0">
-                <a:solidFill>
-                  <a:srgbClr val="434A63"/>
-                </a:solidFill>
-                <a:latin typeface="Arial" pitchFamily="34" charset="0"/>
-                <a:ea typeface="Arial" pitchFamily="34" charset="-122"/>
-                <a:cs typeface="Arial" pitchFamily="34" charset="-120"/>
-              </a:rPr>
-              <a:t>Die kniffligste Stelle und welches Log oder welche Funkhilfe sie gelöst hat</a:t>
-            </a:r>
-            <a:endParaRPr lang="en-US" sz="1200" dirty="0"/>
-          </a:p>
-        </p:txBody>
-      </p:sp>
-      <p:sp>
-        <p:nvSpPr>
-          <p:cNvPr id="13" name="Text 11"/>
-          <p:cNvSpPr/>
-          <p:nvPr/>
-        </p:nvSpPr>
-        <p:spPr>
-          <a:xfrm>
-            <a:off x="566928" y="2907792"/>
-            <a:ext cx="548640" cy="365760"/>
-          </a:xfrm>
-          <a:prstGeom prst="rect">
-            <a:avLst/>
-          </a:prstGeom>
-          <a:noFill/>
-          <a:ln/>
-        </p:spPr>
-        <p:txBody>
-          <a:bodyPr wrap="square" lIns="0" tIns="0" rIns="0" bIns="0" rtlCol="0" anchor="ctr"/>
-          <a:lstStyle/>
-          <a:p>
-            <a:pPr indent="0" marL="0">
-              <a:buNone/>
-            </a:pPr>
-            <a:r>
-              <a:rPr lang="en-US" sz="1200" b="1" dirty="0">
-                <a:solidFill>
-                  <a:srgbClr val="0F7C86"/>
-                </a:solidFill>
-                <a:latin typeface="Courier New" pitchFamily="34" charset="0"/>
-                <a:ea typeface="Courier New" pitchFamily="34" charset="-122"/>
-                <a:cs typeface="Courier New" pitchFamily="34" charset="-120"/>
-              </a:rPr>
-              <a:t>4</a:t>
-            </a:r>
-            <a:endParaRPr lang="en-US" sz="1200" dirty="0"/>
-          </a:p>
-        </p:txBody>
-      </p:sp>
-      <p:sp>
-        <p:nvSpPr>
-          <p:cNvPr id="14" name="Text 12"/>
-          <p:cNvSpPr/>
-          <p:nvPr/>
-        </p:nvSpPr>
-        <p:spPr>
-          <a:xfrm>
-            <a:off x="1115568" y="2907792"/>
-            <a:ext cx="7461504" cy="365760"/>
-          </a:xfrm>
-          <a:prstGeom prst="rect">
-            <a:avLst/>
-          </a:prstGeom>
-          <a:noFill/>
-          <a:ln/>
-        </p:spPr>
-        <p:txBody>
-          <a:bodyPr wrap="square" lIns="0" tIns="0" rIns="0" bIns="0" rtlCol="0" anchor="ctr"/>
-          <a:lstStyle/>
-          <a:p>
-            <a:pPr indent="0" marL="0">
-              <a:buNone/>
-            </a:pPr>
-            <a:r>
-              <a:rPr lang="en-US" sz="1200" dirty="0">
-                <a:solidFill>
-                  <a:srgbClr val="434A63"/>
-                </a:solidFill>
-                <a:latin typeface="Arial" pitchFamily="34" charset="0"/>
-                <a:ea typeface="Arial" pitchFamily="34" charset="-122"/>
-                <a:cs typeface="Arial" pitchFamily="34" charset="-120"/>
-              </a:rPr>
-              <a:t>Aus der Vertiefung: Störung, Live-Ausfall oder FastAPI, kurz vorführen</a:t>
-            </a:r>
-            <a:endParaRPr lang="en-US" sz="1200" dirty="0"/>
-          </a:p>
-        </p:txBody>
-      </p:sp>
-      <p:sp>
-        <p:nvSpPr>
-          <p:cNvPr id="15" name="Shape 13"/>
-          <p:cNvSpPr/>
-          <p:nvPr/>
-        </p:nvSpPr>
-        <p:spPr>
-          <a:xfrm>
-            <a:off x="438912" y="3273552"/>
-            <a:ext cx="8266176" cy="365760"/>
-          </a:xfrm>
-          <a:prstGeom prst="rect">
-            <a:avLst/>
-          </a:prstGeom>
-          <a:solidFill>
-            <a:srgbClr val="F5F6FC"/>
-          </a:solidFill>
-          <a:ln/>
-        </p:spPr>
-      </p:sp>
-      <p:sp>
-        <p:nvSpPr>
-          <p:cNvPr id="16" name="Text 14"/>
-          <p:cNvSpPr/>
-          <p:nvPr/>
-        </p:nvSpPr>
-        <p:spPr>
-          <a:xfrm>
-            <a:off x="566928" y="3273552"/>
-            <a:ext cx="548640" cy="365760"/>
-          </a:xfrm>
-          <a:prstGeom prst="rect">
-            <a:avLst/>
-          </a:prstGeom>
-          <a:noFill/>
-          <a:ln/>
-        </p:spPr>
-        <p:txBody>
-          <a:bodyPr wrap="square" lIns="0" tIns="0" rIns="0" bIns="0" rtlCol="0" anchor="ctr"/>
-          <a:lstStyle/>
-          <a:p>
-            <a:pPr indent="0" marL="0">
-              <a:buNone/>
-            </a:pPr>
-            <a:r>
-              <a:rPr lang="en-US" sz="1200" b="1" dirty="0">
-                <a:solidFill>
-                  <a:srgbClr val="0F7C86"/>
-                </a:solidFill>
-                <a:latin typeface="Courier New" pitchFamily="34" charset="0"/>
-                <a:ea typeface="Courier New" pitchFamily="34" charset="-122"/>
-                <a:cs typeface="Courier New" pitchFamily="34" charset="-120"/>
-              </a:rPr>
-              <a:t>5</a:t>
-            </a:r>
-            <a:endParaRPr lang="en-US" sz="1200" dirty="0"/>
-          </a:p>
-        </p:txBody>
-      </p:sp>
-      <p:sp>
-        <p:nvSpPr>
-          <p:cNvPr id="17" name="Text 15"/>
-          <p:cNvSpPr/>
-          <p:nvPr/>
-        </p:nvSpPr>
-        <p:spPr>
-          <a:xfrm>
-            <a:off x="1115568" y="3273552"/>
-            <a:ext cx="7461504" cy="365760"/>
-          </a:xfrm>
-          <a:prstGeom prst="rect">
-            <a:avLst/>
-          </a:prstGeom>
-          <a:noFill/>
-          <a:ln/>
-        </p:spPr>
-        <p:txBody>
-          <a:bodyPr wrap="square" lIns="0" tIns="0" rIns="0" bIns="0" rtlCol="0" anchor="ctr"/>
-          <a:lstStyle/>
-          <a:p>
-            <a:pPr indent="0" marL="0">
-              <a:buNone/>
-            </a:pPr>
-            <a:r>
-              <a:rPr lang="en-US" sz="1200" dirty="0">
-                <a:solidFill>
-                  <a:srgbClr val="434A63"/>
-                </a:solidFill>
-                <a:latin typeface="Arial" pitchFamily="34" charset="0"/>
-                <a:ea typeface="Arial" pitchFamily="34" charset="-122"/>
-                <a:cs typeface="Arial" pitchFamily="34" charset="-120"/>
-              </a:rPr>
-              <a:t>Die offene Frage für Mittwoch: Euer Stack spricht HTTP. Die Presse in Halle 1 auch?</a:t>
-            </a:r>
-            <a:endParaRPr lang="en-US" sz="1200" dirty="0"/>
-          </a:p>
-        </p:txBody>
-      </p:sp>
-      <p:sp>
-        <p:nvSpPr>
-          <p:cNvPr id="18" name="Shape 16"/>
-          <p:cNvSpPr/>
-          <p:nvPr/>
-        </p:nvSpPr>
-        <p:spPr>
-          <a:xfrm>
-            <a:off x="566928" y="4069080"/>
+      <p:pic>
+        <p:nvPicPr>
+          <p:cNvPr id="5" name="Image 0" descr="/Users/jacobmenge/Desktop/kurs-26.2b-orga/folienwerkstatt/assets/diagramme/healthcheck-mechanik.png">    </p:cNvPr>
+          <p:cNvPicPr>
+            <a:picLocks noChangeAspect="1"/>
+          </p:cNvPicPr>
+          <p:nvPr/>
+        </p:nvPicPr>
+        <p:blipFill>
+          <a:blip r:embed="rId1"/>
+          <a:stretch>
+            <a:fillRect/>
+          </a:stretch>
+        </p:blipFill>
+        <p:spPr>
+          <a:xfrm>
+            <a:off x="566928" y="1371600"/>
+            <a:ext cx="8010144" cy="2633472"/>
+          </a:xfrm>
+          <a:prstGeom prst="rect">
+            <a:avLst/>
+          </a:prstGeom>
+        </p:spPr>
+      </p:pic>
+      <p:sp>
+        <p:nvSpPr>
+          <p:cNvPr id="6" name="Shape 3"/>
+          <p:cNvSpPr/>
+          <p:nvPr/>
+        </p:nvSpPr>
+        <p:spPr>
+          <a:xfrm>
+            <a:off x="566928" y="4160520"/>
             <a:ext cx="32004" cy="256032"/>
           </a:xfrm>
           <a:prstGeom prst="rect">
@@ -5199,13 +4449,13 @@
       </p:sp>
       <p:sp>
         <p:nvSpPr>
-          <p:cNvPr id="19" name="Text 17"/>
-          <p:cNvSpPr/>
-          <p:nvPr/>
-        </p:nvSpPr>
-        <p:spPr>
-          <a:xfrm>
-            <a:off x="749808" y="4023360"/>
+          <p:cNvPr id="7" name="Text 4"/>
+          <p:cNvSpPr/>
+          <p:nvPr/>
+        </p:nvSpPr>
+        <p:spPr>
+          <a:xfrm>
+            <a:off x="749808" y="4114800"/>
             <a:ext cx="7827264" cy="402336"/>
           </a:xfrm>
           <a:prstGeom prst="rect">
@@ -5230,7 +4480,7 @@
                 <a:ea typeface="Arial" pitchFamily="34" charset="-122"/>
                 <a:cs typeface="Arial" pitchFamily="34" charset="-120"/>
               </a:rPr>
-              <a:t>Punkte gibt es nur symbolisch und nur für Teamarbeit: Jede Rolle, die in der Demo zu Wort kommt, zählt einen.</a:t>
+              <a:t>Der Testbefehl gehört zum Container, nicht zu Docker. Docker liefert nur Takt und Bewertung, deshalb funktioniert der Baustein für jeden Dienst.</a:t>
             </a:r>
             <a:endParaRPr lang="en-US" sz="1200" dirty="0"/>
           </a:p>
@@ -5238,7 +4488,7 @@
       </p:sp>
       <p:sp>
         <p:nvSpPr>
-          <p:cNvPr id="20" name="Shape 18"/>
+          <p:cNvPr id="8" name="Shape 5"/>
           <p:cNvSpPr/>
           <p:nvPr/>
         </p:nvSpPr>
@@ -5261,7 +4511,7 @@
       </p:sp>
       <p:sp>
         <p:nvSpPr>
-          <p:cNvPr id="21" name="Text 19"/>
+          <p:cNvPr id="9" name="Text 6"/>
           <p:cNvSpPr/>
           <p:nvPr/>
         </p:nvSpPr>
@@ -5292,7 +4542,7 @@
                 <a:ea typeface="Arial" pitchFamily="34" charset="-122"/>
                 <a:cs typeface="Arial" pitchFamily="34" charset="-120"/>
               </a:rPr>
-              <a:t>Demo-Runde</a:t>
+              <a:t>Das Szenario</a:t>
             </a:r>
             <a:endParaRPr lang="en-US" sz="1050" dirty="0"/>
           </a:p>
@@ -5300,7 +4550,7 @@
       </p:sp>
       <p:sp>
         <p:nvSpPr>
-          <p:cNvPr id="22" name="Text 20"/>
+          <p:cNvPr id="10" name="Text 7"/>
           <p:cNvSpPr/>
           <p:nvPr/>
         </p:nvSpPr>
@@ -5331,7 +4581,7 @@
                 <a:ea typeface="Arial" pitchFamily="34" charset="-122"/>
                 <a:cs typeface="Arial" pitchFamily="34" charset="-120"/>
               </a:rPr>
-              <a:t>11/13</a:t>
+              <a:t>12/19</a:t>
             </a:r>
             <a:endParaRPr lang="en-US" sz="1050" dirty="0"/>
           </a:p>
@@ -5422,7 +4672,7 @@
                 <a:ea typeface="Arial" pitchFamily="34" charset="-122"/>
                 <a:cs typeface="Arial" pitchFamily="34" charset="-120"/>
               </a:rPr>
-              <a:t>DER RÜCKBLICK</a:t>
+              <a:t>DIE COMPOSE.YAML IM ÜBERBLICK</a:t>
             </a:r>
             <a:endParaRPr lang="en-US" sz="1150" dirty="0"/>
           </a:p>
@@ -5461,7 +4711,7 @@
                 <a:ea typeface="Arial" pitchFamily="34" charset="-122"/>
                 <a:cs typeface="Arial" pitchFamily="34" charset="-120"/>
               </a:rPr>
-              <a:t>Vier Abende Docker</a:t>
+              <a:t>Das Gerüst eurer Datei</a:t>
             </a:r>
             <a:endParaRPr lang="en-US" sz="2600" dirty="0"/>
           </a:p>
@@ -5469,7 +4719,7 @@
       </p:sp>
       <p:pic>
         <p:nvPicPr>
-          <p:cNvPr id="5" name="Image 0" descr="/Users/jacobmenge/Desktop/kurs-26.2b-orga/folienwerkstatt/assets/diagramme/block-rueckblick.png">    </p:cNvPr>
+          <p:cNvPr id="5" name="Image 0" descr="/Users/jacobmenge/Desktop/kurs-26.2b-orga/folienwerkstatt/assets/diagramme/compose-wachsen.png">    </p:cNvPr>
           <p:cNvPicPr>
             <a:picLocks noChangeAspect="1"/>
           </p:cNvPicPr>
@@ -5483,8 +4733,8 @@
         </p:blipFill>
         <p:spPr>
           <a:xfrm>
-            <a:off x="566928" y="1700784"/>
-            <a:ext cx="8010144" cy="1737360"/>
+            <a:off x="566928" y="1316736"/>
+            <a:ext cx="8010144" cy="2743200"/>
           </a:xfrm>
           <a:prstGeom prst="rect">
             <a:avLst/>
@@ -5499,7 +4749,7 @@
         </p:nvSpPr>
         <p:spPr>
           <a:xfrm>
-            <a:off x="566928" y="3931920"/>
+            <a:off x="566928" y="4160520"/>
             <a:ext cx="32004" cy="256032"/>
           </a:xfrm>
           <a:prstGeom prst="rect">
@@ -5519,7 +4769,7 @@
         </p:nvSpPr>
         <p:spPr>
           <a:xfrm>
-            <a:off x="749808" y="3886200"/>
+            <a:off x="749808" y="4114800"/>
             <a:ext cx="7827264" cy="402336"/>
           </a:xfrm>
           <a:prstGeom prst="rect">
@@ -5544,7 +4794,7 @@
                 <a:ea typeface="Arial" pitchFamily="34" charset="-122"/>
                 <a:cs typeface="Arial" pitchFamily="34" charset="-120"/>
               </a:rPr>
-              <a:t>Vom ersten Wegwerf-Container zum orchestrierten Stack. Dieser Werkzeugkasten bleibt für den Rest des Kurses im Einsatz.</a:t>
+              <a:t>Mehr Bausteine braucht der ganze Abend nicht. Jeden orangen Block habt ihr gerade auf einer eigenen Folie gesehen, den Rest habt ihr Mittwoch selbst geschrieben.</a:t>
             </a:r>
             <a:endParaRPr lang="en-US" sz="1200" dirty="0"/>
           </a:p>
@@ -5606,7 +4856,7 @@
                 <a:ea typeface="Arial" pitchFamily="34" charset="-122"/>
                 <a:cs typeface="Arial" pitchFamily="34" charset="-120"/>
               </a:rPr>
-              <a:t>Demo-Runde</a:t>
+              <a:t>Das Szenario</a:t>
             </a:r>
             <a:endParaRPr lang="en-US" sz="1050" dirty="0"/>
           </a:p>
@@ -5645,7 +4895,7 @@
                 <a:ea typeface="Arial" pitchFamily="34" charset="-122"/>
                 <a:cs typeface="Arial" pitchFamily="34" charset="-120"/>
               </a:rPr>
-              <a:t>12/13</a:t>
+              <a:t>13/19</a:t>
             </a:r>
             <a:endParaRPr lang="en-US" sz="1050" dirty="0"/>
           </a:p>
@@ -5691,67 +4941,107 @@
         </p:nvSpPr>
         <p:spPr>
           <a:xfrm>
-            <a:off x="566928" y="201168"/>
+            <a:off x="6355080" y="0"/>
+            <a:ext cx="2788920" cy="5143500"/>
+          </a:xfrm>
+          <a:prstGeom prst="rect">
+            <a:avLst/>
+          </a:prstGeom>
+          <a:solidFill>
+            <a:srgbClr val="FBF2E3"/>
+          </a:solidFill>
+          <a:ln/>
+        </p:spPr>
+      </p:sp>
+      <p:sp>
+        <p:nvSpPr>
+          <p:cNvPr id="3" name="Shape 1"/>
+          <p:cNvSpPr/>
+          <p:nvPr/>
+        </p:nvSpPr>
+        <p:spPr>
+          <a:xfrm>
+            <a:off x="6355080" y="0"/>
+            <a:ext cx="45720" cy="5143500"/>
+          </a:xfrm>
+          <a:prstGeom prst="rect">
+            <a:avLst/>
+          </a:prstGeom>
+          <a:solidFill>
+            <a:srgbClr val="9A6310"/>
+          </a:solidFill>
+          <a:ln/>
+        </p:spPr>
+      </p:sp>
+      <p:sp>
+        <p:nvSpPr>
+          <p:cNvPr id="4" name="Text 2"/>
+          <p:cNvSpPr/>
+          <p:nvPr/>
+        </p:nvSpPr>
+        <p:spPr>
+          <a:xfrm>
+            <a:off x="6629400" y="1463040"/>
+            <a:ext cx="2194560" cy="1737360"/>
+          </a:xfrm>
+          <a:prstGeom prst="rect">
+            <a:avLst/>
+          </a:prstGeom>
+          <a:noFill/>
+          <a:ln/>
+        </p:spPr>
+        <p:txBody>
+          <a:bodyPr wrap="square" lIns="0" tIns="0" rIns="0" bIns="0" rtlCol="0" anchor="ctr"/>
+          <a:lstStyle/>
+          <a:p>
+            <a:pPr algn="ctr" indent="0" marL="0">
+              <a:buNone/>
+            </a:pPr>
+            <a:r>
+              <a:rPr lang="en-US" sz="8400" b="1" dirty="0">
+                <a:solidFill>
+                  <a:srgbClr val="9A6310"/>
+                </a:solidFill>
+                <a:latin typeface="Arial" pitchFamily="34" charset="0"/>
+                <a:ea typeface="Arial" pitchFamily="34" charset="-122"/>
+                <a:cs typeface="Arial" pitchFamily="34" charset="-120"/>
+              </a:rPr>
+              <a:t>02</a:t>
+            </a:r>
+            <a:endParaRPr lang="en-US" sz="8400" dirty="0"/>
+          </a:p>
+        </p:txBody>
+      </p:sp>
+      <p:sp>
+        <p:nvSpPr>
+          <p:cNvPr id="5" name="Shape 3"/>
+          <p:cNvSpPr/>
+          <p:nvPr/>
+        </p:nvSpPr>
+        <p:spPr>
+          <a:xfrm>
+            <a:off x="566928" y="1883664"/>
             <a:ext cx="475488" cy="50292"/>
           </a:xfrm>
           <a:prstGeom prst="rect">
             <a:avLst/>
           </a:prstGeom>
           <a:solidFill>
-            <a:srgbClr val="0F7C86"/>
+            <a:srgbClr val="9A6310"/>
           </a:solidFill>
           <a:ln/>
         </p:spPr>
       </p:sp>
       <p:sp>
         <p:nvSpPr>
-          <p:cNvPr id="3" name="Text 1"/>
-          <p:cNvSpPr/>
-          <p:nvPr/>
-        </p:nvSpPr>
-        <p:spPr>
-          <a:xfrm>
-            <a:off x="566928" y="384048"/>
-            <a:ext cx="8010144" cy="237744"/>
-          </a:xfrm>
-          <a:prstGeom prst="rect">
-            <a:avLst/>
-          </a:prstGeom>
-          <a:noFill/>
-          <a:ln/>
-        </p:spPr>
-        <p:txBody>
-          <a:bodyPr wrap="square" lIns="0" tIns="0" rIns="0" bIns="0" rtlCol="0" anchor="ctr"/>
-          <a:lstStyle/>
-          <a:p>
-            <a:pPr indent="0" marL="0">
-              <a:buNone/>
-            </a:pPr>
-            <a:r>
-              <a:rPr lang="en-US" sz="1150" b="1" spc="180" kern="0" dirty="0">
-                <a:solidFill>
-                  <a:srgbClr val="0F7C86"/>
-                </a:solidFill>
-                <a:latin typeface="Arial" pitchFamily="34" charset="0"/>
-                <a:ea typeface="Arial" pitchFamily="34" charset="-122"/>
-                <a:cs typeface="Arial" pitchFamily="34" charset="-120"/>
-              </a:rPr>
-              <a:t>AUSBLICK</a:t>
-            </a:r>
-            <a:endParaRPr lang="en-US" sz="1150" dirty="0"/>
-          </a:p>
-        </p:txBody>
-      </p:sp>
-      <p:sp>
-        <p:nvSpPr>
-          <p:cNvPr id="4" name="Text 2"/>
-          <p:cNvSpPr/>
-          <p:nvPr/>
-        </p:nvSpPr>
-        <p:spPr>
-          <a:xfrm>
-            <a:off x="566928" y="731520"/>
-            <a:ext cx="8010144" cy="603504"/>
+          <p:cNvPr id="6" name="Text 4"/>
+          <p:cNvSpPr/>
+          <p:nvPr/>
+        </p:nvSpPr>
+        <p:spPr>
+          <a:xfrm>
+            <a:off x="566928" y="2084832"/>
+            <a:ext cx="5394960" cy="868680"/>
           </a:xfrm>
           <a:prstGeom prst="rect">
             <a:avLst/>
@@ -5767,7 +5057,7 @@
               <a:buNone/>
             </a:pPr>
             <a:r>
-              <a:rPr lang="en-US" sz="2600" b="1" dirty="0">
+              <a:rPr lang="en-US" sz="3000" b="1" dirty="0">
                 <a:solidFill>
                   <a:srgbClr val="272E52"/>
                 </a:solidFill>
@@ -5775,22 +5065,22 @@
                 <a:ea typeface="Arial" pitchFamily="34" charset="-122"/>
                 <a:cs typeface="Arial" pitchFamily="34" charset="-120"/>
               </a:rPr>
-              <a:t>Bis Mittwoch</a:t>
-            </a:r>
-            <a:endParaRPr lang="en-US" sz="2600" dirty="0"/>
-          </a:p>
-        </p:txBody>
-      </p:sp>
-      <p:sp>
-        <p:nvSpPr>
-          <p:cNvPr id="5" name="Text 3"/>
-          <p:cNvSpPr/>
-          <p:nvPr/>
-        </p:nvSpPr>
-        <p:spPr>
-          <a:xfrm>
-            <a:off x="566928" y="1444752"/>
-            <a:ext cx="8010144" cy="438912"/>
+              <a:t>Eure Missionen</a:t>
+            </a:r>
+            <a:endParaRPr lang="en-US" sz="3000" dirty="0"/>
+          </a:p>
+        </p:txBody>
+      </p:sp>
+      <p:sp>
+        <p:nvSpPr>
+          <p:cNvPr id="7" name="Text 5"/>
+          <p:cNvSpPr/>
+          <p:nvPr/>
+        </p:nvSpPr>
+        <p:spPr>
+          <a:xfrm>
+            <a:off x="566928" y="3017520"/>
+            <a:ext cx="5394960" cy="548640"/>
           </a:xfrm>
           <a:prstGeom prst="rect">
             <a:avLst/>
@@ -5806,7 +5096,7 @@
               <a:buNone/>
             </a:pPr>
             <a:r>
-              <a:rPr lang="en-US" sz="1300" dirty="0">
+              <a:rPr lang="en-US" sz="1350" dirty="0">
                 <a:solidFill>
                   <a:srgbClr val="5C6377"/>
                 </a:solidFill>
@@ -5814,532 +5104,9 @@
                 <a:ea typeface="Arial" pitchFamily="34" charset="-122"/>
                 <a:cs typeface="Arial" pitchFamily="34" charset="-120"/>
               </a:rPr>
-              <a:t>Mittwoch beginnt ein neues Kapitel: die Industrie. Wie sprechen Maschinen, Sensoren und Anlagen?</a:t>
-            </a:r>
-            <a:endParaRPr lang="en-US" sz="1300" dirty="0"/>
-          </a:p>
-        </p:txBody>
-      </p:sp>
-      <p:sp>
-        <p:nvSpPr>
-          <p:cNvPr id="6" name="Shape 4"/>
-          <p:cNvSpPr/>
-          <p:nvPr/>
-        </p:nvSpPr>
-        <p:spPr>
-          <a:xfrm>
-            <a:off x="566928" y="1975104"/>
-            <a:ext cx="2523744" cy="1920240"/>
-          </a:xfrm>
-          <a:prstGeom prst="rect">
-            <a:avLst/>
-          </a:prstGeom>
-          <a:solidFill>
-            <a:srgbClr val="F5F6FC"/>
-          </a:solidFill>
-          <a:ln/>
-        </p:spPr>
-      </p:sp>
-      <p:sp>
-        <p:nvSpPr>
-          <p:cNvPr id="7" name="Shape 5"/>
-          <p:cNvSpPr/>
-          <p:nvPr/>
-        </p:nvSpPr>
-        <p:spPr>
-          <a:xfrm>
-            <a:off x="566928" y="1975104"/>
-            <a:ext cx="41148" cy="1920240"/>
-          </a:xfrm>
-          <a:prstGeom prst="rect">
-            <a:avLst/>
-          </a:prstGeom>
-          <a:solidFill>
-            <a:srgbClr val="0F7C86"/>
-          </a:solidFill>
-          <a:ln/>
-        </p:spPr>
-      </p:sp>
-      <p:sp>
-        <p:nvSpPr>
-          <p:cNvPr id="8" name="Text 6"/>
-          <p:cNvSpPr/>
-          <p:nvPr/>
-        </p:nvSpPr>
-        <p:spPr>
-          <a:xfrm>
-            <a:off x="804672" y="2121408"/>
-            <a:ext cx="2121408" cy="256032"/>
-          </a:xfrm>
-          <a:prstGeom prst="rect">
-            <a:avLst/>
-          </a:prstGeom>
-          <a:noFill/>
-          <a:ln/>
-        </p:spPr>
-        <p:txBody>
-          <a:bodyPr wrap="square" lIns="0" tIns="0" rIns="0" bIns="0" rtlCol="0" anchor="t"/>
-          <a:lstStyle/>
-          <a:p>
-            <a:pPr indent="0" marL="0">
-              <a:buNone/>
-            </a:pPr>
-            <a:r>
-              <a:rPr lang="en-US" sz="1300" b="1" dirty="0">
-                <a:solidFill>
-                  <a:srgbClr val="272E52"/>
-                </a:solidFill>
-                <a:latin typeface="Arial" pitchFamily="34" charset="0"/>
-                <a:ea typeface="Arial" pitchFamily="34" charset="-122"/>
-                <a:cs typeface="Arial" pitchFamily="34" charset="-120"/>
-              </a:rPr>
-              <a:t>Industrie und IoT</a:t>
-            </a:r>
-            <a:endParaRPr lang="en-US" sz="1300" dirty="0"/>
-          </a:p>
-        </p:txBody>
-      </p:sp>
-      <p:sp>
-        <p:nvSpPr>
-          <p:cNvPr id="9" name="Text 7"/>
-          <p:cNvSpPr/>
-          <p:nvPr/>
-        </p:nvSpPr>
-        <p:spPr>
-          <a:xfrm>
-            <a:off x="804672" y="2423160"/>
-            <a:ext cx="2121408" cy="1353312"/>
-          </a:xfrm>
-          <a:prstGeom prst="rect">
-            <a:avLst/>
-          </a:prstGeom>
-          <a:noFill/>
-          <a:ln/>
-        </p:spPr>
-        <p:txBody>
-          <a:bodyPr wrap="square" lIns="0" tIns="0" rIns="0" bIns="0" rtlCol="0" anchor="t"/>
-          <a:lstStyle/>
-          <a:p>
-            <a:pPr indent="0" marL="0">
-              <a:lnSpc>
-                <a:spcPct val="92000"/>
-              </a:lnSpc>
-              <a:buNone/>
-            </a:pPr>
-            <a:r>
-              <a:rPr lang="en-US" sz="1150" dirty="0">
-                <a:solidFill>
-                  <a:srgbClr val="434A63"/>
-                </a:solidFill>
-                <a:latin typeface="Arial" pitchFamily="34" charset="0"/>
-                <a:ea typeface="Arial" pitchFamily="34" charset="-122"/>
-                <a:cs typeface="Arial" pitchFamily="34" charset="-120"/>
-              </a:rPr>
-              <a:t>Profinet, OPC UA und MQTT: die Sprachen der Fabrik. Erst als Überblick, dann live im Datenmitschnitt.</a:t>
-            </a:r>
-            <a:endParaRPr lang="en-US" sz="1150" dirty="0"/>
-          </a:p>
-        </p:txBody>
-      </p:sp>
-      <p:sp>
-        <p:nvSpPr>
-          <p:cNvPr id="10" name="Shape 8"/>
-          <p:cNvSpPr/>
-          <p:nvPr/>
-        </p:nvSpPr>
-        <p:spPr>
-          <a:xfrm>
-            <a:off x="3310128" y="1975104"/>
-            <a:ext cx="2523744" cy="1920240"/>
-          </a:xfrm>
-          <a:prstGeom prst="rect">
-            <a:avLst/>
-          </a:prstGeom>
-          <a:solidFill>
-            <a:srgbClr val="F5F6FC"/>
-          </a:solidFill>
-          <a:ln/>
-        </p:spPr>
-      </p:sp>
-      <p:sp>
-        <p:nvSpPr>
-          <p:cNvPr id="11" name="Shape 9"/>
-          <p:cNvSpPr/>
-          <p:nvPr/>
-        </p:nvSpPr>
-        <p:spPr>
-          <a:xfrm>
-            <a:off x="3310128" y="1975104"/>
-            <a:ext cx="41148" cy="1920240"/>
-          </a:xfrm>
-          <a:prstGeom prst="rect">
-            <a:avLst/>
-          </a:prstGeom>
-          <a:solidFill>
-            <a:srgbClr val="0F7C86"/>
-          </a:solidFill>
-          <a:ln/>
-        </p:spPr>
-      </p:sp>
-      <p:sp>
-        <p:nvSpPr>
-          <p:cNvPr id="12" name="Text 10"/>
-          <p:cNvSpPr/>
-          <p:nvPr/>
-        </p:nvSpPr>
-        <p:spPr>
-          <a:xfrm>
-            <a:off x="3547872" y="2121408"/>
-            <a:ext cx="2121408" cy="256032"/>
-          </a:xfrm>
-          <a:prstGeom prst="rect">
-            <a:avLst/>
-          </a:prstGeom>
-          <a:noFill/>
-          <a:ln/>
-        </p:spPr>
-        <p:txBody>
-          <a:bodyPr wrap="square" lIns="0" tIns="0" rIns="0" bIns="0" rtlCol="0" anchor="t"/>
-          <a:lstStyle/>
-          <a:p>
-            <a:pPr indent="0" marL="0">
-              <a:buNone/>
-            </a:pPr>
-            <a:r>
-              <a:rPr lang="en-US" sz="1300" b="1" dirty="0">
-                <a:solidFill>
-                  <a:srgbClr val="272E52"/>
-                </a:solidFill>
-                <a:latin typeface="Arial" pitchFamily="34" charset="0"/>
-                <a:ea typeface="Arial" pitchFamily="34" charset="-122"/>
-                <a:cs typeface="Arial" pitchFamily="34" charset="-120"/>
-              </a:rPr>
-              <a:t>Wireshark</a:t>
-            </a:r>
-            <a:endParaRPr lang="en-US" sz="1300" dirty="0"/>
-          </a:p>
-        </p:txBody>
-      </p:sp>
-      <p:sp>
-        <p:nvSpPr>
-          <p:cNvPr id="13" name="Text 11"/>
-          <p:cNvSpPr/>
-          <p:nvPr/>
-        </p:nvSpPr>
-        <p:spPr>
-          <a:xfrm>
-            <a:off x="3547872" y="2423160"/>
-            <a:ext cx="2121408" cy="1353312"/>
-          </a:xfrm>
-          <a:prstGeom prst="rect">
-            <a:avLst/>
-          </a:prstGeom>
-          <a:noFill/>
-          <a:ln/>
-        </p:spPr>
-        <p:txBody>
-          <a:bodyPr wrap="square" lIns="0" tIns="0" rIns="0" bIns="0" rtlCol="0" anchor="t"/>
-          <a:lstStyle/>
-          <a:p>
-            <a:pPr indent="0" marL="0">
-              <a:lnSpc>
-                <a:spcPct val="92000"/>
-              </a:lnSpc>
-              <a:buNone/>
-            </a:pPr>
-            <a:r>
-              <a:rPr lang="en-US" sz="1150" dirty="0">
-                <a:solidFill>
-                  <a:srgbClr val="434A63"/>
-                </a:solidFill>
-                <a:latin typeface="Arial" pitchFamily="34" charset="0"/>
-                <a:ea typeface="Arial" pitchFamily="34" charset="-122"/>
-                <a:cs typeface="Arial" pitchFamily="34" charset="-120"/>
-              </a:rPr>
-              <a:t>Wir schauen echten Industrie-Protokollen bei der Arbeit zu. Ob ihr das Werkzeug vorab installiert, sagen wir rechtzeitig im Chat.</a:t>
-            </a:r>
-            <a:endParaRPr lang="en-US" sz="1150" dirty="0"/>
-          </a:p>
-        </p:txBody>
-      </p:sp>
-      <p:sp>
-        <p:nvSpPr>
-          <p:cNvPr id="14" name="Shape 12"/>
-          <p:cNvSpPr/>
-          <p:nvPr/>
-        </p:nvSpPr>
-        <p:spPr>
-          <a:xfrm>
-            <a:off x="6053328" y="1975104"/>
-            <a:ext cx="2523744" cy="1920240"/>
-          </a:xfrm>
-          <a:prstGeom prst="rect">
-            <a:avLst/>
-          </a:prstGeom>
-          <a:solidFill>
-            <a:srgbClr val="F5F6FC"/>
-          </a:solidFill>
-          <a:ln/>
-        </p:spPr>
-      </p:sp>
-      <p:sp>
-        <p:nvSpPr>
-          <p:cNvPr id="15" name="Shape 13"/>
-          <p:cNvSpPr/>
-          <p:nvPr/>
-        </p:nvSpPr>
-        <p:spPr>
-          <a:xfrm>
-            <a:off x="6053328" y="1975104"/>
-            <a:ext cx="41148" cy="1920240"/>
-          </a:xfrm>
-          <a:prstGeom prst="rect">
-            <a:avLst/>
-          </a:prstGeom>
-          <a:solidFill>
-            <a:srgbClr val="0F7C86"/>
-          </a:solidFill>
-          <a:ln/>
-        </p:spPr>
-      </p:sp>
-      <p:sp>
-        <p:nvSpPr>
-          <p:cNvPr id="16" name="Text 14"/>
-          <p:cNvSpPr/>
-          <p:nvPr/>
-        </p:nvSpPr>
-        <p:spPr>
-          <a:xfrm>
-            <a:off x="6291072" y="2121408"/>
-            <a:ext cx="2121408" cy="256032"/>
-          </a:xfrm>
-          <a:prstGeom prst="rect">
-            <a:avLst/>
-          </a:prstGeom>
-          <a:noFill/>
-          <a:ln/>
-        </p:spPr>
-        <p:txBody>
-          <a:bodyPr wrap="square" lIns="0" tIns="0" rIns="0" bIns="0" rtlCol="0" anchor="t"/>
-          <a:lstStyle/>
-          <a:p>
-            <a:pPr indent="0" marL="0">
-              <a:buNone/>
-            </a:pPr>
-            <a:r>
-              <a:rPr lang="en-US" sz="1300" b="1" dirty="0">
-                <a:solidFill>
-                  <a:srgbClr val="272E52"/>
-                </a:solidFill>
-                <a:latin typeface="Arial" pitchFamily="34" charset="0"/>
-                <a:ea typeface="Arial" pitchFamily="34" charset="-122"/>
-                <a:cs typeface="Arial" pitchFamily="34" charset="-120"/>
-              </a:rPr>
-              <a:t>Docker bleibt</a:t>
-            </a:r>
-            <a:endParaRPr lang="en-US" sz="1300" dirty="0"/>
-          </a:p>
-        </p:txBody>
-      </p:sp>
-      <p:sp>
-        <p:nvSpPr>
-          <p:cNvPr id="17" name="Text 15"/>
-          <p:cNvSpPr/>
-          <p:nvPr/>
-        </p:nvSpPr>
-        <p:spPr>
-          <a:xfrm>
-            <a:off x="6291072" y="2423160"/>
-            <a:ext cx="2121408" cy="1353312"/>
-          </a:xfrm>
-          <a:prstGeom prst="rect">
-            <a:avLst/>
-          </a:prstGeom>
-          <a:noFill/>
-          <a:ln/>
-        </p:spPr>
-        <p:txBody>
-          <a:bodyPr wrap="square" lIns="0" tIns="0" rIns="0" bIns="0" rtlCol="0" anchor="t"/>
-          <a:lstStyle/>
-          <a:p>
-            <a:pPr indent="0" marL="0">
-              <a:lnSpc>
-                <a:spcPct val="92000"/>
-              </a:lnSpc>
-              <a:buNone/>
-            </a:pPr>
-            <a:r>
-              <a:rPr lang="en-US" sz="1150" dirty="0">
-                <a:solidFill>
-                  <a:srgbClr val="434A63"/>
-                </a:solidFill>
-                <a:latin typeface="Arial" pitchFamily="34" charset="0"/>
-                <a:ea typeface="Arial" pitchFamily="34" charset="-122"/>
-                <a:cs typeface="Arial" pitchFamily="34" charset="-120"/>
-              </a:rPr>
-              <a:t>Der Werkzeugkasten von heute läuft ab jetzt nebenbei mit. Der MQTT-Broker wohnt bald in einem Container.</a:t>
-            </a:r>
-            <a:endParaRPr lang="en-US" sz="1150" dirty="0"/>
-          </a:p>
-        </p:txBody>
-      </p:sp>
-      <p:sp>
-        <p:nvSpPr>
-          <p:cNvPr id="18" name="Shape 16"/>
-          <p:cNvSpPr/>
-          <p:nvPr/>
-        </p:nvSpPr>
-        <p:spPr>
-          <a:xfrm>
-            <a:off x="566928" y="4160520"/>
-            <a:ext cx="32004" cy="256032"/>
-          </a:xfrm>
-          <a:prstGeom prst="rect">
-            <a:avLst/>
-          </a:prstGeom>
-          <a:solidFill>
-            <a:srgbClr val="0F7C86"/>
-          </a:solidFill>
-          <a:ln/>
-        </p:spPr>
-      </p:sp>
-      <p:sp>
-        <p:nvSpPr>
-          <p:cNvPr id="19" name="Text 17"/>
-          <p:cNvSpPr/>
-          <p:nvPr/>
-        </p:nvSpPr>
-        <p:spPr>
-          <a:xfrm>
-            <a:off x="749808" y="4114800"/>
-            <a:ext cx="7827264" cy="402336"/>
-          </a:xfrm>
-          <a:prstGeom prst="rect">
-            <a:avLst/>
-          </a:prstGeom>
-          <a:noFill/>
-          <a:ln/>
-        </p:spPr>
-        <p:txBody>
-          <a:bodyPr wrap="square" lIns="0" tIns="0" rIns="0" bIns="0" rtlCol="0" anchor="ctr"/>
-          <a:lstStyle/>
-          <a:p>
-            <a:pPr indent="0" marL="0">
-              <a:buNone/>
-            </a:pPr>
-            <a:r>
-              <a:rPr lang="en-US" sz="1200" b="1" dirty="0">
-                <a:solidFill>
-                  <a:srgbClr val="434A63"/>
-                </a:solidFill>
-                <a:latin typeface="Arial" pitchFamily="34" charset="0"/>
-                <a:ea typeface="Arial" pitchFamily="34" charset="-122"/>
-                <a:cs typeface="Arial" pitchFamily="34" charset="-120"/>
-              </a:rPr>
-              <a:t>Nächster Termin: Mittwoch, 23. September um 18:00 Uhr, Industrie und IoT.</a:t>
-            </a:r>
-            <a:endParaRPr lang="en-US" sz="1200" dirty="0"/>
-          </a:p>
-        </p:txBody>
-      </p:sp>
-      <p:sp>
-        <p:nvSpPr>
-          <p:cNvPr id="20" name="Shape 18"/>
-          <p:cNvSpPr/>
-          <p:nvPr/>
-        </p:nvSpPr>
-        <p:spPr>
-          <a:xfrm>
-            <a:off x="566928" y="4631436"/>
-            <a:ext cx="8010144" cy="0"/>
-          </a:xfrm>
-          <a:prstGeom prst="line">
-            <a:avLst/>
-          </a:prstGeom>
-          <a:noFill/>
-          <a:ln w="9525">
-            <a:solidFill>
-              <a:srgbClr val="DFE3F0"/>
-            </a:solidFill>
-            <a:prstDash val="solid"/>
-          </a:ln>
-        </p:spPr>
-      </p:sp>
-      <p:sp>
-        <p:nvSpPr>
-          <p:cNvPr id="21" name="Text 19"/>
-          <p:cNvSpPr/>
-          <p:nvPr/>
-        </p:nvSpPr>
-        <p:spPr>
-          <a:xfrm>
-            <a:off x="566928" y="4722876"/>
-            <a:ext cx="5029200" cy="237744"/>
-          </a:xfrm>
-          <a:prstGeom prst="rect">
-            <a:avLst/>
-          </a:prstGeom>
-          <a:noFill/>
-          <a:ln/>
-        </p:spPr>
-        <p:txBody>
-          <a:bodyPr wrap="square" lIns="0" tIns="0" rIns="0" bIns="0" rtlCol="0" anchor="ctr"/>
-          <a:lstStyle/>
-          <a:p>
-            <a:pPr indent="0" marL="0">
-              <a:buNone/>
-            </a:pPr>
-            <a:r>
-              <a:rPr lang="en-US" sz="1050" spc="30" kern="0" dirty="0">
-                <a:solidFill>
-                  <a:srgbClr val="5C6377"/>
-                </a:solidFill>
-                <a:latin typeface="Arial" pitchFamily="34" charset="0"/>
-                <a:ea typeface="Arial" pitchFamily="34" charset="-122"/>
-                <a:cs typeface="Arial" pitchFamily="34" charset="-120"/>
-              </a:rPr>
-              <a:t>Abschluss</a:t>
-            </a:r>
-            <a:endParaRPr lang="en-US" sz="1050" dirty="0"/>
-          </a:p>
-        </p:txBody>
-      </p:sp>
-      <p:sp>
-        <p:nvSpPr>
-          <p:cNvPr id="22" name="Text 20"/>
-          <p:cNvSpPr/>
-          <p:nvPr/>
-        </p:nvSpPr>
-        <p:spPr>
-          <a:xfrm>
-            <a:off x="8028432" y="4722876"/>
-            <a:ext cx="548640" cy="237744"/>
-          </a:xfrm>
-          <a:prstGeom prst="rect">
-            <a:avLst/>
-          </a:prstGeom>
-          <a:noFill/>
-          <a:ln/>
-        </p:spPr>
-        <p:txBody>
-          <a:bodyPr wrap="square" lIns="0" tIns="0" rIns="0" bIns="0" rtlCol="0" anchor="ctr"/>
-          <a:lstStyle/>
-          <a:p>
-            <a:pPr algn="r" indent="0" marL="0">
-              <a:buNone/>
-            </a:pPr>
-            <a:r>
-              <a:rPr lang="en-US" sz="1050" dirty="0">
-                <a:solidFill>
-                  <a:srgbClr val="5C6377"/>
-                </a:solidFill>
-                <a:latin typeface="Arial" pitchFamily="34" charset="0"/>
-                <a:ea typeface="Arial" pitchFamily="34" charset="-122"/>
-                <a:cs typeface="Arial" pitchFamily="34" charset="-120"/>
-              </a:rPr>
-              <a:t>13/13</a:t>
-            </a:r>
-            <a:endParaRPr lang="en-US" sz="1050" dirty="0"/>
+              <a:t>90 Minuten, sieben Missionen, drei Vertiefungen</a:t>
+            </a:r>
+            <a:endParaRPr lang="en-US" sz="1350" dirty="0"/>
           </a:p>
         </p:txBody>
       </p:sp>
@@ -6357,7 +5124,7 @@
     <p:bg>
       <p:bgPr>
         <a:solidFill>
-          <a:srgbClr val="F5F6FC"/>
+          <a:srgbClr val="FFFFFF"/>
         </a:solidFill>
       </p:bgPr>
     </p:bg>
@@ -6383,14 +5150,14 @@
         </p:nvSpPr>
         <p:spPr>
           <a:xfrm>
-            <a:off x="0" y="5015484"/>
-            <a:ext cx="9144000" cy="128016"/>
+            <a:off x="566928" y="201168"/>
+            <a:ext cx="475488" cy="50292"/>
           </a:xfrm>
           <a:prstGeom prst="rect">
             <a:avLst/>
           </a:prstGeom>
           <a:solidFill>
-            <a:srgbClr val="0F7C86"/>
+            <a:srgbClr val="9A6310"/>
           </a:solidFill>
           <a:ln/>
         </p:spPr>
@@ -6403,8 +5170,8 @@
         </p:nvSpPr>
         <p:spPr>
           <a:xfrm>
-            <a:off x="566928" y="1828800"/>
-            <a:ext cx="8010144" cy="914400"/>
+            <a:off x="566928" y="384048"/>
+            <a:ext cx="8010144" cy="237744"/>
           </a:xfrm>
           <a:prstGeom prst="rect">
             <a:avLst/>
@@ -6416,11 +5183,50 @@
           <a:bodyPr wrap="square" lIns="0" tIns="0" rIns="0" bIns="0" rtlCol="0" anchor="ctr"/>
           <a:lstStyle/>
           <a:p>
-            <a:pPr algn="ctr" indent="0" marL="0">
-              <a:buNone/>
-            </a:pPr>
-            <a:r>
-              <a:rPr lang="en-US" sz="3200" b="1" dirty="0">
+            <a:pPr indent="0" marL="0">
+              <a:buNone/>
+            </a:pPr>
+            <a:r>
+              <a:rPr lang="en-US" sz="1150" b="1" spc="180" kern="0" dirty="0">
+                <a:solidFill>
+                  <a:srgbClr val="9A6310"/>
+                </a:solidFill>
+                <a:latin typeface="Arial" pitchFamily="34" charset="0"/>
+                <a:ea typeface="Arial" pitchFamily="34" charset="-122"/>
+                <a:cs typeface="Arial" pitchFamily="34" charset="-120"/>
+              </a:rPr>
+              <a:t>DAS FORMAT DES ABENDS</a:t>
+            </a:r>
+            <a:endParaRPr lang="en-US" sz="1150" dirty="0"/>
+          </a:p>
+        </p:txBody>
+      </p:sp>
+      <p:sp>
+        <p:nvSpPr>
+          <p:cNvPr id="4" name="Text 2"/>
+          <p:cNvSpPr/>
+          <p:nvPr/>
+        </p:nvSpPr>
+        <p:spPr>
+          <a:xfrm>
+            <a:off x="566928" y="731520"/>
+            <a:ext cx="8010144" cy="603504"/>
+          </a:xfrm>
+          <a:prstGeom prst="rect">
+            <a:avLst/>
+          </a:prstGeom>
+          <a:noFill/>
+          <a:ln/>
+        </p:spPr>
+        <p:txBody>
+          <a:bodyPr wrap="square" lIns="0" tIns="0" rIns="0" bIns="0" rtlCol="0" anchor="t"/>
+          <a:lstStyle/>
+          <a:p>
+            <a:pPr indent="0" marL="0">
+              <a:buNone/>
+            </a:pPr>
+            <a:r>
+              <a:rPr lang="en-US" sz="2600" b="1" dirty="0">
                 <a:solidFill>
                   <a:srgbClr val="272E52"/>
                 </a:solidFill>
@@ -6428,9 +5234,284 @@
                 <a:ea typeface="Arial" pitchFamily="34" charset="-122"/>
                 <a:cs typeface="Arial" pitchFamily="34" charset="-120"/>
               </a:rPr>
-              <a:t>Zehn Container, eine Datei.</a:t>
-            </a:r>
-            <a:endParaRPr lang="en-US" sz="3200" dirty="0"/>
+              <a:t>So ist jede Mission aufgebaut</a:t>
+            </a:r>
+            <a:endParaRPr lang="en-US" sz="2600" dirty="0"/>
+          </a:p>
+        </p:txBody>
+      </p:sp>
+      <p:pic>
+        <p:nvPicPr>
+          <p:cNvPr id="5" name="Image 0" descr="/Users/jacobmenge/Desktop/kurs-26.2b-orga/folienwerkstatt/assets/diagramme/mission-ablauf.png">    </p:cNvPr>
+          <p:cNvPicPr>
+            <a:picLocks noChangeAspect="1"/>
+          </p:cNvPicPr>
+          <p:nvPr/>
+        </p:nvPicPr>
+        <p:blipFill>
+          <a:blip r:embed="rId1"/>
+          <a:stretch>
+            <a:fillRect/>
+          </a:stretch>
+        </p:blipFill>
+        <p:spPr>
+          <a:xfrm>
+            <a:off x="566928" y="1426464"/>
+            <a:ext cx="8010144" cy="2414016"/>
+          </a:xfrm>
+          <a:prstGeom prst="rect">
+            <a:avLst/>
+          </a:prstGeom>
+        </p:spPr>
+      </p:pic>
+      <p:sp>
+        <p:nvSpPr>
+          <p:cNvPr id="6" name="Shape 3"/>
+          <p:cNvSpPr/>
+          <p:nvPr/>
+        </p:nvSpPr>
+        <p:spPr>
+          <a:xfrm>
+            <a:off x="566928" y="4087368"/>
+            <a:ext cx="32004" cy="256032"/>
+          </a:xfrm>
+          <a:prstGeom prst="rect">
+            <a:avLst/>
+          </a:prstGeom>
+          <a:solidFill>
+            <a:srgbClr val="9A6310"/>
+          </a:solidFill>
+          <a:ln/>
+        </p:spPr>
+      </p:sp>
+      <p:sp>
+        <p:nvSpPr>
+          <p:cNvPr id="7" name="Text 4"/>
+          <p:cNvSpPr/>
+          <p:nvPr/>
+        </p:nvSpPr>
+        <p:spPr>
+          <a:xfrm>
+            <a:off x="749808" y="4041648"/>
+            <a:ext cx="7827264" cy="402336"/>
+          </a:xfrm>
+          <a:prstGeom prst="rect">
+            <a:avLst/>
+          </a:prstGeom>
+          <a:noFill/>
+          <a:ln/>
+        </p:spPr>
+        <p:txBody>
+          <a:bodyPr wrap="square" lIns="0" tIns="0" rIns="0" bIns="0" rtlCol="0" anchor="ctr"/>
+          <a:lstStyle/>
+          <a:p>
+            <a:pPr indent="0" marL="0">
+              <a:buNone/>
+            </a:pPr>
+            <a:r>
+              <a:rPr lang="en-US" sz="1200" b="1" dirty="0">
+                <a:solidFill>
+                  <a:srgbClr val="434A63"/>
+                </a:solidFill>
+                <a:latin typeface="Arial" pitchFamily="34" charset="0"/>
+                <a:ea typeface="Arial" pitchFamily="34" charset="-122"/>
+                <a:cs typeface="Arial" pitchFamily="34" charset="-120"/>
+              </a:rPr>
+              <a:t>Ihr arbeitet die Missionen der Reihe nach ab, jede baut auf der vorigen auf. Nach jeder Mission zeigt euch das Dashboard sofort, ob sie geschafft ist.</a:t>
+            </a:r>
+            <a:endParaRPr lang="en-US" sz="1200" dirty="0"/>
+          </a:p>
+        </p:txBody>
+      </p:sp>
+      <p:sp>
+        <p:nvSpPr>
+          <p:cNvPr id="8" name="Shape 5"/>
+          <p:cNvSpPr/>
+          <p:nvPr/>
+        </p:nvSpPr>
+        <p:spPr>
+          <a:xfrm>
+            <a:off x="566928" y="4631436"/>
+            <a:ext cx="8010144" cy="0"/>
+          </a:xfrm>
+          <a:prstGeom prst="line">
+            <a:avLst/>
+          </a:prstGeom>
+          <a:noFill/>
+          <a:ln w="9525">
+            <a:solidFill>
+              <a:srgbClr val="DFE3F0"/>
+            </a:solidFill>
+            <a:prstDash val="solid"/>
+          </a:ln>
+        </p:spPr>
+      </p:sp>
+      <p:sp>
+        <p:nvSpPr>
+          <p:cNvPr id="9" name="Text 6"/>
+          <p:cNvSpPr/>
+          <p:nvPr/>
+        </p:nvSpPr>
+        <p:spPr>
+          <a:xfrm>
+            <a:off x="566928" y="4722876"/>
+            <a:ext cx="5029200" cy="237744"/>
+          </a:xfrm>
+          <a:prstGeom prst="rect">
+            <a:avLst/>
+          </a:prstGeom>
+          <a:noFill/>
+          <a:ln/>
+        </p:spPr>
+        <p:txBody>
+          <a:bodyPr wrap="square" lIns="0" tIns="0" rIns="0" bIns="0" rtlCol="0" anchor="ctr"/>
+          <a:lstStyle/>
+          <a:p>
+            <a:pPr indent="0" marL="0">
+              <a:buNone/>
+            </a:pPr>
+            <a:r>
+              <a:rPr lang="en-US" sz="1050" spc="30" kern="0" dirty="0">
+                <a:solidFill>
+                  <a:srgbClr val="5C6377"/>
+                </a:solidFill>
+                <a:latin typeface="Arial" pitchFamily="34" charset="0"/>
+                <a:ea typeface="Arial" pitchFamily="34" charset="-122"/>
+                <a:cs typeface="Arial" pitchFamily="34" charset="-120"/>
+              </a:rPr>
+              <a:t>Die Missionen</a:t>
+            </a:r>
+            <a:endParaRPr lang="en-US" sz="1050" dirty="0"/>
+          </a:p>
+        </p:txBody>
+      </p:sp>
+      <p:sp>
+        <p:nvSpPr>
+          <p:cNvPr id="10" name="Text 7"/>
+          <p:cNvSpPr/>
+          <p:nvPr/>
+        </p:nvSpPr>
+        <p:spPr>
+          <a:xfrm>
+            <a:off x="8028432" y="4722876"/>
+            <a:ext cx="548640" cy="237744"/>
+          </a:xfrm>
+          <a:prstGeom prst="rect">
+            <a:avLst/>
+          </a:prstGeom>
+          <a:noFill/>
+          <a:ln/>
+        </p:spPr>
+        <p:txBody>
+          <a:bodyPr wrap="square" lIns="0" tIns="0" rIns="0" bIns="0" rtlCol="0" anchor="ctr"/>
+          <a:lstStyle/>
+          <a:p>
+            <a:pPr algn="r" indent="0" marL="0">
+              <a:buNone/>
+            </a:pPr>
+            <a:r>
+              <a:rPr lang="en-US" sz="1050" dirty="0">
+                <a:solidFill>
+                  <a:srgbClr val="5C6377"/>
+                </a:solidFill>
+                <a:latin typeface="Arial" pitchFamily="34" charset="0"/>
+                <a:ea typeface="Arial" pitchFamily="34" charset="-122"/>
+                <a:cs typeface="Arial" pitchFamily="34" charset="-120"/>
+              </a:rPr>
+              <a:t>14/19</a:t>
+            </a:r>
+            <a:endParaRPr lang="en-US" sz="1050" dirty="0"/>
+          </a:p>
+        </p:txBody>
+      </p:sp>
+    </p:spTree>
+  </p:cSld>
+  <p:clrMapOvr>
+    <a:masterClrMapping/>
+  </p:clrMapOvr>
+</p:sld>
+</file>
+
+<file path=ppt/slides/slide18.xml><?xml version="1.0" encoding="utf-8"?>
+<p:sld xmlns:a="http://schemas.openxmlformats.org/drawingml/2006/main" xmlns:r="http://schemas.openxmlformats.org/officeDocument/2006/relationships" xmlns:p="http://schemas.openxmlformats.org/presentationml/2006/main">
+  <p:cSld name="Slide 18">
+    <p:bg>
+      <p:bgPr>
+        <a:solidFill>
+          <a:srgbClr val="FFFFFF"/>
+        </a:solidFill>
+      </p:bgPr>
+    </p:bg>
+    <p:spTree>
+      <p:nvGrpSpPr>
+        <p:cNvPr id="1" name=""/>
+        <p:cNvGrpSpPr/>
+        <p:nvPr/>
+      </p:nvGrpSpPr>
+      <p:grpSpPr>
+        <a:xfrm>
+          <a:off x="0" y="0"/>
+          <a:ext cx="0" cy="0"/>
+          <a:chOff x="0" y="0"/>
+          <a:chExt cx="0" cy="0"/>
+        </a:xfrm>
+      </p:grpSpPr>
+      <p:sp>
+        <p:nvSpPr>
+          <p:cNvPr id="2" name="Shape 0"/>
+          <p:cNvSpPr/>
+          <p:nvPr/>
+        </p:nvSpPr>
+        <p:spPr>
+          <a:xfrm>
+            <a:off x="566928" y="201168"/>
+            <a:ext cx="475488" cy="50292"/>
+          </a:xfrm>
+          <a:prstGeom prst="rect">
+            <a:avLst/>
+          </a:prstGeom>
+          <a:solidFill>
+            <a:srgbClr val="9A6310"/>
+          </a:solidFill>
+          <a:ln/>
+        </p:spPr>
+      </p:sp>
+      <p:sp>
+        <p:nvSpPr>
+          <p:cNvPr id="3" name="Text 1"/>
+          <p:cNvSpPr/>
+          <p:nvPr/>
+        </p:nvSpPr>
+        <p:spPr>
+          <a:xfrm>
+            <a:off x="566928" y="384048"/>
+            <a:ext cx="8010144" cy="237744"/>
+          </a:xfrm>
+          <a:prstGeom prst="rect">
+            <a:avLst/>
+          </a:prstGeom>
+          <a:noFill/>
+          <a:ln/>
+        </p:spPr>
+        <p:txBody>
+          <a:bodyPr wrap="square" lIns="0" tIns="0" rIns="0" bIns="0" rtlCol="0" anchor="ctr"/>
+          <a:lstStyle/>
+          <a:p>
+            <a:pPr indent="0" marL="0">
+              <a:buNone/>
+            </a:pPr>
+            <a:r>
+              <a:rPr lang="en-US" sz="1150" b="1" spc="180" kern="0" dirty="0">
+                <a:solidFill>
+                  <a:srgbClr val="9A6310"/>
+                </a:solidFill>
+                <a:latin typeface="Arial" pitchFamily="34" charset="0"/>
+                <a:ea typeface="Arial" pitchFamily="34" charset="-122"/>
+                <a:cs typeface="Arial" pitchFamily="34" charset="-120"/>
+              </a:rPr>
+              <a:t>BREAKOUT · 90 MINUTEN</a:t>
+            </a:r>
+            <a:endParaRPr lang="en-US" sz="1150" dirty="0"/>
           </a:p>
         </p:txBody>
       </p:sp>
@@ -6442,8 +5523,8 @@
         </p:nvSpPr>
         <p:spPr>
           <a:xfrm>
-            <a:off x="566928" y="2788920"/>
-            <a:ext cx="8010144" cy="457200"/>
+            <a:off x="566928" y="731520"/>
+            <a:ext cx="8010144" cy="603504"/>
           </a:xfrm>
           <a:prstGeom prst="rect">
             <a:avLst/>
@@ -6455,11 +5536,996 @@
           <a:bodyPr wrap="square" lIns="0" tIns="0" rIns="0" bIns="0" rtlCol="0" anchor="t"/>
           <a:lstStyle/>
           <a:p>
-            <a:pPr algn="ctr" indent="0" marL="0">
-              <a:buNone/>
-            </a:pPr>
-            <a:r>
-              <a:rPr lang="en-US" sz="1400" dirty="0">
+            <a:pPr indent="0" marL="0">
+              <a:buNone/>
+            </a:pPr>
+            <a:r>
+              <a:rPr lang="en-US" sz="2600" b="1" dirty="0">
+                <a:solidFill>
+                  <a:srgbClr val="272E52"/>
+                </a:solidFill>
+                <a:latin typeface="Arial" pitchFamily="34" charset="0"/>
+                <a:ea typeface="Arial" pitchFamily="34" charset="-122"/>
+                <a:cs typeface="Arial" pitchFamily="34" charset="-120"/>
+              </a:rPr>
+              <a:t>Der Auftrag</a:t>
+            </a:r>
+            <a:endParaRPr lang="en-US" sz="2600" dirty="0"/>
+          </a:p>
+        </p:txBody>
+      </p:sp>
+      <p:sp>
+        <p:nvSpPr>
+          <p:cNvPr id="5" name="Shape 3"/>
+          <p:cNvSpPr/>
+          <p:nvPr/>
+        </p:nvSpPr>
+        <p:spPr>
+          <a:xfrm>
+            <a:off x="438912" y="1645920"/>
+            <a:ext cx="8266176" cy="246888"/>
+          </a:xfrm>
+          <a:prstGeom prst="rect">
+            <a:avLst/>
+          </a:prstGeom>
+          <a:solidFill>
+            <a:srgbClr val="F5F6FC"/>
+          </a:solidFill>
+          <a:ln/>
+        </p:spPr>
+      </p:sp>
+      <p:sp>
+        <p:nvSpPr>
+          <p:cNvPr id="6" name="Text 4"/>
+          <p:cNvSpPr/>
+          <p:nvPr/>
+        </p:nvSpPr>
+        <p:spPr>
+          <a:xfrm>
+            <a:off x="566928" y="1645920"/>
+            <a:ext cx="914400" cy="246888"/>
+          </a:xfrm>
+          <a:prstGeom prst="rect">
+            <a:avLst/>
+          </a:prstGeom>
+          <a:noFill/>
+          <a:ln/>
+        </p:spPr>
+        <p:txBody>
+          <a:bodyPr wrap="square" lIns="0" tIns="0" rIns="0" bIns="0" rtlCol="0" anchor="ctr"/>
+          <a:lstStyle/>
+          <a:p>
+            <a:pPr indent="0" marL="0">
+              <a:buNone/>
+            </a:pPr>
+            <a:r>
+              <a:rPr lang="en-US" sz="1050" b="1" dirty="0">
+                <a:solidFill>
+                  <a:srgbClr val="9A6310"/>
+                </a:solidFill>
+                <a:latin typeface="Courier New" pitchFamily="34" charset="0"/>
+                <a:ea typeface="Courier New" pitchFamily="34" charset="-122"/>
+                <a:cs typeface="Courier New" pitchFamily="34" charset="-120"/>
+              </a:rPr>
+              <a:t>Start</a:t>
+            </a:r>
+            <a:endParaRPr lang="en-US" sz="1050" dirty="0"/>
+          </a:p>
+        </p:txBody>
+      </p:sp>
+      <p:sp>
+        <p:nvSpPr>
+          <p:cNvPr id="7" name="Text 5"/>
+          <p:cNvSpPr/>
+          <p:nvPr/>
+        </p:nvSpPr>
+        <p:spPr>
+          <a:xfrm>
+            <a:off x="1481328" y="1645920"/>
+            <a:ext cx="7095744" cy="246888"/>
+          </a:xfrm>
+          <a:prstGeom prst="rect">
+            <a:avLst/>
+          </a:prstGeom>
+          <a:noFill/>
+          <a:ln/>
+        </p:spPr>
+        <p:txBody>
+          <a:bodyPr wrap="square" lIns="0" tIns="0" rIns="0" bIns="0" rtlCol="0" anchor="ctr"/>
+          <a:lstStyle/>
+          <a:p>
+            <a:pPr indent="0" marL="0">
+              <a:buNone/>
+            </a:pPr>
+            <a:r>
+              <a:rPr lang="en-US" sz="1050" dirty="0">
+                <a:solidFill>
+                  <a:srgbClr val="434A63"/>
+                </a:solidFill>
+                <a:latin typeface="Arial" pitchFamily="34" charset="0"/>
+                <a:ea typeface="Arial" pitchFamily="34" charset="-122"/>
+                <a:cs typeface="Arial" pitchFamily="34" charset="-120"/>
+              </a:rPr>
+              <a:t>Code als ZIP holen, Terminal im App-Ordner öffnen, leere compose.yaml anlegen</a:t>
+            </a:r>
+            <a:endParaRPr lang="en-US" sz="1050" dirty="0"/>
+          </a:p>
+        </p:txBody>
+      </p:sp>
+      <p:sp>
+        <p:nvSpPr>
+          <p:cNvPr id="8" name="Text 6"/>
+          <p:cNvSpPr/>
+          <p:nvPr/>
+        </p:nvSpPr>
+        <p:spPr>
+          <a:xfrm>
+            <a:off x="566928" y="1892808"/>
+            <a:ext cx="914400" cy="246888"/>
+          </a:xfrm>
+          <a:prstGeom prst="rect">
+            <a:avLst/>
+          </a:prstGeom>
+          <a:noFill/>
+          <a:ln/>
+        </p:spPr>
+        <p:txBody>
+          <a:bodyPr wrap="square" lIns="0" tIns="0" rIns="0" bIns="0" rtlCol="0" anchor="ctr"/>
+          <a:lstStyle/>
+          <a:p>
+            <a:pPr indent="0" marL="0">
+              <a:buNone/>
+            </a:pPr>
+            <a:r>
+              <a:rPr lang="en-US" sz="1050" b="1" dirty="0">
+                <a:solidFill>
+                  <a:srgbClr val="9A6310"/>
+                </a:solidFill>
+                <a:latin typeface="Courier New" pitchFamily="34" charset="0"/>
+                <a:ea typeface="Courier New" pitchFamily="34" charset="-122"/>
+                <a:cs typeface="Courier New" pitchFamily="34" charset="-120"/>
+              </a:rPr>
+              <a:t>Mission 1</a:t>
+            </a:r>
+            <a:endParaRPr lang="en-US" sz="1050" dirty="0"/>
+          </a:p>
+        </p:txBody>
+      </p:sp>
+      <p:sp>
+        <p:nvSpPr>
+          <p:cNvPr id="9" name="Text 7"/>
+          <p:cNvSpPr/>
+          <p:nvPr/>
+        </p:nvSpPr>
+        <p:spPr>
+          <a:xfrm>
+            <a:off x="1481328" y="1892808"/>
+            <a:ext cx="7095744" cy="246888"/>
+          </a:xfrm>
+          <a:prstGeom prst="rect">
+            <a:avLst/>
+          </a:prstGeom>
+          <a:noFill/>
+          <a:ln/>
+        </p:spPr>
+        <p:txBody>
+          <a:bodyPr wrap="square" lIns="0" tIns="0" rIns="0" bIns="0" rtlCol="0" anchor="ctr"/>
+          <a:lstStyle/>
+          <a:p>
+            <a:pPr indent="0" marL="0">
+              <a:buNone/>
+            </a:pPr>
+            <a:r>
+              <a:rPr lang="en-US" sz="1050" dirty="0">
+                <a:solidFill>
+                  <a:srgbClr val="434A63"/>
+                </a:solidFill>
+                <a:latin typeface="Arial" pitchFamily="34" charset="0"/>
+                <a:ea typeface="Arial" pitchFamily="34" charset="-122"/>
+                <a:cs typeface="Arial" pitchFamily="34" charset="-120"/>
+              </a:rPr>
+              <a:t>Frontend: erster Service mit build und Port, die Stationsansicht lädt im Browser</a:t>
+            </a:r>
+            <a:endParaRPr lang="en-US" sz="1050" dirty="0"/>
+          </a:p>
+        </p:txBody>
+      </p:sp>
+      <p:sp>
+        <p:nvSpPr>
+          <p:cNvPr id="10" name="Shape 8"/>
+          <p:cNvSpPr/>
+          <p:nvPr/>
+        </p:nvSpPr>
+        <p:spPr>
+          <a:xfrm>
+            <a:off x="438912" y="2139696"/>
+            <a:ext cx="8266176" cy="246888"/>
+          </a:xfrm>
+          <a:prstGeom prst="rect">
+            <a:avLst/>
+          </a:prstGeom>
+          <a:solidFill>
+            <a:srgbClr val="F5F6FC"/>
+          </a:solidFill>
+          <a:ln/>
+        </p:spPr>
+      </p:sp>
+      <p:sp>
+        <p:nvSpPr>
+          <p:cNvPr id="11" name="Text 9"/>
+          <p:cNvSpPr/>
+          <p:nvPr/>
+        </p:nvSpPr>
+        <p:spPr>
+          <a:xfrm>
+            <a:off x="566928" y="2139696"/>
+            <a:ext cx="914400" cy="246888"/>
+          </a:xfrm>
+          <a:prstGeom prst="rect">
+            <a:avLst/>
+          </a:prstGeom>
+          <a:noFill/>
+          <a:ln/>
+        </p:spPr>
+        <p:txBody>
+          <a:bodyPr wrap="square" lIns="0" tIns="0" rIns="0" bIns="0" rtlCol="0" anchor="ctr"/>
+          <a:lstStyle/>
+          <a:p>
+            <a:pPr indent="0" marL="0">
+              <a:buNone/>
+            </a:pPr>
+            <a:r>
+              <a:rPr lang="en-US" sz="1050" b="1" dirty="0">
+                <a:solidFill>
+                  <a:srgbClr val="9A6310"/>
+                </a:solidFill>
+                <a:latin typeface="Courier New" pitchFamily="34" charset="0"/>
+                <a:ea typeface="Courier New" pitchFamily="34" charset="-122"/>
+                <a:cs typeface="Courier New" pitchFamily="34" charset="-120"/>
+              </a:rPr>
+              <a:t>Mission 2</a:t>
+            </a:r>
+            <a:endParaRPr lang="en-US" sz="1050" dirty="0"/>
+          </a:p>
+        </p:txBody>
+      </p:sp>
+      <p:sp>
+        <p:nvSpPr>
+          <p:cNvPr id="12" name="Text 10"/>
+          <p:cNvSpPr/>
+          <p:nvPr/>
+        </p:nvSpPr>
+        <p:spPr>
+          <a:xfrm>
+            <a:off x="1481328" y="2139696"/>
+            <a:ext cx="7095744" cy="246888"/>
+          </a:xfrm>
+          <a:prstGeom prst="rect">
+            <a:avLst/>
+          </a:prstGeom>
+          <a:noFill/>
+          <a:ln/>
+        </p:spPr>
+        <p:txBody>
+          <a:bodyPr wrap="square" lIns="0" tIns="0" rIns="0" bIns="0" rtlCol="0" anchor="ctr"/>
+          <a:lstStyle/>
+          <a:p>
+            <a:pPr indent="0" marL="0">
+              <a:buNone/>
+            </a:pPr>
+            <a:r>
+              <a:rPr lang="en-US" sz="1050" dirty="0">
+                <a:solidFill>
+                  <a:srgbClr val="434A63"/>
+                </a:solidFill>
+                <a:latin typeface="Arial" pitchFamily="34" charset="0"/>
+                <a:ea typeface="Arial" pitchFamily="34" charset="-122"/>
+                <a:cs typeface="Arial" pitchFamily="34" charset="-120"/>
+              </a:rPr>
+              <a:t>Logbuch: Postgres mit Volume und Init-Skript, damit keine Meldung verloren geht</a:t>
+            </a:r>
+            <a:endParaRPr lang="en-US" sz="1050" dirty="0"/>
+          </a:p>
+        </p:txBody>
+      </p:sp>
+      <p:sp>
+        <p:nvSpPr>
+          <p:cNvPr id="13" name="Text 11"/>
+          <p:cNvSpPr/>
+          <p:nvPr/>
+        </p:nvSpPr>
+        <p:spPr>
+          <a:xfrm>
+            <a:off x="566928" y="2386584"/>
+            <a:ext cx="914400" cy="246888"/>
+          </a:xfrm>
+          <a:prstGeom prst="rect">
+            <a:avLst/>
+          </a:prstGeom>
+          <a:noFill/>
+          <a:ln/>
+        </p:spPr>
+        <p:txBody>
+          <a:bodyPr wrap="square" lIns="0" tIns="0" rIns="0" bIns="0" rtlCol="0" anchor="ctr"/>
+          <a:lstStyle/>
+          <a:p>
+            <a:pPr indent="0" marL="0">
+              <a:buNone/>
+            </a:pPr>
+            <a:r>
+              <a:rPr lang="en-US" sz="1050" b="1" dirty="0">
+                <a:solidFill>
+                  <a:srgbClr val="9A6310"/>
+                </a:solidFill>
+                <a:latin typeface="Courier New" pitchFamily="34" charset="0"/>
+                <a:ea typeface="Courier New" pitchFamily="34" charset="-122"/>
+                <a:cs typeface="Courier New" pitchFamily="34" charset="-120"/>
+              </a:rPr>
+              <a:t>Mission 3</a:t>
+            </a:r>
+            <a:endParaRPr lang="en-US" sz="1050" dirty="0"/>
+          </a:p>
+        </p:txBody>
+      </p:sp>
+      <p:sp>
+        <p:nvSpPr>
+          <p:cNvPr id="14" name="Text 12"/>
+          <p:cNvSpPr/>
+          <p:nvPr/>
+        </p:nvSpPr>
+        <p:spPr>
+          <a:xfrm>
+            <a:off x="1481328" y="2386584"/>
+            <a:ext cx="7095744" cy="246888"/>
+          </a:xfrm>
+          <a:prstGeom prst="rect">
+            <a:avLst/>
+          </a:prstGeom>
+          <a:noFill/>
+          <a:ln/>
+        </p:spPr>
+        <p:txBody>
+          <a:bodyPr wrap="square" lIns="0" tIns="0" rIns="0" bIns="0" rtlCol="0" anchor="ctr"/>
+          <a:lstStyle/>
+          <a:p>
+            <a:pPr indent="0" marL="0">
+              <a:buNone/>
+            </a:pPr>
+            <a:r>
+              <a:rPr lang="en-US" sz="1050" dirty="0">
+                <a:solidFill>
+                  <a:srgbClr val="434A63"/>
+                </a:solidFill>
+                <a:latin typeface="Arial" pitchFamily="34" charset="0"/>
+                <a:ea typeface="Arial" pitchFamily="34" charset="-122"/>
+                <a:cs typeface="Arial" pitchFamily="34" charset="-120"/>
+              </a:rPr>
+              <a:t>Funkkontakt: das Backend verbindet Station und Datenbank, zwei Lampen springen um</a:t>
+            </a:r>
+            <a:endParaRPr lang="en-US" sz="1050" dirty="0"/>
+          </a:p>
+        </p:txBody>
+      </p:sp>
+      <p:sp>
+        <p:nvSpPr>
+          <p:cNvPr id="15" name="Shape 13"/>
+          <p:cNvSpPr/>
+          <p:nvPr/>
+        </p:nvSpPr>
+        <p:spPr>
+          <a:xfrm>
+            <a:off x="438912" y="2633472"/>
+            <a:ext cx="8266176" cy="246888"/>
+          </a:xfrm>
+          <a:prstGeom prst="rect">
+            <a:avLst/>
+          </a:prstGeom>
+          <a:solidFill>
+            <a:srgbClr val="F5F6FC"/>
+          </a:solidFill>
+          <a:ln/>
+        </p:spPr>
+      </p:sp>
+      <p:sp>
+        <p:nvSpPr>
+          <p:cNvPr id="16" name="Text 14"/>
+          <p:cNvSpPr/>
+          <p:nvPr/>
+        </p:nvSpPr>
+        <p:spPr>
+          <a:xfrm>
+            <a:off x="566928" y="2633472"/>
+            <a:ext cx="914400" cy="246888"/>
+          </a:xfrm>
+          <a:prstGeom prst="rect">
+            <a:avLst/>
+          </a:prstGeom>
+          <a:noFill/>
+          <a:ln/>
+        </p:spPr>
+        <p:txBody>
+          <a:bodyPr wrap="square" lIns="0" tIns="0" rIns="0" bIns="0" rtlCol="0" anchor="ctr"/>
+          <a:lstStyle/>
+          <a:p>
+            <a:pPr indent="0" marL="0">
+              <a:buNone/>
+            </a:pPr>
+            <a:r>
+              <a:rPr lang="en-US" sz="1050" b="1" dirty="0">
+                <a:solidFill>
+                  <a:srgbClr val="9A6310"/>
+                </a:solidFill>
+                <a:latin typeface="Courier New" pitchFamily="34" charset="0"/>
+                <a:ea typeface="Courier New" pitchFamily="34" charset="-122"/>
+                <a:cs typeface="Courier New" pitchFamily="34" charset="-120"/>
+              </a:rPr>
+              <a:t>Mission 4</a:t>
+            </a:r>
+            <a:endParaRPr lang="en-US" sz="1050" dirty="0"/>
+          </a:p>
+        </p:txBody>
+      </p:sp>
+      <p:sp>
+        <p:nvSpPr>
+          <p:cNvPr id="17" name="Text 15"/>
+          <p:cNvSpPr/>
+          <p:nvPr/>
+        </p:nvSpPr>
+        <p:spPr>
+          <a:xfrm>
+            <a:off x="1481328" y="2633472"/>
+            <a:ext cx="7095744" cy="246888"/>
+          </a:xfrm>
+          <a:prstGeom prst="rect">
+            <a:avLst/>
+          </a:prstGeom>
+          <a:noFill/>
+          <a:ln/>
+        </p:spPr>
+        <p:txBody>
+          <a:bodyPr wrap="square" lIns="0" tIns="0" rIns="0" bIns="0" rtlCol="0" anchor="ctr"/>
+          <a:lstStyle/>
+          <a:p>
+            <a:pPr indent="0" marL="0">
+              <a:buNone/>
+            </a:pPr>
+            <a:r>
+              <a:rPr lang="en-US" sz="1050" dirty="0">
+                <a:solidFill>
+                  <a:srgbClr val="434A63"/>
+                </a:solidFill>
+                <a:latin typeface="Arial" pitchFamily="34" charset="0"/>
+                <a:ea typeface="Arial" pitchFamily="34" charset="-122"/>
+                <a:cs typeface="Arial" pitchFamily="34" charset="-120"/>
+              </a:rPr>
+              <a:t>Erstes Modul: ein Container aus dem Modul-Image, der Stellplatz leuchtet</a:t>
+            </a:r>
+            <a:endParaRPr lang="en-US" sz="1050" dirty="0"/>
+          </a:p>
+        </p:txBody>
+      </p:sp>
+      <p:sp>
+        <p:nvSpPr>
+          <p:cNvPr id="18" name="Text 16"/>
+          <p:cNvSpPr/>
+          <p:nvPr/>
+        </p:nvSpPr>
+        <p:spPr>
+          <a:xfrm>
+            <a:off x="566928" y="2880360"/>
+            <a:ext cx="914400" cy="246888"/>
+          </a:xfrm>
+          <a:prstGeom prst="rect">
+            <a:avLst/>
+          </a:prstGeom>
+          <a:noFill/>
+          <a:ln/>
+        </p:spPr>
+        <p:txBody>
+          <a:bodyPr wrap="square" lIns="0" tIns="0" rIns="0" bIns="0" rtlCol="0" anchor="ctr"/>
+          <a:lstStyle/>
+          <a:p>
+            <a:pPr indent="0" marL="0">
+              <a:buNone/>
+            </a:pPr>
+            <a:r>
+              <a:rPr lang="en-US" sz="1050" b="1" dirty="0">
+                <a:solidFill>
+                  <a:srgbClr val="9A6310"/>
+                </a:solidFill>
+                <a:latin typeface="Courier New" pitchFamily="34" charset="0"/>
+                <a:ea typeface="Courier New" pitchFamily="34" charset="-122"/>
+                <a:cs typeface="Courier New" pitchFamily="34" charset="-120"/>
+              </a:rPr>
+              <a:t>Mission 5</a:t>
+            </a:r>
+            <a:endParaRPr lang="en-US" sz="1050" dirty="0"/>
+          </a:p>
+        </p:txBody>
+      </p:sp>
+      <p:sp>
+        <p:nvSpPr>
+          <p:cNvPr id="19" name="Text 17"/>
+          <p:cNvSpPr/>
+          <p:nvPr/>
+        </p:nvSpPr>
+        <p:spPr>
+          <a:xfrm>
+            <a:off x="1481328" y="2880360"/>
+            <a:ext cx="7095744" cy="246888"/>
+          </a:xfrm>
+          <a:prstGeom prst="rect">
+            <a:avLst/>
+          </a:prstGeom>
+          <a:noFill/>
+          <a:ln/>
+        </p:spPr>
+        <p:txBody>
+          <a:bodyPr wrap="square" lIns="0" tIns="0" rIns="0" bIns="0" rtlCol="0" anchor="ctr"/>
+          <a:lstStyle/>
+          <a:p>
+            <a:pPr indent="0" marL="0">
+              <a:buNone/>
+            </a:pPr>
+            <a:r>
+              <a:rPr lang="en-US" sz="1050" dirty="0">
+                <a:solidFill>
+                  <a:srgbClr val="434A63"/>
+                </a:solidFill>
+                <a:latin typeface="Arial" pitchFamily="34" charset="0"/>
+                <a:ea typeface="Arial" pitchFamily="34" charset="-122"/>
+                <a:cs typeface="Arial" pitchFamily="34" charset="-120"/>
+              </a:rPr>
+              <a:t>Betriebsstärke: zwei weitere Module nach demselben Muster, drei von sechs online</a:t>
+            </a:r>
+            <a:endParaRPr lang="en-US" sz="1050" dirty="0"/>
+          </a:p>
+        </p:txBody>
+      </p:sp>
+      <p:sp>
+        <p:nvSpPr>
+          <p:cNvPr id="20" name="Shape 18"/>
+          <p:cNvSpPr/>
+          <p:nvPr/>
+        </p:nvSpPr>
+        <p:spPr>
+          <a:xfrm>
+            <a:off x="438912" y="3127248"/>
+            <a:ext cx="8266176" cy="246888"/>
+          </a:xfrm>
+          <a:prstGeom prst="rect">
+            <a:avLst/>
+          </a:prstGeom>
+          <a:solidFill>
+            <a:srgbClr val="F5F6FC"/>
+          </a:solidFill>
+          <a:ln/>
+        </p:spPr>
+      </p:sp>
+      <p:sp>
+        <p:nvSpPr>
+          <p:cNvPr id="21" name="Text 19"/>
+          <p:cNvSpPr/>
+          <p:nvPr/>
+        </p:nvSpPr>
+        <p:spPr>
+          <a:xfrm>
+            <a:off x="566928" y="3127248"/>
+            <a:ext cx="914400" cy="246888"/>
+          </a:xfrm>
+          <a:prstGeom prst="rect">
+            <a:avLst/>
+          </a:prstGeom>
+          <a:noFill/>
+          <a:ln/>
+        </p:spPr>
+        <p:txBody>
+          <a:bodyPr wrap="square" lIns="0" tIns="0" rIns="0" bIns="0" rtlCol="0" anchor="ctr"/>
+          <a:lstStyle/>
+          <a:p>
+            <a:pPr indent="0" marL="0">
+              <a:buNone/>
+            </a:pPr>
+            <a:r>
+              <a:rPr lang="en-US" sz="1050" b="1" dirty="0">
+                <a:solidFill>
+                  <a:srgbClr val="9A6310"/>
+                </a:solidFill>
+                <a:latin typeface="Courier New" pitchFamily="34" charset="0"/>
+                <a:ea typeface="Courier New" pitchFamily="34" charset="-122"/>
+                <a:cs typeface="Courier New" pitchFamily="34" charset="-120"/>
+              </a:rPr>
+              <a:t>Mission 6</a:t>
+            </a:r>
+            <a:endParaRPr lang="en-US" sz="1050" dirty="0"/>
+          </a:p>
+        </p:txBody>
+      </p:sp>
+      <p:sp>
+        <p:nvSpPr>
+          <p:cNvPr id="22" name="Text 20"/>
+          <p:cNvSpPr/>
+          <p:nvPr/>
+        </p:nvSpPr>
+        <p:spPr>
+          <a:xfrm>
+            <a:off x="1481328" y="3127248"/>
+            <a:ext cx="7095744" cy="246888"/>
+          </a:xfrm>
+          <a:prstGeom prst="rect">
+            <a:avLst/>
+          </a:prstGeom>
+          <a:noFill/>
+          <a:ln/>
+        </p:spPr>
+        <p:txBody>
+          <a:bodyPr wrap="square" lIns="0" tIns="0" rIns="0" bIns="0" rtlCol="0" anchor="ctr"/>
+          <a:lstStyle/>
+          <a:p>
+            <a:pPr indent="0" marL="0">
+              <a:buNone/>
+            </a:pPr>
+            <a:r>
+              <a:rPr lang="en-US" sz="1050" dirty="0">
+                <a:solidFill>
+                  <a:srgbClr val="434A63"/>
+                </a:solidFill>
+                <a:latin typeface="Arial" pitchFamily="34" charset="0"/>
+                <a:ea typeface="Arial" pitchFamily="34" charset="-122"/>
+                <a:cs typeface="Arial" pitchFamily="34" charset="-120"/>
+              </a:rPr>
+              <a:t>Konfiguration: alle Werte ziehen in die .env, die compose.yaml behält Platzhalter</a:t>
+            </a:r>
+            <a:endParaRPr lang="en-US" sz="1050" dirty="0"/>
+          </a:p>
+        </p:txBody>
+      </p:sp>
+      <p:sp>
+        <p:nvSpPr>
+          <p:cNvPr id="23" name="Text 21"/>
+          <p:cNvSpPr/>
+          <p:nvPr/>
+        </p:nvSpPr>
+        <p:spPr>
+          <a:xfrm>
+            <a:off x="566928" y="3374136"/>
+            <a:ext cx="914400" cy="246888"/>
+          </a:xfrm>
+          <a:prstGeom prst="rect">
+            <a:avLst/>
+          </a:prstGeom>
+          <a:noFill/>
+          <a:ln/>
+        </p:spPr>
+        <p:txBody>
+          <a:bodyPr wrap="square" lIns="0" tIns="0" rIns="0" bIns="0" rtlCol="0" anchor="ctr"/>
+          <a:lstStyle/>
+          <a:p>
+            <a:pPr indent="0" marL="0">
+              <a:buNone/>
+            </a:pPr>
+            <a:r>
+              <a:rPr lang="en-US" sz="1050" b="1" dirty="0">
+                <a:solidFill>
+                  <a:srgbClr val="9A6310"/>
+                </a:solidFill>
+                <a:latin typeface="Courier New" pitchFamily="34" charset="0"/>
+                <a:ea typeface="Courier New" pitchFamily="34" charset="-122"/>
+                <a:cs typeface="Courier New" pitchFamily="34" charset="-120"/>
+              </a:rPr>
+              <a:t>Mission 7</a:t>
+            </a:r>
+            <a:endParaRPr lang="en-US" sz="1050" dirty="0"/>
+          </a:p>
+        </p:txBody>
+      </p:sp>
+      <p:sp>
+        <p:nvSpPr>
+          <p:cNvPr id="24" name="Text 22"/>
+          <p:cNvSpPr/>
+          <p:nvPr/>
+        </p:nvSpPr>
+        <p:spPr>
+          <a:xfrm>
+            <a:off x="1481328" y="3374136"/>
+            <a:ext cx="7095744" cy="246888"/>
+          </a:xfrm>
+          <a:prstGeom prst="rect">
+            <a:avLst/>
+          </a:prstGeom>
+          <a:noFill/>
+          <a:ln/>
+        </p:spPr>
+        <p:txBody>
+          <a:bodyPr wrap="square" lIns="0" tIns="0" rIns="0" bIns="0" rtlCol="0" anchor="ctr"/>
+          <a:lstStyle/>
+          <a:p>
+            <a:pPr indent="0" marL="0">
+              <a:buNone/>
+            </a:pPr>
+            <a:r>
+              <a:rPr lang="en-US" sz="1050" dirty="0">
+                <a:solidFill>
+                  <a:srgbClr val="434A63"/>
+                </a:solidFill>
+                <a:latin typeface="Arial" pitchFamily="34" charset="0"/>
+                <a:ea typeface="Arial" pitchFamily="34" charset="-122"/>
+                <a:cs typeface="Arial" pitchFamily="34" charset="-120"/>
+              </a:rPr>
+              <a:t>Abnahme: Healthcheck, Adminer und der Beweis, dass das Logbuch den Neustart übersteht</a:t>
+            </a:r>
+            <a:endParaRPr lang="en-US" sz="1050" dirty="0"/>
+          </a:p>
+        </p:txBody>
+      </p:sp>
+      <p:sp>
+        <p:nvSpPr>
+          <p:cNvPr id="25" name="Shape 23"/>
+          <p:cNvSpPr/>
+          <p:nvPr/>
+        </p:nvSpPr>
+        <p:spPr>
+          <a:xfrm>
+            <a:off x="438912" y="3621024"/>
+            <a:ext cx="8266176" cy="246888"/>
+          </a:xfrm>
+          <a:prstGeom prst="rect">
+            <a:avLst/>
+          </a:prstGeom>
+          <a:solidFill>
+            <a:srgbClr val="F5F6FC"/>
+          </a:solidFill>
+          <a:ln/>
+        </p:spPr>
+      </p:sp>
+      <p:sp>
+        <p:nvSpPr>
+          <p:cNvPr id="26" name="Text 24"/>
+          <p:cNvSpPr/>
+          <p:nvPr/>
+        </p:nvSpPr>
+        <p:spPr>
+          <a:xfrm>
+            <a:off x="566928" y="3621024"/>
+            <a:ext cx="914400" cy="246888"/>
+          </a:xfrm>
+          <a:prstGeom prst="rect">
+            <a:avLst/>
+          </a:prstGeom>
+          <a:noFill/>
+          <a:ln/>
+        </p:spPr>
+        <p:txBody>
+          <a:bodyPr wrap="square" lIns="0" tIns="0" rIns="0" bIns="0" rtlCol="0" anchor="ctr"/>
+          <a:lstStyle/>
+          <a:p>
+            <a:pPr indent="0" marL="0">
+              <a:buNone/>
+            </a:pPr>
+            <a:r>
+              <a:rPr lang="en-US" sz="1050" b="1" dirty="0">
+                <a:solidFill>
+                  <a:srgbClr val="9A6310"/>
+                </a:solidFill>
+                <a:latin typeface="Courier New" pitchFamily="34" charset="0"/>
+                <a:ea typeface="Courier New" pitchFamily="34" charset="-122"/>
+                <a:cs typeface="Courier New" pitchFamily="34" charset="-120"/>
+              </a:rPr>
+              <a:t>Danach</a:t>
+            </a:r>
+            <a:endParaRPr lang="en-US" sz="1050" dirty="0"/>
+          </a:p>
+        </p:txBody>
+      </p:sp>
+      <p:sp>
+        <p:nvSpPr>
+          <p:cNvPr id="27" name="Text 25"/>
+          <p:cNvSpPr/>
+          <p:nvPr/>
+        </p:nvSpPr>
+        <p:spPr>
+          <a:xfrm>
+            <a:off x="1481328" y="3621024"/>
+            <a:ext cx="7095744" cy="246888"/>
+          </a:xfrm>
+          <a:prstGeom prst="rect">
+            <a:avLst/>
+          </a:prstGeom>
+          <a:noFill/>
+          <a:ln/>
+        </p:spPr>
+        <p:txBody>
+          <a:bodyPr wrap="square" lIns="0" tIns="0" rIns="0" bIns="0" rtlCol="0" anchor="ctr"/>
+          <a:lstStyle/>
+          <a:p>
+            <a:pPr indent="0" marL="0">
+              <a:buNone/>
+            </a:pPr>
+            <a:r>
+              <a:rPr lang="en-US" sz="1050" dirty="0">
+                <a:solidFill>
+                  <a:srgbClr val="434A63"/>
+                </a:solidFill>
+                <a:latin typeface="Arial" pitchFamily="34" charset="0"/>
+                <a:ea typeface="Arial" pitchFamily="34" charset="-122"/>
+                <a:cs typeface="Arial" pitchFamily="34" charset="-120"/>
+              </a:rPr>
+              <a:t>Vertiefungen für schnelle Gruppen, freiwillig: volle Station, Störung, Backend-Tausch</a:t>
+            </a:r>
+            <a:endParaRPr lang="en-US" sz="1050" dirty="0"/>
+          </a:p>
+        </p:txBody>
+      </p:sp>
+      <p:sp>
+        <p:nvSpPr>
+          <p:cNvPr id="28" name="Shape 26"/>
+          <p:cNvSpPr/>
+          <p:nvPr/>
+        </p:nvSpPr>
+        <p:spPr>
+          <a:xfrm>
+            <a:off x="566928" y="3950208"/>
+            <a:ext cx="8010144" cy="658368"/>
+          </a:xfrm>
+          <a:prstGeom prst="rect">
+            <a:avLst/>
+          </a:prstGeom>
+          <a:solidFill>
+            <a:srgbClr val="EEF0FB"/>
+          </a:solidFill>
+          <a:ln/>
+        </p:spPr>
+      </p:sp>
+      <p:sp>
+        <p:nvSpPr>
+          <p:cNvPr id="29" name="Shape 27"/>
+          <p:cNvSpPr/>
+          <p:nvPr/>
+        </p:nvSpPr>
+        <p:spPr>
+          <a:xfrm>
+            <a:off x="566928" y="3950208"/>
+            <a:ext cx="41148" cy="658368"/>
+          </a:xfrm>
+          <a:prstGeom prst="rect">
+            <a:avLst/>
+          </a:prstGeom>
+          <a:solidFill>
+            <a:srgbClr val="9A6310"/>
+          </a:solidFill>
+          <a:ln/>
+        </p:spPr>
+      </p:sp>
+      <p:sp>
+        <p:nvSpPr>
+          <p:cNvPr id="30" name="Text 28"/>
+          <p:cNvSpPr/>
+          <p:nvPr/>
+        </p:nvSpPr>
+        <p:spPr>
+          <a:xfrm>
+            <a:off x="804672" y="4096512"/>
+            <a:ext cx="7607808" cy="242062"/>
+          </a:xfrm>
+          <a:prstGeom prst="rect">
+            <a:avLst/>
+          </a:prstGeom>
+          <a:noFill/>
+          <a:ln/>
+        </p:spPr>
+        <p:txBody>
+          <a:bodyPr wrap="square" lIns="0" tIns="0" rIns="0" bIns="0" rtlCol="0" anchor="t"/>
+          <a:lstStyle/>
+          <a:p>
+            <a:pPr indent="0" marL="0">
+              <a:buNone/>
+            </a:pPr>
+            <a:r>
+              <a:rPr lang="en-US" sz="1300" b="1" dirty="0">
+                <a:solidFill>
+                  <a:srgbClr val="272E52"/>
+                </a:solidFill>
+                <a:latin typeface="Arial" pitchFamily="34" charset="0"/>
+                <a:ea typeface="Arial" pitchFamily="34" charset="-122"/>
+                <a:cs typeface="Arial" pitchFamily="34" charset="-120"/>
+              </a:rPr>
+              <a:t>Jetzt öffnen: die Einheit mit Missionen, Funkhilfe und Musterlösung</a:t>
+            </a:r>
+            <a:endParaRPr lang="en-US" sz="1300" dirty="0"/>
+          </a:p>
+        </p:txBody>
+      </p:sp>
+      <p:sp>
+        <p:nvSpPr>
+          <p:cNvPr id="31" name="Text 29"/>
+          <p:cNvSpPr/>
+          <p:nvPr/>
+        </p:nvSpPr>
+        <p:spPr>
+          <a:xfrm>
+            <a:off x="804672" y="4384294"/>
+            <a:ext cx="7607808" cy="105410"/>
+          </a:xfrm>
+          <a:prstGeom prst="rect">
+            <a:avLst/>
+          </a:prstGeom>
+          <a:noFill/>
+          <a:ln/>
+        </p:spPr>
+        <p:txBody>
+          <a:bodyPr wrap="square" lIns="0" tIns="0" rIns="0" bIns="0" rtlCol="0" anchor="t"/>
+          <a:lstStyle/>
+          <a:p>
+            <a:pPr indent="0" marL="0">
+              <a:lnSpc>
+                <a:spcPct val="92000"/>
+              </a:lnSpc>
+              <a:buNone/>
+            </a:pPr>
+            <a:r>
+              <a:rPr lang="en-US" sz="1000" dirty="0">
+                <a:solidFill>
+                  <a:srgbClr val="434A63"/>
+                </a:solidFill>
+                <a:latin typeface="Arial" pitchFamily="34" charset="0"/>
+                <a:ea typeface="Arial" pitchFamily="34" charset="-122"/>
+                <a:cs typeface="Arial" pitchFamily="34" charset="-120"/>
+              </a:rPr>
+              <a:t>jacobmenge.github.io/kurs-unterlagen/docker-compose-mission-control/</a:t>
+            </a:r>
+            <a:endParaRPr lang="en-US" sz="1000" dirty="0"/>
+          </a:p>
+        </p:txBody>
+      </p:sp>
+      <p:sp>
+        <p:nvSpPr>
+          <p:cNvPr id="32" name="Shape 30"/>
+          <p:cNvSpPr/>
+          <p:nvPr/>
+        </p:nvSpPr>
+        <p:spPr>
+          <a:xfrm>
+            <a:off x="566928" y="4631436"/>
+            <a:ext cx="8010144" cy="0"/>
+          </a:xfrm>
+          <a:prstGeom prst="line">
+            <a:avLst/>
+          </a:prstGeom>
+          <a:noFill/>
+          <a:ln w="9525">
+            <a:solidFill>
+              <a:srgbClr val="DFE3F0"/>
+            </a:solidFill>
+            <a:prstDash val="solid"/>
+          </a:ln>
+        </p:spPr>
+      </p:sp>
+      <p:sp>
+        <p:nvSpPr>
+          <p:cNvPr id="33" name="Text 31"/>
+          <p:cNvSpPr/>
+          <p:nvPr/>
+        </p:nvSpPr>
+        <p:spPr>
+          <a:xfrm>
+            <a:off x="566928" y="4722876"/>
+            <a:ext cx="5029200" cy="237744"/>
+          </a:xfrm>
+          <a:prstGeom prst="rect">
+            <a:avLst/>
+          </a:prstGeom>
+          <a:noFill/>
+          <a:ln/>
+        </p:spPr>
+        <p:txBody>
+          <a:bodyPr wrap="square" lIns="0" tIns="0" rIns="0" bIns="0" rtlCol="0" anchor="ctr"/>
+          <a:lstStyle/>
+          <a:p>
+            <a:pPr indent="0" marL="0">
+              <a:buNone/>
+            </a:pPr>
+            <a:r>
+              <a:rPr lang="en-US" sz="1050" spc="30" kern="0" dirty="0">
                 <a:solidFill>
                   <a:srgbClr val="5C6377"/>
                 </a:solidFill>
@@ -6467,9 +6533,178 @@
                 <a:ea typeface="Arial" pitchFamily="34" charset="-122"/>
                 <a:cs typeface="Arial" pitchFamily="34" charset="-120"/>
               </a:rPr>
-              <a:t>Missionen, Funkhilfe und die komplette Musterlösung stehen zum Nachlesen auf der Kursseite.</a:t>
-            </a:r>
-            <a:endParaRPr lang="en-US" sz="1400" dirty="0"/>
+              <a:t>Die Missionen</a:t>
+            </a:r>
+            <a:endParaRPr lang="en-US" sz="1050" dirty="0"/>
+          </a:p>
+        </p:txBody>
+      </p:sp>
+      <p:sp>
+        <p:nvSpPr>
+          <p:cNvPr id="34" name="Text 32"/>
+          <p:cNvSpPr/>
+          <p:nvPr/>
+        </p:nvSpPr>
+        <p:spPr>
+          <a:xfrm>
+            <a:off x="8028432" y="4722876"/>
+            <a:ext cx="548640" cy="237744"/>
+          </a:xfrm>
+          <a:prstGeom prst="rect">
+            <a:avLst/>
+          </a:prstGeom>
+          <a:noFill/>
+          <a:ln/>
+        </p:spPr>
+        <p:txBody>
+          <a:bodyPr wrap="square" lIns="0" tIns="0" rIns="0" bIns="0" rtlCol="0" anchor="ctr"/>
+          <a:lstStyle/>
+          <a:p>
+            <a:pPr algn="r" indent="0" marL="0">
+              <a:buNone/>
+            </a:pPr>
+            <a:r>
+              <a:rPr lang="en-US" sz="1050" dirty="0">
+                <a:solidFill>
+                  <a:srgbClr val="5C6377"/>
+                </a:solidFill>
+                <a:latin typeface="Arial" pitchFamily="34" charset="0"/>
+                <a:ea typeface="Arial" pitchFamily="34" charset="-122"/>
+                <a:cs typeface="Arial" pitchFamily="34" charset="-120"/>
+              </a:rPr>
+              <a:t>15/19</a:t>
+            </a:r>
+            <a:endParaRPr lang="en-US" sz="1050" dirty="0"/>
+          </a:p>
+        </p:txBody>
+      </p:sp>
+    </p:spTree>
+  </p:cSld>
+  <p:clrMapOvr>
+    <a:masterClrMapping/>
+  </p:clrMapOvr>
+</p:sld>
+</file>
+
+<file path=ppt/slides/slide19.xml><?xml version="1.0" encoding="utf-8"?>
+<p:sld xmlns:a="http://schemas.openxmlformats.org/drawingml/2006/main" xmlns:r="http://schemas.openxmlformats.org/officeDocument/2006/relationships" xmlns:p="http://schemas.openxmlformats.org/presentationml/2006/main">
+  <p:cSld name="Slide 19">
+    <p:bg>
+      <p:bgPr>
+        <a:solidFill>
+          <a:srgbClr val="FFFFFF"/>
+        </a:solidFill>
+      </p:bgPr>
+    </p:bg>
+    <p:spTree>
+      <p:nvGrpSpPr>
+        <p:cNvPr id="1" name=""/>
+        <p:cNvGrpSpPr/>
+        <p:nvPr/>
+      </p:nvGrpSpPr>
+      <p:grpSpPr>
+        <a:xfrm>
+          <a:off x="0" y="0"/>
+          <a:ext cx="0" cy="0"/>
+          <a:chOff x="0" y="0"/>
+          <a:chExt cx="0" cy="0"/>
+        </a:xfrm>
+      </p:grpSpPr>
+      <p:sp>
+        <p:nvSpPr>
+          <p:cNvPr id="2" name="Shape 0"/>
+          <p:cNvSpPr/>
+          <p:nvPr/>
+        </p:nvSpPr>
+        <p:spPr>
+          <a:xfrm>
+            <a:off x="566928" y="201168"/>
+            <a:ext cx="475488" cy="50292"/>
+          </a:xfrm>
+          <a:prstGeom prst="rect">
+            <a:avLst/>
+          </a:prstGeom>
+          <a:solidFill>
+            <a:srgbClr val="9A6310"/>
+          </a:solidFill>
+          <a:ln/>
+        </p:spPr>
+      </p:sp>
+      <p:sp>
+        <p:nvSpPr>
+          <p:cNvPr id="3" name="Text 1"/>
+          <p:cNvSpPr/>
+          <p:nvPr/>
+        </p:nvSpPr>
+        <p:spPr>
+          <a:xfrm>
+            <a:off x="566928" y="384048"/>
+            <a:ext cx="8010144" cy="237744"/>
+          </a:xfrm>
+          <a:prstGeom prst="rect">
+            <a:avLst/>
+          </a:prstGeom>
+          <a:noFill/>
+          <a:ln/>
+        </p:spPr>
+        <p:txBody>
+          <a:bodyPr wrap="square" lIns="0" tIns="0" rIns="0" bIns="0" rtlCol="0" anchor="ctr"/>
+          <a:lstStyle/>
+          <a:p>
+            <a:pPr indent="0" marL="0">
+              <a:buNone/>
+            </a:pPr>
+            <a:r>
+              <a:rPr lang="en-US" sz="1150" b="1" spc="180" kern="0" dirty="0">
+                <a:solidFill>
+                  <a:srgbClr val="9A6310"/>
+                </a:solidFill>
+                <a:latin typeface="Arial" pitchFamily="34" charset="0"/>
+                <a:ea typeface="Arial" pitchFamily="34" charset="-122"/>
+                <a:cs typeface="Arial" pitchFamily="34" charset="-120"/>
+              </a:rPr>
+              <a:t>SPIELREGELN</a:t>
+            </a:r>
+            <a:endParaRPr lang="en-US" sz="1150" dirty="0"/>
+          </a:p>
+        </p:txBody>
+      </p:sp>
+      <p:sp>
+        <p:nvSpPr>
+          <p:cNvPr id="4" name="Text 2"/>
+          <p:cNvSpPr/>
+          <p:nvPr/>
+        </p:nvSpPr>
+        <p:spPr>
+          <a:xfrm>
+            <a:off x="566928" y="731520"/>
+            <a:ext cx="8010144" cy="603504"/>
+          </a:xfrm>
+          <a:prstGeom prst="rect">
+            <a:avLst/>
+          </a:prstGeom>
+          <a:noFill/>
+          <a:ln/>
+        </p:spPr>
+        <p:txBody>
+          <a:bodyPr wrap="square" lIns="0" tIns="0" rIns="0" bIns="0" rtlCol="0" anchor="t"/>
+          <a:lstStyle/>
+          <a:p>
+            <a:pPr indent="0" marL="0">
+              <a:buNone/>
+            </a:pPr>
+            <a:r>
+              <a:rPr lang="en-US" sz="2600" b="1" dirty="0">
+                <a:solidFill>
+                  <a:srgbClr val="272E52"/>
+                </a:solidFill>
+                <a:latin typeface="Arial" pitchFamily="34" charset="0"/>
+                <a:ea typeface="Arial" pitchFamily="34" charset="-122"/>
+                <a:cs typeface="Arial" pitchFamily="34" charset="-120"/>
+              </a:rPr>
+              <a:t>So arbeitet ihr</a:t>
+            </a:r>
+            <a:endParaRPr lang="en-US" sz="2600" dirty="0"/>
           </a:p>
         </p:txBody>
       </p:sp>
@@ -6481,8 +6716,8 @@
         </p:nvSpPr>
         <p:spPr>
           <a:xfrm>
-            <a:off x="566928" y="3401568"/>
-            <a:ext cx="8010144" cy="457200"/>
+            <a:off x="566928" y="1645920"/>
+            <a:ext cx="8010144" cy="1956816"/>
           </a:xfrm>
           <a:prstGeom prst="rect">
             <a:avLst/>
@@ -6494,21 +6729,361 @@
           <a:bodyPr wrap="square" lIns="0" tIns="0" rIns="0" bIns="0" rtlCol="0" anchor="t"/>
           <a:lstStyle/>
           <a:p>
-            <a:pPr algn="ctr" indent="0" marL="0">
-              <a:buNone/>
-            </a:pPr>
-            <a:r>
-              <a:rPr lang="en-US" sz="1600" b="1" dirty="0">
-                <a:solidFill>
-                  <a:srgbClr val="0F7C86"/>
-                </a:solidFill>
-                <a:latin typeface="Arial" pitchFamily="34" charset="0"/>
-                <a:ea typeface="Arial" pitchFamily="34" charset="-122"/>
-                <a:cs typeface="Arial" pitchFamily="34" charset="-120"/>
-              </a:rPr>
-              <a:t>Mittwoch, 23. September · Industrie und IoT</a:t>
-            </a:r>
-            <a:endParaRPr lang="en-US" sz="1600" dirty="0"/>
+            <a:pPr marL="254000" indent="-254000">
+              <a:lnSpc>
+                <a:spcPct val="100000"/>
+              </a:lnSpc>
+              <a:spcAft>
+                <a:spcPts val="900"/>
+              </a:spcAft>
+              <a:buClr>
+                <a:srgbClr val="0F7C86"/>
+              </a:buClr>
+              <a:buSzPct val="100000"/>
+              <a:buChar char="▸"/>
+            </a:pPr>
+            <a:r>
+              <a:rPr lang="en-US" sz="1150" dirty="0">
+                <a:solidFill>
+                  <a:srgbClr val="434A63"/>
+                </a:solidFill>
+                <a:latin typeface="Arial" pitchFamily="34" charset="0"/>
+                <a:ea typeface="Arial" pitchFamily="34" charset="-122"/>
+                <a:cs typeface="Arial" pitchFamily="34" charset="-120"/>
+              </a:rPr>
+              <a:t>Keine Schrittliste heute: Jede Mission nennt Ziel und Erfolgskriterium, den Weg baut ihr.</a:t>
+            </a:r>
+            <a:endParaRPr lang="en-US" sz="1150" dirty="0"/>
+          </a:p>
+          <a:p>
+            <a:pPr marL="254000" indent="-254000">
+              <a:lnSpc>
+                <a:spcPct val="100000"/>
+              </a:lnSpc>
+              <a:spcAft>
+                <a:spcPts val="900"/>
+              </a:spcAft>
+              <a:buClr>
+                <a:srgbClr val="0F7C86"/>
+              </a:buClr>
+              <a:buSzPct val="100000"/>
+              <a:buChar char="▸"/>
+            </a:pPr>
+            <a:r>
+              <a:rPr lang="en-US" sz="1150" dirty="0">
+                <a:solidFill>
+                  <a:srgbClr val="434A63"/>
+                </a:solidFill>
+                <a:latin typeface="Arial" pitchFamily="34" charset="0"/>
+                <a:ea typeface="Arial" pitchFamily="34" charset="-122"/>
+                <a:cs typeface="Arial" pitchFamily="34" charset="-120"/>
+              </a:rPr>
+              <a:t>Der Reihe nach. Erfolg erkennt ihr an Lampen, Stellplätzen und Logbuch.</a:t>
+            </a:r>
+            <a:endParaRPr lang="en-US" sz="1150" dirty="0"/>
+          </a:p>
+          <a:p>
+            <a:pPr marL="254000" indent="-254000">
+              <a:lnSpc>
+                <a:spcPct val="100000"/>
+              </a:lnSpc>
+              <a:spcAft>
+                <a:spcPts val="900"/>
+              </a:spcAft>
+              <a:buClr>
+                <a:srgbClr val="0F7C86"/>
+              </a:buClr>
+              <a:buSzPct val="100000"/>
+              <a:buChar char="▸"/>
+            </a:pPr>
+            <a:r>
+              <a:rPr lang="en-US" sz="1150" dirty="0">
+                <a:solidFill>
+                  <a:srgbClr val="434A63"/>
+                </a:solidFill>
+                <a:latin typeface="Arial" pitchFamily="34" charset="0"/>
+                <a:ea typeface="Arial" pitchFamily="34" charset="-122"/>
+                <a:cs typeface="Arial" pitchFamily="34" charset="-120"/>
+              </a:rPr>
+              <a:t>Klemmt es: erst Team, dann Funkhilfe Stufe 1 bis 3. Fünf Minuten ohne Fortschritt heißt nächste Stufe.</a:t>
+            </a:r>
+            <a:endParaRPr lang="en-US" sz="1150" dirty="0"/>
+          </a:p>
+          <a:p>
+            <a:pPr marL="254000" indent="-254000">
+              <a:lnSpc>
+                <a:spcPct val="100000"/>
+              </a:lnSpc>
+              <a:spcAft>
+                <a:spcPts val="900"/>
+              </a:spcAft>
+              <a:buClr>
+                <a:srgbClr val="0F7C86"/>
+              </a:buClr>
+              <a:buSzPct val="100000"/>
+              <a:buChar char="▸"/>
+            </a:pPr>
+            <a:r>
+              <a:rPr lang="en-US" sz="1150" dirty="0">
+                <a:solidFill>
+                  <a:srgbClr val="434A63"/>
+                </a:solidFill>
+                <a:latin typeface="Arial" pitchFamily="34" charset="0"/>
+                <a:ea typeface="Arial" pitchFamily="34" charset="-122"/>
+                <a:cs typeface="Arial" pitchFamily="34" charset="-120"/>
+              </a:rPr>
+              <a:t>Pflicht: drei Module leuchten. Die Vertiefungen sind freiwillig, kein Muss für den Abend.</a:t>
+            </a:r>
+            <a:endParaRPr lang="en-US" sz="1150" dirty="0"/>
+          </a:p>
+          <a:p>
+            <a:pPr marL="254000" indent="-254000">
+              <a:lnSpc>
+                <a:spcPct val="100000"/>
+              </a:lnSpc>
+              <a:spcAft>
+                <a:spcPts val="900"/>
+              </a:spcAft>
+              <a:buClr>
+                <a:srgbClr val="0F7C86"/>
+              </a:buClr>
+              <a:buSzPct val="100000"/>
+              <a:buChar char="▸"/>
+            </a:pPr>
+            <a:r>
+              <a:rPr lang="en-US" sz="1150" dirty="0">
+                <a:solidFill>
+                  <a:srgbClr val="434A63"/>
+                </a:solidFill>
+                <a:latin typeface="Arial" pitchFamily="34" charset="0"/>
+                <a:ea typeface="Arial" pitchFamily="34" charset="-122"/>
+                <a:cs typeface="Arial" pitchFamily="34" charset="-120"/>
+              </a:rPr>
+              <a:t>Musterlösung nur als Notausgang. Driver tippt, Windows wie immer in der PowerShell.</a:t>
+            </a:r>
+            <a:endParaRPr lang="en-US" sz="1150" dirty="0"/>
+          </a:p>
+        </p:txBody>
+      </p:sp>
+      <p:sp>
+        <p:nvSpPr>
+          <p:cNvPr id="6" name="Shape 4"/>
+          <p:cNvSpPr/>
+          <p:nvPr/>
+        </p:nvSpPr>
+        <p:spPr>
+          <a:xfrm>
+            <a:off x="566928" y="3639312"/>
+            <a:ext cx="8010144" cy="822960"/>
+          </a:xfrm>
+          <a:prstGeom prst="rect">
+            <a:avLst/>
+          </a:prstGeom>
+          <a:solidFill>
+            <a:srgbClr val="F5F6FC"/>
+          </a:solidFill>
+          <a:ln/>
+        </p:spPr>
+      </p:sp>
+      <p:sp>
+        <p:nvSpPr>
+          <p:cNvPr id="7" name="Shape 5"/>
+          <p:cNvSpPr/>
+          <p:nvPr/>
+        </p:nvSpPr>
+        <p:spPr>
+          <a:xfrm>
+            <a:off x="566928" y="3639312"/>
+            <a:ext cx="41148" cy="822960"/>
+          </a:xfrm>
+          <a:prstGeom prst="rect">
+            <a:avLst/>
+          </a:prstGeom>
+          <a:solidFill>
+            <a:srgbClr val="9A6310"/>
+          </a:solidFill>
+          <a:ln/>
+        </p:spPr>
+      </p:sp>
+      <p:sp>
+        <p:nvSpPr>
+          <p:cNvPr id="8" name="Text 6"/>
+          <p:cNvSpPr/>
+          <p:nvPr/>
+        </p:nvSpPr>
+        <p:spPr>
+          <a:xfrm>
+            <a:off x="804672" y="3785616"/>
+            <a:ext cx="7607808" cy="242062"/>
+          </a:xfrm>
+          <a:prstGeom prst="rect">
+            <a:avLst/>
+          </a:prstGeom>
+          <a:noFill/>
+          <a:ln/>
+        </p:spPr>
+        <p:txBody>
+          <a:bodyPr wrap="square" lIns="0" tIns="0" rIns="0" bIns="0" rtlCol="0" anchor="t"/>
+          <a:lstStyle/>
+          <a:p>
+            <a:pPr indent="0" marL="0">
+              <a:buNone/>
+            </a:pPr>
+            <a:r>
+              <a:rPr lang="en-US" sz="1300" b="1" dirty="0">
+                <a:solidFill>
+                  <a:srgbClr val="272E52"/>
+                </a:solidFill>
+                <a:latin typeface="Arial" pitchFamily="34" charset="0"/>
+                <a:ea typeface="Arial" pitchFamily="34" charset="-122"/>
+                <a:cs typeface="Arial" pitchFamily="34" charset="-120"/>
+              </a:rPr>
+              <a:t>Um 20:30 beginnt die Demo-Runde</a:t>
+            </a:r>
+            <a:endParaRPr lang="en-US" sz="1300" dirty="0"/>
+          </a:p>
+        </p:txBody>
+      </p:sp>
+      <p:sp>
+        <p:nvSpPr>
+          <p:cNvPr id="9" name="Text 7"/>
+          <p:cNvSpPr/>
+          <p:nvPr/>
+        </p:nvSpPr>
+        <p:spPr>
+          <a:xfrm>
+            <a:off x="804672" y="4073398"/>
+            <a:ext cx="7607808" cy="270002"/>
+          </a:xfrm>
+          <a:prstGeom prst="rect">
+            <a:avLst/>
+          </a:prstGeom>
+          <a:noFill/>
+          <a:ln/>
+        </p:spPr>
+        <p:txBody>
+          <a:bodyPr wrap="square" lIns="0" tIns="0" rIns="0" bIns="0" rtlCol="0" anchor="t"/>
+          <a:lstStyle/>
+          <a:p>
+            <a:pPr indent="0" marL="0">
+              <a:lnSpc>
+                <a:spcPct val="92000"/>
+              </a:lnSpc>
+              <a:buNone/>
+            </a:pPr>
+            <a:r>
+              <a:rPr lang="en-US" sz="1100" dirty="0">
+                <a:solidFill>
+                  <a:srgbClr val="434A63"/>
+                </a:solidFill>
+                <a:latin typeface="Arial" pitchFamily="34" charset="0"/>
+                <a:ea typeface="Arial" pitchFamily="34" charset="-122"/>
+                <a:cs typeface="Arial" pitchFamily="34" charset="-120"/>
+              </a:rPr>
+              <a:t>Jede Gruppe 3 bis 5 Minuten: die Station im Browser, docker compose ps mit healthy und eure kniffligste Stelle.</a:t>
+            </a:r>
+            <a:endParaRPr lang="en-US" sz="1100" dirty="0"/>
+          </a:p>
+        </p:txBody>
+      </p:sp>
+      <p:sp>
+        <p:nvSpPr>
+          <p:cNvPr id="10" name="Shape 8"/>
+          <p:cNvSpPr/>
+          <p:nvPr/>
+        </p:nvSpPr>
+        <p:spPr>
+          <a:xfrm>
+            <a:off x="566928" y="4631436"/>
+            <a:ext cx="8010144" cy="0"/>
+          </a:xfrm>
+          <a:prstGeom prst="line">
+            <a:avLst/>
+          </a:prstGeom>
+          <a:noFill/>
+          <a:ln w="9525">
+            <a:solidFill>
+              <a:srgbClr val="DFE3F0"/>
+            </a:solidFill>
+            <a:prstDash val="solid"/>
+          </a:ln>
+        </p:spPr>
+      </p:sp>
+      <p:sp>
+        <p:nvSpPr>
+          <p:cNvPr id="11" name="Text 9"/>
+          <p:cNvSpPr/>
+          <p:nvPr/>
+        </p:nvSpPr>
+        <p:spPr>
+          <a:xfrm>
+            <a:off x="566928" y="4722876"/>
+            <a:ext cx="5029200" cy="237744"/>
+          </a:xfrm>
+          <a:prstGeom prst="rect">
+            <a:avLst/>
+          </a:prstGeom>
+          <a:noFill/>
+          <a:ln/>
+        </p:spPr>
+        <p:txBody>
+          <a:bodyPr wrap="square" lIns="0" tIns="0" rIns="0" bIns="0" rtlCol="0" anchor="ctr"/>
+          <a:lstStyle/>
+          <a:p>
+            <a:pPr indent="0" marL="0">
+              <a:buNone/>
+            </a:pPr>
+            <a:r>
+              <a:rPr lang="en-US" sz="1050" spc="30" kern="0" dirty="0">
+                <a:solidFill>
+                  <a:srgbClr val="5C6377"/>
+                </a:solidFill>
+                <a:latin typeface="Arial" pitchFamily="34" charset="0"/>
+                <a:ea typeface="Arial" pitchFamily="34" charset="-122"/>
+                <a:cs typeface="Arial" pitchFamily="34" charset="-120"/>
+              </a:rPr>
+              <a:t>Die Missionen</a:t>
+            </a:r>
+            <a:endParaRPr lang="en-US" sz="1050" dirty="0"/>
+          </a:p>
+        </p:txBody>
+      </p:sp>
+      <p:sp>
+        <p:nvSpPr>
+          <p:cNvPr id="12" name="Text 10"/>
+          <p:cNvSpPr/>
+          <p:nvPr/>
+        </p:nvSpPr>
+        <p:spPr>
+          <a:xfrm>
+            <a:off x="8028432" y="4722876"/>
+            <a:ext cx="548640" cy="237744"/>
+          </a:xfrm>
+          <a:prstGeom prst="rect">
+            <a:avLst/>
+          </a:prstGeom>
+          <a:noFill/>
+          <a:ln/>
+        </p:spPr>
+        <p:txBody>
+          <a:bodyPr wrap="square" lIns="0" tIns="0" rIns="0" bIns="0" rtlCol="0" anchor="ctr"/>
+          <a:lstStyle/>
+          <a:p>
+            <a:pPr algn="r" indent="0" marL="0">
+              <a:buNone/>
+            </a:pPr>
+            <a:r>
+              <a:rPr lang="en-US" sz="1050" dirty="0">
+                <a:solidFill>
+                  <a:srgbClr val="5C6377"/>
+                </a:solidFill>
+                <a:latin typeface="Arial" pitchFamily="34" charset="0"/>
+                <a:ea typeface="Arial" pitchFamily="34" charset="-122"/>
+                <a:cs typeface="Arial" pitchFamily="34" charset="-120"/>
+              </a:rPr>
+              <a:t>16/19</a:t>
+            </a:r>
+            <a:endParaRPr lang="en-US" sz="1050" dirty="0"/>
           </a:p>
         </p:txBody>
       </p:sp>
@@ -7500,9 +8075,1924 @@
                 <a:ea typeface="Arial" pitchFamily="34" charset="-122"/>
                 <a:cs typeface="Arial" pitchFamily="34" charset="-120"/>
               </a:rPr>
-              <a:t>1/13</a:t>
+              <a:t>1/19</a:t>
             </a:r>
             <a:endParaRPr lang="en-US" sz="1050" dirty="0"/>
+          </a:p>
+        </p:txBody>
+      </p:sp>
+    </p:spTree>
+  </p:cSld>
+  <p:clrMapOvr>
+    <a:masterClrMapping/>
+  </p:clrMapOvr>
+</p:sld>
+</file>
+
+<file path=ppt/slides/slide20.xml><?xml version="1.0" encoding="utf-8"?>
+<p:sld xmlns:a="http://schemas.openxmlformats.org/drawingml/2006/main" xmlns:r="http://schemas.openxmlformats.org/officeDocument/2006/relationships" xmlns:p="http://schemas.openxmlformats.org/presentationml/2006/main">
+  <p:cSld name="Slide 20">
+    <p:bg>
+      <p:bgPr>
+        <a:solidFill>
+          <a:srgbClr val="FFFFFF"/>
+        </a:solidFill>
+      </p:bgPr>
+    </p:bg>
+    <p:spTree>
+      <p:nvGrpSpPr>
+        <p:cNvPr id="1" name=""/>
+        <p:cNvGrpSpPr/>
+        <p:nvPr/>
+      </p:nvGrpSpPr>
+      <p:grpSpPr>
+        <a:xfrm>
+          <a:off x="0" y="0"/>
+          <a:ext cx="0" cy="0"/>
+          <a:chOff x="0" y="0"/>
+          <a:chExt cx="0" cy="0"/>
+        </a:xfrm>
+      </p:grpSpPr>
+      <p:sp>
+        <p:nvSpPr>
+          <p:cNvPr id="2" name="Shape 0"/>
+          <p:cNvSpPr/>
+          <p:nvPr/>
+        </p:nvSpPr>
+        <p:spPr>
+          <a:xfrm>
+            <a:off x="566928" y="201168"/>
+            <a:ext cx="475488" cy="50292"/>
+          </a:xfrm>
+          <a:prstGeom prst="rect">
+            <a:avLst/>
+          </a:prstGeom>
+          <a:solidFill>
+            <a:srgbClr val="0F7C86"/>
+          </a:solidFill>
+          <a:ln/>
+        </p:spPr>
+      </p:sp>
+      <p:sp>
+        <p:nvSpPr>
+          <p:cNvPr id="3" name="Text 1"/>
+          <p:cNvSpPr/>
+          <p:nvPr/>
+        </p:nvSpPr>
+        <p:spPr>
+          <a:xfrm>
+            <a:off x="566928" y="384048"/>
+            <a:ext cx="8010144" cy="237744"/>
+          </a:xfrm>
+          <a:prstGeom prst="rect">
+            <a:avLst/>
+          </a:prstGeom>
+          <a:noFill/>
+          <a:ln/>
+        </p:spPr>
+        <p:txBody>
+          <a:bodyPr wrap="square" lIns="0" tIns="0" rIns="0" bIns="0" rtlCol="0" anchor="ctr"/>
+          <a:lstStyle/>
+          <a:p>
+            <a:pPr indent="0" marL="0">
+              <a:buNone/>
+            </a:pPr>
+            <a:r>
+              <a:rPr lang="en-US" sz="1150" b="1" spc="180" kern="0" dirty="0">
+                <a:solidFill>
+                  <a:srgbClr val="0F7C86"/>
+                </a:solidFill>
+                <a:latin typeface="Arial" pitchFamily="34" charset="0"/>
+                <a:ea typeface="Arial" pitchFamily="34" charset="-122"/>
+                <a:cs typeface="Arial" pitchFamily="34" charset="-120"/>
+              </a:rPr>
+              <a:t>AUSWERTUNG · 20 MINUTEN</a:t>
+            </a:r>
+            <a:endParaRPr lang="en-US" sz="1150" dirty="0"/>
+          </a:p>
+        </p:txBody>
+      </p:sp>
+      <p:sp>
+        <p:nvSpPr>
+          <p:cNvPr id="4" name="Text 2"/>
+          <p:cNvSpPr/>
+          <p:nvPr/>
+        </p:nvSpPr>
+        <p:spPr>
+          <a:xfrm>
+            <a:off x="566928" y="731520"/>
+            <a:ext cx="8010144" cy="603504"/>
+          </a:xfrm>
+          <a:prstGeom prst="rect">
+            <a:avLst/>
+          </a:prstGeom>
+          <a:noFill/>
+          <a:ln/>
+        </p:spPr>
+        <p:txBody>
+          <a:bodyPr wrap="square" lIns="0" tIns="0" rIns="0" bIns="0" rtlCol="0" anchor="t"/>
+          <a:lstStyle/>
+          <a:p>
+            <a:pPr indent="0" marL="0">
+              <a:buNone/>
+            </a:pPr>
+            <a:r>
+              <a:rPr lang="en-US" sz="2600" b="1" dirty="0">
+                <a:solidFill>
+                  <a:srgbClr val="272E52"/>
+                </a:solidFill>
+                <a:latin typeface="Arial" pitchFamily="34" charset="0"/>
+                <a:ea typeface="Arial" pitchFamily="34" charset="-122"/>
+                <a:cs typeface="Arial" pitchFamily="34" charset="-120"/>
+              </a:rPr>
+              <a:t>Die Demo-Runde</a:t>
+            </a:r>
+            <a:endParaRPr lang="en-US" sz="2600" dirty="0"/>
+          </a:p>
+        </p:txBody>
+      </p:sp>
+      <p:sp>
+        <p:nvSpPr>
+          <p:cNvPr id="5" name="Shape 3"/>
+          <p:cNvSpPr/>
+          <p:nvPr/>
+        </p:nvSpPr>
+        <p:spPr>
+          <a:xfrm>
+            <a:off x="438912" y="1810512"/>
+            <a:ext cx="8266176" cy="365760"/>
+          </a:xfrm>
+          <a:prstGeom prst="rect">
+            <a:avLst/>
+          </a:prstGeom>
+          <a:solidFill>
+            <a:srgbClr val="F5F6FC"/>
+          </a:solidFill>
+          <a:ln/>
+        </p:spPr>
+      </p:sp>
+      <p:sp>
+        <p:nvSpPr>
+          <p:cNvPr id="6" name="Text 4"/>
+          <p:cNvSpPr/>
+          <p:nvPr/>
+        </p:nvSpPr>
+        <p:spPr>
+          <a:xfrm>
+            <a:off x="566928" y="1810512"/>
+            <a:ext cx="548640" cy="365760"/>
+          </a:xfrm>
+          <a:prstGeom prst="rect">
+            <a:avLst/>
+          </a:prstGeom>
+          <a:noFill/>
+          <a:ln/>
+        </p:spPr>
+        <p:txBody>
+          <a:bodyPr wrap="square" lIns="0" tIns="0" rIns="0" bIns="0" rtlCol="0" anchor="ctr"/>
+          <a:lstStyle/>
+          <a:p>
+            <a:pPr indent="0" marL="0">
+              <a:buNone/>
+            </a:pPr>
+            <a:r>
+              <a:rPr lang="en-US" sz="1200" b="1" dirty="0">
+                <a:solidFill>
+                  <a:srgbClr val="0F7C86"/>
+                </a:solidFill>
+                <a:latin typeface="Courier New" pitchFamily="34" charset="0"/>
+                <a:ea typeface="Courier New" pitchFamily="34" charset="-122"/>
+                <a:cs typeface="Courier New" pitchFamily="34" charset="-120"/>
+              </a:rPr>
+              <a:t>1</a:t>
+            </a:r>
+            <a:endParaRPr lang="en-US" sz="1200" dirty="0"/>
+          </a:p>
+        </p:txBody>
+      </p:sp>
+      <p:sp>
+        <p:nvSpPr>
+          <p:cNvPr id="7" name="Text 5"/>
+          <p:cNvSpPr/>
+          <p:nvPr/>
+        </p:nvSpPr>
+        <p:spPr>
+          <a:xfrm>
+            <a:off x="1115568" y="1810512"/>
+            <a:ext cx="7461504" cy="365760"/>
+          </a:xfrm>
+          <a:prstGeom prst="rect">
+            <a:avLst/>
+          </a:prstGeom>
+          <a:noFill/>
+          <a:ln/>
+        </p:spPr>
+        <p:txBody>
+          <a:bodyPr wrap="square" lIns="0" tIns="0" rIns="0" bIns="0" rtlCol="0" anchor="ctr"/>
+          <a:lstStyle/>
+          <a:p>
+            <a:pPr indent="0" marL="0">
+              <a:buNone/>
+            </a:pPr>
+            <a:r>
+              <a:rPr lang="en-US" sz="1200" dirty="0">
+                <a:solidFill>
+                  <a:srgbClr val="434A63"/>
+                </a:solidFill>
+                <a:latin typeface="Arial" pitchFamily="34" charset="0"/>
+                <a:ea typeface="Arial" pitchFamily="34" charset="-122"/>
+                <a:cs typeface="Arial" pitchFamily="34" charset="-120"/>
+              </a:rPr>
+              <a:t>Die Station: Wie viele Module leuchten? Daneben docker compose ps mit healthy</a:t>
+            </a:r>
+            <a:endParaRPr lang="en-US" sz="1200" dirty="0"/>
+          </a:p>
+        </p:txBody>
+      </p:sp>
+      <p:sp>
+        <p:nvSpPr>
+          <p:cNvPr id="8" name="Text 6"/>
+          <p:cNvSpPr/>
+          <p:nvPr/>
+        </p:nvSpPr>
+        <p:spPr>
+          <a:xfrm>
+            <a:off x="566928" y="2176272"/>
+            <a:ext cx="548640" cy="365760"/>
+          </a:xfrm>
+          <a:prstGeom prst="rect">
+            <a:avLst/>
+          </a:prstGeom>
+          <a:noFill/>
+          <a:ln/>
+        </p:spPr>
+        <p:txBody>
+          <a:bodyPr wrap="square" lIns="0" tIns="0" rIns="0" bIns="0" rtlCol="0" anchor="ctr"/>
+          <a:lstStyle/>
+          <a:p>
+            <a:pPr indent="0" marL="0">
+              <a:buNone/>
+            </a:pPr>
+            <a:r>
+              <a:rPr lang="en-US" sz="1200" b="1" dirty="0">
+                <a:solidFill>
+                  <a:srgbClr val="0F7C86"/>
+                </a:solidFill>
+                <a:latin typeface="Courier New" pitchFamily="34" charset="0"/>
+                <a:ea typeface="Courier New" pitchFamily="34" charset="-122"/>
+                <a:cs typeface="Courier New" pitchFamily="34" charset="-120"/>
+              </a:rPr>
+              <a:t>2</a:t>
+            </a:r>
+            <a:endParaRPr lang="en-US" sz="1200" dirty="0"/>
+          </a:p>
+        </p:txBody>
+      </p:sp>
+      <p:sp>
+        <p:nvSpPr>
+          <p:cNvPr id="9" name="Text 7"/>
+          <p:cNvSpPr/>
+          <p:nvPr/>
+        </p:nvSpPr>
+        <p:spPr>
+          <a:xfrm>
+            <a:off x="1115568" y="2176272"/>
+            <a:ext cx="7461504" cy="365760"/>
+          </a:xfrm>
+          <a:prstGeom prst="rect">
+            <a:avLst/>
+          </a:prstGeom>
+          <a:noFill/>
+          <a:ln/>
+        </p:spPr>
+        <p:txBody>
+          <a:bodyPr wrap="square" lIns="0" tIns="0" rIns="0" bIns="0" rtlCol="0" anchor="ctr"/>
+          <a:lstStyle/>
+          <a:p>
+            <a:pPr indent="0" marL="0">
+              <a:buNone/>
+            </a:pPr>
+            <a:r>
+              <a:rPr lang="en-US" sz="1200" dirty="0">
+                <a:solidFill>
+                  <a:srgbClr val="434A63"/>
+                </a:solidFill>
+                <a:latin typeface="Arial" pitchFamily="34" charset="0"/>
+                <a:ea typeface="Arial" pitchFamily="34" charset="-122"/>
+                <a:cs typeface="Arial" pitchFamily="34" charset="-120"/>
+              </a:rPr>
+              <a:t>Der Beweis: down und up, die Logbuch-Historie ist noch da. Warum?</a:t>
+            </a:r>
+            <a:endParaRPr lang="en-US" sz="1200" dirty="0"/>
+          </a:p>
+        </p:txBody>
+      </p:sp>
+      <p:sp>
+        <p:nvSpPr>
+          <p:cNvPr id="10" name="Shape 8"/>
+          <p:cNvSpPr/>
+          <p:nvPr/>
+        </p:nvSpPr>
+        <p:spPr>
+          <a:xfrm>
+            <a:off x="438912" y="2542032"/>
+            <a:ext cx="8266176" cy="365760"/>
+          </a:xfrm>
+          <a:prstGeom prst="rect">
+            <a:avLst/>
+          </a:prstGeom>
+          <a:solidFill>
+            <a:srgbClr val="F5F6FC"/>
+          </a:solidFill>
+          <a:ln/>
+        </p:spPr>
+      </p:sp>
+      <p:sp>
+        <p:nvSpPr>
+          <p:cNvPr id="11" name="Text 9"/>
+          <p:cNvSpPr/>
+          <p:nvPr/>
+        </p:nvSpPr>
+        <p:spPr>
+          <a:xfrm>
+            <a:off x="566928" y="2542032"/>
+            <a:ext cx="548640" cy="365760"/>
+          </a:xfrm>
+          <a:prstGeom prst="rect">
+            <a:avLst/>
+          </a:prstGeom>
+          <a:noFill/>
+          <a:ln/>
+        </p:spPr>
+        <p:txBody>
+          <a:bodyPr wrap="square" lIns="0" tIns="0" rIns="0" bIns="0" rtlCol="0" anchor="ctr"/>
+          <a:lstStyle/>
+          <a:p>
+            <a:pPr indent="0" marL="0">
+              <a:buNone/>
+            </a:pPr>
+            <a:r>
+              <a:rPr lang="en-US" sz="1200" b="1" dirty="0">
+                <a:solidFill>
+                  <a:srgbClr val="0F7C86"/>
+                </a:solidFill>
+                <a:latin typeface="Courier New" pitchFamily="34" charset="0"/>
+                <a:ea typeface="Courier New" pitchFamily="34" charset="-122"/>
+                <a:cs typeface="Courier New" pitchFamily="34" charset="-120"/>
+              </a:rPr>
+              <a:t>3</a:t>
+            </a:r>
+            <a:endParaRPr lang="en-US" sz="1200" dirty="0"/>
+          </a:p>
+        </p:txBody>
+      </p:sp>
+      <p:sp>
+        <p:nvSpPr>
+          <p:cNvPr id="12" name="Text 10"/>
+          <p:cNvSpPr/>
+          <p:nvPr/>
+        </p:nvSpPr>
+        <p:spPr>
+          <a:xfrm>
+            <a:off x="1115568" y="2542032"/>
+            <a:ext cx="7461504" cy="365760"/>
+          </a:xfrm>
+          <a:prstGeom prst="rect">
+            <a:avLst/>
+          </a:prstGeom>
+          <a:noFill/>
+          <a:ln/>
+        </p:spPr>
+        <p:txBody>
+          <a:bodyPr wrap="square" lIns="0" tIns="0" rIns="0" bIns="0" rtlCol="0" anchor="ctr"/>
+          <a:lstStyle/>
+          <a:p>
+            <a:pPr indent="0" marL="0">
+              <a:buNone/>
+            </a:pPr>
+            <a:r>
+              <a:rPr lang="en-US" sz="1200" dirty="0">
+                <a:solidFill>
+                  <a:srgbClr val="434A63"/>
+                </a:solidFill>
+                <a:latin typeface="Arial" pitchFamily="34" charset="0"/>
+                <a:ea typeface="Arial" pitchFamily="34" charset="-122"/>
+                <a:cs typeface="Arial" pitchFamily="34" charset="-120"/>
+              </a:rPr>
+              <a:t>Die kniffligste Stelle und welches Log oder welche Funkhilfe sie gelöst hat</a:t>
+            </a:r>
+            <a:endParaRPr lang="en-US" sz="1200" dirty="0"/>
+          </a:p>
+        </p:txBody>
+      </p:sp>
+      <p:sp>
+        <p:nvSpPr>
+          <p:cNvPr id="13" name="Text 11"/>
+          <p:cNvSpPr/>
+          <p:nvPr/>
+        </p:nvSpPr>
+        <p:spPr>
+          <a:xfrm>
+            <a:off x="566928" y="2907792"/>
+            <a:ext cx="548640" cy="365760"/>
+          </a:xfrm>
+          <a:prstGeom prst="rect">
+            <a:avLst/>
+          </a:prstGeom>
+          <a:noFill/>
+          <a:ln/>
+        </p:spPr>
+        <p:txBody>
+          <a:bodyPr wrap="square" lIns="0" tIns="0" rIns="0" bIns="0" rtlCol="0" anchor="ctr"/>
+          <a:lstStyle/>
+          <a:p>
+            <a:pPr indent="0" marL="0">
+              <a:buNone/>
+            </a:pPr>
+            <a:r>
+              <a:rPr lang="en-US" sz="1200" b="1" dirty="0">
+                <a:solidFill>
+                  <a:srgbClr val="0F7C86"/>
+                </a:solidFill>
+                <a:latin typeface="Courier New" pitchFamily="34" charset="0"/>
+                <a:ea typeface="Courier New" pitchFamily="34" charset="-122"/>
+                <a:cs typeface="Courier New" pitchFamily="34" charset="-120"/>
+              </a:rPr>
+              <a:t>4</a:t>
+            </a:r>
+            <a:endParaRPr lang="en-US" sz="1200" dirty="0"/>
+          </a:p>
+        </p:txBody>
+      </p:sp>
+      <p:sp>
+        <p:nvSpPr>
+          <p:cNvPr id="14" name="Text 12"/>
+          <p:cNvSpPr/>
+          <p:nvPr/>
+        </p:nvSpPr>
+        <p:spPr>
+          <a:xfrm>
+            <a:off x="1115568" y="2907792"/>
+            <a:ext cx="7461504" cy="365760"/>
+          </a:xfrm>
+          <a:prstGeom prst="rect">
+            <a:avLst/>
+          </a:prstGeom>
+          <a:noFill/>
+          <a:ln/>
+        </p:spPr>
+        <p:txBody>
+          <a:bodyPr wrap="square" lIns="0" tIns="0" rIns="0" bIns="0" rtlCol="0" anchor="ctr"/>
+          <a:lstStyle/>
+          <a:p>
+            <a:pPr indent="0" marL="0">
+              <a:buNone/>
+            </a:pPr>
+            <a:r>
+              <a:rPr lang="en-US" sz="1200" dirty="0">
+                <a:solidFill>
+                  <a:srgbClr val="434A63"/>
+                </a:solidFill>
+                <a:latin typeface="Arial" pitchFamily="34" charset="0"/>
+                <a:ea typeface="Arial" pitchFamily="34" charset="-122"/>
+                <a:cs typeface="Arial" pitchFamily="34" charset="-120"/>
+              </a:rPr>
+              <a:t>Aus der Vertiefung: Störung, Live-Ausfall oder FastAPI, kurz vorführen</a:t>
+            </a:r>
+            <a:endParaRPr lang="en-US" sz="1200" dirty="0"/>
+          </a:p>
+        </p:txBody>
+      </p:sp>
+      <p:sp>
+        <p:nvSpPr>
+          <p:cNvPr id="15" name="Shape 13"/>
+          <p:cNvSpPr/>
+          <p:nvPr/>
+        </p:nvSpPr>
+        <p:spPr>
+          <a:xfrm>
+            <a:off x="438912" y="3273552"/>
+            <a:ext cx="8266176" cy="365760"/>
+          </a:xfrm>
+          <a:prstGeom prst="rect">
+            <a:avLst/>
+          </a:prstGeom>
+          <a:solidFill>
+            <a:srgbClr val="F5F6FC"/>
+          </a:solidFill>
+          <a:ln/>
+        </p:spPr>
+      </p:sp>
+      <p:sp>
+        <p:nvSpPr>
+          <p:cNvPr id="16" name="Text 14"/>
+          <p:cNvSpPr/>
+          <p:nvPr/>
+        </p:nvSpPr>
+        <p:spPr>
+          <a:xfrm>
+            <a:off x="566928" y="3273552"/>
+            <a:ext cx="548640" cy="365760"/>
+          </a:xfrm>
+          <a:prstGeom prst="rect">
+            <a:avLst/>
+          </a:prstGeom>
+          <a:noFill/>
+          <a:ln/>
+        </p:spPr>
+        <p:txBody>
+          <a:bodyPr wrap="square" lIns="0" tIns="0" rIns="0" bIns="0" rtlCol="0" anchor="ctr"/>
+          <a:lstStyle/>
+          <a:p>
+            <a:pPr indent="0" marL="0">
+              <a:buNone/>
+            </a:pPr>
+            <a:r>
+              <a:rPr lang="en-US" sz="1200" b="1" dirty="0">
+                <a:solidFill>
+                  <a:srgbClr val="0F7C86"/>
+                </a:solidFill>
+                <a:latin typeface="Courier New" pitchFamily="34" charset="0"/>
+                <a:ea typeface="Courier New" pitchFamily="34" charset="-122"/>
+                <a:cs typeface="Courier New" pitchFamily="34" charset="-120"/>
+              </a:rPr>
+              <a:t>5</a:t>
+            </a:r>
+            <a:endParaRPr lang="en-US" sz="1200" dirty="0"/>
+          </a:p>
+        </p:txBody>
+      </p:sp>
+      <p:sp>
+        <p:nvSpPr>
+          <p:cNvPr id="17" name="Text 15"/>
+          <p:cNvSpPr/>
+          <p:nvPr/>
+        </p:nvSpPr>
+        <p:spPr>
+          <a:xfrm>
+            <a:off x="1115568" y="3273552"/>
+            <a:ext cx="7461504" cy="365760"/>
+          </a:xfrm>
+          <a:prstGeom prst="rect">
+            <a:avLst/>
+          </a:prstGeom>
+          <a:noFill/>
+          <a:ln/>
+        </p:spPr>
+        <p:txBody>
+          <a:bodyPr wrap="square" lIns="0" tIns="0" rIns="0" bIns="0" rtlCol="0" anchor="ctr"/>
+          <a:lstStyle/>
+          <a:p>
+            <a:pPr indent="0" marL="0">
+              <a:buNone/>
+            </a:pPr>
+            <a:r>
+              <a:rPr lang="en-US" sz="1200" dirty="0">
+                <a:solidFill>
+                  <a:srgbClr val="434A63"/>
+                </a:solidFill>
+                <a:latin typeface="Arial" pitchFamily="34" charset="0"/>
+                <a:ea typeface="Arial" pitchFamily="34" charset="-122"/>
+                <a:cs typeface="Arial" pitchFamily="34" charset="-120"/>
+              </a:rPr>
+              <a:t>Die offene Frage für Mittwoch: Euer Stack spricht HTTP. Die Presse in Halle 1 auch?</a:t>
+            </a:r>
+            <a:endParaRPr lang="en-US" sz="1200" dirty="0"/>
+          </a:p>
+        </p:txBody>
+      </p:sp>
+      <p:sp>
+        <p:nvSpPr>
+          <p:cNvPr id="18" name="Shape 16"/>
+          <p:cNvSpPr/>
+          <p:nvPr/>
+        </p:nvSpPr>
+        <p:spPr>
+          <a:xfrm>
+            <a:off x="566928" y="4069080"/>
+            <a:ext cx="32004" cy="256032"/>
+          </a:xfrm>
+          <a:prstGeom prst="rect">
+            <a:avLst/>
+          </a:prstGeom>
+          <a:solidFill>
+            <a:srgbClr val="0F7C86"/>
+          </a:solidFill>
+          <a:ln/>
+        </p:spPr>
+      </p:sp>
+      <p:sp>
+        <p:nvSpPr>
+          <p:cNvPr id="19" name="Text 17"/>
+          <p:cNvSpPr/>
+          <p:nvPr/>
+        </p:nvSpPr>
+        <p:spPr>
+          <a:xfrm>
+            <a:off x="749808" y="4023360"/>
+            <a:ext cx="7827264" cy="402336"/>
+          </a:xfrm>
+          <a:prstGeom prst="rect">
+            <a:avLst/>
+          </a:prstGeom>
+          <a:noFill/>
+          <a:ln/>
+        </p:spPr>
+        <p:txBody>
+          <a:bodyPr wrap="square" lIns="0" tIns="0" rIns="0" bIns="0" rtlCol="0" anchor="ctr"/>
+          <a:lstStyle/>
+          <a:p>
+            <a:pPr indent="0" marL="0">
+              <a:buNone/>
+            </a:pPr>
+            <a:r>
+              <a:rPr lang="en-US" sz="1200" b="1" dirty="0">
+                <a:solidFill>
+                  <a:srgbClr val="434A63"/>
+                </a:solidFill>
+                <a:latin typeface="Arial" pitchFamily="34" charset="0"/>
+                <a:ea typeface="Arial" pitchFamily="34" charset="-122"/>
+                <a:cs typeface="Arial" pitchFamily="34" charset="-120"/>
+              </a:rPr>
+              <a:t>Punkte gibt es nur symbolisch und nur für Teamarbeit: Jede Rolle, die in der Demo zu Wort kommt, zählt einen.</a:t>
+            </a:r>
+            <a:endParaRPr lang="en-US" sz="1200" dirty="0"/>
+          </a:p>
+        </p:txBody>
+      </p:sp>
+      <p:sp>
+        <p:nvSpPr>
+          <p:cNvPr id="20" name="Shape 18"/>
+          <p:cNvSpPr/>
+          <p:nvPr/>
+        </p:nvSpPr>
+        <p:spPr>
+          <a:xfrm>
+            <a:off x="566928" y="4631436"/>
+            <a:ext cx="8010144" cy="0"/>
+          </a:xfrm>
+          <a:prstGeom prst="line">
+            <a:avLst/>
+          </a:prstGeom>
+          <a:noFill/>
+          <a:ln w="9525">
+            <a:solidFill>
+              <a:srgbClr val="DFE3F0"/>
+            </a:solidFill>
+            <a:prstDash val="solid"/>
+          </a:ln>
+        </p:spPr>
+      </p:sp>
+      <p:sp>
+        <p:nvSpPr>
+          <p:cNvPr id="21" name="Text 19"/>
+          <p:cNvSpPr/>
+          <p:nvPr/>
+        </p:nvSpPr>
+        <p:spPr>
+          <a:xfrm>
+            <a:off x="566928" y="4722876"/>
+            <a:ext cx="5029200" cy="237744"/>
+          </a:xfrm>
+          <a:prstGeom prst="rect">
+            <a:avLst/>
+          </a:prstGeom>
+          <a:noFill/>
+          <a:ln/>
+        </p:spPr>
+        <p:txBody>
+          <a:bodyPr wrap="square" lIns="0" tIns="0" rIns="0" bIns="0" rtlCol="0" anchor="ctr"/>
+          <a:lstStyle/>
+          <a:p>
+            <a:pPr indent="0" marL="0">
+              <a:buNone/>
+            </a:pPr>
+            <a:r>
+              <a:rPr lang="en-US" sz="1050" spc="30" kern="0" dirty="0">
+                <a:solidFill>
+                  <a:srgbClr val="5C6377"/>
+                </a:solidFill>
+                <a:latin typeface="Arial" pitchFamily="34" charset="0"/>
+                <a:ea typeface="Arial" pitchFamily="34" charset="-122"/>
+                <a:cs typeface="Arial" pitchFamily="34" charset="-120"/>
+              </a:rPr>
+              <a:t>Demo-Runde</a:t>
+            </a:r>
+            <a:endParaRPr lang="en-US" sz="1050" dirty="0"/>
+          </a:p>
+        </p:txBody>
+      </p:sp>
+      <p:sp>
+        <p:nvSpPr>
+          <p:cNvPr id="22" name="Text 20"/>
+          <p:cNvSpPr/>
+          <p:nvPr/>
+        </p:nvSpPr>
+        <p:spPr>
+          <a:xfrm>
+            <a:off x="8028432" y="4722876"/>
+            <a:ext cx="548640" cy="237744"/>
+          </a:xfrm>
+          <a:prstGeom prst="rect">
+            <a:avLst/>
+          </a:prstGeom>
+          <a:noFill/>
+          <a:ln/>
+        </p:spPr>
+        <p:txBody>
+          <a:bodyPr wrap="square" lIns="0" tIns="0" rIns="0" bIns="0" rtlCol="0" anchor="ctr"/>
+          <a:lstStyle/>
+          <a:p>
+            <a:pPr algn="r" indent="0" marL="0">
+              <a:buNone/>
+            </a:pPr>
+            <a:r>
+              <a:rPr lang="en-US" sz="1050" dirty="0">
+                <a:solidFill>
+                  <a:srgbClr val="5C6377"/>
+                </a:solidFill>
+                <a:latin typeface="Arial" pitchFamily="34" charset="0"/>
+                <a:ea typeface="Arial" pitchFamily="34" charset="-122"/>
+                <a:cs typeface="Arial" pitchFamily="34" charset="-120"/>
+              </a:rPr>
+              <a:t>17/19</a:t>
+            </a:r>
+            <a:endParaRPr lang="en-US" sz="1050" dirty="0"/>
+          </a:p>
+        </p:txBody>
+      </p:sp>
+    </p:spTree>
+  </p:cSld>
+  <p:clrMapOvr>
+    <a:masterClrMapping/>
+  </p:clrMapOvr>
+</p:sld>
+</file>
+
+<file path=ppt/slides/slide21.xml><?xml version="1.0" encoding="utf-8"?>
+<p:sld xmlns:a="http://schemas.openxmlformats.org/drawingml/2006/main" xmlns:r="http://schemas.openxmlformats.org/officeDocument/2006/relationships" xmlns:p="http://schemas.openxmlformats.org/presentationml/2006/main">
+  <p:cSld name="Slide 21">
+    <p:bg>
+      <p:bgPr>
+        <a:solidFill>
+          <a:srgbClr val="FFFFFF"/>
+        </a:solidFill>
+      </p:bgPr>
+    </p:bg>
+    <p:spTree>
+      <p:nvGrpSpPr>
+        <p:cNvPr id="1" name=""/>
+        <p:cNvGrpSpPr/>
+        <p:nvPr/>
+      </p:nvGrpSpPr>
+      <p:grpSpPr>
+        <a:xfrm>
+          <a:off x="0" y="0"/>
+          <a:ext cx="0" cy="0"/>
+          <a:chOff x="0" y="0"/>
+          <a:chExt cx="0" cy="0"/>
+        </a:xfrm>
+      </p:grpSpPr>
+      <p:sp>
+        <p:nvSpPr>
+          <p:cNvPr id="2" name="Shape 0"/>
+          <p:cNvSpPr/>
+          <p:nvPr/>
+        </p:nvSpPr>
+        <p:spPr>
+          <a:xfrm>
+            <a:off x="566928" y="201168"/>
+            <a:ext cx="475488" cy="50292"/>
+          </a:xfrm>
+          <a:prstGeom prst="rect">
+            <a:avLst/>
+          </a:prstGeom>
+          <a:solidFill>
+            <a:srgbClr val="0F7C86"/>
+          </a:solidFill>
+          <a:ln/>
+        </p:spPr>
+      </p:sp>
+      <p:sp>
+        <p:nvSpPr>
+          <p:cNvPr id="3" name="Text 1"/>
+          <p:cNvSpPr/>
+          <p:nvPr/>
+        </p:nvSpPr>
+        <p:spPr>
+          <a:xfrm>
+            <a:off x="566928" y="384048"/>
+            <a:ext cx="8010144" cy="237744"/>
+          </a:xfrm>
+          <a:prstGeom prst="rect">
+            <a:avLst/>
+          </a:prstGeom>
+          <a:noFill/>
+          <a:ln/>
+        </p:spPr>
+        <p:txBody>
+          <a:bodyPr wrap="square" lIns="0" tIns="0" rIns="0" bIns="0" rtlCol="0" anchor="ctr"/>
+          <a:lstStyle/>
+          <a:p>
+            <a:pPr indent="0" marL="0">
+              <a:buNone/>
+            </a:pPr>
+            <a:r>
+              <a:rPr lang="en-US" sz="1150" b="1" spc="180" kern="0" dirty="0">
+                <a:solidFill>
+                  <a:srgbClr val="0F7C86"/>
+                </a:solidFill>
+                <a:latin typeface="Arial" pitchFamily="34" charset="0"/>
+                <a:ea typeface="Arial" pitchFamily="34" charset="-122"/>
+                <a:cs typeface="Arial" pitchFamily="34" charset="-120"/>
+              </a:rPr>
+              <a:t>DER RÜCKBLICK</a:t>
+            </a:r>
+            <a:endParaRPr lang="en-US" sz="1150" dirty="0"/>
+          </a:p>
+        </p:txBody>
+      </p:sp>
+      <p:sp>
+        <p:nvSpPr>
+          <p:cNvPr id="4" name="Text 2"/>
+          <p:cNvSpPr/>
+          <p:nvPr/>
+        </p:nvSpPr>
+        <p:spPr>
+          <a:xfrm>
+            <a:off x="566928" y="731520"/>
+            <a:ext cx="8010144" cy="603504"/>
+          </a:xfrm>
+          <a:prstGeom prst="rect">
+            <a:avLst/>
+          </a:prstGeom>
+          <a:noFill/>
+          <a:ln/>
+        </p:spPr>
+        <p:txBody>
+          <a:bodyPr wrap="square" lIns="0" tIns="0" rIns="0" bIns="0" rtlCol="0" anchor="t"/>
+          <a:lstStyle/>
+          <a:p>
+            <a:pPr indent="0" marL="0">
+              <a:buNone/>
+            </a:pPr>
+            <a:r>
+              <a:rPr lang="en-US" sz="2600" b="1" dirty="0">
+                <a:solidFill>
+                  <a:srgbClr val="272E52"/>
+                </a:solidFill>
+                <a:latin typeface="Arial" pitchFamily="34" charset="0"/>
+                <a:ea typeface="Arial" pitchFamily="34" charset="-122"/>
+                <a:cs typeface="Arial" pitchFamily="34" charset="-120"/>
+              </a:rPr>
+              <a:t>Vier Abende Docker</a:t>
+            </a:r>
+            <a:endParaRPr lang="en-US" sz="2600" dirty="0"/>
+          </a:p>
+        </p:txBody>
+      </p:sp>
+      <p:pic>
+        <p:nvPicPr>
+          <p:cNvPr id="5" name="Image 0" descr="/Users/jacobmenge/Desktop/kurs-26.2b-orga/folienwerkstatt/assets/diagramme/block-rueckblick.png">    </p:cNvPr>
+          <p:cNvPicPr>
+            <a:picLocks noChangeAspect="1"/>
+          </p:cNvPicPr>
+          <p:nvPr/>
+        </p:nvPicPr>
+        <p:blipFill>
+          <a:blip r:embed="rId1"/>
+          <a:stretch>
+            <a:fillRect/>
+          </a:stretch>
+        </p:blipFill>
+        <p:spPr>
+          <a:xfrm>
+            <a:off x="566928" y="1700784"/>
+            <a:ext cx="8010144" cy="1737360"/>
+          </a:xfrm>
+          <a:prstGeom prst="rect">
+            <a:avLst/>
+          </a:prstGeom>
+        </p:spPr>
+      </p:pic>
+      <p:sp>
+        <p:nvSpPr>
+          <p:cNvPr id="6" name="Shape 3"/>
+          <p:cNvSpPr/>
+          <p:nvPr/>
+        </p:nvSpPr>
+        <p:spPr>
+          <a:xfrm>
+            <a:off x="566928" y="3931920"/>
+            <a:ext cx="32004" cy="256032"/>
+          </a:xfrm>
+          <a:prstGeom prst="rect">
+            <a:avLst/>
+          </a:prstGeom>
+          <a:solidFill>
+            <a:srgbClr val="0F7C86"/>
+          </a:solidFill>
+          <a:ln/>
+        </p:spPr>
+      </p:sp>
+      <p:sp>
+        <p:nvSpPr>
+          <p:cNvPr id="7" name="Text 4"/>
+          <p:cNvSpPr/>
+          <p:nvPr/>
+        </p:nvSpPr>
+        <p:spPr>
+          <a:xfrm>
+            <a:off x="749808" y="3886200"/>
+            <a:ext cx="7827264" cy="402336"/>
+          </a:xfrm>
+          <a:prstGeom prst="rect">
+            <a:avLst/>
+          </a:prstGeom>
+          <a:noFill/>
+          <a:ln/>
+        </p:spPr>
+        <p:txBody>
+          <a:bodyPr wrap="square" lIns="0" tIns="0" rIns="0" bIns="0" rtlCol="0" anchor="ctr"/>
+          <a:lstStyle/>
+          <a:p>
+            <a:pPr indent="0" marL="0">
+              <a:buNone/>
+            </a:pPr>
+            <a:r>
+              <a:rPr lang="en-US" sz="1200" b="1" dirty="0">
+                <a:solidFill>
+                  <a:srgbClr val="434A63"/>
+                </a:solidFill>
+                <a:latin typeface="Arial" pitchFamily="34" charset="0"/>
+                <a:ea typeface="Arial" pitchFamily="34" charset="-122"/>
+                <a:cs typeface="Arial" pitchFamily="34" charset="-120"/>
+              </a:rPr>
+              <a:t>Vom ersten Wegwerf-Container zum orchestrierten Stack. Dieser Werkzeugkasten bleibt für den Rest des Kurses im Einsatz.</a:t>
+            </a:r>
+            <a:endParaRPr lang="en-US" sz="1200" dirty="0"/>
+          </a:p>
+        </p:txBody>
+      </p:sp>
+      <p:sp>
+        <p:nvSpPr>
+          <p:cNvPr id="8" name="Shape 5"/>
+          <p:cNvSpPr/>
+          <p:nvPr/>
+        </p:nvSpPr>
+        <p:spPr>
+          <a:xfrm>
+            <a:off x="566928" y="4631436"/>
+            <a:ext cx="8010144" cy="0"/>
+          </a:xfrm>
+          <a:prstGeom prst="line">
+            <a:avLst/>
+          </a:prstGeom>
+          <a:noFill/>
+          <a:ln w="9525">
+            <a:solidFill>
+              <a:srgbClr val="DFE3F0"/>
+            </a:solidFill>
+            <a:prstDash val="solid"/>
+          </a:ln>
+        </p:spPr>
+      </p:sp>
+      <p:sp>
+        <p:nvSpPr>
+          <p:cNvPr id="9" name="Text 6"/>
+          <p:cNvSpPr/>
+          <p:nvPr/>
+        </p:nvSpPr>
+        <p:spPr>
+          <a:xfrm>
+            <a:off x="566928" y="4722876"/>
+            <a:ext cx="5029200" cy="237744"/>
+          </a:xfrm>
+          <a:prstGeom prst="rect">
+            <a:avLst/>
+          </a:prstGeom>
+          <a:noFill/>
+          <a:ln/>
+        </p:spPr>
+        <p:txBody>
+          <a:bodyPr wrap="square" lIns="0" tIns="0" rIns="0" bIns="0" rtlCol="0" anchor="ctr"/>
+          <a:lstStyle/>
+          <a:p>
+            <a:pPr indent="0" marL="0">
+              <a:buNone/>
+            </a:pPr>
+            <a:r>
+              <a:rPr lang="en-US" sz="1050" spc="30" kern="0" dirty="0">
+                <a:solidFill>
+                  <a:srgbClr val="5C6377"/>
+                </a:solidFill>
+                <a:latin typeface="Arial" pitchFamily="34" charset="0"/>
+                <a:ea typeface="Arial" pitchFamily="34" charset="-122"/>
+                <a:cs typeface="Arial" pitchFamily="34" charset="-120"/>
+              </a:rPr>
+              <a:t>Demo-Runde</a:t>
+            </a:r>
+            <a:endParaRPr lang="en-US" sz="1050" dirty="0"/>
+          </a:p>
+        </p:txBody>
+      </p:sp>
+      <p:sp>
+        <p:nvSpPr>
+          <p:cNvPr id="10" name="Text 7"/>
+          <p:cNvSpPr/>
+          <p:nvPr/>
+        </p:nvSpPr>
+        <p:spPr>
+          <a:xfrm>
+            <a:off x="8028432" y="4722876"/>
+            <a:ext cx="548640" cy="237744"/>
+          </a:xfrm>
+          <a:prstGeom prst="rect">
+            <a:avLst/>
+          </a:prstGeom>
+          <a:noFill/>
+          <a:ln/>
+        </p:spPr>
+        <p:txBody>
+          <a:bodyPr wrap="square" lIns="0" tIns="0" rIns="0" bIns="0" rtlCol="0" anchor="ctr"/>
+          <a:lstStyle/>
+          <a:p>
+            <a:pPr algn="r" indent="0" marL="0">
+              <a:buNone/>
+            </a:pPr>
+            <a:r>
+              <a:rPr lang="en-US" sz="1050" dirty="0">
+                <a:solidFill>
+                  <a:srgbClr val="5C6377"/>
+                </a:solidFill>
+                <a:latin typeface="Arial" pitchFamily="34" charset="0"/>
+                <a:ea typeface="Arial" pitchFamily="34" charset="-122"/>
+                <a:cs typeface="Arial" pitchFamily="34" charset="-120"/>
+              </a:rPr>
+              <a:t>18/19</a:t>
+            </a:r>
+            <a:endParaRPr lang="en-US" sz="1050" dirty="0"/>
+          </a:p>
+        </p:txBody>
+      </p:sp>
+    </p:spTree>
+  </p:cSld>
+  <p:clrMapOvr>
+    <a:masterClrMapping/>
+  </p:clrMapOvr>
+</p:sld>
+</file>
+
+<file path=ppt/slides/slide22.xml><?xml version="1.0" encoding="utf-8"?>
+<p:sld xmlns:a="http://schemas.openxmlformats.org/drawingml/2006/main" xmlns:r="http://schemas.openxmlformats.org/officeDocument/2006/relationships" xmlns:p="http://schemas.openxmlformats.org/presentationml/2006/main">
+  <p:cSld name="Slide 22">
+    <p:bg>
+      <p:bgPr>
+        <a:solidFill>
+          <a:srgbClr val="FFFFFF"/>
+        </a:solidFill>
+      </p:bgPr>
+    </p:bg>
+    <p:spTree>
+      <p:nvGrpSpPr>
+        <p:cNvPr id="1" name=""/>
+        <p:cNvGrpSpPr/>
+        <p:nvPr/>
+      </p:nvGrpSpPr>
+      <p:grpSpPr>
+        <a:xfrm>
+          <a:off x="0" y="0"/>
+          <a:ext cx="0" cy="0"/>
+          <a:chOff x="0" y="0"/>
+          <a:chExt cx="0" cy="0"/>
+        </a:xfrm>
+      </p:grpSpPr>
+      <p:sp>
+        <p:nvSpPr>
+          <p:cNvPr id="2" name="Shape 0"/>
+          <p:cNvSpPr/>
+          <p:nvPr/>
+        </p:nvSpPr>
+        <p:spPr>
+          <a:xfrm>
+            <a:off x="566928" y="201168"/>
+            <a:ext cx="475488" cy="50292"/>
+          </a:xfrm>
+          <a:prstGeom prst="rect">
+            <a:avLst/>
+          </a:prstGeom>
+          <a:solidFill>
+            <a:srgbClr val="0F7C86"/>
+          </a:solidFill>
+          <a:ln/>
+        </p:spPr>
+      </p:sp>
+      <p:sp>
+        <p:nvSpPr>
+          <p:cNvPr id="3" name="Text 1"/>
+          <p:cNvSpPr/>
+          <p:nvPr/>
+        </p:nvSpPr>
+        <p:spPr>
+          <a:xfrm>
+            <a:off x="566928" y="384048"/>
+            <a:ext cx="8010144" cy="237744"/>
+          </a:xfrm>
+          <a:prstGeom prst="rect">
+            <a:avLst/>
+          </a:prstGeom>
+          <a:noFill/>
+          <a:ln/>
+        </p:spPr>
+        <p:txBody>
+          <a:bodyPr wrap="square" lIns="0" tIns="0" rIns="0" bIns="0" rtlCol="0" anchor="ctr"/>
+          <a:lstStyle/>
+          <a:p>
+            <a:pPr indent="0" marL="0">
+              <a:buNone/>
+            </a:pPr>
+            <a:r>
+              <a:rPr lang="en-US" sz="1150" b="1" spc="180" kern="0" dirty="0">
+                <a:solidFill>
+                  <a:srgbClr val="0F7C86"/>
+                </a:solidFill>
+                <a:latin typeface="Arial" pitchFamily="34" charset="0"/>
+                <a:ea typeface="Arial" pitchFamily="34" charset="-122"/>
+                <a:cs typeface="Arial" pitchFamily="34" charset="-120"/>
+              </a:rPr>
+              <a:t>AUSBLICK</a:t>
+            </a:r>
+            <a:endParaRPr lang="en-US" sz="1150" dirty="0"/>
+          </a:p>
+        </p:txBody>
+      </p:sp>
+      <p:sp>
+        <p:nvSpPr>
+          <p:cNvPr id="4" name="Text 2"/>
+          <p:cNvSpPr/>
+          <p:nvPr/>
+        </p:nvSpPr>
+        <p:spPr>
+          <a:xfrm>
+            <a:off x="566928" y="731520"/>
+            <a:ext cx="8010144" cy="603504"/>
+          </a:xfrm>
+          <a:prstGeom prst="rect">
+            <a:avLst/>
+          </a:prstGeom>
+          <a:noFill/>
+          <a:ln/>
+        </p:spPr>
+        <p:txBody>
+          <a:bodyPr wrap="square" lIns="0" tIns="0" rIns="0" bIns="0" rtlCol="0" anchor="t"/>
+          <a:lstStyle/>
+          <a:p>
+            <a:pPr indent="0" marL="0">
+              <a:buNone/>
+            </a:pPr>
+            <a:r>
+              <a:rPr lang="en-US" sz="2600" b="1" dirty="0">
+                <a:solidFill>
+                  <a:srgbClr val="272E52"/>
+                </a:solidFill>
+                <a:latin typeface="Arial" pitchFamily="34" charset="0"/>
+                <a:ea typeface="Arial" pitchFamily="34" charset="-122"/>
+                <a:cs typeface="Arial" pitchFamily="34" charset="-120"/>
+              </a:rPr>
+              <a:t>Bis Mittwoch</a:t>
+            </a:r>
+            <a:endParaRPr lang="en-US" sz="2600" dirty="0"/>
+          </a:p>
+        </p:txBody>
+      </p:sp>
+      <p:sp>
+        <p:nvSpPr>
+          <p:cNvPr id="5" name="Text 3"/>
+          <p:cNvSpPr/>
+          <p:nvPr/>
+        </p:nvSpPr>
+        <p:spPr>
+          <a:xfrm>
+            <a:off x="566928" y="1444752"/>
+            <a:ext cx="8010144" cy="438912"/>
+          </a:xfrm>
+          <a:prstGeom prst="rect">
+            <a:avLst/>
+          </a:prstGeom>
+          <a:noFill/>
+          <a:ln/>
+        </p:spPr>
+        <p:txBody>
+          <a:bodyPr wrap="square" lIns="0" tIns="0" rIns="0" bIns="0" rtlCol="0" anchor="t"/>
+          <a:lstStyle/>
+          <a:p>
+            <a:pPr indent="0" marL="0">
+              <a:buNone/>
+            </a:pPr>
+            <a:r>
+              <a:rPr lang="en-US" sz="1300" dirty="0">
+                <a:solidFill>
+                  <a:srgbClr val="5C6377"/>
+                </a:solidFill>
+                <a:latin typeface="Arial" pitchFamily="34" charset="0"/>
+                <a:ea typeface="Arial" pitchFamily="34" charset="-122"/>
+                <a:cs typeface="Arial" pitchFamily="34" charset="-120"/>
+              </a:rPr>
+              <a:t>Mittwoch beginnt ein neues Kapitel: die Industrie. Wie sprechen Maschinen, Sensoren und Anlagen?</a:t>
+            </a:r>
+            <a:endParaRPr lang="en-US" sz="1300" dirty="0"/>
+          </a:p>
+        </p:txBody>
+      </p:sp>
+      <p:sp>
+        <p:nvSpPr>
+          <p:cNvPr id="6" name="Shape 4"/>
+          <p:cNvSpPr/>
+          <p:nvPr/>
+        </p:nvSpPr>
+        <p:spPr>
+          <a:xfrm>
+            <a:off x="566928" y="1975104"/>
+            <a:ext cx="2523744" cy="1920240"/>
+          </a:xfrm>
+          <a:prstGeom prst="rect">
+            <a:avLst/>
+          </a:prstGeom>
+          <a:solidFill>
+            <a:srgbClr val="F5F6FC"/>
+          </a:solidFill>
+          <a:ln/>
+        </p:spPr>
+      </p:sp>
+      <p:sp>
+        <p:nvSpPr>
+          <p:cNvPr id="7" name="Shape 5"/>
+          <p:cNvSpPr/>
+          <p:nvPr/>
+        </p:nvSpPr>
+        <p:spPr>
+          <a:xfrm>
+            <a:off x="566928" y="1975104"/>
+            <a:ext cx="41148" cy="1920240"/>
+          </a:xfrm>
+          <a:prstGeom prst="rect">
+            <a:avLst/>
+          </a:prstGeom>
+          <a:solidFill>
+            <a:srgbClr val="0F7C86"/>
+          </a:solidFill>
+          <a:ln/>
+        </p:spPr>
+      </p:sp>
+      <p:sp>
+        <p:nvSpPr>
+          <p:cNvPr id="8" name="Text 6"/>
+          <p:cNvSpPr/>
+          <p:nvPr/>
+        </p:nvSpPr>
+        <p:spPr>
+          <a:xfrm>
+            <a:off x="804672" y="2121408"/>
+            <a:ext cx="2121408" cy="256032"/>
+          </a:xfrm>
+          <a:prstGeom prst="rect">
+            <a:avLst/>
+          </a:prstGeom>
+          <a:noFill/>
+          <a:ln/>
+        </p:spPr>
+        <p:txBody>
+          <a:bodyPr wrap="square" lIns="0" tIns="0" rIns="0" bIns="0" rtlCol="0" anchor="t"/>
+          <a:lstStyle/>
+          <a:p>
+            <a:pPr indent="0" marL="0">
+              <a:buNone/>
+            </a:pPr>
+            <a:r>
+              <a:rPr lang="en-US" sz="1300" b="1" dirty="0">
+                <a:solidFill>
+                  <a:srgbClr val="272E52"/>
+                </a:solidFill>
+                <a:latin typeface="Arial" pitchFamily="34" charset="0"/>
+                <a:ea typeface="Arial" pitchFamily="34" charset="-122"/>
+                <a:cs typeface="Arial" pitchFamily="34" charset="-120"/>
+              </a:rPr>
+              <a:t>Industrie und IoT</a:t>
+            </a:r>
+            <a:endParaRPr lang="en-US" sz="1300" dirty="0"/>
+          </a:p>
+        </p:txBody>
+      </p:sp>
+      <p:sp>
+        <p:nvSpPr>
+          <p:cNvPr id="9" name="Text 7"/>
+          <p:cNvSpPr/>
+          <p:nvPr/>
+        </p:nvSpPr>
+        <p:spPr>
+          <a:xfrm>
+            <a:off x="804672" y="2423160"/>
+            <a:ext cx="2121408" cy="1353312"/>
+          </a:xfrm>
+          <a:prstGeom prst="rect">
+            <a:avLst/>
+          </a:prstGeom>
+          <a:noFill/>
+          <a:ln/>
+        </p:spPr>
+        <p:txBody>
+          <a:bodyPr wrap="square" lIns="0" tIns="0" rIns="0" bIns="0" rtlCol="0" anchor="t"/>
+          <a:lstStyle/>
+          <a:p>
+            <a:pPr indent="0" marL="0">
+              <a:lnSpc>
+                <a:spcPct val="92000"/>
+              </a:lnSpc>
+              <a:buNone/>
+            </a:pPr>
+            <a:r>
+              <a:rPr lang="en-US" sz="1150" dirty="0">
+                <a:solidFill>
+                  <a:srgbClr val="434A63"/>
+                </a:solidFill>
+                <a:latin typeface="Arial" pitchFamily="34" charset="0"/>
+                <a:ea typeface="Arial" pitchFamily="34" charset="-122"/>
+                <a:cs typeface="Arial" pitchFamily="34" charset="-120"/>
+              </a:rPr>
+              <a:t>Profinet, OPC UA und MQTT: die Sprachen der Fabrik. Erst als Überblick, dann live im Datenmitschnitt.</a:t>
+            </a:r>
+            <a:endParaRPr lang="en-US" sz="1150" dirty="0"/>
+          </a:p>
+        </p:txBody>
+      </p:sp>
+      <p:sp>
+        <p:nvSpPr>
+          <p:cNvPr id="10" name="Shape 8"/>
+          <p:cNvSpPr/>
+          <p:nvPr/>
+        </p:nvSpPr>
+        <p:spPr>
+          <a:xfrm>
+            <a:off x="3310128" y="1975104"/>
+            <a:ext cx="2523744" cy="1920240"/>
+          </a:xfrm>
+          <a:prstGeom prst="rect">
+            <a:avLst/>
+          </a:prstGeom>
+          <a:solidFill>
+            <a:srgbClr val="F5F6FC"/>
+          </a:solidFill>
+          <a:ln/>
+        </p:spPr>
+      </p:sp>
+      <p:sp>
+        <p:nvSpPr>
+          <p:cNvPr id="11" name="Shape 9"/>
+          <p:cNvSpPr/>
+          <p:nvPr/>
+        </p:nvSpPr>
+        <p:spPr>
+          <a:xfrm>
+            <a:off x="3310128" y="1975104"/>
+            <a:ext cx="41148" cy="1920240"/>
+          </a:xfrm>
+          <a:prstGeom prst="rect">
+            <a:avLst/>
+          </a:prstGeom>
+          <a:solidFill>
+            <a:srgbClr val="0F7C86"/>
+          </a:solidFill>
+          <a:ln/>
+        </p:spPr>
+      </p:sp>
+      <p:sp>
+        <p:nvSpPr>
+          <p:cNvPr id="12" name="Text 10"/>
+          <p:cNvSpPr/>
+          <p:nvPr/>
+        </p:nvSpPr>
+        <p:spPr>
+          <a:xfrm>
+            <a:off x="3547872" y="2121408"/>
+            <a:ext cx="2121408" cy="256032"/>
+          </a:xfrm>
+          <a:prstGeom prst="rect">
+            <a:avLst/>
+          </a:prstGeom>
+          <a:noFill/>
+          <a:ln/>
+        </p:spPr>
+        <p:txBody>
+          <a:bodyPr wrap="square" lIns="0" tIns="0" rIns="0" bIns="0" rtlCol="0" anchor="t"/>
+          <a:lstStyle/>
+          <a:p>
+            <a:pPr indent="0" marL="0">
+              <a:buNone/>
+            </a:pPr>
+            <a:r>
+              <a:rPr lang="en-US" sz="1300" b="1" dirty="0">
+                <a:solidFill>
+                  <a:srgbClr val="272E52"/>
+                </a:solidFill>
+                <a:latin typeface="Arial" pitchFamily="34" charset="0"/>
+                <a:ea typeface="Arial" pitchFamily="34" charset="-122"/>
+                <a:cs typeface="Arial" pitchFamily="34" charset="-120"/>
+              </a:rPr>
+              <a:t>Wireshark</a:t>
+            </a:r>
+            <a:endParaRPr lang="en-US" sz="1300" dirty="0"/>
+          </a:p>
+        </p:txBody>
+      </p:sp>
+      <p:sp>
+        <p:nvSpPr>
+          <p:cNvPr id="13" name="Text 11"/>
+          <p:cNvSpPr/>
+          <p:nvPr/>
+        </p:nvSpPr>
+        <p:spPr>
+          <a:xfrm>
+            <a:off x="3547872" y="2423160"/>
+            <a:ext cx="2121408" cy="1353312"/>
+          </a:xfrm>
+          <a:prstGeom prst="rect">
+            <a:avLst/>
+          </a:prstGeom>
+          <a:noFill/>
+          <a:ln/>
+        </p:spPr>
+        <p:txBody>
+          <a:bodyPr wrap="square" lIns="0" tIns="0" rIns="0" bIns="0" rtlCol="0" anchor="t"/>
+          <a:lstStyle/>
+          <a:p>
+            <a:pPr indent="0" marL="0">
+              <a:lnSpc>
+                <a:spcPct val="92000"/>
+              </a:lnSpc>
+              <a:buNone/>
+            </a:pPr>
+            <a:r>
+              <a:rPr lang="en-US" sz="1150" dirty="0">
+                <a:solidFill>
+                  <a:srgbClr val="434A63"/>
+                </a:solidFill>
+                <a:latin typeface="Arial" pitchFamily="34" charset="0"/>
+                <a:ea typeface="Arial" pitchFamily="34" charset="-122"/>
+                <a:cs typeface="Arial" pitchFamily="34" charset="-120"/>
+              </a:rPr>
+              <a:t>Wir schauen echten Industrie-Protokollen bei der Arbeit zu. Ob ihr das Werkzeug vorab installiert, sagen wir rechtzeitig im Chat.</a:t>
+            </a:r>
+            <a:endParaRPr lang="en-US" sz="1150" dirty="0"/>
+          </a:p>
+        </p:txBody>
+      </p:sp>
+      <p:sp>
+        <p:nvSpPr>
+          <p:cNvPr id="14" name="Shape 12"/>
+          <p:cNvSpPr/>
+          <p:nvPr/>
+        </p:nvSpPr>
+        <p:spPr>
+          <a:xfrm>
+            <a:off x="6053328" y="1975104"/>
+            <a:ext cx="2523744" cy="1920240"/>
+          </a:xfrm>
+          <a:prstGeom prst="rect">
+            <a:avLst/>
+          </a:prstGeom>
+          <a:solidFill>
+            <a:srgbClr val="F5F6FC"/>
+          </a:solidFill>
+          <a:ln/>
+        </p:spPr>
+      </p:sp>
+      <p:sp>
+        <p:nvSpPr>
+          <p:cNvPr id="15" name="Shape 13"/>
+          <p:cNvSpPr/>
+          <p:nvPr/>
+        </p:nvSpPr>
+        <p:spPr>
+          <a:xfrm>
+            <a:off x="6053328" y="1975104"/>
+            <a:ext cx="41148" cy="1920240"/>
+          </a:xfrm>
+          <a:prstGeom prst="rect">
+            <a:avLst/>
+          </a:prstGeom>
+          <a:solidFill>
+            <a:srgbClr val="0F7C86"/>
+          </a:solidFill>
+          <a:ln/>
+        </p:spPr>
+      </p:sp>
+      <p:sp>
+        <p:nvSpPr>
+          <p:cNvPr id="16" name="Text 14"/>
+          <p:cNvSpPr/>
+          <p:nvPr/>
+        </p:nvSpPr>
+        <p:spPr>
+          <a:xfrm>
+            <a:off x="6291072" y="2121408"/>
+            <a:ext cx="2121408" cy="256032"/>
+          </a:xfrm>
+          <a:prstGeom prst="rect">
+            <a:avLst/>
+          </a:prstGeom>
+          <a:noFill/>
+          <a:ln/>
+        </p:spPr>
+        <p:txBody>
+          <a:bodyPr wrap="square" lIns="0" tIns="0" rIns="0" bIns="0" rtlCol="0" anchor="t"/>
+          <a:lstStyle/>
+          <a:p>
+            <a:pPr indent="0" marL="0">
+              <a:buNone/>
+            </a:pPr>
+            <a:r>
+              <a:rPr lang="en-US" sz="1300" b="1" dirty="0">
+                <a:solidFill>
+                  <a:srgbClr val="272E52"/>
+                </a:solidFill>
+                <a:latin typeface="Arial" pitchFamily="34" charset="0"/>
+                <a:ea typeface="Arial" pitchFamily="34" charset="-122"/>
+                <a:cs typeface="Arial" pitchFamily="34" charset="-120"/>
+              </a:rPr>
+              <a:t>Docker bleibt</a:t>
+            </a:r>
+            <a:endParaRPr lang="en-US" sz="1300" dirty="0"/>
+          </a:p>
+        </p:txBody>
+      </p:sp>
+      <p:sp>
+        <p:nvSpPr>
+          <p:cNvPr id="17" name="Text 15"/>
+          <p:cNvSpPr/>
+          <p:nvPr/>
+        </p:nvSpPr>
+        <p:spPr>
+          <a:xfrm>
+            <a:off x="6291072" y="2423160"/>
+            <a:ext cx="2121408" cy="1353312"/>
+          </a:xfrm>
+          <a:prstGeom prst="rect">
+            <a:avLst/>
+          </a:prstGeom>
+          <a:noFill/>
+          <a:ln/>
+        </p:spPr>
+        <p:txBody>
+          <a:bodyPr wrap="square" lIns="0" tIns="0" rIns="0" bIns="0" rtlCol="0" anchor="t"/>
+          <a:lstStyle/>
+          <a:p>
+            <a:pPr indent="0" marL="0">
+              <a:lnSpc>
+                <a:spcPct val="92000"/>
+              </a:lnSpc>
+              <a:buNone/>
+            </a:pPr>
+            <a:r>
+              <a:rPr lang="en-US" sz="1150" dirty="0">
+                <a:solidFill>
+                  <a:srgbClr val="434A63"/>
+                </a:solidFill>
+                <a:latin typeface="Arial" pitchFamily="34" charset="0"/>
+                <a:ea typeface="Arial" pitchFamily="34" charset="-122"/>
+                <a:cs typeface="Arial" pitchFamily="34" charset="-120"/>
+              </a:rPr>
+              <a:t>Der Werkzeugkasten von heute läuft ab jetzt nebenbei mit. Der MQTT-Broker wohnt bald in einem Container.</a:t>
+            </a:r>
+            <a:endParaRPr lang="en-US" sz="1150" dirty="0"/>
+          </a:p>
+        </p:txBody>
+      </p:sp>
+      <p:sp>
+        <p:nvSpPr>
+          <p:cNvPr id="18" name="Shape 16"/>
+          <p:cNvSpPr/>
+          <p:nvPr/>
+        </p:nvSpPr>
+        <p:spPr>
+          <a:xfrm>
+            <a:off x="566928" y="4160520"/>
+            <a:ext cx="32004" cy="256032"/>
+          </a:xfrm>
+          <a:prstGeom prst="rect">
+            <a:avLst/>
+          </a:prstGeom>
+          <a:solidFill>
+            <a:srgbClr val="0F7C86"/>
+          </a:solidFill>
+          <a:ln/>
+        </p:spPr>
+      </p:sp>
+      <p:sp>
+        <p:nvSpPr>
+          <p:cNvPr id="19" name="Text 17"/>
+          <p:cNvSpPr/>
+          <p:nvPr/>
+        </p:nvSpPr>
+        <p:spPr>
+          <a:xfrm>
+            <a:off x="749808" y="4114800"/>
+            <a:ext cx="7827264" cy="402336"/>
+          </a:xfrm>
+          <a:prstGeom prst="rect">
+            <a:avLst/>
+          </a:prstGeom>
+          <a:noFill/>
+          <a:ln/>
+        </p:spPr>
+        <p:txBody>
+          <a:bodyPr wrap="square" lIns="0" tIns="0" rIns="0" bIns="0" rtlCol="0" anchor="ctr"/>
+          <a:lstStyle/>
+          <a:p>
+            <a:pPr indent="0" marL="0">
+              <a:buNone/>
+            </a:pPr>
+            <a:r>
+              <a:rPr lang="en-US" sz="1200" b="1" dirty="0">
+                <a:solidFill>
+                  <a:srgbClr val="434A63"/>
+                </a:solidFill>
+                <a:latin typeface="Arial" pitchFamily="34" charset="0"/>
+                <a:ea typeface="Arial" pitchFamily="34" charset="-122"/>
+                <a:cs typeface="Arial" pitchFamily="34" charset="-120"/>
+              </a:rPr>
+              <a:t>Nächster Termin: Mittwoch, 23. September um 18:00 Uhr, Industrie und IoT.</a:t>
+            </a:r>
+            <a:endParaRPr lang="en-US" sz="1200" dirty="0"/>
+          </a:p>
+        </p:txBody>
+      </p:sp>
+      <p:sp>
+        <p:nvSpPr>
+          <p:cNvPr id="20" name="Shape 18"/>
+          <p:cNvSpPr/>
+          <p:nvPr/>
+        </p:nvSpPr>
+        <p:spPr>
+          <a:xfrm>
+            <a:off x="566928" y="4631436"/>
+            <a:ext cx="8010144" cy="0"/>
+          </a:xfrm>
+          <a:prstGeom prst="line">
+            <a:avLst/>
+          </a:prstGeom>
+          <a:noFill/>
+          <a:ln w="9525">
+            <a:solidFill>
+              <a:srgbClr val="DFE3F0"/>
+            </a:solidFill>
+            <a:prstDash val="solid"/>
+          </a:ln>
+        </p:spPr>
+      </p:sp>
+      <p:sp>
+        <p:nvSpPr>
+          <p:cNvPr id="21" name="Text 19"/>
+          <p:cNvSpPr/>
+          <p:nvPr/>
+        </p:nvSpPr>
+        <p:spPr>
+          <a:xfrm>
+            <a:off x="566928" y="4722876"/>
+            <a:ext cx="5029200" cy="237744"/>
+          </a:xfrm>
+          <a:prstGeom prst="rect">
+            <a:avLst/>
+          </a:prstGeom>
+          <a:noFill/>
+          <a:ln/>
+        </p:spPr>
+        <p:txBody>
+          <a:bodyPr wrap="square" lIns="0" tIns="0" rIns="0" bIns="0" rtlCol="0" anchor="ctr"/>
+          <a:lstStyle/>
+          <a:p>
+            <a:pPr indent="0" marL="0">
+              <a:buNone/>
+            </a:pPr>
+            <a:r>
+              <a:rPr lang="en-US" sz="1050" spc="30" kern="0" dirty="0">
+                <a:solidFill>
+                  <a:srgbClr val="5C6377"/>
+                </a:solidFill>
+                <a:latin typeface="Arial" pitchFamily="34" charset="0"/>
+                <a:ea typeface="Arial" pitchFamily="34" charset="-122"/>
+                <a:cs typeface="Arial" pitchFamily="34" charset="-120"/>
+              </a:rPr>
+              <a:t>Abschluss</a:t>
+            </a:r>
+            <a:endParaRPr lang="en-US" sz="1050" dirty="0"/>
+          </a:p>
+        </p:txBody>
+      </p:sp>
+      <p:sp>
+        <p:nvSpPr>
+          <p:cNvPr id="22" name="Text 20"/>
+          <p:cNvSpPr/>
+          <p:nvPr/>
+        </p:nvSpPr>
+        <p:spPr>
+          <a:xfrm>
+            <a:off x="8028432" y="4722876"/>
+            <a:ext cx="548640" cy="237744"/>
+          </a:xfrm>
+          <a:prstGeom prst="rect">
+            <a:avLst/>
+          </a:prstGeom>
+          <a:noFill/>
+          <a:ln/>
+        </p:spPr>
+        <p:txBody>
+          <a:bodyPr wrap="square" lIns="0" tIns="0" rIns="0" bIns="0" rtlCol="0" anchor="ctr"/>
+          <a:lstStyle/>
+          <a:p>
+            <a:pPr algn="r" indent="0" marL="0">
+              <a:buNone/>
+            </a:pPr>
+            <a:r>
+              <a:rPr lang="en-US" sz="1050" dirty="0">
+                <a:solidFill>
+                  <a:srgbClr val="5C6377"/>
+                </a:solidFill>
+                <a:latin typeface="Arial" pitchFamily="34" charset="0"/>
+                <a:ea typeface="Arial" pitchFamily="34" charset="-122"/>
+                <a:cs typeface="Arial" pitchFamily="34" charset="-120"/>
+              </a:rPr>
+              <a:t>19/19</a:t>
+            </a:r>
+            <a:endParaRPr lang="en-US" sz="1050" dirty="0"/>
+          </a:p>
+        </p:txBody>
+      </p:sp>
+    </p:spTree>
+  </p:cSld>
+  <p:clrMapOvr>
+    <a:masterClrMapping/>
+  </p:clrMapOvr>
+</p:sld>
+</file>
+
+<file path=ppt/slides/slide23.xml><?xml version="1.0" encoding="utf-8"?>
+<p:sld xmlns:a="http://schemas.openxmlformats.org/drawingml/2006/main" xmlns:r="http://schemas.openxmlformats.org/officeDocument/2006/relationships" xmlns:p="http://schemas.openxmlformats.org/presentationml/2006/main">
+  <p:cSld name="Slide 23">
+    <p:bg>
+      <p:bgPr>
+        <a:solidFill>
+          <a:srgbClr val="F5F6FC"/>
+        </a:solidFill>
+      </p:bgPr>
+    </p:bg>
+    <p:spTree>
+      <p:nvGrpSpPr>
+        <p:cNvPr id="1" name=""/>
+        <p:cNvGrpSpPr/>
+        <p:nvPr/>
+      </p:nvGrpSpPr>
+      <p:grpSpPr>
+        <a:xfrm>
+          <a:off x="0" y="0"/>
+          <a:ext cx="0" cy="0"/>
+          <a:chOff x="0" y="0"/>
+          <a:chExt cx="0" cy="0"/>
+        </a:xfrm>
+      </p:grpSpPr>
+      <p:sp>
+        <p:nvSpPr>
+          <p:cNvPr id="2" name="Shape 0"/>
+          <p:cNvSpPr/>
+          <p:nvPr/>
+        </p:nvSpPr>
+        <p:spPr>
+          <a:xfrm>
+            <a:off x="0" y="5015484"/>
+            <a:ext cx="9144000" cy="128016"/>
+          </a:xfrm>
+          <a:prstGeom prst="rect">
+            <a:avLst/>
+          </a:prstGeom>
+          <a:solidFill>
+            <a:srgbClr val="0F7C86"/>
+          </a:solidFill>
+          <a:ln/>
+        </p:spPr>
+      </p:sp>
+      <p:sp>
+        <p:nvSpPr>
+          <p:cNvPr id="3" name="Text 1"/>
+          <p:cNvSpPr/>
+          <p:nvPr/>
+        </p:nvSpPr>
+        <p:spPr>
+          <a:xfrm>
+            <a:off x="566928" y="1828800"/>
+            <a:ext cx="8010144" cy="914400"/>
+          </a:xfrm>
+          <a:prstGeom prst="rect">
+            <a:avLst/>
+          </a:prstGeom>
+          <a:noFill/>
+          <a:ln/>
+        </p:spPr>
+        <p:txBody>
+          <a:bodyPr wrap="square" lIns="0" tIns="0" rIns="0" bIns="0" rtlCol="0" anchor="ctr"/>
+          <a:lstStyle/>
+          <a:p>
+            <a:pPr algn="ctr" indent="0" marL="0">
+              <a:buNone/>
+            </a:pPr>
+            <a:r>
+              <a:rPr lang="en-US" sz="3200" b="1" dirty="0">
+                <a:solidFill>
+                  <a:srgbClr val="272E52"/>
+                </a:solidFill>
+                <a:latin typeface="Arial" pitchFamily="34" charset="0"/>
+                <a:ea typeface="Arial" pitchFamily="34" charset="-122"/>
+                <a:cs typeface="Arial" pitchFamily="34" charset="-120"/>
+              </a:rPr>
+              <a:t>Zehn Container, eine Datei.</a:t>
+            </a:r>
+            <a:endParaRPr lang="en-US" sz="3200" dirty="0"/>
+          </a:p>
+        </p:txBody>
+      </p:sp>
+      <p:sp>
+        <p:nvSpPr>
+          <p:cNvPr id="4" name="Text 2"/>
+          <p:cNvSpPr/>
+          <p:nvPr/>
+        </p:nvSpPr>
+        <p:spPr>
+          <a:xfrm>
+            <a:off x="566928" y="2788920"/>
+            <a:ext cx="8010144" cy="457200"/>
+          </a:xfrm>
+          <a:prstGeom prst="rect">
+            <a:avLst/>
+          </a:prstGeom>
+          <a:noFill/>
+          <a:ln/>
+        </p:spPr>
+        <p:txBody>
+          <a:bodyPr wrap="square" lIns="0" tIns="0" rIns="0" bIns="0" rtlCol="0" anchor="t"/>
+          <a:lstStyle/>
+          <a:p>
+            <a:pPr algn="ctr" indent="0" marL="0">
+              <a:buNone/>
+            </a:pPr>
+            <a:r>
+              <a:rPr lang="en-US" sz="1400" dirty="0">
+                <a:solidFill>
+                  <a:srgbClr val="5C6377"/>
+                </a:solidFill>
+                <a:latin typeface="Arial" pitchFamily="34" charset="0"/>
+                <a:ea typeface="Arial" pitchFamily="34" charset="-122"/>
+                <a:cs typeface="Arial" pitchFamily="34" charset="-120"/>
+              </a:rPr>
+              <a:t>Missionen, Funkhilfe und die komplette Musterlösung stehen zum Nachlesen auf der Kursseite.</a:t>
+            </a:r>
+            <a:endParaRPr lang="en-US" sz="1400" dirty="0"/>
+          </a:p>
+        </p:txBody>
+      </p:sp>
+      <p:sp>
+        <p:nvSpPr>
+          <p:cNvPr id="5" name="Text 3"/>
+          <p:cNvSpPr/>
+          <p:nvPr/>
+        </p:nvSpPr>
+        <p:spPr>
+          <a:xfrm>
+            <a:off x="566928" y="3401568"/>
+            <a:ext cx="8010144" cy="457200"/>
+          </a:xfrm>
+          <a:prstGeom prst="rect">
+            <a:avLst/>
+          </a:prstGeom>
+          <a:noFill/>
+          <a:ln/>
+        </p:spPr>
+        <p:txBody>
+          <a:bodyPr wrap="square" lIns="0" tIns="0" rIns="0" bIns="0" rtlCol="0" anchor="t"/>
+          <a:lstStyle/>
+          <a:p>
+            <a:pPr algn="ctr" indent="0" marL="0">
+              <a:buNone/>
+            </a:pPr>
+            <a:r>
+              <a:rPr lang="en-US" sz="1600" b="1" dirty="0">
+                <a:solidFill>
+                  <a:srgbClr val="0F7C86"/>
+                </a:solidFill>
+                <a:latin typeface="Arial" pitchFamily="34" charset="0"/>
+                <a:ea typeface="Arial" pitchFamily="34" charset="-122"/>
+                <a:cs typeface="Arial" pitchFamily="34" charset="-120"/>
+              </a:rPr>
+              <a:t>Mittwoch, 23. September · Industrie und IoT</a:t>
+            </a:r>
+            <a:endParaRPr lang="en-US" sz="1600" dirty="0"/>
           </a:p>
         </p:txBody>
       </p:sp>
@@ -7863,7 +10353,7 @@
                 <a:ea typeface="Arial" pitchFamily="34" charset="-122"/>
                 <a:cs typeface="Arial" pitchFamily="34" charset="-120"/>
               </a:rPr>
-              <a:t>2/13</a:t>
+              <a:t>2/19</a:t>
             </a:r>
             <a:endParaRPr lang="en-US" sz="1050" dirty="0"/>
           </a:p>
@@ -8209,7 +10699,7 @@
                 <a:ea typeface="Arial" pitchFamily="34" charset="-122"/>
                 <a:cs typeface="Arial" pitchFamily="34" charset="-120"/>
               </a:rPr>
-              <a:t>3/13</a:t>
+              <a:t>3/19</a:t>
             </a:r>
             <a:endParaRPr lang="en-US" sz="1050" dirty="0"/>
           </a:p>
@@ -8732,7 +11222,7 @@
                 <a:ea typeface="Arial" pitchFamily="34" charset="-122"/>
                 <a:cs typeface="Arial" pitchFamily="34" charset="-120"/>
               </a:rPr>
-              <a:t>4/13</a:t>
+              <a:t>4/19</a:t>
             </a:r>
             <a:endParaRPr lang="en-US" sz="1050" dirty="0"/>
           </a:p>
@@ -8884,8 +11374,8 @@
         </p:blipFill>
         <p:spPr>
           <a:xfrm>
-            <a:off x="566928" y="1389888"/>
-            <a:ext cx="8010144" cy="2487168"/>
+            <a:off x="566928" y="1335024"/>
+            <a:ext cx="8010144" cy="2724912"/>
           </a:xfrm>
           <a:prstGeom prst="rect">
             <a:avLst/>
@@ -8900,7 +11390,7 @@
         </p:nvSpPr>
         <p:spPr>
           <a:xfrm>
-            <a:off x="566928" y="4105656"/>
+            <a:off x="566928" y="4160520"/>
             <a:ext cx="32004" cy="256032"/>
           </a:xfrm>
           <a:prstGeom prst="rect">
@@ -8920,7 +11410,7 @@
         </p:nvSpPr>
         <p:spPr>
           <a:xfrm>
-            <a:off x="749808" y="4059936"/>
+            <a:off x="749808" y="4114800"/>
             <a:ext cx="7827264" cy="402336"/>
           </a:xfrm>
           <a:prstGeom prst="rect">
@@ -9046,7 +11536,7 @@
                 <a:ea typeface="Arial" pitchFamily="34" charset="-122"/>
                 <a:cs typeface="Arial" pitchFamily="34" charset="-120"/>
               </a:rPr>
-              <a:t>5/13</a:t>
+              <a:t>5/19</a:t>
             </a:r>
             <a:endParaRPr lang="en-US" sz="1050" dirty="0"/>
           </a:p>
@@ -9360,7 +11850,7 @@
                 <a:ea typeface="Arial" pitchFamily="34" charset="-122"/>
                 <a:cs typeface="Arial" pitchFamily="34" charset="-120"/>
               </a:rPr>
-              <a:t>6/13</a:t>
+              <a:t>6/19</a:t>
             </a:r>
             <a:endParaRPr lang="en-US" sz="1050" dirty="0"/>
           </a:p>
@@ -9451,7 +11941,7 @@
                 <a:ea typeface="Arial" pitchFamily="34" charset="-122"/>
                 <a:cs typeface="Arial" pitchFamily="34" charset="-120"/>
               </a:rPr>
-              <a:t>ALLE DREI SEKUNDEN EIN LEBENSZEICHEN</a:t>
+              <a:t>BUILD STATT IMAGE</a:t>
             </a:r>
             <a:endParaRPr lang="en-US" sz="1150" dirty="0"/>
           </a:p>
@@ -9490,7 +11980,7 @@
                 <a:ea typeface="Arial" pitchFamily="34" charset="-122"/>
                 <a:cs typeface="Arial" pitchFamily="34" charset="-120"/>
               </a:rPr>
-              <a:t>Der Heartbeat der Module</a:t>
+              <a:t>Woher kommt das Image?</a:t>
             </a:r>
             <a:endParaRPr lang="en-US" sz="2600" dirty="0"/>
           </a:p>
@@ -9498,7 +11988,7 @@
       </p:sp>
       <p:pic>
         <p:nvPicPr>
-          <p:cNvPr id="5" name="Image 0" descr="/Users/jacobmenge/Desktop/kurs-26.2b-orga/folienwerkstatt/assets/diagramme/heartbeat-bild.png">    </p:cNvPr>
+          <p:cNvPr id="5" name="Image 0" descr="/Users/jacobmenge/Desktop/kurs-26.2b-orga/folienwerkstatt/assets/diagramme/compose-build.png">    </p:cNvPr>
           <p:cNvPicPr>
             <a:picLocks noChangeAspect="1"/>
           </p:cNvPicPr>
@@ -9512,8 +12002,8 @@
         </p:blipFill>
         <p:spPr>
           <a:xfrm>
-            <a:off x="566928" y="1517904"/>
-            <a:ext cx="8010144" cy="2304288"/>
+            <a:off x="566928" y="1426464"/>
+            <a:ext cx="8010144" cy="2578608"/>
           </a:xfrm>
           <a:prstGeom prst="rect">
             <a:avLst/>
@@ -9528,7 +12018,7 @@
         </p:nvSpPr>
         <p:spPr>
           <a:xfrm>
-            <a:off x="566928" y="4087368"/>
+            <a:off x="566928" y="4160520"/>
             <a:ext cx="32004" cy="256032"/>
           </a:xfrm>
           <a:prstGeom prst="rect">
@@ -9548,7 +12038,7 @@
         </p:nvSpPr>
         <p:spPr>
           <a:xfrm>
-            <a:off x="749808" y="4041648"/>
+            <a:off x="749808" y="4114800"/>
             <a:ext cx="7827264" cy="402336"/>
           </a:xfrm>
           <a:prstGeom prst="rect">
@@ -9573,7 +12063,7 @@
                 <a:ea typeface="Arial" pitchFamily="34" charset="-122"/>
                 <a:cs typeface="Arial" pitchFamily="34" charset="-120"/>
               </a:rPr>
-              <a:t>Jedes Modul ist ein eigener Container aus demselben Image, nur MODUL_NAME unterscheidet sie: die Umgebungsvariablen-Lektion von Montag in groß.</a:t>
+              <a:t>Ein Dockerfile beschreibt den Bau eines Images Schritt für Schritt, das kennt ihr von Abend 5. Heute schreibt ihr keins, alle vier liegen fertig im Repository.</a:t>
             </a:r>
             <a:endParaRPr lang="en-US" sz="1200" dirty="0"/>
           </a:p>
@@ -9674,7 +12164,7 @@
                 <a:ea typeface="Arial" pitchFamily="34" charset="-122"/>
                 <a:cs typeface="Arial" pitchFamily="34" charset="-120"/>
               </a:rPr>
-              <a:t>7/13</a:t>
+              <a:t>7/19</a:t>
             </a:r>
             <a:endParaRPr lang="en-US" sz="1050" dirty="0"/>
           </a:p>
